--- a/docs/source/repository_overview_editable.pptx
+++ b/docs/source/repository_overview_editable.pptx
@@ -2,13 +2,13 @@
 <file path=ppt/presentation.xml><?xml version="1.0" encoding="utf-8"?>
 <p:presentation xmlns:p="http://schemas.openxmlformats.org/presentationml/2006/main">
   <p:sldMasterIdLst>
-    <p:sldMasterId xmlns:r="http://schemas.openxmlformats.org/officeDocument/2006/relationships" id="2147483648" r:id="R0332cb8e877049af"/>
+    <p:sldMasterId xmlns:r="http://schemas.openxmlformats.org/officeDocument/2006/relationships" id="2147483648" r:id="Rf84e3187d5cc4fcb"/>
   </p:sldMasterIdLst>
   <p:notesMasterIdLst>
-    <p:notesMasterId xmlns:r="http://schemas.openxmlformats.org/officeDocument/2006/relationships" r:id="R74c99b4fcd804810"/>
+    <p:notesMasterId xmlns:r="http://schemas.openxmlformats.org/officeDocument/2006/relationships" r:id="Rc7ff153440fe4e71"/>
   </p:notesMasterIdLst>
   <p:sldIdLst>
-    <p:sldId xmlns:r="http://schemas.openxmlformats.org/officeDocument/2006/relationships" id="256" r:id="R3f870c1549c84a70"/>
+    <p:sldId xmlns:r="http://schemas.openxmlformats.org/officeDocument/2006/relationships" id="256" r:id="R9910f969a1fa4b52"/>
   </p:sldIdLst>
   <p:sldSz cx="12192000" cy="6096000"/>
   <p:notesSz cx="6858000" cy="9144000"/>
@@ -601,7 +601,7 @@
   </p:cSld>
   <p:clrMap bg1="lt1" tx1="dk1" bg2="lt2" tx2="dk2" accent1="accent1" accent2="accent2" accent3="accent3" accent4="accent4" accent5="accent5" accent6="accent6" hlink="hlink" folHlink="folHlink"/>
   <p:sldLayoutIdLst>
-    <p:sldLayoutId xmlns:r="http://schemas.openxmlformats.org/officeDocument/2006/relationships" id="2147483649" r:id="Rcb9a37a293d84efd"/>
+    <p:sldLayoutId xmlns:r="http://schemas.openxmlformats.org/officeDocument/2006/relationships" id="2147483649" r:id="R079b6dde474c4f0c"/>
   </p:sldLayoutIdLst>
   <p:txStyles>
     <p:titleStyle>
@@ -1152,7 +1152,7 @@
           <p:cNvPr id="114" name="overview-takeaway">
             <a:extLst xmlns:a="http://schemas.openxmlformats.org/drawingml/2006/main">
               <a:ext uri="{FF2B5EF4-FFF2-40B4-BE49-F238E27FC236}">
-                <a16:creationId xmlns:a16="http://schemas.microsoft.com/office/drawing/2014/main" id="{2BB7BD95-EEEE-4DE6-ACBD-5849A7501A9A}"/>
+                <a16:creationId xmlns:a16="http://schemas.microsoft.com/office/drawing/2014/main" id="{A5126910-88BE-4F71-A082-CC8CB5843577}"/>
               </a:ext>
             </a:extLst>
           </p:cNvPr>
@@ -1210,7 +1210,7 @@
           <p:cNvPr id="2" name="overview-subtitle">
             <a:extLst xmlns:a="http://schemas.openxmlformats.org/drawingml/2006/main">
               <a:ext uri="{FF2B5EF4-FFF2-40B4-BE49-F238E27FC236}">
-                <a16:creationId xmlns:a16="http://schemas.microsoft.com/office/drawing/2014/main" id="{A9C78D8D-799E-4254-92B9-7AB4DAB6BE24}"/>
+                <a16:creationId xmlns:a16="http://schemas.microsoft.com/office/drawing/2014/main" id="{F4D89031-4FBD-45A2-A1C5-54673CD01055}"/>
               </a:ext>
             </a:extLst>
           </p:cNvPr>
@@ -1268,7 +1268,7 @@
           <p:cNvPr id="3" name="overview-divider">
             <a:extLst xmlns:a="http://schemas.openxmlformats.org/drawingml/2006/main">
               <a:ext uri="{FF2B5EF4-FFF2-40B4-BE49-F238E27FC236}">
-                <a16:creationId xmlns:a16="http://schemas.microsoft.com/office/drawing/2014/main" id="{C6C11C0D-C84C-441D-8C2C-B54DB7472203}"/>
+                <a16:creationId xmlns:a16="http://schemas.microsoft.com/office/drawing/2014/main" id="{3E162649-D05B-4C4B-BD8C-18F11399246D}"/>
               </a:ext>
             </a:extLst>
           </p:cNvPr>
@@ -1299,7 +1299,7 @@
           <p:cNvPr id="4" name="input-to-rank-arrow">
             <a:extLst xmlns:a="http://schemas.openxmlformats.org/drawingml/2006/main">
               <a:ext uri="{FF2B5EF4-FFF2-40B4-BE49-F238E27FC236}">
-                <a16:creationId xmlns:a16="http://schemas.microsoft.com/office/drawing/2014/main" id="{31F8225B-D04D-422C-98D0-C6D5CB50638C}"/>
+                <a16:creationId xmlns:a16="http://schemas.microsoft.com/office/drawing/2014/main" id="{F7C86418-6AA6-4E4B-9B05-94EDF6B1F47D}"/>
               </a:ext>
             </a:extLst>
           </p:cNvPr>
@@ -1330,7 +1330,7 @@
           <p:cNvPr id="5" name="rank-to-allocation-arrow">
             <a:extLst xmlns:a="http://schemas.openxmlformats.org/drawingml/2006/main">
               <a:ext uri="{FF2B5EF4-FFF2-40B4-BE49-F238E27FC236}">
-                <a16:creationId xmlns:a16="http://schemas.microsoft.com/office/drawing/2014/main" id="{F9B275F1-AAA1-4D2C-97F8-E557AAA3AC11}"/>
+                <a16:creationId xmlns:a16="http://schemas.microsoft.com/office/drawing/2014/main" id="{42E43535-F79F-4C59-ACA0-1D7B61D061F3}"/>
               </a:ext>
             </a:extLst>
           </p:cNvPr>
@@ -1361,7 +1361,7 @@
           <p:cNvPr id="6" name="allocation-to-result-arrow">
             <a:extLst xmlns:a="http://schemas.openxmlformats.org/drawingml/2006/main">
               <a:ext uri="{FF2B5EF4-FFF2-40B4-BE49-F238E27FC236}">
-                <a16:creationId xmlns:a16="http://schemas.microsoft.com/office/drawing/2014/main" id="{6FF69515-A20E-4ACA-A3E8-B7389CE3B987}"/>
+                <a16:creationId xmlns:a16="http://schemas.microsoft.com/office/drawing/2014/main" id="{B60C1E43-F847-42DA-B470-FF00ADDDCA27}"/>
               </a:ext>
             </a:extLst>
           </p:cNvPr>
@@ -1392,7 +1392,7 @@
           <p:cNvPr id="7" name="input-heading">
             <a:extLst xmlns:a="http://schemas.openxmlformats.org/drawingml/2006/main">
               <a:ext uri="{FF2B5EF4-FFF2-40B4-BE49-F238E27FC236}">
-                <a16:creationId xmlns:a16="http://schemas.microsoft.com/office/drawing/2014/main" id="{5DF3F2BB-4C01-4B59-B917-93AEDDB039C7}"/>
+                <a16:creationId xmlns:a16="http://schemas.microsoft.com/office/drawing/2014/main" id="{E4C75BF8-A350-4A20-A131-4A5E524DE48E}"/>
               </a:ext>
             </a:extLst>
           </p:cNvPr>
@@ -1450,7 +1450,7 @@
           <p:cNvPr id="8" name="input-caption">
             <a:extLst xmlns:a="http://schemas.openxmlformats.org/drawingml/2006/main">
               <a:ext uri="{FF2B5EF4-FFF2-40B4-BE49-F238E27FC236}">
-                <a16:creationId xmlns:a16="http://schemas.microsoft.com/office/drawing/2014/main" id="{49D2ADEF-DC29-4CD0-A217-3E19251069C2}"/>
+                <a16:creationId xmlns:a16="http://schemas.microsoft.com/office/drawing/2014/main" id="{80A00002-E4AF-4047-869D-DC8150066254}"/>
               </a:ext>
             </a:extLst>
           </p:cNvPr>
@@ -1508,7 +1508,7 @@
           <p:cNvPr id="9" name="candidate-records-sheet">
             <a:extLst xmlns:a="http://schemas.openxmlformats.org/drawingml/2006/main">
               <a:ext uri="{FF2B5EF4-FFF2-40B4-BE49-F238E27FC236}">
-                <a16:creationId xmlns:a16="http://schemas.microsoft.com/office/drawing/2014/main" id="{36DA334A-13F7-4C11-BED7-5513FBD1BE25}"/>
+                <a16:creationId xmlns:a16="http://schemas.microsoft.com/office/drawing/2014/main" id="{431A8D41-338D-4C28-A9E2-EB5B3B4C9344}"/>
               </a:ext>
             </a:extLst>
           </p:cNvPr>
@@ -1541,7 +1541,7 @@
           <p:cNvPr id="10" name="candidate-records-header">
             <a:extLst xmlns:a="http://schemas.openxmlformats.org/drawingml/2006/main">
               <a:ext uri="{FF2B5EF4-FFF2-40B4-BE49-F238E27FC236}">
-                <a16:creationId xmlns:a16="http://schemas.microsoft.com/office/drawing/2014/main" id="{8A976EB3-8798-43EC-8577-4B76E6ABD692}"/>
+                <a16:creationId xmlns:a16="http://schemas.microsoft.com/office/drawing/2014/main" id="{1D3548A5-DD34-4C1F-A3FD-ACE22E20AE14}"/>
               </a:ext>
             </a:extLst>
           </p:cNvPr>
@@ -1574,7 +1574,7 @@
           <p:cNvPr id="11" name="candidate-id-header">
             <a:extLst xmlns:a="http://schemas.openxmlformats.org/drawingml/2006/main">
               <a:ext uri="{FF2B5EF4-FFF2-40B4-BE49-F238E27FC236}">
-                <a16:creationId xmlns:a16="http://schemas.microsoft.com/office/drawing/2014/main" id="{FAE4929E-7939-4843-8723-4C73BA6A91E2}"/>
+                <a16:creationId xmlns:a16="http://schemas.microsoft.com/office/drawing/2014/main" id="{D17BC123-92BE-48F1-A935-4A1315AAEC71}"/>
               </a:ext>
             </a:extLst>
           </p:cNvPr>
@@ -1622,7 +1622,7 @@
                 <a:ea typeface="Arial"/>
                 <a:cs typeface="Arial"/>
               </a:rPr>
-              <a:t>candidate_id</a:t>
+              <a:t>Candidate ID</a:t>
             </a:r>
           </a:p>
         </p:txBody>
@@ -1632,7 +1632,7 @@
           <p:cNvPr id="12" name="score-header">
             <a:extLst xmlns:a="http://schemas.openxmlformats.org/drawingml/2006/main">
               <a:ext uri="{FF2B5EF4-FFF2-40B4-BE49-F238E27FC236}">
-                <a16:creationId xmlns:a16="http://schemas.microsoft.com/office/drawing/2014/main" id="{BCF78E9D-25BB-4FCF-84B5-1C774747444A}"/>
+                <a16:creationId xmlns:a16="http://schemas.microsoft.com/office/drawing/2014/main" id="{4103AD1A-1C68-4ECF-89B9-0E6ED904F3BE}"/>
               </a:ext>
             </a:extLst>
           </p:cNvPr>
@@ -1680,7 +1680,7 @@
                 <a:ea typeface="Arial"/>
                 <a:cs typeface="Arial"/>
               </a:rPr>
-              <a:t>score</a:t>
+              <a:t>Score</a:t>
             </a:r>
           </a:p>
         </p:txBody>
@@ -1690,7 +1690,7 @@
           <p:cNvPr id="13" name="candidate-token-1">
             <a:extLst xmlns:a="http://schemas.openxmlformats.org/drawingml/2006/main">
               <a:ext uri="{FF2B5EF4-FFF2-40B4-BE49-F238E27FC236}">
-                <a16:creationId xmlns:a16="http://schemas.microsoft.com/office/drawing/2014/main" id="{7CAD7F03-315E-493E-9997-7B6EC2165BF6}"/>
+                <a16:creationId xmlns:a16="http://schemas.microsoft.com/office/drawing/2014/main" id="{FE4119AE-84CF-4741-98AB-A942663DC1FC}"/>
               </a:ext>
             </a:extLst>
           </p:cNvPr>
@@ -1721,7 +1721,7 @@
           <p:cNvPr id="14" name="candidate-id-1">
             <a:extLst xmlns:a="http://schemas.openxmlformats.org/drawingml/2006/main">
               <a:ext uri="{FF2B5EF4-FFF2-40B4-BE49-F238E27FC236}">
-                <a16:creationId xmlns:a16="http://schemas.microsoft.com/office/drawing/2014/main" id="{A48C9568-5DE5-497A-898B-7EFE9E8ECE87}"/>
+                <a16:creationId xmlns:a16="http://schemas.microsoft.com/office/drawing/2014/main" id="{B76DA80A-72AF-4A5D-A5E8-2CBC12DC7345}"/>
               </a:ext>
             </a:extLst>
           </p:cNvPr>
@@ -1779,7 +1779,7 @@
           <p:cNvPr id="15" name="candidate-score-1">
             <a:extLst xmlns:a="http://schemas.openxmlformats.org/drawingml/2006/main">
               <a:ext uri="{FF2B5EF4-FFF2-40B4-BE49-F238E27FC236}">
-                <a16:creationId xmlns:a16="http://schemas.microsoft.com/office/drawing/2014/main" id="{308569BC-EDD2-4050-86C2-7D791641076C}"/>
+                <a16:creationId xmlns:a16="http://schemas.microsoft.com/office/drawing/2014/main" id="{90B6D1AF-0CBA-4731-8F6C-7EBF4413F34A}"/>
               </a:ext>
             </a:extLst>
           </p:cNvPr>
@@ -1837,7 +1837,7 @@
           <p:cNvPr id="16" name="candidate-row-line-1">
             <a:extLst xmlns:a="http://schemas.openxmlformats.org/drawingml/2006/main">
               <a:ext uri="{FF2B5EF4-FFF2-40B4-BE49-F238E27FC236}">
-                <a16:creationId xmlns:a16="http://schemas.microsoft.com/office/drawing/2014/main" id="{3A624B0B-1EBA-477F-9CCF-0284F971AE66}"/>
+                <a16:creationId xmlns:a16="http://schemas.microsoft.com/office/drawing/2014/main" id="{47909C3D-392E-4111-8DDB-A280268F921A}"/>
               </a:ext>
             </a:extLst>
           </p:cNvPr>
@@ -1868,7 +1868,7 @@
           <p:cNvPr id="17" name="candidate-token-2">
             <a:extLst xmlns:a="http://schemas.openxmlformats.org/drawingml/2006/main">
               <a:ext uri="{FF2B5EF4-FFF2-40B4-BE49-F238E27FC236}">
-                <a16:creationId xmlns:a16="http://schemas.microsoft.com/office/drawing/2014/main" id="{DE197FAE-57BD-4635-90F9-3A2350E3255D}"/>
+                <a16:creationId xmlns:a16="http://schemas.microsoft.com/office/drawing/2014/main" id="{DEC7182C-BF61-4815-BCC0-AB353FBB7025}"/>
               </a:ext>
             </a:extLst>
           </p:cNvPr>
@@ -1901,7 +1901,7 @@
           <p:cNvPr id="18" name="candidate-id-2">
             <a:extLst xmlns:a="http://schemas.openxmlformats.org/drawingml/2006/main">
               <a:ext uri="{FF2B5EF4-FFF2-40B4-BE49-F238E27FC236}">
-                <a16:creationId xmlns:a16="http://schemas.microsoft.com/office/drawing/2014/main" id="{495CBAC0-6EDA-44FE-AB79-A3BDFA777E0E}"/>
+                <a16:creationId xmlns:a16="http://schemas.microsoft.com/office/drawing/2014/main" id="{D05561A1-CFAE-4A7D-9E59-8685FDD010BA}"/>
               </a:ext>
             </a:extLst>
           </p:cNvPr>
@@ -1959,7 +1959,7 @@
           <p:cNvPr id="19" name="candidate-score-2">
             <a:extLst xmlns:a="http://schemas.openxmlformats.org/drawingml/2006/main">
               <a:ext uri="{FF2B5EF4-FFF2-40B4-BE49-F238E27FC236}">
-                <a16:creationId xmlns:a16="http://schemas.microsoft.com/office/drawing/2014/main" id="{526120F6-7C00-489F-8747-E85E86294C2E}"/>
+                <a16:creationId xmlns:a16="http://schemas.microsoft.com/office/drawing/2014/main" id="{A97FC39E-C406-48A8-8D3E-0CBF73D1BE84}"/>
               </a:ext>
             </a:extLst>
           </p:cNvPr>
@@ -2017,7 +2017,7 @@
           <p:cNvPr id="20" name="candidate-row-line-2">
             <a:extLst xmlns:a="http://schemas.openxmlformats.org/drawingml/2006/main">
               <a:ext uri="{FF2B5EF4-FFF2-40B4-BE49-F238E27FC236}">
-                <a16:creationId xmlns:a16="http://schemas.microsoft.com/office/drawing/2014/main" id="{08713197-3754-4E09-9C60-1393CCF6B067}"/>
+                <a16:creationId xmlns:a16="http://schemas.microsoft.com/office/drawing/2014/main" id="{5B377CEC-0491-4AA7-9B64-C3C08400EEC7}"/>
               </a:ext>
             </a:extLst>
           </p:cNvPr>
@@ -2048,7 +2048,7 @@
           <p:cNvPr id="21" name="candidate-token-3">
             <a:extLst xmlns:a="http://schemas.openxmlformats.org/drawingml/2006/main">
               <a:ext uri="{FF2B5EF4-FFF2-40B4-BE49-F238E27FC236}">
-                <a16:creationId xmlns:a16="http://schemas.microsoft.com/office/drawing/2014/main" id="{60F4025E-F657-43C7-9052-7023C5BF80B4}"/>
+                <a16:creationId xmlns:a16="http://schemas.microsoft.com/office/drawing/2014/main" id="{9B078B27-4930-4A99-918D-F84A080C2B9B}"/>
               </a:ext>
             </a:extLst>
           </p:cNvPr>
@@ -2081,7 +2081,7 @@
           <p:cNvPr id="22" name="candidate-id-3">
             <a:extLst xmlns:a="http://schemas.openxmlformats.org/drawingml/2006/main">
               <a:ext uri="{FF2B5EF4-FFF2-40B4-BE49-F238E27FC236}">
-                <a16:creationId xmlns:a16="http://schemas.microsoft.com/office/drawing/2014/main" id="{86C42EBF-CA6D-4F3E-962C-49140307A35A}"/>
+                <a16:creationId xmlns:a16="http://schemas.microsoft.com/office/drawing/2014/main" id="{8D9FC5AC-9097-42CD-8120-80DE01A03CD4}"/>
               </a:ext>
             </a:extLst>
           </p:cNvPr>
@@ -2139,7 +2139,7 @@
           <p:cNvPr id="23" name="candidate-score-3">
             <a:extLst xmlns:a="http://schemas.openxmlformats.org/drawingml/2006/main">
               <a:ext uri="{FF2B5EF4-FFF2-40B4-BE49-F238E27FC236}">
-                <a16:creationId xmlns:a16="http://schemas.microsoft.com/office/drawing/2014/main" id="{2897842C-0423-47F5-8CB1-5CED42F1740F}"/>
+                <a16:creationId xmlns:a16="http://schemas.microsoft.com/office/drawing/2014/main" id="{CCD3F8F8-4715-4DB7-98A6-272DB59EDC8D}"/>
               </a:ext>
             </a:extLst>
           </p:cNvPr>
@@ -2197,7 +2197,7 @@
           <p:cNvPr id="24" name="candidate-row-line-3">
             <a:extLst xmlns:a="http://schemas.openxmlformats.org/drawingml/2006/main">
               <a:ext uri="{FF2B5EF4-FFF2-40B4-BE49-F238E27FC236}">
-                <a16:creationId xmlns:a16="http://schemas.microsoft.com/office/drawing/2014/main" id="{9544B45B-926B-42F7-8A42-B5283791F29B}"/>
+                <a16:creationId xmlns:a16="http://schemas.microsoft.com/office/drawing/2014/main" id="{F284FACD-D933-4AD9-8E16-C5BF4AD236E8}"/>
               </a:ext>
             </a:extLst>
           </p:cNvPr>
@@ -2228,7 +2228,7 @@
           <p:cNvPr id="25" name="candidate-token-4">
             <a:extLst xmlns:a="http://schemas.openxmlformats.org/drawingml/2006/main">
               <a:ext uri="{FF2B5EF4-FFF2-40B4-BE49-F238E27FC236}">
-                <a16:creationId xmlns:a16="http://schemas.microsoft.com/office/drawing/2014/main" id="{38542875-A0C2-4F69-B0C8-CBEC677CCE16}"/>
+                <a16:creationId xmlns:a16="http://schemas.microsoft.com/office/drawing/2014/main" id="{582570AC-1D8D-45F1-A3C6-00FB9C31193D}"/>
               </a:ext>
             </a:extLst>
           </p:cNvPr>
@@ -2259,7 +2259,7 @@
           <p:cNvPr id="26" name="candidate-id-4">
             <a:extLst xmlns:a="http://schemas.openxmlformats.org/drawingml/2006/main">
               <a:ext uri="{FF2B5EF4-FFF2-40B4-BE49-F238E27FC236}">
-                <a16:creationId xmlns:a16="http://schemas.microsoft.com/office/drawing/2014/main" id="{E3CD71A4-49BD-42EB-85FD-6A63E9833C38}"/>
+                <a16:creationId xmlns:a16="http://schemas.microsoft.com/office/drawing/2014/main" id="{72C8B356-17CB-45D1-8D76-2208D6F11F00}"/>
               </a:ext>
             </a:extLst>
           </p:cNvPr>
@@ -2317,7 +2317,7 @@
           <p:cNvPr id="27" name="candidate-score-4">
             <a:extLst xmlns:a="http://schemas.openxmlformats.org/drawingml/2006/main">
               <a:ext uri="{FF2B5EF4-FFF2-40B4-BE49-F238E27FC236}">
-                <a16:creationId xmlns:a16="http://schemas.microsoft.com/office/drawing/2014/main" id="{3878B320-BDEC-435D-9F9D-383C462F96CA}"/>
+                <a16:creationId xmlns:a16="http://schemas.microsoft.com/office/drawing/2014/main" id="{7FE9F185-41A9-4635-9C9D-C296FEDD7CBD}"/>
               </a:ext>
             </a:extLst>
           </p:cNvPr>
@@ -2375,7 +2375,7 @@
           <p:cNvPr id="28" name="ranking-heading">
             <a:extLst xmlns:a="http://schemas.openxmlformats.org/drawingml/2006/main">
               <a:ext uri="{FF2B5EF4-FFF2-40B4-BE49-F238E27FC236}">
-                <a16:creationId xmlns:a16="http://schemas.microsoft.com/office/drawing/2014/main" id="{26212BD2-EFE9-4D55-9AFA-5C7728757D56}"/>
+                <a16:creationId xmlns:a16="http://schemas.microsoft.com/office/drawing/2014/main" id="{8CB8BF20-1AEF-49B9-B7C8-CB4A02AD8539}"/>
               </a:ext>
             </a:extLst>
           </p:cNvPr>
@@ -2433,7 +2433,7 @@
           <p:cNvPr id="29" name="ranking-score-caption">
             <a:extLst xmlns:a="http://schemas.openxmlformats.org/drawingml/2006/main">
               <a:ext uri="{FF2B5EF4-FFF2-40B4-BE49-F238E27FC236}">
-                <a16:creationId xmlns:a16="http://schemas.microsoft.com/office/drawing/2014/main" id="{F05583D0-8543-4C00-95BE-2E8F89B12C06}"/>
+                <a16:creationId xmlns:a16="http://schemas.microsoft.com/office/drawing/2014/main" id="{BF3DAB87-37B1-4450-8911-6166055442A7}"/>
               </a:ext>
             </a:extLst>
           </p:cNvPr>
@@ -2481,7 +2481,7 @@
                 <a:ea typeface="Arial"/>
                 <a:cs typeface="Arial"/>
               </a:rPr>
-              <a:t>global_score (descending)</a:t>
+              <a:t>Global score (descending)</a:t>
             </a:r>
           </a:p>
         </p:txBody>
@@ -2491,7 +2491,7 @@
           <p:cNvPr id="30" name="rank-number-1">
             <a:extLst xmlns:a="http://schemas.openxmlformats.org/drawingml/2006/main">
               <a:ext uri="{FF2B5EF4-FFF2-40B4-BE49-F238E27FC236}">
-                <a16:creationId xmlns:a16="http://schemas.microsoft.com/office/drawing/2014/main" id="{2EDECEAD-7EC1-44A4-B05C-91E91A05FCF7}"/>
+                <a16:creationId xmlns:a16="http://schemas.microsoft.com/office/drawing/2014/main" id="{B23EACAD-43AD-4D9E-8867-10C8A7F49008}"/>
               </a:ext>
             </a:extLst>
           </p:cNvPr>
@@ -2549,7 +2549,7 @@
           <p:cNvPr id="31" name="rank-row-1">
             <a:extLst xmlns:a="http://schemas.openxmlformats.org/drawingml/2006/main">
               <a:ext uri="{FF2B5EF4-FFF2-40B4-BE49-F238E27FC236}">
-                <a16:creationId xmlns:a16="http://schemas.microsoft.com/office/drawing/2014/main" id="{1343D819-FBE1-4DBB-A79F-B1324506E9E9}"/>
+                <a16:creationId xmlns:a16="http://schemas.microsoft.com/office/drawing/2014/main" id="{FAA68132-4B1B-4C60-A3B1-B4164CD2CE77}"/>
               </a:ext>
             </a:extLst>
           </p:cNvPr>
@@ -2582,7 +2582,7 @@
           <p:cNvPr id="32" name="rank-id-1">
             <a:extLst xmlns:a="http://schemas.openxmlformats.org/drawingml/2006/main">
               <a:ext uri="{FF2B5EF4-FFF2-40B4-BE49-F238E27FC236}">
-                <a16:creationId xmlns:a16="http://schemas.microsoft.com/office/drawing/2014/main" id="{6DB67E11-A911-4AF0-A99E-517783A90618}"/>
+                <a16:creationId xmlns:a16="http://schemas.microsoft.com/office/drawing/2014/main" id="{152FB334-4A0F-4347-B1AB-EF280889C992}"/>
               </a:ext>
             </a:extLst>
           </p:cNvPr>
@@ -2640,7 +2640,7 @@
           <p:cNvPr id="33" name="rank-score-1">
             <a:extLst xmlns:a="http://schemas.openxmlformats.org/drawingml/2006/main">
               <a:ext uri="{FF2B5EF4-FFF2-40B4-BE49-F238E27FC236}">
-                <a16:creationId xmlns:a16="http://schemas.microsoft.com/office/drawing/2014/main" id="{25AD3AA4-3736-4423-8057-D0B0E117E19A}"/>
+                <a16:creationId xmlns:a16="http://schemas.microsoft.com/office/drawing/2014/main" id="{1A21F3D7-CDB9-4403-BC48-8848995391C2}"/>
               </a:ext>
             </a:extLst>
           </p:cNvPr>
@@ -2698,7 +2698,7 @@
           <p:cNvPr id="34" name="rank-number-2">
             <a:extLst xmlns:a="http://schemas.openxmlformats.org/drawingml/2006/main">
               <a:ext uri="{FF2B5EF4-FFF2-40B4-BE49-F238E27FC236}">
-                <a16:creationId xmlns:a16="http://schemas.microsoft.com/office/drawing/2014/main" id="{B868741D-28A1-4164-ADC1-7246260154DC}"/>
+                <a16:creationId xmlns:a16="http://schemas.microsoft.com/office/drawing/2014/main" id="{413A19B6-76D9-4580-AD2C-7508FD1869E9}"/>
               </a:ext>
             </a:extLst>
           </p:cNvPr>
@@ -2756,7 +2756,7 @@
           <p:cNvPr id="35" name="rank-row-2">
             <a:extLst xmlns:a="http://schemas.openxmlformats.org/drawingml/2006/main">
               <a:ext uri="{FF2B5EF4-FFF2-40B4-BE49-F238E27FC236}">
-                <a16:creationId xmlns:a16="http://schemas.microsoft.com/office/drawing/2014/main" id="{717D6C5F-75DE-462A-8FF2-3BF12998D619}"/>
+                <a16:creationId xmlns:a16="http://schemas.microsoft.com/office/drawing/2014/main" id="{65374D32-BF33-446E-A131-62CB77FC4067}"/>
               </a:ext>
             </a:extLst>
           </p:cNvPr>
@@ -2789,7 +2789,7 @@
           <p:cNvPr id="36" name="rank-id-2">
             <a:extLst xmlns:a="http://schemas.openxmlformats.org/drawingml/2006/main">
               <a:ext uri="{FF2B5EF4-FFF2-40B4-BE49-F238E27FC236}">
-                <a16:creationId xmlns:a16="http://schemas.microsoft.com/office/drawing/2014/main" id="{B5A7C972-33AD-4BE8-B3D2-EB3B27D10DB3}"/>
+                <a16:creationId xmlns:a16="http://schemas.microsoft.com/office/drawing/2014/main" id="{565229A1-AFBC-4880-BA58-DBCBDF7D1904}"/>
               </a:ext>
             </a:extLst>
           </p:cNvPr>
@@ -2847,7 +2847,7 @@
           <p:cNvPr id="37" name="rank-score-2">
             <a:extLst xmlns:a="http://schemas.openxmlformats.org/drawingml/2006/main">
               <a:ext uri="{FF2B5EF4-FFF2-40B4-BE49-F238E27FC236}">
-                <a16:creationId xmlns:a16="http://schemas.microsoft.com/office/drawing/2014/main" id="{3F14EEBB-66D6-4F27-8132-05381013B80C}"/>
+                <a16:creationId xmlns:a16="http://schemas.microsoft.com/office/drawing/2014/main" id="{08B5CBE1-9ACA-4C57-9088-802179A8F484}"/>
               </a:ext>
             </a:extLst>
           </p:cNvPr>
@@ -2905,7 +2905,7 @@
           <p:cNvPr id="38" name="rank-number-3">
             <a:extLst xmlns:a="http://schemas.openxmlformats.org/drawingml/2006/main">
               <a:ext uri="{FF2B5EF4-FFF2-40B4-BE49-F238E27FC236}">
-                <a16:creationId xmlns:a16="http://schemas.microsoft.com/office/drawing/2014/main" id="{7C6F01F0-5BD7-494B-BD9E-5505ECD4FFDC}"/>
+                <a16:creationId xmlns:a16="http://schemas.microsoft.com/office/drawing/2014/main" id="{57ECC4B2-C836-424B-9E4C-807764EB3A03}"/>
               </a:ext>
             </a:extLst>
           </p:cNvPr>
@@ -2963,7 +2963,7 @@
           <p:cNvPr id="39" name="rank-row-3">
             <a:extLst xmlns:a="http://schemas.openxmlformats.org/drawingml/2006/main">
               <a:ext uri="{FF2B5EF4-FFF2-40B4-BE49-F238E27FC236}">
-                <a16:creationId xmlns:a16="http://schemas.microsoft.com/office/drawing/2014/main" id="{3E2376B0-944B-4A2A-A8F5-FC1D372151D9}"/>
+                <a16:creationId xmlns:a16="http://schemas.microsoft.com/office/drawing/2014/main" id="{5A2FC2BF-7D78-47FF-8694-40DEAD54B6E7}"/>
               </a:ext>
             </a:extLst>
           </p:cNvPr>
@@ -2996,7 +2996,7 @@
           <p:cNvPr id="40" name="rank-id-3">
             <a:extLst xmlns:a="http://schemas.openxmlformats.org/drawingml/2006/main">
               <a:ext uri="{FF2B5EF4-FFF2-40B4-BE49-F238E27FC236}">
-                <a16:creationId xmlns:a16="http://schemas.microsoft.com/office/drawing/2014/main" id="{E916A40B-1659-4FD0-88B2-129A9B2E48BE}"/>
+                <a16:creationId xmlns:a16="http://schemas.microsoft.com/office/drawing/2014/main" id="{E2EE779D-8946-4E76-B3A2-AC532C37F2AC}"/>
               </a:ext>
             </a:extLst>
           </p:cNvPr>
@@ -3054,7 +3054,7 @@
           <p:cNvPr id="41" name="rank-score-3">
             <a:extLst xmlns:a="http://schemas.openxmlformats.org/drawingml/2006/main">
               <a:ext uri="{FF2B5EF4-FFF2-40B4-BE49-F238E27FC236}">
-                <a16:creationId xmlns:a16="http://schemas.microsoft.com/office/drawing/2014/main" id="{7E4C30CD-D27C-4D85-B2EF-B2A63C86039B}"/>
+                <a16:creationId xmlns:a16="http://schemas.microsoft.com/office/drawing/2014/main" id="{D9EF0EB5-98CF-4127-BDE5-ADA946D1A612}"/>
               </a:ext>
             </a:extLst>
           </p:cNvPr>
@@ -3112,7 +3112,7 @@
           <p:cNvPr id="42" name="rank-number-4">
             <a:extLst xmlns:a="http://schemas.openxmlformats.org/drawingml/2006/main">
               <a:ext uri="{FF2B5EF4-FFF2-40B4-BE49-F238E27FC236}">
-                <a16:creationId xmlns:a16="http://schemas.microsoft.com/office/drawing/2014/main" id="{686BB871-DC98-4A9A-8801-BE9A562F7738}"/>
+                <a16:creationId xmlns:a16="http://schemas.microsoft.com/office/drawing/2014/main" id="{C4E90B57-EFC5-4617-9E0B-092D2C6E99A0}"/>
               </a:ext>
             </a:extLst>
           </p:cNvPr>
@@ -3170,7 +3170,7 @@
           <p:cNvPr id="43" name="rank-row-4">
             <a:extLst xmlns:a="http://schemas.openxmlformats.org/drawingml/2006/main">
               <a:ext uri="{FF2B5EF4-FFF2-40B4-BE49-F238E27FC236}">
-                <a16:creationId xmlns:a16="http://schemas.microsoft.com/office/drawing/2014/main" id="{28ADD896-8976-40E8-89D4-17EE03DAFE5F}"/>
+                <a16:creationId xmlns:a16="http://schemas.microsoft.com/office/drawing/2014/main" id="{A774120E-B5E0-40E7-82CB-5770D0F884B7}"/>
               </a:ext>
             </a:extLst>
           </p:cNvPr>
@@ -3203,7 +3203,7 @@
           <p:cNvPr id="44" name="rank-id-4">
             <a:extLst xmlns:a="http://schemas.openxmlformats.org/drawingml/2006/main">
               <a:ext uri="{FF2B5EF4-FFF2-40B4-BE49-F238E27FC236}">
-                <a16:creationId xmlns:a16="http://schemas.microsoft.com/office/drawing/2014/main" id="{60DDEC76-815B-4F2D-8A41-209E6BA7D088}"/>
+                <a16:creationId xmlns:a16="http://schemas.microsoft.com/office/drawing/2014/main" id="{15252D50-D027-4E45-9C34-13634B7B6C46}"/>
               </a:ext>
             </a:extLst>
           </p:cNvPr>
@@ -3261,7 +3261,7 @@
           <p:cNvPr id="45" name="rank-score-4">
             <a:extLst xmlns:a="http://schemas.openxmlformats.org/drawingml/2006/main">
               <a:ext uri="{FF2B5EF4-FFF2-40B4-BE49-F238E27FC236}">
-                <a16:creationId xmlns:a16="http://schemas.microsoft.com/office/drawing/2014/main" id="{482C2283-77EF-401C-9884-D88171DC93D6}"/>
+                <a16:creationId xmlns:a16="http://schemas.microsoft.com/office/drawing/2014/main" id="{08F56E90-4F55-4D96-BB52-88086E7C35E3}"/>
               </a:ext>
             </a:extLst>
           </p:cNvPr>
@@ -3319,7 +3319,7 @@
           <p:cNvPr id="46" name="stable-tie-bracket">
             <a:extLst xmlns:a="http://schemas.openxmlformats.org/drawingml/2006/main">
               <a:ext uri="{FF2B5EF4-FFF2-40B4-BE49-F238E27FC236}">
-                <a16:creationId xmlns:a16="http://schemas.microsoft.com/office/drawing/2014/main" id="{49006252-A5BD-4C2D-9183-688074580F3E}"/>
+                <a16:creationId xmlns:a16="http://schemas.microsoft.com/office/drawing/2014/main" id="{F6CA9EAA-FB2E-4070-ADCA-F0218D6902F0}"/>
               </a:ext>
             </a:extLst>
           </p:cNvPr>
@@ -3350,7 +3350,7 @@
           <p:cNvPr id="47" name="">
             <a:extLst xmlns:a="http://schemas.openxmlformats.org/drawingml/2006/main">
               <a:ext uri="{FF2B5EF4-FFF2-40B4-BE49-F238E27FC236}">
-                <a16:creationId xmlns:a16="http://schemas.microsoft.com/office/drawing/2014/main" id="{484366D9-19DE-4CFC-8B47-E991D962B4AE}"/>
+                <a16:creationId xmlns:a16="http://schemas.microsoft.com/office/drawing/2014/main" id="{18D0601B-6991-4775-BDF8-0254BFEEF4FF}"/>
               </a:ext>
             </a:extLst>
           </p:cNvPr>
@@ -3381,7 +3381,7 @@
           <p:cNvPr id="48" name="">
             <a:extLst xmlns:a="http://schemas.openxmlformats.org/drawingml/2006/main">
               <a:ext uri="{FF2B5EF4-FFF2-40B4-BE49-F238E27FC236}">
-                <a16:creationId xmlns:a16="http://schemas.microsoft.com/office/drawing/2014/main" id="{A6356F12-A2FC-4185-8D97-B13DF0F656D7}"/>
+                <a16:creationId xmlns:a16="http://schemas.microsoft.com/office/drawing/2014/main" id="{85C73A5E-9571-482B-9785-27CFEAC826CD}"/>
               </a:ext>
             </a:extLst>
           </p:cNvPr>
@@ -3412,7 +3412,7 @@
           <p:cNvPr id="49" name="stable-tie-label">
             <a:extLst xmlns:a="http://schemas.openxmlformats.org/drawingml/2006/main">
               <a:ext uri="{FF2B5EF4-FFF2-40B4-BE49-F238E27FC236}">
-                <a16:creationId xmlns:a16="http://schemas.microsoft.com/office/drawing/2014/main" id="{568693EF-636D-47F7-A8C5-306BEF796DC4}"/>
+                <a16:creationId xmlns:a16="http://schemas.microsoft.com/office/drawing/2014/main" id="{E5F01D5F-9CD7-431A-8473-CA2CBE6DB11F}"/>
               </a:ext>
             </a:extLst>
           </p:cNvPr>
@@ -3470,19 +3470,135 @@
           <p:cNvPr id="50" name="ranking-tie-caption">
             <a:extLst xmlns:a="http://schemas.openxmlformats.org/drawingml/2006/main">
               <a:ext uri="{FF2B5EF4-FFF2-40B4-BE49-F238E27FC236}">
-                <a16:creationId xmlns:a16="http://schemas.microsoft.com/office/drawing/2014/main" id="{30994E81-B310-4551-8BF6-35F816071CCD}"/>
-              </a:ext>
-            </a:extLst>
-          </p:cNvPr>
-          <p:cNvSpPr>
-            <a:spLocks xmlns:a="http://schemas.openxmlformats.org/drawingml/2006/main" noGrp="1"/>
-          </p:cNvSpPr>
-          <p:nvPr/>
-        </p:nvSpPr>
-        <p:spPr>
-          <a:xfrm xmlns:a="http://schemas.openxmlformats.org/drawingml/2006/main" rot="0">
-            <a:off x="2952750" y="4095750"/>
-            <a:ext cx="2038350" cy="400050"/>
+                <a16:creationId xmlns:a16="http://schemas.microsoft.com/office/drawing/2014/main" id="{BA5DA827-D111-4EFA-994B-8253B3516673}"/>
+              </a:ext>
+            </a:extLst>
+          </p:cNvPr>
+          <p:cNvSpPr>
+            <a:spLocks xmlns:a="http://schemas.openxmlformats.org/drawingml/2006/main" noGrp="1"/>
+          </p:cNvSpPr>
+          <p:nvPr/>
+        </p:nvSpPr>
+        <p:spPr>
+          <a:xfrm xmlns:a="http://schemas.openxmlformats.org/drawingml/2006/main" rot="0">
+            <a:off x="2952750" y="3905250"/>
+            <a:ext cx="2038350" cy="285750"/>
+          </a:xfrm>
+          <a:prstGeom xmlns:a="http://schemas.openxmlformats.org/drawingml/2006/main" prst="rect">
+            <a:avLst/>
+          </a:prstGeom>
+          <a:noFill xmlns:a="http://schemas.openxmlformats.org/drawingml/2006/main"/>
+          <a:ln xmlns:a="http://schemas.openxmlformats.org/drawingml/2006/main" w="0">
+            <a:noFill/>
+            <a:prstDash val="solid"/>
+          </a:ln>
+        </p:spPr>
+        <p:txBody>
+          <a:bodyPr xmlns:a="http://schemas.openxmlformats.org/drawingml/2006/main" wrap="square" lIns="19050" tIns="9525" rIns="19050" bIns="9525" anchor="ctr">
+            <a:normAutofit fontScale="100000"/>
+          </a:bodyPr>
+          <a:lstStyle xmlns:a="http://schemas.openxmlformats.org/drawingml/2006/main"/>
+          <a:p xmlns:a="http://schemas.openxmlformats.org/drawingml/2006/main">
+            <a:pPr algn="ctr">
+              <a:defRPr sz="1125" b="0">
+                <a:solidFill>
+                  <a:srgbClr val="637077"/>
+                </a:solidFill>
+                <a:latin typeface="Arial"/>
+                <a:ea typeface="Arial"/>
+                <a:cs typeface="Arial"/>
+              </a:defRPr>
+            </a:pPr>
+            <a:r>
+              <a:rPr sz="1125" b="0">
+                <a:solidFill>
+                  <a:srgbClr val="637077"/>
+                </a:solidFill>
+                <a:latin typeface="Arial"/>
+                <a:ea typeface="Arial"/>
+                <a:cs typeface="Arial"/>
+              </a:rPr>
+              <a:t>Equal scores: candidate ID</a:t>
+            </a:r>
+          </a:p>
+        </p:txBody>
+      </p:sp>
+      <p:sp>
+        <p:nvSpPr>
+          <p:cNvPr id="51" name="allocation-heading">
+            <a:extLst xmlns:a="http://schemas.openxmlformats.org/drawingml/2006/main">
+              <a:ext uri="{FF2B5EF4-FFF2-40B4-BE49-F238E27FC236}">
+                <a16:creationId xmlns:a16="http://schemas.microsoft.com/office/drawing/2014/main" id="{52E13C7B-661F-45DC-8D17-BE19DD732F0C}"/>
+              </a:ext>
+            </a:extLst>
+          </p:cNvPr>
+          <p:cNvSpPr>
+            <a:spLocks xmlns:a="http://schemas.openxmlformats.org/drawingml/2006/main" noGrp="1"/>
+          </p:cNvSpPr>
+          <p:nvPr/>
+        </p:nvSpPr>
+        <p:spPr>
+          <a:xfrm xmlns:a="http://schemas.openxmlformats.org/drawingml/2006/main" rot="0">
+            <a:off x="5314950" y="1428750"/>
+            <a:ext cx="3905250" cy="323850"/>
+          </a:xfrm>
+          <a:prstGeom xmlns:a="http://schemas.openxmlformats.org/drawingml/2006/main" prst="rect">
+            <a:avLst/>
+          </a:prstGeom>
+          <a:noFill xmlns:a="http://schemas.openxmlformats.org/drawingml/2006/main"/>
+          <a:ln xmlns:a="http://schemas.openxmlformats.org/drawingml/2006/main" w="0">
+            <a:noFill/>
+            <a:prstDash val="solid"/>
+          </a:ln>
+        </p:spPr>
+        <p:txBody>
+          <a:bodyPr xmlns:a="http://schemas.openxmlformats.org/drawingml/2006/main" wrap="square" lIns="19050" tIns="9525" rIns="19050" bIns="9525" anchor="ctr">
+            <a:normAutofit fontScale="100000"/>
+          </a:bodyPr>
+          <a:lstStyle xmlns:a="http://schemas.openxmlformats.org/drawingml/2006/main"/>
+          <a:p xmlns:a="http://schemas.openxmlformats.org/drawingml/2006/main">
+            <a:pPr algn="ctr">
+              <a:defRPr sz="1725" b="1">
+                <a:solidFill>
+                  <a:srgbClr val="26785F"/>
+                </a:solidFill>
+                <a:latin typeface="Arial"/>
+                <a:ea typeface="Arial"/>
+                <a:cs typeface="Arial"/>
+              </a:defRPr>
+            </a:pPr>
+            <a:r>
+              <a:rPr sz="1725" b="1">
+                <a:solidFill>
+                  <a:srgbClr val="26785F"/>
+                </a:solidFill>
+                <a:latin typeface="Arial"/>
+                <a:ea typeface="Arial"/>
+                <a:cs typeface="Arial"/>
+              </a:rPr>
+              <a:t>Governed allocation</a:t>
+            </a:r>
+          </a:p>
+        </p:txBody>
+      </p:sp>
+      <p:sp>
+        <p:nvSpPr>
+          <p:cNvPr id="52" name="allocation-caption">
+            <a:extLst xmlns:a="http://schemas.openxmlformats.org/drawingml/2006/main">
+              <a:ext uri="{FF2B5EF4-FFF2-40B4-BE49-F238E27FC236}">
+                <a16:creationId xmlns:a16="http://schemas.microsoft.com/office/drawing/2014/main" id="{4B1B2F7A-5BAD-49F3-9BE3-508C5E0636AC}"/>
+              </a:ext>
+            </a:extLst>
+          </p:cNvPr>
+          <p:cNvSpPr>
+            <a:spLocks xmlns:a="http://schemas.openxmlformats.org/drawingml/2006/main" noGrp="1"/>
+          </p:cNvSpPr>
+          <p:nvPr/>
+        </p:nvSpPr>
+        <p:spPr>
+          <a:xfrm xmlns:a="http://schemas.openxmlformats.org/drawingml/2006/main" rot="0">
+            <a:off x="5314950" y="1771650"/>
+            <a:ext cx="3905250" cy="266700"/>
           </a:xfrm>
           <a:prstGeom xmlns:a="http://schemas.openxmlformats.org/drawingml/2006/main" prst="rect">
             <a:avLst/>
@@ -3518,29 +3634,1718 @@
                 <a:ea typeface="Arial"/>
                 <a:cs typeface="Arial"/>
               </a:rPr>
-              <a:t>Equal scores: candidate_id</a:t>
+              <a:t>Apply declared reserves, then fill from the global order</a:t>
             </a:r>
           </a:p>
         </p:txBody>
       </p:sp>
       <p:sp>
         <p:nvSpPr>
-          <p:cNvPr id="51" name="allocation-heading">
-            <a:extLst xmlns:a="http://schemas.openxmlformats.org/drawingml/2006/main">
-              <a:ext uri="{FF2B5EF4-FFF2-40B4-BE49-F238E27FC236}">
-                <a16:creationId xmlns:a16="http://schemas.microsoft.com/office/drawing/2014/main" id="{D5464D63-5811-4F59-A1BE-1A880B3F2529}"/>
-              </a:ext>
-            </a:extLst>
-          </p:cNvPr>
-          <p:cNvSpPr>
-            <a:spLocks xmlns:a="http://schemas.openxmlformats.org/drawingml/2006/main" noGrp="1"/>
-          </p:cNvSpPr>
-          <p:nvPr/>
-        </p:nvSpPr>
-        <p:spPr>
-          <a:xfrm xmlns:a="http://schemas.openxmlformats.org/drawingml/2006/main" rot="0">
-            <a:off x="5314950" y="1428750"/>
-            <a:ext cx="3905250" cy="323850"/>
+          <p:cNvPr id="53" name="policy-to-queue-arrow">
+            <a:extLst xmlns:a="http://schemas.openxmlformats.org/drawingml/2006/main">
+              <a:ext uri="{FF2B5EF4-FFF2-40B4-BE49-F238E27FC236}">
+                <a16:creationId xmlns:a16="http://schemas.microsoft.com/office/drawing/2014/main" id="{FA3AA5A9-2750-4CCA-AD70-185D0992B2DE}"/>
+              </a:ext>
+            </a:extLst>
+          </p:cNvPr>
+          <p:cNvSpPr>
+            <a:spLocks xmlns:a="http://schemas.openxmlformats.org/drawingml/2006/main" noGrp="1"/>
+          </p:cNvSpPr>
+          <p:nvPr/>
+        </p:nvSpPr>
+        <p:spPr>
+          <a:xfrm xmlns:a="http://schemas.openxmlformats.org/drawingml/2006/main" rot="0">
+            <a:off x="6000750" y="3429000"/>
+            <a:ext cx="266700" cy="285750"/>
+          </a:xfrm>
+          <a:prstGeom xmlns:a="http://schemas.openxmlformats.org/drawingml/2006/main" prst="downArrow">
+            <a:avLst/>
+          </a:prstGeom>
+          <a:solidFill xmlns:a="http://schemas.openxmlformats.org/drawingml/2006/main">
+            <a:srgbClr val="C6E4E9"/>
+          </a:solidFill>
+          <a:ln xmlns:a="http://schemas.openxmlformats.org/drawingml/2006/main" w="0">
+            <a:noFill/>
+            <a:prstDash val="solid"/>
+          </a:ln>
+        </p:spPr>
+      </p:sp>
+      <p:sp>
+        <p:nvSpPr>
+          <p:cNvPr id="54" name="global-to-queue-arrow">
+            <a:extLst xmlns:a="http://schemas.openxmlformats.org/drawingml/2006/main">
+              <a:ext uri="{FF2B5EF4-FFF2-40B4-BE49-F238E27FC236}">
+                <a16:creationId xmlns:a16="http://schemas.microsoft.com/office/drawing/2014/main" id="{B31891CC-7A5F-486E-AA93-8F514BEBC6D5}"/>
+              </a:ext>
+            </a:extLst>
+          </p:cNvPr>
+          <p:cNvSpPr>
+            <a:spLocks xmlns:a="http://schemas.openxmlformats.org/drawingml/2006/main" noGrp="1"/>
+          </p:cNvSpPr>
+          <p:nvPr/>
+        </p:nvSpPr>
+        <p:spPr>
+          <a:xfrm xmlns:a="http://schemas.openxmlformats.org/drawingml/2006/main" rot="0">
+            <a:off x="8039100" y="3067050"/>
+            <a:ext cx="266700" cy="647700"/>
+          </a:xfrm>
+          <a:prstGeom xmlns:a="http://schemas.openxmlformats.org/drawingml/2006/main" prst="downArrow">
+            <a:avLst/>
+          </a:prstGeom>
+          <a:solidFill xmlns:a="http://schemas.openxmlformats.org/drawingml/2006/main">
+            <a:srgbClr val="C6E4E9"/>
+          </a:solidFill>
+          <a:ln xmlns:a="http://schemas.openxmlformats.org/drawingml/2006/main" w="0">
+            <a:noFill/>
+            <a:prstDash val="solid"/>
+          </a:ln>
+        </p:spPr>
+      </p:sp>
+      <p:sp>
+        <p:nvSpPr>
+          <p:cNvPr id="55" name="allocation-policy">
+            <a:extLst xmlns:a="http://schemas.openxmlformats.org/drawingml/2006/main">
+              <a:ext uri="{FF2B5EF4-FFF2-40B4-BE49-F238E27FC236}">
+                <a16:creationId xmlns:a16="http://schemas.microsoft.com/office/drawing/2014/main" id="{E6D33484-2377-45B7-BF71-C8338A573D11}"/>
+              </a:ext>
+            </a:extLst>
+          </p:cNvPr>
+          <p:cNvSpPr>
+            <a:spLocks xmlns:a="http://schemas.openxmlformats.org/drawingml/2006/main" noGrp="1"/>
+          </p:cNvSpPr>
+          <p:nvPr/>
+        </p:nvSpPr>
+        <p:spPr>
+          <a:xfrm xmlns:a="http://schemas.openxmlformats.org/drawingml/2006/main" rot="0">
+            <a:off x="5314950" y="2190750"/>
+            <a:ext cx="1676400" cy="1200150"/>
+          </a:xfrm>
+          <a:prstGeom xmlns:a="http://schemas.openxmlformats.org/drawingml/2006/main" prst="rect">
+            <a:avLst/>
+          </a:prstGeom>
+          <a:solidFill xmlns:a="http://schemas.openxmlformats.org/drawingml/2006/main">
+            <a:srgbClr val="E6F1EB"/>
+          </a:solidFill>
+          <a:ln xmlns:a="http://schemas.openxmlformats.org/drawingml/2006/main" w="14288">
+            <a:solidFill>
+              <a:srgbClr val="26785F"/>
+            </a:solidFill>
+            <a:prstDash val="solid"/>
+          </a:ln>
+        </p:spPr>
+      </p:sp>
+      <p:sp>
+        <p:nvSpPr>
+          <p:cNvPr id="56" name="allocation-policy-name">
+            <a:extLst xmlns:a="http://schemas.openxmlformats.org/drawingml/2006/main">
+              <a:ext uri="{FF2B5EF4-FFF2-40B4-BE49-F238E27FC236}">
+                <a16:creationId xmlns:a16="http://schemas.microsoft.com/office/drawing/2014/main" id="{A02461FA-E7B7-4A70-9BF3-7D22C69F2C67}"/>
+              </a:ext>
+            </a:extLst>
+          </p:cNvPr>
+          <p:cNvSpPr>
+            <a:spLocks xmlns:a="http://schemas.openxmlformats.org/drawingml/2006/main" noGrp="1"/>
+          </p:cNvSpPr>
+          <p:nvPr/>
+        </p:nvSpPr>
+        <p:spPr>
+          <a:xfrm xmlns:a="http://schemas.openxmlformats.org/drawingml/2006/main" rot="0">
+            <a:off x="5429250" y="2286000"/>
+            <a:ext cx="1428750" cy="228600"/>
+          </a:xfrm>
+          <a:prstGeom xmlns:a="http://schemas.openxmlformats.org/drawingml/2006/main" prst="rect">
+            <a:avLst/>
+          </a:prstGeom>
+          <a:noFill xmlns:a="http://schemas.openxmlformats.org/drawingml/2006/main"/>
+          <a:ln xmlns:a="http://schemas.openxmlformats.org/drawingml/2006/main" w="0">
+            <a:noFill/>
+            <a:prstDash val="solid"/>
+          </a:ln>
+        </p:spPr>
+        <p:txBody>
+          <a:bodyPr xmlns:a="http://schemas.openxmlformats.org/drawingml/2006/main" wrap="square" lIns="19050" tIns="9525" rIns="19050" bIns="9525" anchor="ctr">
+            <a:normAutofit fontScale="100000"/>
+          </a:bodyPr>
+          <a:lstStyle xmlns:a="http://schemas.openxmlformats.org/drawingml/2006/main"/>
+          <a:p xmlns:a="http://schemas.openxmlformats.org/drawingml/2006/main">
+            <a:pPr algn="l">
+              <a:defRPr sz="1200" b="1">
+                <a:solidFill>
+                  <a:srgbClr val="26785F"/>
+                </a:solidFill>
+                <a:latin typeface="Arial"/>
+                <a:ea typeface="Arial"/>
+                <a:cs typeface="Arial"/>
+              </a:defRPr>
+            </a:pPr>
+            <a:r>
+              <a:rPr sz="1200" b="1">
+                <a:solidFill>
+                  <a:srgbClr val="26785F"/>
+                </a:solidFill>
+                <a:latin typeface="Arial"/>
+                <a:ea typeface="Arial"/>
+                <a:cs typeface="Arial"/>
+              </a:rPr>
+              <a:t>Reserve policy</a:t>
+            </a:r>
+          </a:p>
+        </p:txBody>
+      </p:sp>
+      <p:sp>
+        <p:nvSpPr>
+          <p:cNvPr id="57" name="allocation-policy-profile">
+            <a:extLst xmlns:a="http://schemas.openxmlformats.org/drawingml/2006/main">
+              <a:ext uri="{FF2B5EF4-FFF2-40B4-BE49-F238E27FC236}">
+                <a16:creationId xmlns:a16="http://schemas.microsoft.com/office/drawing/2014/main" id="{D630D256-B72C-4EFD-B8A0-3142006D4BA0}"/>
+              </a:ext>
+            </a:extLst>
+          </p:cNvPr>
+          <p:cNvSpPr>
+            <a:spLocks xmlns:a="http://schemas.openxmlformats.org/drawingml/2006/main" noGrp="1"/>
+          </p:cNvSpPr>
+          <p:nvPr/>
+        </p:nvSpPr>
+        <p:spPr>
+          <a:xfrm xmlns:a="http://schemas.openxmlformats.org/drawingml/2006/main" rot="0">
+            <a:off x="5486400" y="2619375"/>
+            <a:ext cx="819150" cy="209550"/>
+          </a:xfrm>
+          <a:prstGeom xmlns:a="http://schemas.openxmlformats.org/drawingml/2006/main" prst="rect">
+            <a:avLst/>
+          </a:prstGeom>
+          <a:noFill xmlns:a="http://schemas.openxmlformats.org/drawingml/2006/main"/>
+          <a:ln xmlns:a="http://schemas.openxmlformats.org/drawingml/2006/main" w="0">
+            <a:noFill/>
+            <a:prstDash val="solid"/>
+          </a:ln>
+        </p:spPr>
+        <p:txBody>
+          <a:bodyPr xmlns:a="http://schemas.openxmlformats.org/drawingml/2006/main" wrap="square" lIns="19050" tIns="9525" rIns="19050" bIns="9525" anchor="ctr">
+            <a:normAutofit fontScale="100000"/>
+          </a:bodyPr>
+          <a:lstStyle xmlns:a="http://schemas.openxmlformats.org/drawingml/2006/main"/>
+          <a:p xmlns:a="http://schemas.openxmlformats.org/drawingml/2006/main">
+            <a:pPr algn="l">
+              <a:defRPr sz="1200" b="0">
+                <a:solidFill>
+                  <a:srgbClr val="172027"/>
+                </a:solidFill>
+                <a:latin typeface="Arial"/>
+                <a:ea typeface="Arial"/>
+                <a:cs typeface="Arial"/>
+              </a:defRPr>
+            </a:pPr>
+            <a:r>
+              <a:rPr sz="1200" b="0">
+                <a:solidFill>
+                  <a:srgbClr val="172027"/>
+                </a:solidFill>
+                <a:latin typeface="Arial"/>
+                <a:ea typeface="Arial"/>
+                <a:cs typeface="Arial"/>
+              </a:rPr>
+              <a:t>profile</a:t>
+            </a:r>
+          </a:p>
+        </p:txBody>
+      </p:sp>
+      <p:sp>
+        <p:nvSpPr>
+          <p:cNvPr id="58" name="allocation-policy-fraction">
+            <a:extLst xmlns:a="http://schemas.openxmlformats.org/drawingml/2006/main">
+              <a:ext uri="{FF2B5EF4-FFF2-40B4-BE49-F238E27FC236}">
+                <a16:creationId xmlns:a16="http://schemas.microsoft.com/office/drawing/2014/main" id="{ADD187BB-31DF-44AF-A1E5-567E0422231A}"/>
+              </a:ext>
+            </a:extLst>
+          </p:cNvPr>
+          <p:cNvSpPr>
+            <a:spLocks xmlns:a="http://schemas.openxmlformats.org/drawingml/2006/main" noGrp="1"/>
+          </p:cNvSpPr>
+          <p:nvPr/>
+        </p:nvSpPr>
+        <p:spPr>
+          <a:xfrm xmlns:a="http://schemas.openxmlformats.org/drawingml/2006/main" rot="0">
+            <a:off x="5486400" y="2895600"/>
+            <a:ext cx="1390650" cy="209550"/>
+          </a:xfrm>
+          <a:prstGeom xmlns:a="http://schemas.openxmlformats.org/drawingml/2006/main" prst="rect">
+            <a:avLst/>
+          </a:prstGeom>
+          <a:noFill xmlns:a="http://schemas.openxmlformats.org/drawingml/2006/main"/>
+          <a:ln xmlns:a="http://schemas.openxmlformats.org/drawingml/2006/main" w="0">
+            <a:noFill/>
+            <a:prstDash val="solid"/>
+          </a:ln>
+        </p:spPr>
+        <p:txBody>
+          <a:bodyPr xmlns:a="http://schemas.openxmlformats.org/drawingml/2006/main" wrap="square" lIns="19050" tIns="9525" rIns="19050" bIns="9525" anchor="ctr">
+            <a:normAutofit fontScale="100000"/>
+          </a:bodyPr>
+          <a:lstStyle xmlns:a="http://schemas.openxmlformats.org/drawingml/2006/main"/>
+          <a:p xmlns:a="http://schemas.openxmlformats.org/drawingml/2006/main">
+            <a:pPr algn="l">
+              <a:defRPr sz="1125" b="0">
+                <a:solidFill>
+                  <a:srgbClr val="172027"/>
+                </a:solidFill>
+                <a:latin typeface="Arial"/>
+                <a:ea typeface="Arial"/>
+                <a:cs typeface="Arial"/>
+              </a:defRPr>
+            </a:pPr>
+            <a:r>
+              <a:rPr sz="1125" b="0">
+                <a:solidFill>
+                  <a:srgbClr val="172027"/>
+                </a:solidFill>
+                <a:latin typeface="Arial"/>
+                <a:ea typeface="Arial"/>
+                <a:cs typeface="Arial"/>
+              </a:rPr>
+              <a:t>fraction = 0.10</a:t>
+            </a:r>
+          </a:p>
+        </p:txBody>
+      </p:sp>
+      <p:sp>
+        <p:nvSpPr>
+          <p:cNvPr id="59" name="allocation-policy-token-1">
+            <a:extLst xmlns:a="http://schemas.openxmlformats.org/drawingml/2006/main">
+              <a:ext uri="{FF2B5EF4-FFF2-40B4-BE49-F238E27FC236}">
+                <a16:creationId xmlns:a16="http://schemas.microsoft.com/office/drawing/2014/main" id="{4D79B9A8-9BA6-47D2-88E9-0F45B74F3590}"/>
+              </a:ext>
+            </a:extLst>
+          </p:cNvPr>
+          <p:cNvSpPr>
+            <a:spLocks xmlns:a="http://schemas.openxmlformats.org/drawingml/2006/main" noGrp="1"/>
+          </p:cNvSpPr>
+          <p:nvPr/>
+        </p:nvSpPr>
+        <p:spPr>
+          <a:xfrm xmlns:a="http://schemas.openxmlformats.org/drawingml/2006/main" rot="0">
+            <a:off x="6438900" y="2600325"/>
+            <a:ext cx="171450" cy="171450"/>
+          </a:xfrm>
+          <a:prstGeom xmlns:a="http://schemas.openxmlformats.org/drawingml/2006/main" prst="ellipse">
+            <a:avLst/>
+          </a:prstGeom>
+          <a:solidFill xmlns:a="http://schemas.openxmlformats.org/drawingml/2006/main">
+            <a:srgbClr val="257FA0"/>
+          </a:solidFill>
+          <a:ln xmlns:a="http://schemas.openxmlformats.org/drawingml/2006/main" w="7620">
+            <a:solidFill>
+              <a:srgbClr val="26355F"/>
+            </a:solidFill>
+            <a:prstDash val="solid"/>
+          </a:ln>
+        </p:spPr>
+      </p:sp>
+      <p:sp>
+        <p:nvSpPr>
+          <p:cNvPr id="60" name="allocation-policy-token-2">
+            <a:extLst xmlns:a="http://schemas.openxmlformats.org/drawingml/2006/main">
+              <a:ext uri="{FF2B5EF4-FFF2-40B4-BE49-F238E27FC236}">
+                <a16:creationId xmlns:a16="http://schemas.microsoft.com/office/drawing/2014/main" id="{233C9093-5803-4FCD-87E4-AF41C83C1D18}"/>
+              </a:ext>
+            </a:extLst>
+          </p:cNvPr>
+          <p:cNvSpPr>
+            <a:spLocks xmlns:a="http://schemas.openxmlformats.org/drawingml/2006/main" noGrp="1"/>
+          </p:cNvSpPr>
+          <p:nvPr/>
+        </p:nvSpPr>
+        <p:spPr>
+          <a:xfrm xmlns:a="http://schemas.openxmlformats.org/drawingml/2006/main" rot="0">
+            <a:off x="6686550" y="2600325"/>
+            <a:ext cx="171450" cy="171450"/>
+          </a:xfrm>
+          <a:prstGeom xmlns:a="http://schemas.openxmlformats.org/drawingml/2006/main" prst="diamond">
+            <a:avLst/>
+          </a:prstGeom>
+          <a:solidFill xmlns:a="http://schemas.openxmlformats.org/drawingml/2006/main">
+            <a:srgbClr val="765A8D"/>
+          </a:solidFill>
+          <a:ln xmlns:a="http://schemas.openxmlformats.org/drawingml/2006/main" w="7620">
+            <a:solidFill>
+              <a:srgbClr val="26355F"/>
+            </a:solidFill>
+            <a:prstDash val="solid"/>
+          </a:ln>
+        </p:spPr>
+      </p:sp>
+      <p:sp>
+        <p:nvSpPr>
+          <p:cNvPr id="61" name="allocation-policy-order">
+            <a:extLst xmlns:a="http://schemas.openxmlformats.org/drawingml/2006/main">
+              <a:ext uri="{FF2B5EF4-FFF2-40B4-BE49-F238E27FC236}">
+                <a16:creationId xmlns:a16="http://schemas.microsoft.com/office/drawing/2014/main" id="{BC02DFF8-AE44-47DE-816C-9DB668D0B448}"/>
+              </a:ext>
+            </a:extLst>
+          </p:cNvPr>
+          <p:cNvSpPr>
+            <a:spLocks xmlns:a="http://schemas.openxmlformats.org/drawingml/2006/main" noGrp="1"/>
+          </p:cNvSpPr>
+          <p:nvPr/>
+        </p:nvSpPr>
+        <p:spPr>
+          <a:xfrm xmlns:a="http://schemas.openxmlformats.org/drawingml/2006/main" rot="0">
+            <a:off x="5486400" y="3133725"/>
+            <a:ext cx="1314450" cy="190500"/>
+          </a:xfrm>
+          <a:prstGeom xmlns:a="http://schemas.openxmlformats.org/drawingml/2006/main" prst="rect">
+            <a:avLst/>
+          </a:prstGeom>
+          <a:noFill xmlns:a="http://schemas.openxmlformats.org/drawingml/2006/main"/>
+          <a:ln xmlns:a="http://schemas.openxmlformats.org/drawingml/2006/main" w="0">
+            <a:noFill/>
+            <a:prstDash val="solid"/>
+          </a:ln>
+        </p:spPr>
+        <p:txBody>
+          <a:bodyPr xmlns:a="http://schemas.openxmlformats.org/drawingml/2006/main" wrap="square" lIns="19050" tIns="9525" rIns="19050" bIns="9525" anchor="ctr">
+            <a:normAutofit fontScale="100000"/>
+          </a:bodyPr>
+          <a:lstStyle xmlns:a="http://schemas.openxmlformats.org/drawingml/2006/main"/>
+          <a:p xmlns:a="http://schemas.openxmlformats.org/drawingml/2006/main">
+            <a:pPr algn="l">
+              <a:defRPr sz="1050" b="1">
+                <a:solidFill>
+                  <a:srgbClr val="26785F"/>
+                </a:solidFill>
+                <a:latin typeface="Arial"/>
+                <a:ea typeface="Arial"/>
+                <a:cs typeface="Arial"/>
+              </a:defRPr>
+            </a:pPr>
+            <a:r>
+              <a:rPr sz="1050" b="1">
+                <a:solidFill>
+                  <a:srgbClr val="26785F"/>
+                </a:solidFill>
+                <a:latin typeface="Arial"/>
+                <a:ea typeface="Arial"/>
+                <a:cs typeface="Arial"/>
+              </a:rPr>
+              <a:t>Declared order</a:t>
+            </a:r>
+          </a:p>
+        </p:txBody>
+      </p:sp>
+      <p:sp>
+        <p:nvSpPr>
+          <p:cNvPr id="62" name="allocation-global-label">
+            <a:extLst xmlns:a="http://schemas.openxmlformats.org/drawingml/2006/main">
+              <a:ext uri="{FF2B5EF4-FFF2-40B4-BE49-F238E27FC236}">
+                <a16:creationId xmlns:a16="http://schemas.microsoft.com/office/drawing/2014/main" id="{4F920531-EFC4-404F-B865-2EBCEAF3EB62}"/>
+              </a:ext>
+            </a:extLst>
+          </p:cNvPr>
+          <p:cNvSpPr>
+            <a:spLocks xmlns:a="http://schemas.openxmlformats.org/drawingml/2006/main" noGrp="1"/>
+          </p:cNvSpPr>
+          <p:nvPr/>
+        </p:nvSpPr>
+        <p:spPr>
+          <a:xfrm xmlns:a="http://schemas.openxmlformats.org/drawingml/2006/main" rot="0">
+            <a:off x="7391400" y="2219325"/>
+            <a:ext cx="1257300" cy="228600"/>
+          </a:xfrm>
+          <a:prstGeom xmlns:a="http://schemas.openxmlformats.org/drawingml/2006/main" prst="rect">
+            <a:avLst/>
+          </a:prstGeom>
+          <a:noFill xmlns:a="http://schemas.openxmlformats.org/drawingml/2006/main"/>
+          <a:ln xmlns:a="http://schemas.openxmlformats.org/drawingml/2006/main" w="0">
+            <a:noFill/>
+            <a:prstDash val="solid"/>
+          </a:ln>
+        </p:spPr>
+        <p:txBody>
+          <a:bodyPr xmlns:a="http://schemas.openxmlformats.org/drawingml/2006/main" wrap="square" lIns="19050" tIns="9525" rIns="19050" bIns="9525" anchor="ctr">
+            <a:normAutofit fontScale="100000"/>
+          </a:bodyPr>
+          <a:lstStyle xmlns:a="http://schemas.openxmlformats.org/drawingml/2006/main"/>
+          <a:p xmlns:a="http://schemas.openxmlformats.org/drawingml/2006/main">
+            <a:pPr algn="l">
+              <a:defRPr sz="1200" b="1">
+                <a:solidFill>
+                  <a:srgbClr val="26355F"/>
+                </a:solidFill>
+                <a:latin typeface="Arial"/>
+                <a:ea typeface="Arial"/>
+                <a:cs typeface="Arial"/>
+              </a:defRPr>
+            </a:pPr>
+            <a:r>
+              <a:rPr sz="1200" b="1">
+                <a:solidFill>
+                  <a:srgbClr val="26355F"/>
+                </a:solidFill>
+                <a:latin typeface="Arial"/>
+                <a:ea typeface="Arial"/>
+                <a:cs typeface="Arial"/>
+              </a:rPr>
+              <a:t>Global order</a:t>
+            </a:r>
+          </a:p>
+        </p:txBody>
+      </p:sp>
+      <p:sp>
+        <p:nvSpPr>
+          <p:cNvPr id="63" name="allocation-global-token-1">
+            <a:extLst xmlns:a="http://schemas.openxmlformats.org/drawingml/2006/main">
+              <a:ext uri="{FF2B5EF4-FFF2-40B4-BE49-F238E27FC236}">
+                <a16:creationId xmlns:a16="http://schemas.microsoft.com/office/drawing/2014/main" id="{C01D112A-1E98-4785-96F8-298B6C30F493}"/>
+              </a:ext>
+            </a:extLst>
+          </p:cNvPr>
+          <p:cNvSpPr>
+            <a:spLocks xmlns:a="http://schemas.openxmlformats.org/drawingml/2006/main" noGrp="1"/>
+          </p:cNvSpPr>
+          <p:nvPr/>
+        </p:nvSpPr>
+        <p:spPr>
+          <a:xfrm xmlns:a="http://schemas.openxmlformats.org/drawingml/2006/main" rot="0">
+            <a:off x="7410450" y="2571750"/>
+            <a:ext cx="190500" cy="190500"/>
+          </a:xfrm>
+          <a:prstGeom xmlns:a="http://schemas.openxmlformats.org/drawingml/2006/main" prst="rect">
+            <a:avLst/>
+          </a:prstGeom>
+          <a:solidFill xmlns:a="http://schemas.openxmlformats.org/drawingml/2006/main">
+            <a:srgbClr val="26355F"/>
+          </a:solidFill>
+          <a:ln xmlns:a="http://schemas.openxmlformats.org/drawingml/2006/main" w="0">
+            <a:noFill/>
+            <a:prstDash val="solid"/>
+          </a:ln>
+        </p:spPr>
+      </p:sp>
+      <p:sp>
+        <p:nvSpPr>
+          <p:cNvPr id="64" name="allocation-global-rank-1">
+            <a:extLst xmlns:a="http://schemas.openxmlformats.org/drawingml/2006/main">
+              <a:ext uri="{FF2B5EF4-FFF2-40B4-BE49-F238E27FC236}">
+                <a16:creationId xmlns:a16="http://schemas.microsoft.com/office/drawing/2014/main" id="{2A41FEEE-98CD-47F2-8E1C-309DB5DD79B3}"/>
+              </a:ext>
+            </a:extLst>
+          </p:cNvPr>
+          <p:cNvSpPr>
+            <a:spLocks xmlns:a="http://schemas.openxmlformats.org/drawingml/2006/main" noGrp="1"/>
+          </p:cNvSpPr>
+          <p:nvPr/>
+        </p:nvSpPr>
+        <p:spPr>
+          <a:xfrm xmlns:a="http://schemas.openxmlformats.org/drawingml/2006/main" rot="0">
+            <a:off x="7410450" y="2819400"/>
+            <a:ext cx="190500" cy="190500"/>
+          </a:xfrm>
+          <a:prstGeom xmlns:a="http://schemas.openxmlformats.org/drawingml/2006/main" prst="rect">
+            <a:avLst/>
+          </a:prstGeom>
+          <a:noFill xmlns:a="http://schemas.openxmlformats.org/drawingml/2006/main"/>
+          <a:ln xmlns:a="http://schemas.openxmlformats.org/drawingml/2006/main" w="0">
+            <a:noFill/>
+            <a:prstDash val="solid"/>
+          </a:ln>
+        </p:spPr>
+        <p:txBody>
+          <a:bodyPr xmlns:a="http://schemas.openxmlformats.org/drawingml/2006/main" wrap="square" lIns="19050" tIns="9525" rIns="19050" bIns="9525" anchor="ctr">
+            <a:normAutofit fontScale="100000"/>
+          </a:bodyPr>
+          <a:lstStyle xmlns:a="http://schemas.openxmlformats.org/drawingml/2006/main"/>
+          <a:p xmlns:a="http://schemas.openxmlformats.org/drawingml/2006/main">
+            <a:pPr algn="ctr">
+              <a:defRPr sz="975" b="0">
+                <a:solidFill>
+                  <a:srgbClr val="637077"/>
+                </a:solidFill>
+                <a:latin typeface="Arial"/>
+                <a:ea typeface="Arial"/>
+                <a:cs typeface="Arial"/>
+              </a:defRPr>
+            </a:pPr>
+            <a:r>
+              <a:rPr sz="975" b="0">
+                <a:solidFill>
+                  <a:srgbClr val="637077"/>
+                </a:solidFill>
+                <a:latin typeface="Arial"/>
+                <a:ea typeface="Arial"/>
+                <a:cs typeface="Arial"/>
+              </a:rPr>
+              <a:t>1</a:t>
+            </a:r>
+          </a:p>
+        </p:txBody>
+      </p:sp>
+      <p:sp>
+        <p:nvSpPr>
+          <p:cNvPr id="65" name="allocation-global-token-2">
+            <a:extLst xmlns:a="http://schemas.openxmlformats.org/drawingml/2006/main">
+              <a:ext uri="{FF2B5EF4-FFF2-40B4-BE49-F238E27FC236}">
+                <a16:creationId xmlns:a16="http://schemas.microsoft.com/office/drawing/2014/main" id="{054C4A07-1CE0-4F09-B328-20F1108ACB4C}"/>
+              </a:ext>
+            </a:extLst>
+          </p:cNvPr>
+          <p:cNvSpPr>
+            <a:spLocks xmlns:a="http://schemas.openxmlformats.org/drawingml/2006/main" noGrp="1"/>
+          </p:cNvSpPr>
+          <p:nvPr/>
+        </p:nvSpPr>
+        <p:spPr>
+          <a:xfrm xmlns:a="http://schemas.openxmlformats.org/drawingml/2006/main" rot="0">
+            <a:off x="7772400" y="2571750"/>
+            <a:ext cx="190500" cy="190500"/>
+          </a:xfrm>
+          <a:prstGeom xmlns:a="http://schemas.openxmlformats.org/drawingml/2006/main" prst="ellipse">
+            <a:avLst/>
+          </a:prstGeom>
+          <a:solidFill xmlns:a="http://schemas.openxmlformats.org/drawingml/2006/main">
+            <a:srgbClr val="257FA0"/>
+          </a:solidFill>
+          <a:ln xmlns:a="http://schemas.openxmlformats.org/drawingml/2006/main" w="7620">
+            <a:solidFill>
+              <a:srgbClr val="26355F"/>
+            </a:solidFill>
+            <a:prstDash val="solid"/>
+          </a:ln>
+        </p:spPr>
+      </p:sp>
+      <p:sp>
+        <p:nvSpPr>
+          <p:cNvPr id="66" name="allocation-global-rank-2">
+            <a:extLst xmlns:a="http://schemas.openxmlformats.org/drawingml/2006/main">
+              <a:ext uri="{FF2B5EF4-FFF2-40B4-BE49-F238E27FC236}">
+                <a16:creationId xmlns:a16="http://schemas.microsoft.com/office/drawing/2014/main" id="{6F6121D7-875F-4250-96ED-4DDBEA5ED569}"/>
+              </a:ext>
+            </a:extLst>
+          </p:cNvPr>
+          <p:cNvSpPr>
+            <a:spLocks xmlns:a="http://schemas.openxmlformats.org/drawingml/2006/main" noGrp="1"/>
+          </p:cNvSpPr>
+          <p:nvPr/>
+        </p:nvSpPr>
+        <p:spPr>
+          <a:xfrm xmlns:a="http://schemas.openxmlformats.org/drawingml/2006/main" rot="0">
+            <a:off x="7772400" y="2819400"/>
+            <a:ext cx="190500" cy="190500"/>
+          </a:xfrm>
+          <a:prstGeom xmlns:a="http://schemas.openxmlformats.org/drawingml/2006/main" prst="rect">
+            <a:avLst/>
+          </a:prstGeom>
+          <a:noFill xmlns:a="http://schemas.openxmlformats.org/drawingml/2006/main"/>
+          <a:ln xmlns:a="http://schemas.openxmlformats.org/drawingml/2006/main" w="0">
+            <a:noFill/>
+            <a:prstDash val="solid"/>
+          </a:ln>
+        </p:spPr>
+        <p:txBody>
+          <a:bodyPr xmlns:a="http://schemas.openxmlformats.org/drawingml/2006/main" wrap="square" lIns="19050" tIns="9525" rIns="19050" bIns="9525" anchor="ctr">
+            <a:normAutofit fontScale="100000"/>
+          </a:bodyPr>
+          <a:lstStyle xmlns:a="http://schemas.openxmlformats.org/drawingml/2006/main"/>
+          <a:p xmlns:a="http://schemas.openxmlformats.org/drawingml/2006/main">
+            <a:pPr algn="ctr">
+              <a:defRPr sz="975" b="0">
+                <a:solidFill>
+                  <a:srgbClr val="637077"/>
+                </a:solidFill>
+                <a:latin typeface="Arial"/>
+                <a:ea typeface="Arial"/>
+                <a:cs typeface="Arial"/>
+              </a:defRPr>
+            </a:pPr>
+            <a:r>
+              <a:rPr sz="975" b="0">
+                <a:solidFill>
+                  <a:srgbClr val="637077"/>
+                </a:solidFill>
+                <a:latin typeface="Arial"/>
+                <a:ea typeface="Arial"/>
+                <a:cs typeface="Arial"/>
+              </a:rPr>
+              <a:t>2</a:t>
+            </a:r>
+          </a:p>
+        </p:txBody>
+      </p:sp>
+      <p:sp>
+        <p:nvSpPr>
+          <p:cNvPr id="67" name="allocation-global-token-3">
+            <a:extLst xmlns:a="http://schemas.openxmlformats.org/drawingml/2006/main">
+              <a:ext uri="{FF2B5EF4-FFF2-40B4-BE49-F238E27FC236}">
+                <a16:creationId xmlns:a16="http://schemas.microsoft.com/office/drawing/2014/main" id="{E060EA77-C445-45CB-A1E5-B460B0DB57DB}"/>
+              </a:ext>
+            </a:extLst>
+          </p:cNvPr>
+          <p:cNvSpPr>
+            <a:spLocks xmlns:a="http://schemas.openxmlformats.org/drawingml/2006/main" noGrp="1"/>
+          </p:cNvSpPr>
+          <p:nvPr/>
+        </p:nvSpPr>
+        <p:spPr>
+          <a:xfrm xmlns:a="http://schemas.openxmlformats.org/drawingml/2006/main" rot="0">
+            <a:off x="8134350" y="2571750"/>
+            <a:ext cx="190500" cy="190500"/>
+          </a:xfrm>
+          <a:prstGeom xmlns:a="http://schemas.openxmlformats.org/drawingml/2006/main" prst="diamond">
+            <a:avLst/>
+          </a:prstGeom>
+          <a:solidFill xmlns:a="http://schemas.openxmlformats.org/drawingml/2006/main">
+            <a:srgbClr val="765A8D"/>
+          </a:solidFill>
+          <a:ln xmlns:a="http://schemas.openxmlformats.org/drawingml/2006/main" w="7620">
+            <a:solidFill>
+              <a:srgbClr val="26355F"/>
+            </a:solidFill>
+            <a:prstDash val="solid"/>
+          </a:ln>
+        </p:spPr>
+      </p:sp>
+      <p:sp>
+        <p:nvSpPr>
+          <p:cNvPr id="68" name="allocation-global-rank-3">
+            <a:extLst xmlns:a="http://schemas.openxmlformats.org/drawingml/2006/main">
+              <a:ext uri="{FF2B5EF4-FFF2-40B4-BE49-F238E27FC236}">
+                <a16:creationId xmlns:a16="http://schemas.microsoft.com/office/drawing/2014/main" id="{CD545F40-D949-42FB-BEDA-8708FE3E86BE}"/>
+              </a:ext>
+            </a:extLst>
+          </p:cNvPr>
+          <p:cNvSpPr>
+            <a:spLocks xmlns:a="http://schemas.openxmlformats.org/drawingml/2006/main" noGrp="1"/>
+          </p:cNvSpPr>
+          <p:nvPr/>
+        </p:nvSpPr>
+        <p:spPr>
+          <a:xfrm xmlns:a="http://schemas.openxmlformats.org/drawingml/2006/main" rot="0">
+            <a:off x="8134350" y="2819400"/>
+            <a:ext cx="190500" cy="190500"/>
+          </a:xfrm>
+          <a:prstGeom xmlns:a="http://schemas.openxmlformats.org/drawingml/2006/main" prst="rect">
+            <a:avLst/>
+          </a:prstGeom>
+          <a:noFill xmlns:a="http://schemas.openxmlformats.org/drawingml/2006/main"/>
+          <a:ln xmlns:a="http://schemas.openxmlformats.org/drawingml/2006/main" w="0">
+            <a:noFill/>
+            <a:prstDash val="solid"/>
+          </a:ln>
+        </p:spPr>
+        <p:txBody>
+          <a:bodyPr xmlns:a="http://schemas.openxmlformats.org/drawingml/2006/main" wrap="square" lIns="19050" tIns="9525" rIns="19050" bIns="9525" anchor="ctr">
+            <a:normAutofit fontScale="100000"/>
+          </a:bodyPr>
+          <a:lstStyle xmlns:a="http://schemas.openxmlformats.org/drawingml/2006/main"/>
+          <a:p xmlns:a="http://schemas.openxmlformats.org/drawingml/2006/main">
+            <a:pPr algn="ctr">
+              <a:defRPr sz="975" b="0">
+                <a:solidFill>
+                  <a:srgbClr val="637077"/>
+                </a:solidFill>
+                <a:latin typeface="Arial"/>
+                <a:ea typeface="Arial"/>
+                <a:cs typeface="Arial"/>
+              </a:defRPr>
+            </a:pPr>
+            <a:r>
+              <a:rPr sz="975" b="0">
+                <a:solidFill>
+                  <a:srgbClr val="637077"/>
+                </a:solidFill>
+                <a:latin typeface="Arial"/>
+                <a:ea typeface="Arial"/>
+                <a:cs typeface="Arial"/>
+              </a:rPr>
+              <a:t>3</a:t>
+            </a:r>
+          </a:p>
+        </p:txBody>
+      </p:sp>
+      <p:sp>
+        <p:nvSpPr>
+          <p:cNvPr id="69" name="allocation-global-token-4">
+            <a:extLst xmlns:a="http://schemas.openxmlformats.org/drawingml/2006/main">
+              <a:ext uri="{FF2B5EF4-FFF2-40B4-BE49-F238E27FC236}">
+                <a16:creationId xmlns:a16="http://schemas.microsoft.com/office/drawing/2014/main" id="{4E504996-F520-40DE-9E41-A57616E056E4}"/>
+              </a:ext>
+            </a:extLst>
+          </p:cNvPr>
+          <p:cNvSpPr>
+            <a:spLocks xmlns:a="http://schemas.openxmlformats.org/drawingml/2006/main" noGrp="1"/>
+          </p:cNvSpPr>
+          <p:nvPr/>
+        </p:nvSpPr>
+        <p:spPr>
+          <a:xfrm xmlns:a="http://schemas.openxmlformats.org/drawingml/2006/main" rot="0">
+            <a:off x="8496300" y="2571750"/>
+            <a:ext cx="190500" cy="190500"/>
+          </a:xfrm>
+          <a:prstGeom xmlns:a="http://schemas.openxmlformats.org/drawingml/2006/main" prst="rect">
+            <a:avLst/>
+          </a:prstGeom>
+          <a:solidFill xmlns:a="http://schemas.openxmlformats.org/drawingml/2006/main">
+            <a:srgbClr val="26355F"/>
+          </a:solidFill>
+          <a:ln xmlns:a="http://schemas.openxmlformats.org/drawingml/2006/main" w="0">
+            <a:noFill/>
+            <a:prstDash val="solid"/>
+          </a:ln>
+        </p:spPr>
+      </p:sp>
+      <p:sp>
+        <p:nvSpPr>
+          <p:cNvPr id="70" name="allocation-global-rank-4">
+            <a:extLst xmlns:a="http://schemas.openxmlformats.org/drawingml/2006/main">
+              <a:ext uri="{FF2B5EF4-FFF2-40B4-BE49-F238E27FC236}">
+                <a16:creationId xmlns:a16="http://schemas.microsoft.com/office/drawing/2014/main" id="{7E94C0C0-94B4-4927-8386-9599C0261690}"/>
+              </a:ext>
+            </a:extLst>
+          </p:cNvPr>
+          <p:cNvSpPr>
+            <a:spLocks xmlns:a="http://schemas.openxmlformats.org/drawingml/2006/main" noGrp="1"/>
+          </p:cNvSpPr>
+          <p:nvPr/>
+        </p:nvSpPr>
+        <p:spPr>
+          <a:xfrm xmlns:a="http://schemas.openxmlformats.org/drawingml/2006/main" rot="0">
+            <a:off x="8496300" y="2819400"/>
+            <a:ext cx="190500" cy="190500"/>
+          </a:xfrm>
+          <a:prstGeom xmlns:a="http://schemas.openxmlformats.org/drawingml/2006/main" prst="rect">
+            <a:avLst/>
+          </a:prstGeom>
+          <a:noFill xmlns:a="http://schemas.openxmlformats.org/drawingml/2006/main"/>
+          <a:ln xmlns:a="http://schemas.openxmlformats.org/drawingml/2006/main" w="0">
+            <a:noFill/>
+            <a:prstDash val="solid"/>
+          </a:ln>
+        </p:spPr>
+        <p:txBody>
+          <a:bodyPr xmlns:a="http://schemas.openxmlformats.org/drawingml/2006/main" wrap="square" lIns="19050" tIns="9525" rIns="19050" bIns="9525" anchor="ctr">
+            <a:normAutofit fontScale="100000"/>
+          </a:bodyPr>
+          <a:lstStyle xmlns:a="http://schemas.openxmlformats.org/drawingml/2006/main"/>
+          <a:p xmlns:a="http://schemas.openxmlformats.org/drawingml/2006/main">
+            <a:pPr algn="ctr">
+              <a:defRPr sz="975" b="0">
+                <a:solidFill>
+                  <a:srgbClr val="637077"/>
+                </a:solidFill>
+                <a:latin typeface="Arial"/>
+                <a:ea typeface="Arial"/>
+                <a:cs typeface="Arial"/>
+              </a:defRPr>
+            </a:pPr>
+            <a:r>
+              <a:rPr sz="975" b="0">
+                <a:solidFill>
+                  <a:srgbClr val="637077"/>
+                </a:solidFill>
+                <a:latin typeface="Arial"/>
+                <a:ea typeface="Arial"/>
+                <a:cs typeface="Arial"/>
+              </a:rPr>
+              <a:t>4</a:t>
+            </a:r>
+          </a:p>
+        </p:txBody>
+      </p:sp>
+      <p:sp>
+        <p:nvSpPr>
+          <p:cNvPr id="71" name="allocation-global-baseline">
+            <a:extLst xmlns:a="http://schemas.openxmlformats.org/drawingml/2006/main">
+              <a:ext uri="{FF2B5EF4-FFF2-40B4-BE49-F238E27FC236}">
+                <a16:creationId xmlns:a16="http://schemas.microsoft.com/office/drawing/2014/main" id="{17E276B4-40C6-4B10-A6E7-D1D26E2EEDC6}"/>
+              </a:ext>
+            </a:extLst>
+          </p:cNvPr>
+          <p:cNvSpPr>
+            <a:spLocks xmlns:a="http://schemas.openxmlformats.org/drawingml/2006/main" noGrp="1"/>
+          </p:cNvSpPr>
+          <p:nvPr/>
+        </p:nvSpPr>
+        <p:spPr>
+          <a:xfrm xmlns:a="http://schemas.openxmlformats.org/drawingml/2006/main" flipH="0" flipV="0">
+            <a:off x="7391400" y="3057525"/>
+            <a:ext cx="1428750" cy="9525"/>
+          </a:xfrm>
+          <a:prstGeom xmlns:a="http://schemas.openxmlformats.org/drawingml/2006/main" prst="line">
+            <a:avLst/>
+          </a:prstGeom>
+          <a:noFill xmlns:a="http://schemas.openxmlformats.org/drawingml/2006/main"/>
+          <a:ln xmlns:a="http://schemas.openxmlformats.org/drawingml/2006/main" w="11430">
+            <a:solidFill>
+              <a:srgbClr val="CAD3D4"/>
+            </a:solidFill>
+            <a:prstDash val="solid"/>
+          </a:ln>
+        </p:spPr>
+      </p:sp>
+      <p:sp>
+        <p:nvSpPr>
+          <p:cNvPr id="72" name="allocation-reserved-label">
+            <a:extLst xmlns:a="http://schemas.openxmlformats.org/drawingml/2006/main">
+              <a:ext uri="{FF2B5EF4-FFF2-40B4-BE49-F238E27FC236}">
+                <a16:creationId xmlns:a16="http://schemas.microsoft.com/office/drawing/2014/main" id="{57841E6F-EABA-4247-9EF5-52E52E2F3AEC}"/>
+              </a:ext>
+            </a:extLst>
+          </p:cNvPr>
+          <p:cNvSpPr>
+            <a:spLocks xmlns:a="http://schemas.openxmlformats.org/drawingml/2006/main" noGrp="1"/>
+          </p:cNvSpPr>
+          <p:nvPr/>
+        </p:nvSpPr>
+        <p:spPr>
+          <a:xfrm xmlns:a="http://schemas.openxmlformats.org/drawingml/2006/main" rot="0">
+            <a:off x="5943600" y="3762375"/>
+            <a:ext cx="685800" cy="190500"/>
+          </a:xfrm>
+          <a:prstGeom xmlns:a="http://schemas.openxmlformats.org/drawingml/2006/main" prst="rect">
+            <a:avLst/>
+          </a:prstGeom>
+          <a:noFill xmlns:a="http://schemas.openxmlformats.org/drawingml/2006/main"/>
+          <a:ln xmlns:a="http://schemas.openxmlformats.org/drawingml/2006/main" w="0">
+            <a:noFill/>
+            <a:prstDash val="solid"/>
+          </a:ln>
+        </p:spPr>
+        <p:txBody>
+          <a:bodyPr xmlns:a="http://schemas.openxmlformats.org/drawingml/2006/main" wrap="square" lIns="19050" tIns="9525" rIns="19050" bIns="9525" anchor="ctr">
+            <a:normAutofit fontScale="100000"/>
+          </a:bodyPr>
+          <a:lstStyle xmlns:a="http://schemas.openxmlformats.org/drawingml/2006/main"/>
+          <a:p xmlns:a="http://schemas.openxmlformats.org/drawingml/2006/main">
+            <a:pPr algn="ctr">
+              <a:defRPr sz="1050" b="1">
+                <a:solidFill>
+                  <a:srgbClr val="26785F"/>
+                </a:solidFill>
+                <a:latin typeface="Arial"/>
+                <a:ea typeface="Arial"/>
+                <a:cs typeface="Arial"/>
+              </a:defRPr>
+            </a:pPr>
+            <a:r>
+              <a:rPr sz="1050" b="1">
+                <a:solidFill>
+                  <a:srgbClr val="26785F"/>
+                </a:solidFill>
+                <a:latin typeface="Arial"/>
+                <a:ea typeface="Arial"/>
+                <a:cs typeface="Arial"/>
+              </a:rPr>
+              <a:t>Reserved</a:t>
+            </a:r>
+          </a:p>
+        </p:txBody>
+      </p:sp>
+      <p:sp>
+        <p:nvSpPr>
+          <p:cNvPr id="73" name="allocation-fill-label">
+            <a:extLst xmlns:a="http://schemas.openxmlformats.org/drawingml/2006/main">
+              <a:ext uri="{FF2B5EF4-FFF2-40B4-BE49-F238E27FC236}">
+                <a16:creationId xmlns:a16="http://schemas.microsoft.com/office/drawing/2014/main" id="{619040F7-8C8A-4CA5-B339-50B44ED5A805}"/>
+              </a:ext>
+            </a:extLst>
+          </p:cNvPr>
+          <p:cNvSpPr>
+            <a:spLocks xmlns:a="http://schemas.openxmlformats.org/drawingml/2006/main" noGrp="1"/>
+          </p:cNvSpPr>
+          <p:nvPr/>
+        </p:nvSpPr>
+        <p:spPr>
+          <a:xfrm xmlns:a="http://schemas.openxmlformats.org/drawingml/2006/main" rot="0">
+            <a:off x="7677150" y="3762375"/>
+            <a:ext cx="876300" cy="190500"/>
+          </a:xfrm>
+          <a:prstGeom xmlns:a="http://schemas.openxmlformats.org/drawingml/2006/main" prst="rect">
+            <a:avLst/>
+          </a:prstGeom>
+          <a:noFill xmlns:a="http://schemas.openxmlformats.org/drawingml/2006/main"/>
+          <a:ln xmlns:a="http://schemas.openxmlformats.org/drawingml/2006/main" w="0">
+            <a:noFill/>
+            <a:prstDash val="solid"/>
+          </a:ln>
+        </p:spPr>
+        <p:txBody>
+          <a:bodyPr xmlns:a="http://schemas.openxmlformats.org/drawingml/2006/main" wrap="square" lIns="19050" tIns="9525" rIns="19050" bIns="9525" anchor="ctr">
+            <a:normAutofit fontScale="100000"/>
+          </a:bodyPr>
+          <a:lstStyle xmlns:a="http://schemas.openxmlformats.org/drawingml/2006/main"/>
+          <a:p xmlns:a="http://schemas.openxmlformats.org/drawingml/2006/main">
+            <a:pPr algn="ctr">
+              <a:defRPr sz="1050" b="1">
+                <a:solidFill>
+                  <a:srgbClr val="26355F"/>
+                </a:solidFill>
+                <a:latin typeface="Arial"/>
+                <a:ea typeface="Arial"/>
+                <a:cs typeface="Arial"/>
+              </a:defRPr>
+            </a:pPr>
+            <a:r>
+              <a:rPr sz="1050" b="1">
+                <a:solidFill>
+                  <a:srgbClr val="26355F"/>
+                </a:solidFill>
+                <a:latin typeface="Arial"/>
+                <a:ea typeface="Arial"/>
+                <a:cs typeface="Arial"/>
+              </a:rPr>
+              <a:t>Global fill</a:t>
+            </a:r>
+          </a:p>
+        </p:txBody>
+      </p:sp>
+      <p:sp>
+        <p:nvSpPr>
+          <p:cNvPr id="74" name="allocation-slot-1">
+            <a:extLst xmlns:a="http://schemas.openxmlformats.org/drawingml/2006/main">
+              <a:ext uri="{FF2B5EF4-FFF2-40B4-BE49-F238E27FC236}">
+                <a16:creationId xmlns:a16="http://schemas.microsoft.com/office/drawing/2014/main" id="{6441C0B4-09F7-4CE7-BE84-502333BF1E3E}"/>
+              </a:ext>
+            </a:extLst>
+          </p:cNvPr>
+          <p:cNvSpPr>
+            <a:spLocks xmlns:a="http://schemas.openxmlformats.org/drawingml/2006/main" noGrp="1"/>
+          </p:cNvSpPr>
+          <p:nvPr/>
+        </p:nvSpPr>
+        <p:spPr>
+          <a:xfrm xmlns:a="http://schemas.openxmlformats.org/drawingml/2006/main" rot="0">
+            <a:off x="5791200" y="4010025"/>
+            <a:ext cx="352425" cy="438150"/>
+          </a:xfrm>
+          <a:prstGeom xmlns:a="http://schemas.openxmlformats.org/drawingml/2006/main" prst="rect">
+            <a:avLst/>
+          </a:prstGeom>
+          <a:solidFill xmlns:a="http://schemas.openxmlformats.org/drawingml/2006/main">
+            <a:srgbClr val="E6F1EB"/>
+          </a:solidFill>
+          <a:ln xmlns:a="http://schemas.openxmlformats.org/drawingml/2006/main" w="12383">
+            <a:solidFill>
+              <a:srgbClr val="26785F"/>
+            </a:solidFill>
+            <a:prstDash val="solid"/>
+          </a:ln>
+        </p:spPr>
+      </p:sp>
+      <p:sp>
+        <p:nvSpPr>
+          <p:cNvPr id="75" name="allocation-slot-token-1">
+            <a:extLst xmlns:a="http://schemas.openxmlformats.org/drawingml/2006/main">
+              <a:ext uri="{FF2B5EF4-FFF2-40B4-BE49-F238E27FC236}">
+                <a16:creationId xmlns:a16="http://schemas.microsoft.com/office/drawing/2014/main" id="{315BEBD9-7777-4DF0-82AE-6BE10F85ACC4}"/>
+              </a:ext>
+            </a:extLst>
+          </p:cNvPr>
+          <p:cNvSpPr>
+            <a:spLocks xmlns:a="http://schemas.openxmlformats.org/drawingml/2006/main" noGrp="1"/>
+          </p:cNvSpPr>
+          <p:nvPr/>
+        </p:nvSpPr>
+        <p:spPr>
+          <a:xfrm xmlns:a="http://schemas.openxmlformats.org/drawingml/2006/main" rot="0">
+            <a:off x="5876925" y="4143375"/>
+            <a:ext cx="171450" cy="171450"/>
+          </a:xfrm>
+          <a:prstGeom xmlns:a="http://schemas.openxmlformats.org/drawingml/2006/main" prst="ellipse">
+            <a:avLst/>
+          </a:prstGeom>
+          <a:solidFill xmlns:a="http://schemas.openxmlformats.org/drawingml/2006/main">
+            <a:srgbClr val="257FA0"/>
+          </a:solidFill>
+          <a:ln xmlns:a="http://schemas.openxmlformats.org/drawingml/2006/main" w="7620">
+            <a:solidFill>
+              <a:srgbClr val="26355F"/>
+            </a:solidFill>
+            <a:prstDash val="solid"/>
+          </a:ln>
+        </p:spPr>
+      </p:sp>
+      <p:sp>
+        <p:nvSpPr>
+          <p:cNvPr id="76" name="allocation-slot-2">
+            <a:extLst xmlns:a="http://schemas.openxmlformats.org/drawingml/2006/main">
+              <a:ext uri="{FF2B5EF4-FFF2-40B4-BE49-F238E27FC236}">
+                <a16:creationId xmlns:a16="http://schemas.microsoft.com/office/drawing/2014/main" id="{3EC3FE39-9208-484C-8FDC-CFF7BD41A600}"/>
+              </a:ext>
+            </a:extLst>
+          </p:cNvPr>
+          <p:cNvSpPr>
+            <a:spLocks xmlns:a="http://schemas.openxmlformats.org/drawingml/2006/main" noGrp="1"/>
+          </p:cNvSpPr>
+          <p:nvPr/>
+        </p:nvSpPr>
+        <p:spPr>
+          <a:xfrm xmlns:a="http://schemas.openxmlformats.org/drawingml/2006/main" rot="0">
+            <a:off x="6162675" y="4010025"/>
+            <a:ext cx="352425" cy="438150"/>
+          </a:xfrm>
+          <a:prstGeom xmlns:a="http://schemas.openxmlformats.org/drawingml/2006/main" prst="rect">
+            <a:avLst/>
+          </a:prstGeom>
+          <a:solidFill xmlns:a="http://schemas.openxmlformats.org/drawingml/2006/main">
+            <a:srgbClr val="E6F1EB"/>
+          </a:solidFill>
+          <a:ln xmlns:a="http://schemas.openxmlformats.org/drawingml/2006/main" w="12383">
+            <a:solidFill>
+              <a:srgbClr val="26785F"/>
+            </a:solidFill>
+            <a:prstDash val="solid"/>
+          </a:ln>
+        </p:spPr>
+      </p:sp>
+      <p:sp>
+        <p:nvSpPr>
+          <p:cNvPr id="77" name="allocation-slot-token-2">
+            <a:extLst xmlns:a="http://schemas.openxmlformats.org/drawingml/2006/main">
+              <a:ext uri="{FF2B5EF4-FFF2-40B4-BE49-F238E27FC236}">
+                <a16:creationId xmlns:a16="http://schemas.microsoft.com/office/drawing/2014/main" id="{7725E9D1-2E34-4FE0-81E7-D471ED39BB6D}"/>
+              </a:ext>
+            </a:extLst>
+          </p:cNvPr>
+          <p:cNvSpPr>
+            <a:spLocks xmlns:a="http://schemas.openxmlformats.org/drawingml/2006/main" noGrp="1"/>
+          </p:cNvSpPr>
+          <p:nvPr/>
+        </p:nvSpPr>
+        <p:spPr>
+          <a:xfrm xmlns:a="http://schemas.openxmlformats.org/drawingml/2006/main" rot="0">
+            <a:off x="6248400" y="4143375"/>
+            <a:ext cx="171450" cy="171450"/>
+          </a:xfrm>
+          <a:prstGeom xmlns:a="http://schemas.openxmlformats.org/drawingml/2006/main" prst="diamond">
+            <a:avLst/>
+          </a:prstGeom>
+          <a:solidFill xmlns:a="http://schemas.openxmlformats.org/drawingml/2006/main">
+            <a:srgbClr val="765A8D"/>
+          </a:solidFill>
+          <a:ln xmlns:a="http://schemas.openxmlformats.org/drawingml/2006/main" w="7620">
+            <a:solidFill>
+              <a:srgbClr val="26355F"/>
+            </a:solidFill>
+            <a:prstDash val="solid"/>
+          </a:ln>
+        </p:spPr>
+      </p:sp>
+      <p:sp>
+        <p:nvSpPr>
+          <p:cNvPr id="78" name="allocation-slot-3">
+            <a:extLst xmlns:a="http://schemas.openxmlformats.org/drawingml/2006/main">
+              <a:ext uri="{FF2B5EF4-FFF2-40B4-BE49-F238E27FC236}">
+                <a16:creationId xmlns:a16="http://schemas.microsoft.com/office/drawing/2014/main" id="{3ACD4D96-2BD0-4782-B698-0AB4F86D35D5}"/>
+              </a:ext>
+            </a:extLst>
+          </p:cNvPr>
+          <p:cNvSpPr>
+            <a:spLocks xmlns:a="http://schemas.openxmlformats.org/drawingml/2006/main" noGrp="1"/>
+          </p:cNvSpPr>
+          <p:nvPr/>
+        </p:nvSpPr>
+        <p:spPr>
+          <a:xfrm xmlns:a="http://schemas.openxmlformats.org/drawingml/2006/main" rot="0">
+            <a:off x="6534150" y="4010025"/>
+            <a:ext cx="352425" cy="438150"/>
+          </a:xfrm>
+          <a:prstGeom xmlns:a="http://schemas.openxmlformats.org/drawingml/2006/main" prst="rect">
+            <a:avLst/>
+          </a:prstGeom>
+          <a:solidFill xmlns:a="http://schemas.openxmlformats.org/drawingml/2006/main">
+            <a:srgbClr val="FFFFFF"/>
+          </a:solidFill>
+          <a:ln xmlns:a="http://schemas.openxmlformats.org/drawingml/2006/main" w="12383">
+            <a:solidFill>
+              <a:srgbClr val="26355F"/>
+            </a:solidFill>
+            <a:prstDash val="solid"/>
+          </a:ln>
+        </p:spPr>
+      </p:sp>
+      <p:sp>
+        <p:nvSpPr>
+          <p:cNvPr id="79" name="allocation-slot-token-3">
+            <a:extLst xmlns:a="http://schemas.openxmlformats.org/drawingml/2006/main">
+              <a:ext uri="{FF2B5EF4-FFF2-40B4-BE49-F238E27FC236}">
+                <a16:creationId xmlns:a16="http://schemas.microsoft.com/office/drawing/2014/main" id="{C4281113-869C-497B-8EA7-9A8AAD0F3940}"/>
+              </a:ext>
+            </a:extLst>
+          </p:cNvPr>
+          <p:cNvSpPr>
+            <a:spLocks xmlns:a="http://schemas.openxmlformats.org/drawingml/2006/main" noGrp="1"/>
+          </p:cNvSpPr>
+          <p:nvPr/>
+        </p:nvSpPr>
+        <p:spPr>
+          <a:xfrm xmlns:a="http://schemas.openxmlformats.org/drawingml/2006/main" rot="0">
+            <a:off x="6619875" y="4143375"/>
+            <a:ext cx="171450" cy="171450"/>
+          </a:xfrm>
+          <a:prstGeom xmlns:a="http://schemas.openxmlformats.org/drawingml/2006/main" prst="rect">
+            <a:avLst/>
+          </a:prstGeom>
+          <a:solidFill xmlns:a="http://schemas.openxmlformats.org/drawingml/2006/main">
+            <a:srgbClr val="26355F"/>
+          </a:solidFill>
+          <a:ln xmlns:a="http://schemas.openxmlformats.org/drawingml/2006/main" w="0">
+            <a:noFill/>
+            <a:prstDash val="solid"/>
+          </a:ln>
+        </p:spPr>
+      </p:sp>
+      <p:sp>
+        <p:nvSpPr>
+          <p:cNvPr id="80" name="allocation-slot-4">
+            <a:extLst xmlns:a="http://schemas.openxmlformats.org/drawingml/2006/main">
+              <a:ext uri="{FF2B5EF4-FFF2-40B4-BE49-F238E27FC236}">
+                <a16:creationId xmlns:a16="http://schemas.microsoft.com/office/drawing/2014/main" id="{66999BA6-C3C4-4183-9C68-D3F727B45A58}"/>
+              </a:ext>
+            </a:extLst>
+          </p:cNvPr>
+          <p:cNvSpPr>
+            <a:spLocks xmlns:a="http://schemas.openxmlformats.org/drawingml/2006/main" noGrp="1"/>
+          </p:cNvSpPr>
+          <p:nvPr/>
+        </p:nvSpPr>
+        <p:spPr>
+          <a:xfrm xmlns:a="http://schemas.openxmlformats.org/drawingml/2006/main" rot="0">
+            <a:off x="6905625" y="4010025"/>
+            <a:ext cx="352425" cy="438150"/>
+          </a:xfrm>
+          <a:prstGeom xmlns:a="http://schemas.openxmlformats.org/drawingml/2006/main" prst="rect">
+            <a:avLst/>
+          </a:prstGeom>
+          <a:solidFill xmlns:a="http://schemas.openxmlformats.org/drawingml/2006/main">
+            <a:srgbClr val="FFFFFF"/>
+          </a:solidFill>
+          <a:ln xmlns:a="http://schemas.openxmlformats.org/drawingml/2006/main" w="12383">
+            <a:solidFill>
+              <a:srgbClr val="26355F"/>
+            </a:solidFill>
+            <a:prstDash val="solid"/>
+          </a:ln>
+        </p:spPr>
+      </p:sp>
+      <p:sp>
+        <p:nvSpPr>
+          <p:cNvPr id="81" name="allocation-slot-token-4">
+            <a:extLst xmlns:a="http://schemas.openxmlformats.org/drawingml/2006/main">
+              <a:ext uri="{FF2B5EF4-FFF2-40B4-BE49-F238E27FC236}">
+                <a16:creationId xmlns:a16="http://schemas.microsoft.com/office/drawing/2014/main" id="{5CB083DA-2B5C-413F-A820-4F31EA7DB685}"/>
+              </a:ext>
+            </a:extLst>
+          </p:cNvPr>
+          <p:cNvSpPr>
+            <a:spLocks xmlns:a="http://schemas.openxmlformats.org/drawingml/2006/main" noGrp="1"/>
+          </p:cNvSpPr>
+          <p:nvPr/>
+        </p:nvSpPr>
+        <p:spPr>
+          <a:xfrm xmlns:a="http://schemas.openxmlformats.org/drawingml/2006/main" rot="0">
+            <a:off x="6991350" y="4143375"/>
+            <a:ext cx="171450" cy="171450"/>
+          </a:xfrm>
+          <a:prstGeom xmlns:a="http://schemas.openxmlformats.org/drawingml/2006/main" prst="ellipse">
+            <a:avLst/>
+          </a:prstGeom>
+          <a:solidFill xmlns:a="http://schemas.openxmlformats.org/drawingml/2006/main">
+            <a:srgbClr val="257FA0"/>
+          </a:solidFill>
+          <a:ln xmlns:a="http://schemas.openxmlformats.org/drawingml/2006/main" w="7620">
+            <a:solidFill>
+              <a:srgbClr val="26355F"/>
+            </a:solidFill>
+            <a:prstDash val="solid"/>
+          </a:ln>
+        </p:spPr>
+      </p:sp>
+      <p:sp>
+        <p:nvSpPr>
+          <p:cNvPr id="82" name="allocation-slot-5">
+            <a:extLst xmlns:a="http://schemas.openxmlformats.org/drawingml/2006/main">
+              <a:ext uri="{FF2B5EF4-FFF2-40B4-BE49-F238E27FC236}">
+                <a16:creationId xmlns:a16="http://schemas.microsoft.com/office/drawing/2014/main" id="{307DDD61-4855-4A45-ACEE-99D0406B3997}"/>
+              </a:ext>
+            </a:extLst>
+          </p:cNvPr>
+          <p:cNvSpPr>
+            <a:spLocks xmlns:a="http://schemas.openxmlformats.org/drawingml/2006/main" noGrp="1"/>
+          </p:cNvSpPr>
+          <p:nvPr/>
+        </p:nvSpPr>
+        <p:spPr>
+          <a:xfrm xmlns:a="http://schemas.openxmlformats.org/drawingml/2006/main" rot="0">
+            <a:off x="7277100" y="4010025"/>
+            <a:ext cx="352425" cy="438150"/>
+          </a:xfrm>
+          <a:prstGeom xmlns:a="http://schemas.openxmlformats.org/drawingml/2006/main" prst="rect">
+            <a:avLst/>
+          </a:prstGeom>
+          <a:solidFill xmlns:a="http://schemas.openxmlformats.org/drawingml/2006/main">
+            <a:srgbClr val="FFFFFF"/>
+          </a:solidFill>
+          <a:ln xmlns:a="http://schemas.openxmlformats.org/drawingml/2006/main" w="12383">
+            <a:solidFill>
+              <a:srgbClr val="26355F"/>
+            </a:solidFill>
+            <a:prstDash val="solid"/>
+          </a:ln>
+        </p:spPr>
+      </p:sp>
+      <p:sp>
+        <p:nvSpPr>
+          <p:cNvPr id="83" name="allocation-slot-token-5">
+            <a:extLst xmlns:a="http://schemas.openxmlformats.org/drawingml/2006/main">
+              <a:ext uri="{FF2B5EF4-FFF2-40B4-BE49-F238E27FC236}">
+                <a16:creationId xmlns:a16="http://schemas.microsoft.com/office/drawing/2014/main" id="{C50FC76F-11FE-4FC6-8D3D-DD1CB85A7F10}"/>
+              </a:ext>
+            </a:extLst>
+          </p:cNvPr>
+          <p:cNvSpPr>
+            <a:spLocks xmlns:a="http://schemas.openxmlformats.org/drawingml/2006/main" noGrp="1"/>
+          </p:cNvSpPr>
+          <p:nvPr/>
+        </p:nvSpPr>
+        <p:spPr>
+          <a:xfrm xmlns:a="http://schemas.openxmlformats.org/drawingml/2006/main" rot="0">
+            <a:off x="7362825" y="4143375"/>
+            <a:ext cx="171450" cy="171450"/>
+          </a:xfrm>
+          <a:prstGeom xmlns:a="http://schemas.openxmlformats.org/drawingml/2006/main" prst="rect">
+            <a:avLst/>
+          </a:prstGeom>
+          <a:solidFill xmlns:a="http://schemas.openxmlformats.org/drawingml/2006/main">
+            <a:srgbClr val="26355F"/>
+          </a:solidFill>
+          <a:ln xmlns:a="http://schemas.openxmlformats.org/drawingml/2006/main" w="0">
+            <a:noFill/>
+            <a:prstDash val="solid"/>
+          </a:ln>
+        </p:spPr>
+      </p:sp>
+      <p:sp>
+        <p:nvSpPr>
+          <p:cNvPr id="84" name="allocation-slot-6">
+            <a:extLst xmlns:a="http://schemas.openxmlformats.org/drawingml/2006/main">
+              <a:ext uri="{FF2B5EF4-FFF2-40B4-BE49-F238E27FC236}">
+                <a16:creationId xmlns:a16="http://schemas.microsoft.com/office/drawing/2014/main" id="{9AE6561C-9AD1-43F3-857B-30AC01044CCF}"/>
+              </a:ext>
+            </a:extLst>
+          </p:cNvPr>
+          <p:cNvSpPr>
+            <a:spLocks xmlns:a="http://schemas.openxmlformats.org/drawingml/2006/main" noGrp="1"/>
+          </p:cNvSpPr>
+          <p:nvPr/>
+        </p:nvSpPr>
+        <p:spPr>
+          <a:xfrm xmlns:a="http://schemas.openxmlformats.org/drawingml/2006/main" rot="0">
+            <a:off x="7648575" y="4010025"/>
+            <a:ext cx="352425" cy="438150"/>
+          </a:xfrm>
+          <a:prstGeom xmlns:a="http://schemas.openxmlformats.org/drawingml/2006/main" prst="rect">
+            <a:avLst/>
+          </a:prstGeom>
+          <a:solidFill xmlns:a="http://schemas.openxmlformats.org/drawingml/2006/main">
+            <a:srgbClr val="FFFFFF"/>
+          </a:solidFill>
+          <a:ln xmlns:a="http://schemas.openxmlformats.org/drawingml/2006/main" w="12383">
+            <a:solidFill>
+              <a:srgbClr val="26355F"/>
+            </a:solidFill>
+            <a:prstDash val="solid"/>
+          </a:ln>
+        </p:spPr>
+      </p:sp>
+      <p:sp>
+        <p:nvSpPr>
+          <p:cNvPr id="85" name="allocation-slot-token-6">
+            <a:extLst xmlns:a="http://schemas.openxmlformats.org/drawingml/2006/main">
+              <a:ext uri="{FF2B5EF4-FFF2-40B4-BE49-F238E27FC236}">
+                <a16:creationId xmlns:a16="http://schemas.microsoft.com/office/drawing/2014/main" id="{41DFADFA-5EE5-4BAA-9E7B-A95B15394C26}"/>
+              </a:ext>
+            </a:extLst>
+          </p:cNvPr>
+          <p:cNvSpPr>
+            <a:spLocks xmlns:a="http://schemas.openxmlformats.org/drawingml/2006/main" noGrp="1"/>
+          </p:cNvSpPr>
+          <p:nvPr/>
+        </p:nvSpPr>
+        <p:spPr>
+          <a:xfrm xmlns:a="http://schemas.openxmlformats.org/drawingml/2006/main" rot="0">
+            <a:off x="7734300" y="4143375"/>
+            <a:ext cx="171450" cy="171450"/>
+          </a:xfrm>
+          <a:prstGeom xmlns:a="http://schemas.openxmlformats.org/drawingml/2006/main" prst="ellipse">
+            <a:avLst/>
+          </a:prstGeom>
+          <a:solidFill xmlns:a="http://schemas.openxmlformats.org/drawingml/2006/main">
+            <a:srgbClr val="257FA0"/>
+          </a:solidFill>
+          <a:ln xmlns:a="http://schemas.openxmlformats.org/drawingml/2006/main" w="7620">
+            <a:solidFill>
+              <a:srgbClr val="26355F"/>
+            </a:solidFill>
+            <a:prstDash val="solid"/>
+          </a:ln>
+        </p:spPr>
+      </p:sp>
+      <p:sp>
+        <p:nvSpPr>
+          <p:cNvPr id="86" name="allocation-slot-7">
+            <a:extLst xmlns:a="http://schemas.openxmlformats.org/drawingml/2006/main">
+              <a:ext uri="{FF2B5EF4-FFF2-40B4-BE49-F238E27FC236}">
+                <a16:creationId xmlns:a16="http://schemas.microsoft.com/office/drawing/2014/main" id="{E317DCE7-CF9D-4FBB-AE28-48AEF0879042}"/>
+              </a:ext>
+            </a:extLst>
+          </p:cNvPr>
+          <p:cNvSpPr>
+            <a:spLocks xmlns:a="http://schemas.openxmlformats.org/drawingml/2006/main" noGrp="1"/>
+          </p:cNvSpPr>
+          <p:nvPr/>
+        </p:nvSpPr>
+        <p:spPr>
+          <a:xfrm xmlns:a="http://schemas.openxmlformats.org/drawingml/2006/main" rot="0">
+            <a:off x="8020050" y="4010025"/>
+            <a:ext cx="352425" cy="438150"/>
+          </a:xfrm>
+          <a:prstGeom xmlns:a="http://schemas.openxmlformats.org/drawingml/2006/main" prst="rect">
+            <a:avLst/>
+          </a:prstGeom>
+          <a:solidFill xmlns:a="http://schemas.openxmlformats.org/drawingml/2006/main">
+            <a:srgbClr val="FFFFFF"/>
+          </a:solidFill>
+          <a:ln xmlns:a="http://schemas.openxmlformats.org/drawingml/2006/main" w="12383">
+            <a:solidFill>
+              <a:srgbClr val="26355F"/>
+            </a:solidFill>
+            <a:prstDash val="solid"/>
+          </a:ln>
+        </p:spPr>
+      </p:sp>
+      <p:sp>
+        <p:nvSpPr>
+          <p:cNvPr id="87" name="allocation-slot-token-7">
+            <a:extLst xmlns:a="http://schemas.openxmlformats.org/drawingml/2006/main">
+              <a:ext uri="{FF2B5EF4-FFF2-40B4-BE49-F238E27FC236}">
+                <a16:creationId xmlns:a16="http://schemas.microsoft.com/office/drawing/2014/main" id="{E004F3AB-5EC9-46C0-AA41-56480A9BC698}"/>
+              </a:ext>
+            </a:extLst>
+          </p:cNvPr>
+          <p:cNvSpPr>
+            <a:spLocks xmlns:a="http://schemas.openxmlformats.org/drawingml/2006/main" noGrp="1"/>
+          </p:cNvSpPr>
+          <p:nvPr/>
+        </p:nvSpPr>
+        <p:spPr>
+          <a:xfrm xmlns:a="http://schemas.openxmlformats.org/drawingml/2006/main" rot="0">
+            <a:off x="8105775" y="4143375"/>
+            <a:ext cx="171450" cy="171450"/>
+          </a:xfrm>
+          <a:prstGeom xmlns:a="http://schemas.openxmlformats.org/drawingml/2006/main" prst="diamond">
+            <a:avLst/>
+          </a:prstGeom>
+          <a:solidFill xmlns:a="http://schemas.openxmlformats.org/drawingml/2006/main">
+            <a:srgbClr val="765A8D"/>
+          </a:solidFill>
+          <a:ln xmlns:a="http://schemas.openxmlformats.org/drawingml/2006/main" w="7620">
+            <a:solidFill>
+              <a:srgbClr val="26355F"/>
+            </a:solidFill>
+            <a:prstDash val="solid"/>
+          </a:ln>
+        </p:spPr>
+      </p:sp>
+      <p:sp>
+        <p:nvSpPr>
+          <p:cNvPr id="88" name="allocation-slot-8">
+            <a:extLst xmlns:a="http://schemas.openxmlformats.org/drawingml/2006/main">
+              <a:ext uri="{FF2B5EF4-FFF2-40B4-BE49-F238E27FC236}">
+                <a16:creationId xmlns:a16="http://schemas.microsoft.com/office/drawing/2014/main" id="{59848973-DE7B-40B5-8027-3AAE3E1709EE}"/>
+              </a:ext>
+            </a:extLst>
+          </p:cNvPr>
+          <p:cNvSpPr>
+            <a:spLocks xmlns:a="http://schemas.openxmlformats.org/drawingml/2006/main" noGrp="1"/>
+          </p:cNvSpPr>
+          <p:nvPr/>
+        </p:nvSpPr>
+        <p:spPr>
+          <a:xfrm xmlns:a="http://schemas.openxmlformats.org/drawingml/2006/main" rot="0">
+            <a:off x="8391525" y="4010025"/>
+            <a:ext cx="352425" cy="438150"/>
+          </a:xfrm>
+          <a:prstGeom xmlns:a="http://schemas.openxmlformats.org/drawingml/2006/main" prst="rect">
+            <a:avLst/>
+          </a:prstGeom>
+          <a:solidFill xmlns:a="http://schemas.openxmlformats.org/drawingml/2006/main">
+            <a:srgbClr val="FFFFFF"/>
+          </a:solidFill>
+          <a:ln xmlns:a="http://schemas.openxmlformats.org/drawingml/2006/main" w="12383">
+            <a:solidFill>
+              <a:srgbClr val="26355F"/>
+            </a:solidFill>
+            <a:prstDash val="solid"/>
+          </a:ln>
+        </p:spPr>
+      </p:sp>
+      <p:sp>
+        <p:nvSpPr>
+          <p:cNvPr id="89" name="allocation-slot-token-8">
+            <a:extLst xmlns:a="http://schemas.openxmlformats.org/drawingml/2006/main">
+              <a:ext uri="{FF2B5EF4-FFF2-40B4-BE49-F238E27FC236}">
+                <a16:creationId xmlns:a16="http://schemas.microsoft.com/office/drawing/2014/main" id="{1D6FAC0F-E709-4866-9431-850E5198E764}"/>
+              </a:ext>
+            </a:extLst>
+          </p:cNvPr>
+          <p:cNvSpPr>
+            <a:spLocks xmlns:a="http://schemas.openxmlformats.org/drawingml/2006/main" noGrp="1"/>
+          </p:cNvSpPr>
+          <p:nvPr/>
+        </p:nvSpPr>
+        <p:spPr>
+          <a:xfrm xmlns:a="http://schemas.openxmlformats.org/drawingml/2006/main" rot="0">
+            <a:off x="8477250" y="4143375"/>
+            <a:ext cx="171450" cy="171450"/>
+          </a:xfrm>
+          <a:prstGeom xmlns:a="http://schemas.openxmlformats.org/drawingml/2006/main" prst="rect">
+            <a:avLst/>
+          </a:prstGeom>
+          <a:solidFill xmlns:a="http://schemas.openxmlformats.org/drawingml/2006/main">
+            <a:srgbClr val="26355F"/>
+          </a:solidFill>
+          <a:ln xmlns:a="http://schemas.openxmlformats.org/drawingml/2006/main" w="0">
+            <a:noFill/>
+            <a:prstDash val="solid"/>
+          </a:ln>
+        </p:spPr>
+      </p:sp>
+      <p:sp>
+        <p:nvSpPr>
+          <p:cNvPr id="90" name="allocation-capacity-bracket">
+            <a:extLst xmlns:a="http://schemas.openxmlformats.org/drawingml/2006/main">
+              <a:ext uri="{FF2B5EF4-FFF2-40B4-BE49-F238E27FC236}">
+                <a16:creationId xmlns:a16="http://schemas.microsoft.com/office/drawing/2014/main" id="{E96030A9-69A8-4624-8C77-4AD28C77CFCE}"/>
+              </a:ext>
+            </a:extLst>
+          </p:cNvPr>
+          <p:cNvSpPr>
+            <a:spLocks xmlns:a="http://schemas.openxmlformats.org/drawingml/2006/main" noGrp="1"/>
+          </p:cNvSpPr>
+          <p:nvPr/>
+        </p:nvSpPr>
+        <p:spPr>
+          <a:xfrm xmlns:a="http://schemas.openxmlformats.org/drawingml/2006/main" flipH="0" flipV="0">
+            <a:off x="5791200" y="4552950"/>
+            <a:ext cx="2943225" cy="9525"/>
+          </a:xfrm>
+          <a:prstGeom xmlns:a="http://schemas.openxmlformats.org/drawingml/2006/main" prst="line">
+            <a:avLst/>
+          </a:prstGeom>
+          <a:noFill xmlns:a="http://schemas.openxmlformats.org/drawingml/2006/main"/>
+          <a:ln xmlns:a="http://schemas.openxmlformats.org/drawingml/2006/main" w="13335">
+            <a:solidFill>
+              <a:srgbClr val="26355F"/>
+            </a:solidFill>
+            <a:prstDash val="solid"/>
+          </a:ln>
+        </p:spPr>
+      </p:sp>
+      <p:sp>
+        <p:nvSpPr>
+          <p:cNvPr id="91" name="">
+            <a:extLst xmlns:a="http://schemas.openxmlformats.org/drawingml/2006/main">
+              <a:ext uri="{FF2B5EF4-FFF2-40B4-BE49-F238E27FC236}">
+                <a16:creationId xmlns:a16="http://schemas.microsoft.com/office/drawing/2014/main" id="{E4258281-8B38-4085-8E4C-7B23015CE5F3}"/>
+              </a:ext>
+            </a:extLst>
+          </p:cNvPr>
+          <p:cNvSpPr>
+            <a:spLocks xmlns:a="http://schemas.openxmlformats.org/drawingml/2006/main" noGrp="1"/>
+          </p:cNvSpPr>
+          <p:nvPr/>
+        </p:nvSpPr>
+        <p:spPr>
+          <a:xfrm xmlns:a="http://schemas.openxmlformats.org/drawingml/2006/main" flipH="0" flipV="0">
+            <a:off x="5791200" y="4495800"/>
+            <a:ext cx="9525" cy="114300"/>
+          </a:xfrm>
+          <a:prstGeom xmlns:a="http://schemas.openxmlformats.org/drawingml/2006/main" prst="line">
+            <a:avLst/>
+          </a:prstGeom>
+          <a:noFill xmlns:a="http://schemas.openxmlformats.org/drawingml/2006/main"/>
+          <a:ln xmlns:a="http://schemas.openxmlformats.org/drawingml/2006/main" w="13335">
+            <a:solidFill>
+              <a:srgbClr val="26355F"/>
+            </a:solidFill>
+            <a:prstDash val="solid"/>
+          </a:ln>
+        </p:spPr>
+      </p:sp>
+      <p:sp>
+        <p:nvSpPr>
+          <p:cNvPr id="92" name="">
+            <a:extLst xmlns:a="http://schemas.openxmlformats.org/drawingml/2006/main">
+              <a:ext uri="{FF2B5EF4-FFF2-40B4-BE49-F238E27FC236}">
+                <a16:creationId xmlns:a16="http://schemas.microsoft.com/office/drawing/2014/main" id="{BA425858-F94D-43AE-ABA8-E4D9D2BE0635}"/>
+              </a:ext>
+            </a:extLst>
+          </p:cNvPr>
+          <p:cNvSpPr>
+            <a:spLocks xmlns:a="http://schemas.openxmlformats.org/drawingml/2006/main" noGrp="1"/>
+          </p:cNvSpPr>
+          <p:nvPr/>
+        </p:nvSpPr>
+        <p:spPr>
+          <a:xfrm xmlns:a="http://schemas.openxmlformats.org/drawingml/2006/main" flipH="0" flipV="0">
+            <a:off x="8734425" y="4495800"/>
+            <a:ext cx="9525" cy="114300"/>
+          </a:xfrm>
+          <a:prstGeom xmlns:a="http://schemas.openxmlformats.org/drawingml/2006/main" prst="line">
+            <a:avLst/>
+          </a:prstGeom>
+          <a:noFill xmlns:a="http://schemas.openxmlformats.org/drawingml/2006/main"/>
+          <a:ln xmlns:a="http://schemas.openxmlformats.org/drawingml/2006/main" w="13335">
+            <a:solidFill>
+              <a:srgbClr val="26355F"/>
+            </a:solidFill>
+            <a:prstDash val="solid"/>
+          </a:ln>
+        </p:spPr>
+      </p:sp>
+      <p:sp>
+        <p:nvSpPr>
+          <p:cNvPr id="93" name="allocation-capacity-label">
+            <a:extLst xmlns:a="http://schemas.openxmlformats.org/drawingml/2006/main">
+              <a:ext uri="{FF2B5EF4-FFF2-40B4-BE49-F238E27FC236}">
+                <a16:creationId xmlns:a16="http://schemas.microsoft.com/office/drawing/2014/main" id="{AA4F573B-6476-41E3-BCFF-45962665D697}"/>
+              </a:ext>
+            </a:extLst>
+          </p:cNvPr>
+          <p:cNvSpPr>
+            <a:spLocks xmlns:a="http://schemas.openxmlformats.org/drawingml/2006/main" noGrp="1"/>
+          </p:cNvSpPr>
+          <p:nvPr/>
+        </p:nvSpPr>
+        <p:spPr>
+          <a:xfrm xmlns:a="http://schemas.openxmlformats.org/drawingml/2006/main" rot="0">
+            <a:off x="6629400" y="4572000"/>
+            <a:ext cx="1276350" cy="209550"/>
+          </a:xfrm>
+          <a:prstGeom xmlns:a="http://schemas.openxmlformats.org/drawingml/2006/main" prst="rect">
+            <a:avLst/>
+          </a:prstGeom>
+          <a:noFill xmlns:a="http://schemas.openxmlformats.org/drawingml/2006/main"/>
+          <a:ln xmlns:a="http://schemas.openxmlformats.org/drawingml/2006/main" w="0">
+            <a:noFill/>
+            <a:prstDash val="solid"/>
+          </a:ln>
+        </p:spPr>
+        <p:txBody>
+          <a:bodyPr xmlns:a="http://schemas.openxmlformats.org/drawingml/2006/main" wrap="square" lIns="19050" tIns="9525" rIns="19050" bIns="9525" anchor="ctr">
+            <a:normAutofit fontScale="100000"/>
+          </a:bodyPr>
+          <a:lstStyle xmlns:a="http://schemas.openxmlformats.org/drawingml/2006/main"/>
+          <a:p xmlns:a="http://schemas.openxmlformats.org/drawingml/2006/main">
+            <a:pPr algn="ctr">
+              <a:defRPr sz="1050" b="1">
+                <a:solidFill>
+                  <a:srgbClr val="26355F"/>
+                </a:solidFill>
+                <a:latin typeface="Arial"/>
+                <a:ea typeface="Arial"/>
+                <a:cs typeface="Arial"/>
+              </a:defRPr>
+            </a:pPr>
+            <a:r>
+              <a:rPr sz="1050" b="1">
+                <a:solidFill>
+                  <a:srgbClr val="26355F"/>
+                </a:solidFill>
+                <a:latin typeface="Arial"/>
+                <a:ea typeface="Arial"/>
+                <a:cs typeface="Arial"/>
+              </a:rPr>
+              <a:t>Fixed capacity</a:t>
+            </a:r>
+          </a:p>
+        </p:txBody>
+      </p:sp>
+      <p:sp>
+        <p:nvSpPr>
+          <p:cNvPr id="94" name="allocation-note">
+            <a:extLst xmlns:a="http://schemas.openxmlformats.org/drawingml/2006/main">
+              <a:ext uri="{FF2B5EF4-FFF2-40B4-BE49-F238E27FC236}">
+                <a16:creationId xmlns:a16="http://schemas.microsoft.com/office/drawing/2014/main" id="{2F0559D0-A07B-4C7B-A42D-B6B295269E1D}"/>
+              </a:ext>
+            </a:extLst>
+          </p:cNvPr>
+          <p:cNvSpPr>
+            <a:spLocks xmlns:a="http://schemas.openxmlformats.org/drawingml/2006/main" noGrp="1"/>
+          </p:cNvSpPr>
+          <p:nvPr/>
+        </p:nvSpPr>
+        <p:spPr>
+          <a:xfrm xmlns:a="http://schemas.openxmlformats.org/drawingml/2006/main" rot="0">
+            <a:off x="5314950" y="4714875"/>
+            <a:ext cx="3905250" cy="285750"/>
+          </a:xfrm>
+          <a:prstGeom xmlns:a="http://schemas.openxmlformats.org/drawingml/2006/main" prst="rect">
+            <a:avLst/>
+          </a:prstGeom>
+          <a:noFill xmlns:a="http://schemas.openxmlformats.org/drawingml/2006/main"/>
+          <a:ln xmlns:a="http://schemas.openxmlformats.org/drawingml/2006/main" w="0">
+            <a:noFill/>
+            <a:prstDash val="solid"/>
+          </a:ln>
+        </p:spPr>
+        <p:txBody>
+          <a:bodyPr xmlns:a="http://schemas.openxmlformats.org/drawingml/2006/main" wrap="square" lIns="19050" tIns="9525" rIns="19050" bIns="9525" anchor="ctr">
+            <a:normAutofit fontScale="76853"/>
+          </a:bodyPr>
+          <a:lstStyle xmlns:a="http://schemas.openxmlformats.org/drawingml/2006/main"/>
+          <a:p xmlns:a="http://schemas.openxmlformats.org/drawingml/2006/main">
+            <a:pPr algn="ctr">
+              <a:defRPr sz="1200" b="0">
+                <a:solidFill>
+                  <a:srgbClr val="637077"/>
+                </a:solidFill>
+                <a:latin typeface="Arial"/>
+                <a:ea typeface="Arial"/>
+                <a:cs typeface="Arial"/>
+              </a:defRPr>
+            </a:pPr>
+            <a:r>
+              <a:rPr sz="1200" b="0">
+                <a:solidFill>
+                  <a:srgbClr val="637077"/>
+                </a:solidFill>
+                <a:latin typeface="Arial"/>
+                <a:ea typeface="Arial"/>
+                <a:cs typeface="Arial"/>
+              </a:rPr>
+              <a:t>Deduplicate before fill; unused reserve capacity returns to the global order.</a:t>
+            </a:r>
+          </a:p>
+        </p:txBody>
+      </p:sp>
+      <p:sp>
+        <p:nvSpPr>
+          <p:cNvPr id="95" name="output-heading">
+            <a:extLst xmlns:a="http://schemas.openxmlformats.org/drawingml/2006/main">
+              <a:ext uri="{FF2B5EF4-FFF2-40B4-BE49-F238E27FC236}">
+                <a16:creationId xmlns:a16="http://schemas.microsoft.com/office/drawing/2014/main" id="{B7B271C8-828B-4A69-8C75-B93E3F090271}"/>
+              </a:ext>
+            </a:extLst>
+          </p:cNvPr>
+          <p:cNvSpPr>
+            <a:spLocks xmlns:a="http://schemas.openxmlformats.org/drawingml/2006/main" noGrp="1"/>
+          </p:cNvSpPr>
+          <p:nvPr/>
+        </p:nvSpPr>
+        <p:spPr>
+          <a:xfrm xmlns:a="http://schemas.openxmlformats.org/drawingml/2006/main" rot="0">
+            <a:off x="9734550" y="1428750"/>
+            <a:ext cx="1847850" cy="323850"/>
           </a:xfrm>
           <a:prstGeom xmlns:a="http://schemas.openxmlformats.org/drawingml/2006/main" prst="rect">
             <a:avLst/>
@@ -3560,7 +5365,7 @@
             <a:pPr algn="ctr">
               <a:defRPr sz="1725" b="1">
                 <a:solidFill>
-                  <a:srgbClr val="26785F"/>
+                  <a:srgbClr val="765A8D"/>
                 </a:solidFill>
                 <a:latin typeface="Arial"/>
                 <a:ea typeface="Arial"/>
@@ -3570,35 +5375,35 @@
             <a:r>
               <a:rPr sz="1725" b="1">
                 <a:solidFill>
-                  <a:srgbClr val="26785F"/>
+                  <a:srgbClr val="765A8D"/>
                 </a:solidFill>
                 <a:latin typeface="Arial"/>
                 <a:ea typeface="Arial"/>
                 <a:cs typeface="Arial"/>
               </a:rPr>
-              <a:t>Governed allocation</a:t>
+              <a:t>Queue result</a:t>
             </a:r>
           </a:p>
         </p:txBody>
       </p:sp>
       <p:sp>
         <p:nvSpPr>
-          <p:cNvPr id="52" name="allocation-caption">
-            <a:extLst xmlns:a="http://schemas.openxmlformats.org/drawingml/2006/main">
-              <a:ext uri="{FF2B5EF4-FFF2-40B4-BE49-F238E27FC236}">
-                <a16:creationId xmlns:a16="http://schemas.microsoft.com/office/drawing/2014/main" id="{DD12F73A-CD0B-42BE-8454-9A86E73C7D25}"/>
-              </a:ext>
-            </a:extLst>
-          </p:cNvPr>
-          <p:cNvSpPr>
-            <a:spLocks xmlns:a="http://schemas.openxmlformats.org/drawingml/2006/main" noGrp="1"/>
-          </p:cNvSpPr>
-          <p:nvPr/>
-        </p:nvSpPr>
-        <p:spPr>
-          <a:xfrm xmlns:a="http://schemas.openxmlformats.org/drawingml/2006/main" rot="0">
-            <a:off x="5314950" y="1771650"/>
-            <a:ext cx="3905250" cy="266700"/>
+          <p:cNvPr id="96" name="output-caption">
+            <a:extLst xmlns:a="http://schemas.openxmlformats.org/drawingml/2006/main">
+              <a:ext uri="{FF2B5EF4-FFF2-40B4-BE49-F238E27FC236}">
+                <a16:creationId xmlns:a16="http://schemas.microsoft.com/office/drawing/2014/main" id="{8B9F8A9A-E3C5-47EE-9766-E5BAA9138FE3}"/>
+              </a:ext>
+            </a:extLst>
+          </p:cNvPr>
+          <p:cNvSpPr>
+            <a:spLocks xmlns:a="http://schemas.openxmlformats.org/drawingml/2006/main" noGrp="1"/>
+          </p:cNvSpPr>
+          <p:nvPr/>
+        </p:nvSpPr>
+        <p:spPr>
+          <a:xfrm xmlns:a="http://schemas.openxmlformats.org/drawingml/2006/main" rot="0">
+            <a:off x="9734550" y="1771650"/>
+            <a:ext cx="1847850" cy="304800"/>
           </a:xfrm>
           <a:prstGeom xmlns:a="http://schemas.openxmlformats.org/drawingml/2006/main" prst="rect">
             <a:avLst/>
@@ -3611,7 +5416,7 @@
         </p:spPr>
         <p:txBody>
           <a:bodyPr xmlns:a="http://schemas.openxmlformats.org/drawingml/2006/main" wrap="square" lIns="19050" tIns="9525" rIns="19050" bIns="9525" anchor="ctr">
-            <a:normAutofit fontScale="100000"/>
+            <a:normAutofit fontScale="94809"/>
           </a:bodyPr>
           <a:lstStyle xmlns:a="http://schemas.openxmlformats.org/drawingml/2006/main"/>
           <a:p xmlns:a="http://schemas.openxmlformats.org/drawingml/2006/main">
@@ -3634,101 +5439,72 @@
                 <a:ea typeface="Arial"/>
                 <a:cs typeface="Arial"/>
               </a:rPr>
-              <a:t>Apply declared reserves, then fill from the global order</a:t>
+              <a:t>Selected IDs and slot ledger</a:t>
             </a:r>
           </a:p>
         </p:txBody>
       </p:sp>
       <p:sp>
         <p:nvSpPr>
-          <p:cNvPr id="53" name="policy-to-queue-arrow">
-            <a:extLst xmlns:a="http://schemas.openxmlformats.org/drawingml/2006/main">
-              <a:ext uri="{FF2B5EF4-FFF2-40B4-BE49-F238E27FC236}">
-                <a16:creationId xmlns:a16="http://schemas.microsoft.com/office/drawing/2014/main" id="{56E6E831-CCD3-4C01-A061-DAA74CE03934}"/>
-              </a:ext>
-            </a:extLst>
-          </p:cNvPr>
-          <p:cNvSpPr>
-            <a:spLocks xmlns:a="http://schemas.openxmlformats.org/drawingml/2006/main" noGrp="1"/>
-          </p:cNvSpPr>
-          <p:nvPr/>
-        </p:nvSpPr>
-        <p:spPr>
-          <a:xfrm xmlns:a="http://schemas.openxmlformats.org/drawingml/2006/main" rot="0">
-            <a:off x="6000750" y="3429000"/>
-            <a:ext cx="266700" cy="285750"/>
-          </a:xfrm>
-          <a:prstGeom xmlns:a="http://schemas.openxmlformats.org/drawingml/2006/main" prst="downArrow">
+          <p:cNvPr id="97" name="queue-result-ledger">
+            <a:extLst xmlns:a="http://schemas.openxmlformats.org/drawingml/2006/main">
+              <a:ext uri="{FF2B5EF4-FFF2-40B4-BE49-F238E27FC236}">
+                <a16:creationId xmlns:a16="http://schemas.microsoft.com/office/drawing/2014/main" id="{48CD94DA-EEBB-401D-AD23-A28B1EBF7616}"/>
+              </a:ext>
+            </a:extLst>
+          </p:cNvPr>
+          <p:cNvSpPr>
+            <a:spLocks xmlns:a="http://schemas.openxmlformats.org/drawingml/2006/main" noGrp="1"/>
+          </p:cNvSpPr>
+          <p:nvPr/>
+        </p:nvSpPr>
+        <p:spPr>
+          <a:xfrm xmlns:a="http://schemas.openxmlformats.org/drawingml/2006/main" rot="0">
+            <a:off x="9877425" y="2209800"/>
+            <a:ext cx="1562100" cy="1676400"/>
+          </a:xfrm>
+          <a:prstGeom xmlns:a="http://schemas.openxmlformats.org/drawingml/2006/main" prst="rect">
             <a:avLst/>
           </a:prstGeom>
           <a:solidFill xmlns:a="http://schemas.openxmlformats.org/drawingml/2006/main">
-            <a:srgbClr val="C6E4E9"/>
-          </a:solidFill>
-          <a:ln xmlns:a="http://schemas.openxmlformats.org/drawingml/2006/main" w="0">
-            <a:noFill/>
-            <a:prstDash val="solid"/>
-          </a:ln>
-        </p:spPr>
-      </p:sp>
-      <p:sp>
-        <p:nvSpPr>
-          <p:cNvPr id="54" name="global-to-queue-arrow">
-            <a:extLst xmlns:a="http://schemas.openxmlformats.org/drawingml/2006/main">
-              <a:ext uri="{FF2B5EF4-FFF2-40B4-BE49-F238E27FC236}">
-                <a16:creationId xmlns:a16="http://schemas.microsoft.com/office/drawing/2014/main" id="{140F6961-10F5-45DC-B2C5-C322D87A77E8}"/>
-              </a:ext>
-            </a:extLst>
-          </p:cNvPr>
-          <p:cNvSpPr>
-            <a:spLocks xmlns:a="http://schemas.openxmlformats.org/drawingml/2006/main" noGrp="1"/>
-          </p:cNvSpPr>
-          <p:nvPr/>
-        </p:nvSpPr>
-        <p:spPr>
-          <a:xfrm xmlns:a="http://schemas.openxmlformats.org/drawingml/2006/main" rot="0">
-            <a:off x="8039100" y="3067050"/>
-            <a:ext cx="266700" cy="647700"/>
-          </a:xfrm>
-          <a:prstGeom xmlns:a="http://schemas.openxmlformats.org/drawingml/2006/main" prst="downArrow">
+            <a:srgbClr val="FFFFFF"/>
+          </a:solidFill>
+          <a:ln xmlns:a="http://schemas.openxmlformats.org/drawingml/2006/main" w="16193">
+            <a:solidFill>
+              <a:srgbClr val="26355F"/>
+            </a:solidFill>
+            <a:prstDash val="solid"/>
+          </a:ln>
+        </p:spPr>
+      </p:sp>
+      <p:sp>
+        <p:nvSpPr>
+          <p:cNvPr id="98" name="queue-result-header">
+            <a:extLst xmlns:a="http://schemas.openxmlformats.org/drawingml/2006/main">
+              <a:ext uri="{FF2B5EF4-FFF2-40B4-BE49-F238E27FC236}">
+                <a16:creationId xmlns:a16="http://schemas.microsoft.com/office/drawing/2014/main" id="{94625D73-39C8-43C3-AD87-DD0CF76D09B5}"/>
+              </a:ext>
+            </a:extLst>
+          </p:cNvPr>
+          <p:cNvSpPr>
+            <a:spLocks xmlns:a="http://schemas.openxmlformats.org/drawingml/2006/main" noGrp="1"/>
+          </p:cNvSpPr>
+          <p:nvPr/>
+        </p:nvSpPr>
+        <p:spPr>
+          <a:xfrm xmlns:a="http://schemas.openxmlformats.org/drawingml/2006/main" rot="0">
+            <a:off x="9877425" y="2209800"/>
+            <a:ext cx="1562100" cy="361950"/>
+          </a:xfrm>
+          <a:prstGeom xmlns:a="http://schemas.openxmlformats.org/drawingml/2006/main" prst="rect">
             <a:avLst/>
           </a:prstGeom>
           <a:solidFill xmlns:a="http://schemas.openxmlformats.org/drawingml/2006/main">
-            <a:srgbClr val="C6E4E9"/>
-          </a:solidFill>
-          <a:ln xmlns:a="http://schemas.openxmlformats.org/drawingml/2006/main" w="0">
-            <a:noFill/>
-            <a:prstDash val="solid"/>
-          </a:ln>
-        </p:spPr>
-      </p:sp>
-      <p:sp>
-        <p:nvSpPr>
-          <p:cNvPr id="55" name="allocation-policy">
-            <a:extLst xmlns:a="http://schemas.openxmlformats.org/drawingml/2006/main">
-              <a:ext uri="{FF2B5EF4-FFF2-40B4-BE49-F238E27FC236}">
-                <a16:creationId xmlns:a16="http://schemas.microsoft.com/office/drawing/2014/main" id="{528F2112-FAE7-4319-81F8-676157732857}"/>
-              </a:ext>
-            </a:extLst>
-          </p:cNvPr>
-          <p:cNvSpPr>
-            <a:spLocks xmlns:a="http://schemas.openxmlformats.org/drawingml/2006/main" noGrp="1"/>
-          </p:cNvSpPr>
-          <p:nvPr/>
-        </p:nvSpPr>
-        <p:spPr>
-          <a:xfrm xmlns:a="http://schemas.openxmlformats.org/drawingml/2006/main" rot="0">
-            <a:off x="5314950" y="2190750"/>
-            <a:ext cx="1676400" cy="1200150"/>
-          </a:xfrm>
-          <a:prstGeom xmlns:a="http://schemas.openxmlformats.org/drawingml/2006/main" prst="rect">
-            <a:avLst/>
-          </a:prstGeom>
-          <a:solidFill xmlns:a="http://schemas.openxmlformats.org/drawingml/2006/main">
-            <a:srgbClr val="E6F1EB"/>
-          </a:solidFill>
-          <a:ln xmlns:a="http://schemas.openxmlformats.org/drawingml/2006/main" w="14288">
+            <a:srgbClr val="EEEAF3"/>
+          </a:solidFill>
+          <a:ln xmlns:a="http://schemas.openxmlformats.org/drawingml/2006/main" w="11430">
             <a:solidFill>
-              <a:srgbClr val="26785F"/>
+              <a:srgbClr val="26355F"/>
             </a:solidFill>
             <a:prstDash val="solid"/>
           </a:ln>
@@ -3736,22 +5512,22 @@
       </p:sp>
       <p:sp>
         <p:nvSpPr>
-          <p:cNvPr id="56" name="allocation-policy-name">
-            <a:extLst xmlns:a="http://schemas.openxmlformats.org/drawingml/2006/main">
-              <a:ext uri="{FF2B5EF4-FFF2-40B4-BE49-F238E27FC236}">
-                <a16:creationId xmlns:a16="http://schemas.microsoft.com/office/drawing/2014/main" id="{B4B02353-7DE8-499A-8B67-AC732FB0C142}"/>
-              </a:ext>
-            </a:extLst>
-          </p:cNvPr>
-          <p:cNvSpPr>
-            <a:spLocks xmlns:a="http://schemas.openxmlformats.org/drawingml/2006/main" noGrp="1"/>
-          </p:cNvSpPr>
-          <p:nvPr/>
-        </p:nvSpPr>
-        <p:spPr>
-          <a:xfrm xmlns:a="http://schemas.openxmlformats.org/drawingml/2006/main" rot="0">
-            <a:off x="5429250" y="2286000"/>
-            <a:ext cx="1428750" cy="228600"/>
+          <p:cNvPr id="99" name="queue-result-title">
+            <a:extLst xmlns:a="http://schemas.openxmlformats.org/drawingml/2006/main">
+              <a:ext uri="{FF2B5EF4-FFF2-40B4-BE49-F238E27FC236}">
+                <a16:creationId xmlns:a16="http://schemas.microsoft.com/office/drawing/2014/main" id="{7A9163F3-6D7F-4F52-A672-A6B14795E0F4}"/>
+              </a:ext>
+            </a:extLst>
+          </p:cNvPr>
+          <p:cNvSpPr>
+            <a:spLocks xmlns:a="http://schemas.openxmlformats.org/drawingml/2006/main" noGrp="1"/>
+          </p:cNvSpPr>
+          <p:nvPr/>
+        </p:nvSpPr>
+        <p:spPr>
+          <a:xfrm xmlns:a="http://schemas.openxmlformats.org/drawingml/2006/main" rot="0">
+            <a:off x="9991725" y="2247900"/>
+            <a:ext cx="1333500" cy="276225"/>
           </a:xfrm>
           <a:prstGeom xmlns:a="http://schemas.openxmlformats.org/drawingml/2006/main" prst="rect">
             <a:avLst/>
@@ -3771,7 +5547,7 @@
             <a:pPr algn="l">
               <a:defRPr sz="1200" b="1">
                 <a:solidFill>
-                  <a:srgbClr val="26785F"/>
+                  <a:srgbClr val="26355F"/>
                 </a:solidFill>
                 <a:latin typeface="Arial"/>
                 <a:ea typeface="Arial"/>
@@ -3781,35 +5557,35 @@
             <a:r>
               <a:rPr sz="1200" b="1">
                 <a:solidFill>
-                  <a:srgbClr val="26785F"/>
+                  <a:srgbClr val="26355F"/>
                 </a:solidFill>
                 <a:latin typeface="Arial"/>
                 <a:ea typeface="Arial"/>
                 <a:cs typeface="Arial"/>
               </a:rPr>
-              <a:t>ReservePolicy</a:t>
+              <a:t>Queue result</a:t>
             </a:r>
           </a:p>
         </p:txBody>
       </p:sp>
       <p:sp>
         <p:nvSpPr>
-          <p:cNvPr id="57" name="allocation-policy-profile">
-            <a:extLst xmlns:a="http://schemas.openxmlformats.org/drawingml/2006/main">
-              <a:ext uri="{FF2B5EF4-FFF2-40B4-BE49-F238E27FC236}">
-                <a16:creationId xmlns:a16="http://schemas.microsoft.com/office/drawing/2014/main" id="{F4CD8553-2FAE-465E-8FE4-08AE81AA637A}"/>
-              </a:ext>
-            </a:extLst>
-          </p:cNvPr>
-          <p:cNvSpPr>
-            <a:spLocks xmlns:a="http://schemas.openxmlformats.org/drawingml/2006/main" noGrp="1"/>
-          </p:cNvSpPr>
-          <p:nvPr/>
-        </p:nvSpPr>
-        <p:spPr>
-          <a:xfrm xmlns:a="http://schemas.openxmlformats.org/drawingml/2006/main" rot="0">
-            <a:off x="5486400" y="2619375"/>
-            <a:ext cx="819150" cy="209550"/>
+          <p:cNvPr id="100" name="selected-ids-label">
+            <a:extLst xmlns:a="http://schemas.openxmlformats.org/drawingml/2006/main">
+              <a:ext uri="{FF2B5EF4-FFF2-40B4-BE49-F238E27FC236}">
+                <a16:creationId xmlns:a16="http://schemas.microsoft.com/office/drawing/2014/main" id="{C162A55E-73AE-458A-ADD4-1EFD2084AAAF}"/>
+              </a:ext>
+            </a:extLst>
+          </p:cNvPr>
+          <p:cNvSpPr>
+            <a:spLocks xmlns:a="http://schemas.openxmlformats.org/drawingml/2006/main" noGrp="1"/>
+          </p:cNvSpPr>
+          <p:nvPr/>
+        </p:nvSpPr>
+        <p:spPr>
+          <a:xfrm xmlns:a="http://schemas.openxmlformats.org/drawingml/2006/main" rot="0">
+            <a:off x="9991725" y="2667000"/>
+            <a:ext cx="1333500" cy="228600"/>
           </a:xfrm>
           <a:prstGeom xmlns:a="http://schemas.openxmlformats.org/drawingml/2006/main" prst="rect">
             <a:avLst/>
@@ -3827,7 +5603,7 @@
           <a:lstStyle xmlns:a="http://schemas.openxmlformats.org/drawingml/2006/main"/>
           <a:p xmlns:a="http://schemas.openxmlformats.org/drawingml/2006/main">
             <a:pPr algn="l">
-              <a:defRPr sz="1200" b="0">
+              <a:defRPr sz="1200" b="1">
                 <a:solidFill>
                   <a:srgbClr val="172027"/>
                 </a:solidFill>
@@ -3837,7 +5613,7 @@
               </a:defRPr>
             </a:pPr>
             <a:r>
-              <a:rPr sz="1200" b="0">
+              <a:rPr sz="1200" b="1">
                 <a:solidFill>
                   <a:srgbClr val="172027"/>
                 </a:solidFill>
@@ -3845,29 +5621,306 @@
                 <a:ea typeface="Arial"/>
                 <a:cs typeface="Arial"/>
               </a:rPr>
-              <a:t>profile</a:t>
+              <a:t>Selected IDs</a:t>
             </a:r>
           </a:p>
         </p:txBody>
       </p:sp>
       <p:sp>
         <p:nvSpPr>
-          <p:cNvPr id="58" name="allocation-policy-fraction">
-            <a:extLst xmlns:a="http://schemas.openxmlformats.org/drawingml/2006/main">
-              <a:ext uri="{FF2B5EF4-FFF2-40B4-BE49-F238E27FC236}">
-                <a16:creationId xmlns:a16="http://schemas.microsoft.com/office/drawing/2014/main" id="{03C43339-B5BC-43C9-8A60-4069D70944EB}"/>
-              </a:ext>
-            </a:extLst>
-          </p:cNvPr>
-          <p:cNvSpPr>
-            <a:spLocks xmlns:a="http://schemas.openxmlformats.org/drawingml/2006/main" noGrp="1"/>
-          </p:cNvSpPr>
-          <p:nvPr/>
-        </p:nvSpPr>
-        <p:spPr>
-          <a:xfrm xmlns:a="http://schemas.openxmlformats.org/drawingml/2006/main" rot="0">
-            <a:off x="5486400" y="2895600"/>
-            <a:ext cx="1390650" cy="209550"/>
+          <p:cNvPr id="101" name="result-token-1">
+            <a:extLst xmlns:a="http://schemas.openxmlformats.org/drawingml/2006/main">
+              <a:ext uri="{FF2B5EF4-FFF2-40B4-BE49-F238E27FC236}">
+                <a16:creationId xmlns:a16="http://schemas.microsoft.com/office/drawing/2014/main" id="{CFFC4FF9-AD17-4D9F-81A8-4DF6A74745C1}"/>
+              </a:ext>
+            </a:extLst>
+          </p:cNvPr>
+          <p:cNvSpPr>
+            <a:spLocks xmlns:a="http://schemas.openxmlformats.org/drawingml/2006/main" noGrp="1"/>
+          </p:cNvSpPr>
+          <p:nvPr/>
+        </p:nvSpPr>
+        <p:spPr>
+          <a:xfrm xmlns:a="http://schemas.openxmlformats.org/drawingml/2006/main" rot="0">
+            <a:off x="10182225" y="2971800"/>
+            <a:ext cx="152400" cy="152400"/>
+          </a:xfrm>
+          <a:prstGeom xmlns:a="http://schemas.openxmlformats.org/drawingml/2006/main" prst="ellipse">
+            <a:avLst/>
+          </a:prstGeom>
+          <a:solidFill xmlns:a="http://schemas.openxmlformats.org/drawingml/2006/main">
+            <a:srgbClr val="257FA0"/>
+          </a:solidFill>
+          <a:ln xmlns:a="http://schemas.openxmlformats.org/drawingml/2006/main" w="7620">
+            <a:solidFill>
+              <a:srgbClr val="26355F"/>
+            </a:solidFill>
+            <a:prstDash val="solid"/>
+          </a:ln>
+        </p:spPr>
+      </p:sp>
+      <p:sp>
+        <p:nvSpPr>
+          <p:cNvPr id="102" name="result-token-2">
+            <a:extLst xmlns:a="http://schemas.openxmlformats.org/drawingml/2006/main">
+              <a:ext uri="{FF2B5EF4-FFF2-40B4-BE49-F238E27FC236}">
+                <a16:creationId xmlns:a16="http://schemas.microsoft.com/office/drawing/2014/main" id="{EBFADC5C-116D-4EF6-82FD-83372390D787}"/>
+              </a:ext>
+            </a:extLst>
+          </p:cNvPr>
+          <p:cNvSpPr>
+            <a:spLocks xmlns:a="http://schemas.openxmlformats.org/drawingml/2006/main" noGrp="1"/>
+          </p:cNvSpPr>
+          <p:nvPr/>
+        </p:nvSpPr>
+        <p:spPr>
+          <a:xfrm xmlns:a="http://schemas.openxmlformats.org/drawingml/2006/main" rot="0">
+            <a:off x="10448925" y="2971800"/>
+            <a:ext cx="152400" cy="152400"/>
+          </a:xfrm>
+          <a:prstGeom xmlns:a="http://schemas.openxmlformats.org/drawingml/2006/main" prst="diamond">
+            <a:avLst/>
+          </a:prstGeom>
+          <a:solidFill xmlns:a="http://schemas.openxmlformats.org/drawingml/2006/main">
+            <a:srgbClr val="765A8D"/>
+          </a:solidFill>
+          <a:ln xmlns:a="http://schemas.openxmlformats.org/drawingml/2006/main" w="7620">
+            <a:solidFill>
+              <a:srgbClr val="26355F"/>
+            </a:solidFill>
+            <a:prstDash val="solid"/>
+          </a:ln>
+        </p:spPr>
+      </p:sp>
+      <p:sp>
+        <p:nvSpPr>
+          <p:cNvPr id="103" name="result-token-3">
+            <a:extLst xmlns:a="http://schemas.openxmlformats.org/drawingml/2006/main">
+              <a:ext uri="{FF2B5EF4-FFF2-40B4-BE49-F238E27FC236}">
+                <a16:creationId xmlns:a16="http://schemas.microsoft.com/office/drawing/2014/main" id="{5F8050A4-0CEE-4982-97B8-6E782F55E781}"/>
+              </a:ext>
+            </a:extLst>
+          </p:cNvPr>
+          <p:cNvSpPr>
+            <a:spLocks xmlns:a="http://schemas.openxmlformats.org/drawingml/2006/main" noGrp="1"/>
+          </p:cNvSpPr>
+          <p:nvPr/>
+        </p:nvSpPr>
+        <p:spPr>
+          <a:xfrm xmlns:a="http://schemas.openxmlformats.org/drawingml/2006/main" rot="0">
+            <a:off x="10715625" y="2971800"/>
+            <a:ext cx="152400" cy="152400"/>
+          </a:xfrm>
+          <a:prstGeom xmlns:a="http://schemas.openxmlformats.org/drawingml/2006/main" prst="rect">
+            <a:avLst/>
+          </a:prstGeom>
+          <a:solidFill xmlns:a="http://schemas.openxmlformats.org/drawingml/2006/main">
+            <a:srgbClr val="26355F"/>
+          </a:solidFill>
+          <a:ln xmlns:a="http://schemas.openxmlformats.org/drawingml/2006/main" w="0">
+            <a:noFill/>
+            <a:prstDash val="solid"/>
+          </a:ln>
+        </p:spPr>
+      </p:sp>
+      <p:sp>
+        <p:nvSpPr>
+          <p:cNvPr id="104" name="result-token-4">
+            <a:extLst xmlns:a="http://schemas.openxmlformats.org/drawingml/2006/main">
+              <a:ext uri="{FF2B5EF4-FFF2-40B4-BE49-F238E27FC236}">
+                <a16:creationId xmlns:a16="http://schemas.microsoft.com/office/drawing/2014/main" id="{35498B7B-75E8-44CD-BDF4-8C941AF6D368}"/>
+              </a:ext>
+            </a:extLst>
+          </p:cNvPr>
+          <p:cNvSpPr>
+            <a:spLocks xmlns:a="http://schemas.openxmlformats.org/drawingml/2006/main" noGrp="1"/>
+          </p:cNvSpPr>
+          <p:nvPr/>
+        </p:nvSpPr>
+        <p:spPr>
+          <a:xfrm xmlns:a="http://schemas.openxmlformats.org/drawingml/2006/main" rot="0">
+            <a:off x="10982325" y="2971800"/>
+            <a:ext cx="152400" cy="152400"/>
+          </a:xfrm>
+          <a:prstGeom xmlns:a="http://schemas.openxmlformats.org/drawingml/2006/main" prst="ellipse">
+            <a:avLst/>
+          </a:prstGeom>
+          <a:solidFill xmlns:a="http://schemas.openxmlformats.org/drawingml/2006/main">
+            <a:srgbClr val="257FA0"/>
+          </a:solidFill>
+          <a:ln xmlns:a="http://schemas.openxmlformats.org/drawingml/2006/main" w="7620">
+            <a:solidFill>
+              <a:srgbClr val="26355F"/>
+            </a:solidFill>
+            <a:prstDash val="solid"/>
+          </a:ln>
+        </p:spPr>
+      </p:sp>
+      <p:sp>
+        <p:nvSpPr>
+          <p:cNvPr id="105" name="result-divider">
+            <a:extLst xmlns:a="http://schemas.openxmlformats.org/drawingml/2006/main">
+              <a:ext uri="{FF2B5EF4-FFF2-40B4-BE49-F238E27FC236}">
+                <a16:creationId xmlns:a16="http://schemas.microsoft.com/office/drawing/2014/main" id="{88B500E1-F012-4958-9364-9377CFC3EC34}"/>
+              </a:ext>
+            </a:extLst>
+          </p:cNvPr>
+          <p:cNvSpPr>
+            <a:spLocks xmlns:a="http://schemas.openxmlformats.org/drawingml/2006/main" noGrp="1"/>
+          </p:cNvSpPr>
+          <p:nvPr/>
+        </p:nvSpPr>
+        <p:spPr>
+          <a:xfrm xmlns:a="http://schemas.openxmlformats.org/drawingml/2006/main" flipH="0" flipV="0">
+            <a:off x="9991725" y="3267075"/>
+            <a:ext cx="1333500" cy="9525"/>
+          </a:xfrm>
+          <a:prstGeom xmlns:a="http://schemas.openxmlformats.org/drawingml/2006/main" prst="line">
+            <a:avLst/>
+          </a:prstGeom>
+          <a:noFill xmlns:a="http://schemas.openxmlformats.org/drawingml/2006/main"/>
+          <a:ln xmlns:a="http://schemas.openxmlformats.org/drawingml/2006/main" w="9525">
+            <a:solidFill>
+              <a:srgbClr val="CAD3D4"/>
+            </a:solidFill>
+            <a:prstDash val="solid"/>
+          </a:ln>
+        </p:spPr>
+      </p:sp>
+      <p:sp>
+        <p:nvSpPr>
+          <p:cNvPr id="106" name="ledger-slot-header">
+            <a:extLst xmlns:a="http://schemas.openxmlformats.org/drawingml/2006/main">
+              <a:ext uri="{FF2B5EF4-FFF2-40B4-BE49-F238E27FC236}">
+                <a16:creationId xmlns:a16="http://schemas.microsoft.com/office/drawing/2014/main" id="{F3AA411A-C137-4C1B-8CD2-0D8E5F6EF5E0}"/>
+              </a:ext>
+            </a:extLst>
+          </p:cNvPr>
+          <p:cNvSpPr>
+            <a:spLocks xmlns:a="http://schemas.openxmlformats.org/drawingml/2006/main" noGrp="1"/>
+          </p:cNvSpPr>
+          <p:nvPr/>
+        </p:nvSpPr>
+        <p:spPr>
+          <a:xfrm xmlns:a="http://schemas.openxmlformats.org/drawingml/2006/main" rot="0">
+            <a:off x="10010775" y="3343275"/>
+            <a:ext cx="381000" cy="209550"/>
+          </a:xfrm>
+          <a:prstGeom xmlns:a="http://schemas.openxmlformats.org/drawingml/2006/main" prst="rect">
+            <a:avLst/>
+          </a:prstGeom>
+          <a:noFill xmlns:a="http://schemas.openxmlformats.org/drawingml/2006/main"/>
+          <a:ln xmlns:a="http://schemas.openxmlformats.org/drawingml/2006/main" w="0">
+            <a:noFill/>
+            <a:prstDash val="solid"/>
+          </a:ln>
+        </p:spPr>
+        <p:txBody>
+          <a:bodyPr xmlns:a="http://schemas.openxmlformats.org/drawingml/2006/main" wrap="square" lIns="19050" tIns="9525" rIns="19050" bIns="9525" anchor="ctr">
+            <a:normAutofit fontScale="100000"/>
+          </a:bodyPr>
+          <a:lstStyle xmlns:a="http://schemas.openxmlformats.org/drawingml/2006/main"/>
+          <a:p xmlns:a="http://schemas.openxmlformats.org/drawingml/2006/main">
+            <a:pPr algn="l">
+              <a:defRPr sz="1050" b="1">
+                <a:solidFill>
+                  <a:srgbClr val="637077"/>
+                </a:solidFill>
+                <a:latin typeface="Arial"/>
+                <a:ea typeface="Arial"/>
+                <a:cs typeface="Arial"/>
+              </a:defRPr>
+            </a:pPr>
+            <a:r>
+              <a:rPr sz="1050" b="1">
+                <a:solidFill>
+                  <a:srgbClr val="637077"/>
+                </a:solidFill>
+                <a:latin typeface="Arial"/>
+                <a:ea typeface="Arial"/>
+                <a:cs typeface="Arial"/>
+              </a:rPr>
+              <a:t>Slot</a:t>
+            </a:r>
+          </a:p>
+        </p:txBody>
+      </p:sp>
+      <p:sp>
+        <p:nvSpPr>
+          <p:cNvPr id="107" name="ledger-source-header">
+            <a:extLst xmlns:a="http://schemas.openxmlformats.org/drawingml/2006/main">
+              <a:ext uri="{FF2B5EF4-FFF2-40B4-BE49-F238E27FC236}">
+                <a16:creationId xmlns:a16="http://schemas.microsoft.com/office/drawing/2014/main" id="{CA8832DE-2458-4A2C-A635-90CE37A24999}"/>
+              </a:ext>
+            </a:extLst>
+          </p:cNvPr>
+          <p:cNvSpPr>
+            <a:spLocks xmlns:a="http://schemas.openxmlformats.org/drawingml/2006/main" noGrp="1"/>
+          </p:cNvSpPr>
+          <p:nvPr/>
+        </p:nvSpPr>
+        <p:spPr>
+          <a:xfrm xmlns:a="http://schemas.openxmlformats.org/drawingml/2006/main" rot="0">
+            <a:off x="10582275" y="3343275"/>
+            <a:ext cx="742950" cy="209550"/>
+          </a:xfrm>
+          <a:prstGeom xmlns:a="http://schemas.openxmlformats.org/drawingml/2006/main" prst="rect">
+            <a:avLst/>
+          </a:prstGeom>
+          <a:noFill xmlns:a="http://schemas.openxmlformats.org/drawingml/2006/main"/>
+          <a:ln xmlns:a="http://schemas.openxmlformats.org/drawingml/2006/main" w="0">
+            <a:noFill/>
+            <a:prstDash val="solid"/>
+          </a:ln>
+        </p:spPr>
+        <p:txBody>
+          <a:bodyPr xmlns:a="http://schemas.openxmlformats.org/drawingml/2006/main" wrap="square" lIns="19050" tIns="9525" rIns="19050" bIns="9525" anchor="ctr">
+            <a:normAutofit fontScale="100000"/>
+          </a:bodyPr>
+          <a:lstStyle xmlns:a="http://schemas.openxmlformats.org/drawingml/2006/main"/>
+          <a:p xmlns:a="http://schemas.openxmlformats.org/drawingml/2006/main">
+            <a:pPr algn="l">
+              <a:defRPr sz="1050" b="1">
+                <a:solidFill>
+                  <a:srgbClr val="637077"/>
+                </a:solidFill>
+                <a:latin typeface="Arial"/>
+                <a:ea typeface="Arial"/>
+                <a:cs typeface="Arial"/>
+              </a:defRPr>
+            </a:pPr>
+            <a:r>
+              <a:rPr sz="1050" b="1">
+                <a:solidFill>
+                  <a:srgbClr val="637077"/>
+                </a:solidFill>
+                <a:latin typeface="Arial"/>
+                <a:ea typeface="Arial"/>
+                <a:cs typeface="Arial"/>
+              </a:rPr>
+              <a:t>Source</a:t>
+            </a:r>
+          </a:p>
+        </p:txBody>
+      </p:sp>
+      <p:sp>
+        <p:nvSpPr>
+          <p:cNvPr id="108" name="ledger-slot-1">
+            <a:extLst xmlns:a="http://schemas.openxmlformats.org/drawingml/2006/main">
+              <a:ext uri="{FF2B5EF4-FFF2-40B4-BE49-F238E27FC236}">
+                <a16:creationId xmlns:a16="http://schemas.microsoft.com/office/drawing/2014/main" id="{6D81C5C6-D617-40C7-9F7A-8F4BADA4F878}"/>
+              </a:ext>
+            </a:extLst>
+          </p:cNvPr>
+          <p:cNvSpPr>
+            <a:spLocks xmlns:a="http://schemas.openxmlformats.org/drawingml/2006/main" noGrp="1"/>
+          </p:cNvSpPr>
+          <p:nvPr/>
+        </p:nvSpPr>
+        <p:spPr>
+          <a:xfrm xmlns:a="http://schemas.openxmlformats.org/drawingml/2006/main" rot="0">
+            <a:off x="10010775" y="3600450"/>
+            <a:ext cx="381000" cy="209550"/>
           </a:xfrm>
           <a:prstGeom xmlns:a="http://schemas.openxmlformats.org/drawingml/2006/main" prst="rect">
             <a:avLst/>
@@ -3903,95 +5956,29 @@
                 <a:ea typeface="Arial"/>
                 <a:cs typeface="Arial"/>
               </a:rPr>
-              <a:t>fraction = 0.10</a:t>
+              <a:t>01</a:t>
             </a:r>
           </a:p>
         </p:txBody>
       </p:sp>
       <p:sp>
         <p:nvSpPr>
-          <p:cNvPr id="59" name="allocation-policy-token-1">
-            <a:extLst xmlns:a="http://schemas.openxmlformats.org/drawingml/2006/main">
-              <a:ext uri="{FF2B5EF4-FFF2-40B4-BE49-F238E27FC236}">
-                <a16:creationId xmlns:a16="http://schemas.microsoft.com/office/drawing/2014/main" id="{F2D67177-18B4-45C8-AA67-D3D4F546D336}"/>
-              </a:ext>
-            </a:extLst>
-          </p:cNvPr>
-          <p:cNvSpPr>
-            <a:spLocks xmlns:a="http://schemas.openxmlformats.org/drawingml/2006/main" noGrp="1"/>
-          </p:cNvSpPr>
-          <p:nvPr/>
-        </p:nvSpPr>
-        <p:spPr>
-          <a:xfrm xmlns:a="http://schemas.openxmlformats.org/drawingml/2006/main" rot="0">
-            <a:off x="6438900" y="2600325"/>
-            <a:ext cx="171450" cy="171450"/>
-          </a:xfrm>
-          <a:prstGeom xmlns:a="http://schemas.openxmlformats.org/drawingml/2006/main" prst="ellipse">
-            <a:avLst/>
-          </a:prstGeom>
-          <a:solidFill xmlns:a="http://schemas.openxmlformats.org/drawingml/2006/main">
-            <a:srgbClr val="257FA0"/>
-          </a:solidFill>
-          <a:ln xmlns:a="http://schemas.openxmlformats.org/drawingml/2006/main" w="7620">
-            <a:solidFill>
-              <a:srgbClr val="26355F"/>
-            </a:solidFill>
-            <a:prstDash val="solid"/>
-          </a:ln>
-        </p:spPr>
-      </p:sp>
-      <p:sp>
-        <p:nvSpPr>
-          <p:cNvPr id="60" name="allocation-policy-token-2">
-            <a:extLst xmlns:a="http://schemas.openxmlformats.org/drawingml/2006/main">
-              <a:ext uri="{FF2B5EF4-FFF2-40B4-BE49-F238E27FC236}">
-                <a16:creationId xmlns:a16="http://schemas.microsoft.com/office/drawing/2014/main" id="{3649651B-F1DD-4067-BA21-06A11F80F4B5}"/>
-              </a:ext>
-            </a:extLst>
-          </p:cNvPr>
-          <p:cNvSpPr>
-            <a:spLocks xmlns:a="http://schemas.openxmlformats.org/drawingml/2006/main" noGrp="1"/>
-          </p:cNvSpPr>
-          <p:nvPr/>
-        </p:nvSpPr>
-        <p:spPr>
-          <a:xfrm xmlns:a="http://schemas.openxmlformats.org/drawingml/2006/main" rot="0">
-            <a:off x="6686550" y="2600325"/>
-            <a:ext cx="171450" cy="171450"/>
-          </a:xfrm>
-          <a:prstGeom xmlns:a="http://schemas.openxmlformats.org/drawingml/2006/main" prst="diamond">
-            <a:avLst/>
-          </a:prstGeom>
-          <a:solidFill xmlns:a="http://schemas.openxmlformats.org/drawingml/2006/main">
-            <a:srgbClr val="765A8D"/>
-          </a:solidFill>
-          <a:ln xmlns:a="http://schemas.openxmlformats.org/drawingml/2006/main" w="7620">
-            <a:solidFill>
-              <a:srgbClr val="26355F"/>
-            </a:solidFill>
-            <a:prstDash val="solid"/>
-          </a:ln>
-        </p:spPr>
-      </p:sp>
-      <p:sp>
-        <p:nvSpPr>
-          <p:cNvPr id="61" name="allocation-policy-order">
-            <a:extLst xmlns:a="http://schemas.openxmlformats.org/drawingml/2006/main">
-              <a:ext uri="{FF2B5EF4-FFF2-40B4-BE49-F238E27FC236}">
-                <a16:creationId xmlns:a16="http://schemas.microsoft.com/office/drawing/2014/main" id="{9548EA21-BE32-48AC-9196-3612C77A7857}"/>
-              </a:ext>
-            </a:extLst>
-          </p:cNvPr>
-          <p:cNvSpPr>
-            <a:spLocks xmlns:a="http://schemas.openxmlformats.org/drawingml/2006/main" noGrp="1"/>
-          </p:cNvSpPr>
-          <p:nvPr/>
-        </p:nvSpPr>
-        <p:spPr>
-          <a:xfrm xmlns:a="http://schemas.openxmlformats.org/drawingml/2006/main" rot="0">
-            <a:off x="5486400" y="3133725"/>
-            <a:ext cx="1314450" cy="190500"/>
+          <p:cNvPr id="109" name="ledger-source-1">
+            <a:extLst xmlns:a="http://schemas.openxmlformats.org/drawingml/2006/main">
+              <a:ext uri="{FF2B5EF4-FFF2-40B4-BE49-F238E27FC236}">
+                <a16:creationId xmlns:a16="http://schemas.microsoft.com/office/drawing/2014/main" id="{624E6773-177E-4052-83E4-8D47990332B4}"/>
+              </a:ext>
+            </a:extLst>
+          </p:cNvPr>
+          <p:cNvSpPr>
+            <a:spLocks xmlns:a="http://schemas.openxmlformats.org/drawingml/2006/main" noGrp="1"/>
+          </p:cNvSpPr>
+          <p:nvPr/>
+        </p:nvSpPr>
+        <p:spPr>
+          <a:xfrm xmlns:a="http://schemas.openxmlformats.org/drawingml/2006/main" rot="0">
+            <a:off x="10582275" y="3600450"/>
+            <a:ext cx="742950" cy="209550"/>
           </a:xfrm>
           <a:prstGeom xmlns:a="http://schemas.openxmlformats.org/drawingml/2006/main" prst="rect">
             <a:avLst/>
@@ -4009,7 +5996,7 @@
           <a:lstStyle xmlns:a="http://schemas.openxmlformats.org/drawingml/2006/main"/>
           <a:p xmlns:a="http://schemas.openxmlformats.org/drawingml/2006/main">
             <a:pPr algn="l">
-              <a:defRPr sz="1050" b="1">
+              <a:defRPr sz="1125" b="1">
                 <a:solidFill>
                   <a:srgbClr val="26785F"/>
                 </a:solidFill>
@@ -4019,7 +6006,7 @@
               </a:defRPr>
             </a:pPr>
             <a:r>
-              <a:rPr sz="1050" b="1">
+              <a:rPr sz="1125" b="1">
                 <a:solidFill>
                   <a:srgbClr val="26785F"/>
                 </a:solidFill>
@@ -4027,29 +6014,60 @@
                 <a:ea typeface="Arial"/>
                 <a:cs typeface="Arial"/>
               </a:rPr>
-              <a:t>declared order</a:t>
+              <a:t>reserve</a:t>
             </a:r>
           </a:p>
         </p:txBody>
       </p:sp>
       <p:sp>
         <p:nvSpPr>
-          <p:cNvPr id="62" name="allocation-global-label">
-            <a:extLst xmlns:a="http://schemas.openxmlformats.org/drawingml/2006/main">
-              <a:ext uri="{FF2B5EF4-FFF2-40B4-BE49-F238E27FC236}">
-                <a16:creationId xmlns:a16="http://schemas.microsoft.com/office/drawing/2014/main" id="{3088BBD4-BA62-47AA-A6F0-5CDCE48ADCD1}"/>
-              </a:ext>
-            </a:extLst>
-          </p:cNvPr>
-          <p:cNvSpPr>
-            <a:spLocks xmlns:a="http://schemas.openxmlformats.org/drawingml/2006/main" noGrp="1"/>
-          </p:cNvSpPr>
-          <p:nvPr/>
-        </p:nvSpPr>
-        <p:spPr>
-          <a:xfrm xmlns:a="http://schemas.openxmlformats.org/drawingml/2006/main" rot="0">
-            <a:off x="7391400" y="2219325"/>
-            <a:ext cx="1257300" cy="228600"/>
+          <p:cNvPr id="110" name="contract-divider">
+            <a:extLst xmlns:a="http://schemas.openxmlformats.org/drawingml/2006/main">
+              <a:ext uri="{FF2B5EF4-FFF2-40B4-BE49-F238E27FC236}">
+                <a16:creationId xmlns:a16="http://schemas.microsoft.com/office/drawing/2014/main" id="{62E234BD-C8CB-476E-A1DA-EBDB44E27306}"/>
+              </a:ext>
+            </a:extLst>
+          </p:cNvPr>
+          <p:cNvSpPr>
+            <a:spLocks xmlns:a="http://schemas.openxmlformats.org/drawingml/2006/main" noGrp="1"/>
+          </p:cNvSpPr>
+          <p:nvPr/>
+        </p:nvSpPr>
+        <p:spPr>
+          <a:xfrm xmlns:a="http://schemas.openxmlformats.org/drawingml/2006/main" flipH="0" flipV="0">
+            <a:off x="533400" y="5162550"/>
+            <a:ext cx="11125200" cy="9525"/>
+          </a:xfrm>
+          <a:prstGeom xmlns:a="http://schemas.openxmlformats.org/drawingml/2006/main" prst="line">
+            <a:avLst/>
+          </a:prstGeom>
+          <a:noFill xmlns:a="http://schemas.openxmlformats.org/drawingml/2006/main"/>
+          <a:ln xmlns:a="http://schemas.openxmlformats.org/drawingml/2006/main" w="12383">
+            <a:solidFill>
+              <a:srgbClr val="CAD3D4"/>
+            </a:solidFill>
+            <a:prstDash val="solid"/>
+          </a:ln>
+        </p:spPr>
+      </p:sp>
+      <p:sp>
+        <p:nvSpPr>
+          <p:cNvPr id="111" name="contract-heading">
+            <a:extLst xmlns:a="http://schemas.openxmlformats.org/drawingml/2006/main">
+              <a:ext uri="{FF2B5EF4-FFF2-40B4-BE49-F238E27FC236}">
+                <a16:creationId xmlns:a16="http://schemas.microsoft.com/office/drawing/2014/main" id="{477E5434-E550-4B19-8997-16DE4136ADBC}"/>
+              </a:ext>
+            </a:extLst>
+          </p:cNvPr>
+          <p:cNvSpPr>
+            <a:spLocks xmlns:a="http://schemas.openxmlformats.org/drawingml/2006/main" noGrp="1"/>
+          </p:cNvSpPr>
+          <p:nvPr/>
+        </p:nvSpPr>
+        <p:spPr>
+          <a:xfrm xmlns:a="http://schemas.openxmlformats.org/drawingml/2006/main" rot="0">
+            <a:off x="533400" y="5238750"/>
+            <a:ext cx="11125200" cy="238125"/>
           </a:xfrm>
           <a:prstGeom xmlns:a="http://schemas.openxmlformats.org/drawingml/2006/main" prst="rect">
             <a:avLst/>
@@ -4066,7 +6084,7 @@
           </a:bodyPr>
           <a:lstStyle xmlns:a="http://schemas.openxmlformats.org/drawingml/2006/main"/>
           <a:p xmlns:a="http://schemas.openxmlformats.org/drawingml/2006/main">
-            <a:pPr algn="l">
+            <a:pPr algn="ctr">
               <a:defRPr sz="1200" b="1">
                 <a:solidFill>
                   <a:srgbClr val="26355F"/>
@@ -4085,60 +6103,87 @@
                 <a:ea typeface="Arial"/>
                 <a:cs typeface="Arial"/>
               </a:rPr>
-              <a:t>global order</a:t>
+              <a:t>Selection contract</a:t>
             </a:r>
           </a:p>
         </p:txBody>
       </p:sp>
       <p:sp>
         <p:nvSpPr>
-          <p:cNvPr id="63" name="allocation-global-token-1">
-            <a:extLst xmlns:a="http://schemas.openxmlformats.org/drawingml/2006/main">
-              <a:ext uri="{FF2B5EF4-FFF2-40B4-BE49-F238E27FC236}">
-                <a16:creationId xmlns:a16="http://schemas.microsoft.com/office/drawing/2014/main" id="{608BAF72-2966-4706-99EE-4EE8F1FFFC7C}"/>
-              </a:ext>
-            </a:extLst>
-          </p:cNvPr>
-          <p:cNvSpPr>
-            <a:spLocks xmlns:a="http://schemas.openxmlformats.org/drawingml/2006/main" noGrp="1"/>
-          </p:cNvSpPr>
-          <p:nvPr/>
-        </p:nvSpPr>
-        <p:spPr>
-          <a:xfrm xmlns:a="http://schemas.openxmlformats.org/drawingml/2006/main" rot="0">
-            <a:off x="7410450" y="2571750"/>
-            <a:ext cx="190500" cy="190500"/>
-          </a:xfrm>
-          <a:prstGeom xmlns:a="http://schemas.openxmlformats.org/drawingml/2006/main" prst="rect">
-            <a:avLst/>
-          </a:prstGeom>
-          <a:solidFill xmlns:a="http://schemas.openxmlformats.org/drawingml/2006/main">
-            <a:srgbClr val="26355F"/>
-          </a:solidFill>
-          <a:ln xmlns:a="http://schemas.openxmlformats.org/drawingml/2006/main" w="0">
-            <a:noFill/>
-            <a:prstDash val="solid"/>
-          </a:ln>
-        </p:spPr>
-      </p:sp>
-      <p:sp>
-        <p:nvSpPr>
-          <p:cNvPr id="64" name="allocation-global-rank-1">
-            <a:extLst xmlns:a="http://schemas.openxmlformats.org/drawingml/2006/main">
-              <a:ext uri="{FF2B5EF4-FFF2-40B4-BE49-F238E27FC236}">
-                <a16:creationId xmlns:a16="http://schemas.microsoft.com/office/drawing/2014/main" id="{F98E6AAB-380C-43A0-972A-49F9356C8474}"/>
-              </a:ext>
-            </a:extLst>
-          </p:cNvPr>
-          <p:cNvSpPr>
-            <a:spLocks xmlns:a="http://schemas.openxmlformats.org/drawingml/2006/main" noGrp="1"/>
-          </p:cNvSpPr>
-          <p:nvPr/>
-        </p:nvSpPr>
-        <p:spPr>
-          <a:xfrm xmlns:a="http://schemas.openxmlformats.org/drawingml/2006/main" rot="0">
-            <a:off x="7410450" y="2819400"/>
-            <a:ext cx="190500" cy="190500"/>
+          <p:cNvPr id="112" name="contract-copy">
+            <a:extLst xmlns:a="http://schemas.openxmlformats.org/drawingml/2006/main">
+              <a:ext uri="{FF2B5EF4-FFF2-40B4-BE49-F238E27FC236}">
+                <a16:creationId xmlns:a16="http://schemas.microsoft.com/office/drawing/2014/main" id="{62E17605-3A31-4C08-9534-997EEA47EF53}"/>
+              </a:ext>
+            </a:extLst>
+          </p:cNvPr>
+          <p:cNvSpPr>
+            <a:spLocks xmlns:a="http://schemas.openxmlformats.org/drawingml/2006/main" noGrp="1"/>
+          </p:cNvSpPr>
+          <p:nvPr/>
+        </p:nvSpPr>
+        <p:spPr>
+          <a:xfrm xmlns:a="http://schemas.openxmlformats.org/drawingml/2006/main" rot="0">
+            <a:off x="533400" y="5476875"/>
+            <a:ext cx="11125200" cy="228600"/>
+          </a:xfrm>
+          <a:prstGeom xmlns:a="http://schemas.openxmlformats.org/drawingml/2006/main" prst="rect">
+            <a:avLst/>
+          </a:prstGeom>
+          <a:noFill xmlns:a="http://schemas.openxmlformats.org/drawingml/2006/main"/>
+          <a:ln xmlns:a="http://schemas.openxmlformats.org/drawingml/2006/main" w="0">
+            <a:noFill/>
+            <a:prstDash val="solid"/>
+          </a:ln>
+        </p:spPr>
+        <p:txBody>
+          <a:bodyPr xmlns:a="http://schemas.openxmlformats.org/drawingml/2006/main" wrap="square" lIns="19050" tIns="9525" rIns="19050" bIns="9525" anchor="ctr">
+            <a:normAutofit fontScale="100000"/>
+          </a:bodyPr>
+          <a:lstStyle xmlns:a="http://schemas.openxmlformats.org/drawingml/2006/main"/>
+          <a:p xmlns:a="http://schemas.openxmlformats.org/drawingml/2006/main">
+            <a:pPr algn="ctr">
+              <a:defRPr sz="1050" b="0">
+                <a:solidFill>
+                  <a:srgbClr val="172027"/>
+                </a:solidFill>
+                <a:latin typeface="Arial"/>
+                <a:ea typeface="Arial"/>
+                <a:cs typeface="Arial"/>
+              </a:defRPr>
+            </a:pPr>
+            <a:r>
+              <a:rPr sz="1050" b="0">
+                <a:solidFill>
+                  <a:srgbClr val="172027"/>
+                </a:solidFill>
+                <a:latin typeface="Arial"/>
+                <a:ea typeface="Arial"/>
+                <a:cs typeface="Arial"/>
+              </a:rPr>
+              <a:t>Fixed capacity | stable ties | no duplicate slots | complete assignment ledger</a:t>
+            </a:r>
+          </a:p>
+        </p:txBody>
+      </p:sp>
+      <p:sp>
+        <p:nvSpPr>
+          <p:cNvPr id="113" name="scope-boundary">
+            <a:extLst xmlns:a="http://schemas.openxmlformats.org/drawingml/2006/main">
+              <a:ext uri="{FF2B5EF4-FFF2-40B4-BE49-F238E27FC236}">
+                <a16:creationId xmlns:a16="http://schemas.microsoft.com/office/drawing/2014/main" id="{81FA19F4-6F53-4520-8510-3FBC33239414}"/>
+              </a:ext>
+            </a:extLst>
+          </p:cNvPr>
+          <p:cNvSpPr>
+            <a:spLocks xmlns:a="http://schemas.openxmlformats.org/drawingml/2006/main" noGrp="1"/>
+          </p:cNvSpPr>
+          <p:nvPr/>
+        </p:nvSpPr>
+        <p:spPr>
+          <a:xfrm xmlns:a="http://schemas.openxmlformats.org/drawingml/2006/main" rot="0">
+            <a:off x="533400" y="5734050"/>
+            <a:ext cx="11125200" cy="209550"/>
           </a:xfrm>
           <a:prstGeom xmlns:a="http://schemas.openxmlformats.org/drawingml/2006/main" prst="rect">
             <a:avLst/>
@@ -4174,2051 +6219,6 @@
                 <a:ea typeface="Arial"/>
                 <a:cs typeface="Arial"/>
               </a:rPr>
-              <a:t>1</a:t>
-            </a:r>
-          </a:p>
-        </p:txBody>
-      </p:sp>
-      <p:sp>
-        <p:nvSpPr>
-          <p:cNvPr id="65" name="allocation-global-token-2">
-            <a:extLst xmlns:a="http://schemas.openxmlformats.org/drawingml/2006/main">
-              <a:ext uri="{FF2B5EF4-FFF2-40B4-BE49-F238E27FC236}">
-                <a16:creationId xmlns:a16="http://schemas.microsoft.com/office/drawing/2014/main" id="{6B2523F5-82A0-4F7F-99E6-490F9F65BF04}"/>
-              </a:ext>
-            </a:extLst>
-          </p:cNvPr>
-          <p:cNvSpPr>
-            <a:spLocks xmlns:a="http://schemas.openxmlformats.org/drawingml/2006/main" noGrp="1"/>
-          </p:cNvSpPr>
-          <p:nvPr/>
-        </p:nvSpPr>
-        <p:spPr>
-          <a:xfrm xmlns:a="http://schemas.openxmlformats.org/drawingml/2006/main" rot="0">
-            <a:off x="7772400" y="2571750"/>
-            <a:ext cx="190500" cy="190500"/>
-          </a:xfrm>
-          <a:prstGeom xmlns:a="http://schemas.openxmlformats.org/drawingml/2006/main" prst="ellipse">
-            <a:avLst/>
-          </a:prstGeom>
-          <a:solidFill xmlns:a="http://schemas.openxmlformats.org/drawingml/2006/main">
-            <a:srgbClr val="257FA0"/>
-          </a:solidFill>
-          <a:ln xmlns:a="http://schemas.openxmlformats.org/drawingml/2006/main" w="7620">
-            <a:solidFill>
-              <a:srgbClr val="26355F"/>
-            </a:solidFill>
-            <a:prstDash val="solid"/>
-          </a:ln>
-        </p:spPr>
-      </p:sp>
-      <p:sp>
-        <p:nvSpPr>
-          <p:cNvPr id="66" name="allocation-global-rank-2">
-            <a:extLst xmlns:a="http://schemas.openxmlformats.org/drawingml/2006/main">
-              <a:ext uri="{FF2B5EF4-FFF2-40B4-BE49-F238E27FC236}">
-                <a16:creationId xmlns:a16="http://schemas.microsoft.com/office/drawing/2014/main" id="{D0C7C860-144B-4970-A75D-D65A91CB5094}"/>
-              </a:ext>
-            </a:extLst>
-          </p:cNvPr>
-          <p:cNvSpPr>
-            <a:spLocks xmlns:a="http://schemas.openxmlformats.org/drawingml/2006/main" noGrp="1"/>
-          </p:cNvSpPr>
-          <p:nvPr/>
-        </p:nvSpPr>
-        <p:spPr>
-          <a:xfrm xmlns:a="http://schemas.openxmlformats.org/drawingml/2006/main" rot="0">
-            <a:off x="7772400" y="2819400"/>
-            <a:ext cx="190500" cy="190500"/>
-          </a:xfrm>
-          <a:prstGeom xmlns:a="http://schemas.openxmlformats.org/drawingml/2006/main" prst="rect">
-            <a:avLst/>
-          </a:prstGeom>
-          <a:noFill xmlns:a="http://schemas.openxmlformats.org/drawingml/2006/main"/>
-          <a:ln xmlns:a="http://schemas.openxmlformats.org/drawingml/2006/main" w="0">
-            <a:noFill/>
-            <a:prstDash val="solid"/>
-          </a:ln>
-        </p:spPr>
-        <p:txBody>
-          <a:bodyPr xmlns:a="http://schemas.openxmlformats.org/drawingml/2006/main" wrap="square" lIns="19050" tIns="9525" rIns="19050" bIns="9525" anchor="ctr">
-            <a:normAutofit fontScale="100000"/>
-          </a:bodyPr>
-          <a:lstStyle xmlns:a="http://schemas.openxmlformats.org/drawingml/2006/main"/>
-          <a:p xmlns:a="http://schemas.openxmlformats.org/drawingml/2006/main">
-            <a:pPr algn="ctr">
-              <a:defRPr sz="975" b="0">
-                <a:solidFill>
-                  <a:srgbClr val="637077"/>
-                </a:solidFill>
-                <a:latin typeface="Arial"/>
-                <a:ea typeface="Arial"/>
-                <a:cs typeface="Arial"/>
-              </a:defRPr>
-            </a:pPr>
-            <a:r>
-              <a:rPr sz="975" b="0">
-                <a:solidFill>
-                  <a:srgbClr val="637077"/>
-                </a:solidFill>
-                <a:latin typeface="Arial"/>
-                <a:ea typeface="Arial"/>
-                <a:cs typeface="Arial"/>
-              </a:rPr>
-              <a:t>2</a:t>
-            </a:r>
-          </a:p>
-        </p:txBody>
-      </p:sp>
-      <p:sp>
-        <p:nvSpPr>
-          <p:cNvPr id="67" name="allocation-global-token-3">
-            <a:extLst xmlns:a="http://schemas.openxmlformats.org/drawingml/2006/main">
-              <a:ext uri="{FF2B5EF4-FFF2-40B4-BE49-F238E27FC236}">
-                <a16:creationId xmlns:a16="http://schemas.microsoft.com/office/drawing/2014/main" id="{4A816DD9-63BF-40F8-910C-0D4D4842057F}"/>
-              </a:ext>
-            </a:extLst>
-          </p:cNvPr>
-          <p:cNvSpPr>
-            <a:spLocks xmlns:a="http://schemas.openxmlformats.org/drawingml/2006/main" noGrp="1"/>
-          </p:cNvSpPr>
-          <p:nvPr/>
-        </p:nvSpPr>
-        <p:spPr>
-          <a:xfrm xmlns:a="http://schemas.openxmlformats.org/drawingml/2006/main" rot="0">
-            <a:off x="8134350" y="2571750"/>
-            <a:ext cx="190500" cy="190500"/>
-          </a:xfrm>
-          <a:prstGeom xmlns:a="http://schemas.openxmlformats.org/drawingml/2006/main" prst="diamond">
-            <a:avLst/>
-          </a:prstGeom>
-          <a:solidFill xmlns:a="http://schemas.openxmlformats.org/drawingml/2006/main">
-            <a:srgbClr val="765A8D"/>
-          </a:solidFill>
-          <a:ln xmlns:a="http://schemas.openxmlformats.org/drawingml/2006/main" w="7620">
-            <a:solidFill>
-              <a:srgbClr val="26355F"/>
-            </a:solidFill>
-            <a:prstDash val="solid"/>
-          </a:ln>
-        </p:spPr>
-      </p:sp>
-      <p:sp>
-        <p:nvSpPr>
-          <p:cNvPr id="68" name="allocation-global-rank-3">
-            <a:extLst xmlns:a="http://schemas.openxmlformats.org/drawingml/2006/main">
-              <a:ext uri="{FF2B5EF4-FFF2-40B4-BE49-F238E27FC236}">
-                <a16:creationId xmlns:a16="http://schemas.microsoft.com/office/drawing/2014/main" id="{F00C88CA-8FEB-4000-806A-2C7D4173D20E}"/>
-              </a:ext>
-            </a:extLst>
-          </p:cNvPr>
-          <p:cNvSpPr>
-            <a:spLocks xmlns:a="http://schemas.openxmlformats.org/drawingml/2006/main" noGrp="1"/>
-          </p:cNvSpPr>
-          <p:nvPr/>
-        </p:nvSpPr>
-        <p:spPr>
-          <a:xfrm xmlns:a="http://schemas.openxmlformats.org/drawingml/2006/main" rot="0">
-            <a:off x="8134350" y="2819400"/>
-            <a:ext cx="190500" cy="190500"/>
-          </a:xfrm>
-          <a:prstGeom xmlns:a="http://schemas.openxmlformats.org/drawingml/2006/main" prst="rect">
-            <a:avLst/>
-          </a:prstGeom>
-          <a:noFill xmlns:a="http://schemas.openxmlformats.org/drawingml/2006/main"/>
-          <a:ln xmlns:a="http://schemas.openxmlformats.org/drawingml/2006/main" w="0">
-            <a:noFill/>
-            <a:prstDash val="solid"/>
-          </a:ln>
-        </p:spPr>
-        <p:txBody>
-          <a:bodyPr xmlns:a="http://schemas.openxmlformats.org/drawingml/2006/main" wrap="square" lIns="19050" tIns="9525" rIns="19050" bIns="9525" anchor="ctr">
-            <a:normAutofit fontScale="100000"/>
-          </a:bodyPr>
-          <a:lstStyle xmlns:a="http://schemas.openxmlformats.org/drawingml/2006/main"/>
-          <a:p xmlns:a="http://schemas.openxmlformats.org/drawingml/2006/main">
-            <a:pPr algn="ctr">
-              <a:defRPr sz="975" b="0">
-                <a:solidFill>
-                  <a:srgbClr val="637077"/>
-                </a:solidFill>
-                <a:latin typeface="Arial"/>
-                <a:ea typeface="Arial"/>
-                <a:cs typeface="Arial"/>
-              </a:defRPr>
-            </a:pPr>
-            <a:r>
-              <a:rPr sz="975" b="0">
-                <a:solidFill>
-                  <a:srgbClr val="637077"/>
-                </a:solidFill>
-                <a:latin typeface="Arial"/>
-                <a:ea typeface="Arial"/>
-                <a:cs typeface="Arial"/>
-              </a:rPr>
-              <a:t>3</a:t>
-            </a:r>
-          </a:p>
-        </p:txBody>
-      </p:sp>
-      <p:sp>
-        <p:nvSpPr>
-          <p:cNvPr id="69" name="allocation-global-token-4">
-            <a:extLst xmlns:a="http://schemas.openxmlformats.org/drawingml/2006/main">
-              <a:ext uri="{FF2B5EF4-FFF2-40B4-BE49-F238E27FC236}">
-                <a16:creationId xmlns:a16="http://schemas.microsoft.com/office/drawing/2014/main" id="{16AFA29C-398A-458A-9E41-6AED9C38F6D3}"/>
-              </a:ext>
-            </a:extLst>
-          </p:cNvPr>
-          <p:cNvSpPr>
-            <a:spLocks xmlns:a="http://schemas.openxmlformats.org/drawingml/2006/main" noGrp="1"/>
-          </p:cNvSpPr>
-          <p:nvPr/>
-        </p:nvSpPr>
-        <p:spPr>
-          <a:xfrm xmlns:a="http://schemas.openxmlformats.org/drawingml/2006/main" rot="0">
-            <a:off x="8496300" y="2571750"/>
-            <a:ext cx="190500" cy="190500"/>
-          </a:xfrm>
-          <a:prstGeom xmlns:a="http://schemas.openxmlformats.org/drawingml/2006/main" prst="rect">
-            <a:avLst/>
-          </a:prstGeom>
-          <a:solidFill xmlns:a="http://schemas.openxmlformats.org/drawingml/2006/main">
-            <a:srgbClr val="26355F"/>
-          </a:solidFill>
-          <a:ln xmlns:a="http://schemas.openxmlformats.org/drawingml/2006/main" w="0">
-            <a:noFill/>
-            <a:prstDash val="solid"/>
-          </a:ln>
-        </p:spPr>
-      </p:sp>
-      <p:sp>
-        <p:nvSpPr>
-          <p:cNvPr id="70" name="allocation-global-rank-4">
-            <a:extLst xmlns:a="http://schemas.openxmlformats.org/drawingml/2006/main">
-              <a:ext uri="{FF2B5EF4-FFF2-40B4-BE49-F238E27FC236}">
-                <a16:creationId xmlns:a16="http://schemas.microsoft.com/office/drawing/2014/main" id="{B9B92ABE-26D5-4A95-8FEA-613CB359B447}"/>
-              </a:ext>
-            </a:extLst>
-          </p:cNvPr>
-          <p:cNvSpPr>
-            <a:spLocks xmlns:a="http://schemas.openxmlformats.org/drawingml/2006/main" noGrp="1"/>
-          </p:cNvSpPr>
-          <p:nvPr/>
-        </p:nvSpPr>
-        <p:spPr>
-          <a:xfrm xmlns:a="http://schemas.openxmlformats.org/drawingml/2006/main" rot="0">
-            <a:off x="8496300" y="2819400"/>
-            <a:ext cx="190500" cy="190500"/>
-          </a:xfrm>
-          <a:prstGeom xmlns:a="http://schemas.openxmlformats.org/drawingml/2006/main" prst="rect">
-            <a:avLst/>
-          </a:prstGeom>
-          <a:noFill xmlns:a="http://schemas.openxmlformats.org/drawingml/2006/main"/>
-          <a:ln xmlns:a="http://schemas.openxmlformats.org/drawingml/2006/main" w="0">
-            <a:noFill/>
-            <a:prstDash val="solid"/>
-          </a:ln>
-        </p:spPr>
-        <p:txBody>
-          <a:bodyPr xmlns:a="http://schemas.openxmlformats.org/drawingml/2006/main" wrap="square" lIns="19050" tIns="9525" rIns="19050" bIns="9525" anchor="ctr">
-            <a:normAutofit fontScale="100000"/>
-          </a:bodyPr>
-          <a:lstStyle xmlns:a="http://schemas.openxmlformats.org/drawingml/2006/main"/>
-          <a:p xmlns:a="http://schemas.openxmlformats.org/drawingml/2006/main">
-            <a:pPr algn="ctr">
-              <a:defRPr sz="975" b="0">
-                <a:solidFill>
-                  <a:srgbClr val="637077"/>
-                </a:solidFill>
-                <a:latin typeface="Arial"/>
-                <a:ea typeface="Arial"/>
-                <a:cs typeface="Arial"/>
-              </a:defRPr>
-            </a:pPr>
-            <a:r>
-              <a:rPr sz="975" b="0">
-                <a:solidFill>
-                  <a:srgbClr val="637077"/>
-                </a:solidFill>
-                <a:latin typeface="Arial"/>
-                <a:ea typeface="Arial"/>
-                <a:cs typeface="Arial"/>
-              </a:rPr>
-              <a:t>4</a:t>
-            </a:r>
-          </a:p>
-        </p:txBody>
-      </p:sp>
-      <p:sp>
-        <p:nvSpPr>
-          <p:cNvPr id="71" name="allocation-global-baseline">
-            <a:extLst xmlns:a="http://schemas.openxmlformats.org/drawingml/2006/main">
-              <a:ext uri="{FF2B5EF4-FFF2-40B4-BE49-F238E27FC236}">
-                <a16:creationId xmlns:a16="http://schemas.microsoft.com/office/drawing/2014/main" id="{38738645-D1DA-453E-BE78-B2DC4FAE50BE}"/>
-              </a:ext>
-            </a:extLst>
-          </p:cNvPr>
-          <p:cNvSpPr>
-            <a:spLocks xmlns:a="http://schemas.openxmlformats.org/drawingml/2006/main" noGrp="1"/>
-          </p:cNvSpPr>
-          <p:nvPr/>
-        </p:nvSpPr>
-        <p:spPr>
-          <a:xfrm xmlns:a="http://schemas.openxmlformats.org/drawingml/2006/main" flipH="0" flipV="0">
-            <a:off x="7391400" y="3057525"/>
-            <a:ext cx="1428750" cy="9525"/>
-          </a:xfrm>
-          <a:prstGeom xmlns:a="http://schemas.openxmlformats.org/drawingml/2006/main" prst="line">
-            <a:avLst/>
-          </a:prstGeom>
-          <a:noFill xmlns:a="http://schemas.openxmlformats.org/drawingml/2006/main"/>
-          <a:ln xmlns:a="http://schemas.openxmlformats.org/drawingml/2006/main" w="11430">
-            <a:solidFill>
-              <a:srgbClr val="CAD3D4"/>
-            </a:solidFill>
-            <a:prstDash val="solid"/>
-          </a:ln>
-        </p:spPr>
-      </p:sp>
-      <p:sp>
-        <p:nvSpPr>
-          <p:cNvPr id="72" name="allocation-reserved-label">
-            <a:extLst xmlns:a="http://schemas.openxmlformats.org/drawingml/2006/main">
-              <a:ext uri="{FF2B5EF4-FFF2-40B4-BE49-F238E27FC236}">
-                <a16:creationId xmlns:a16="http://schemas.microsoft.com/office/drawing/2014/main" id="{6528C060-3BAF-40FD-B2EB-D39621ED6F1F}"/>
-              </a:ext>
-            </a:extLst>
-          </p:cNvPr>
-          <p:cNvSpPr>
-            <a:spLocks xmlns:a="http://schemas.openxmlformats.org/drawingml/2006/main" noGrp="1"/>
-          </p:cNvSpPr>
-          <p:nvPr/>
-        </p:nvSpPr>
-        <p:spPr>
-          <a:xfrm xmlns:a="http://schemas.openxmlformats.org/drawingml/2006/main" rot="0">
-            <a:off x="5943600" y="3762375"/>
-            <a:ext cx="685800" cy="190500"/>
-          </a:xfrm>
-          <a:prstGeom xmlns:a="http://schemas.openxmlformats.org/drawingml/2006/main" prst="rect">
-            <a:avLst/>
-          </a:prstGeom>
-          <a:noFill xmlns:a="http://schemas.openxmlformats.org/drawingml/2006/main"/>
-          <a:ln xmlns:a="http://schemas.openxmlformats.org/drawingml/2006/main" w="0">
-            <a:noFill/>
-            <a:prstDash val="solid"/>
-          </a:ln>
-        </p:spPr>
-        <p:txBody>
-          <a:bodyPr xmlns:a="http://schemas.openxmlformats.org/drawingml/2006/main" wrap="square" lIns="19050" tIns="9525" rIns="19050" bIns="9525" anchor="ctr">
-            <a:normAutofit fontScale="100000"/>
-          </a:bodyPr>
-          <a:lstStyle xmlns:a="http://schemas.openxmlformats.org/drawingml/2006/main"/>
-          <a:p xmlns:a="http://schemas.openxmlformats.org/drawingml/2006/main">
-            <a:pPr algn="ctr">
-              <a:defRPr sz="1050" b="1">
-                <a:solidFill>
-                  <a:srgbClr val="26785F"/>
-                </a:solidFill>
-                <a:latin typeface="Arial"/>
-                <a:ea typeface="Arial"/>
-                <a:cs typeface="Arial"/>
-              </a:defRPr>
-            </a:pPr>
-            <a:r>
-              <a:rPr sz="1050" b="1">
-                <a:solidFill>
-                  <a:srgbClr val="26785F"/>
-                </a:solidFill>
-                <a:latin typeface="Arial"/>
-                <a:ea typeface="Arial"/>
-                <a:cs typeface="Arial"/>
-              </a:rPr>
-              <a:t>reserved</a:t>
-            </a:r>
-          </a:p>
-        </p:txBody>
-      </p:sp>
-      <p:sp>
-        <p:nvSpPr>
-          <p:cNvPr id="73" name="allocation-fill-label">
-            <a:extLst xmlns:a="http://schemas.openxmlformats.org/drawingml/2006/main">
-              <a:ext uri="{FF2B5EF4-FFF2-40B4-BE49-F238E27FC236}">
-                <a16:creationId xmlns:a16="http://schemas.microsoft.com/office/drawing/2014/main" id="{21183C22-288E-42AF-B430-BF7D948337C7}"/>
-              </a:ext>
-            </a:extLst>
-          </p:cNvPr>
-          <p:cNvSpPr>
-            <a:spLocks xmlns:a="http://schemas.openxmlformats.org/drawingml/2006/main" noGrp="1"/>
-          </p:cNvSpPr>
-          <p:nvPr/>
-        </p:nvSpPr>
-        <p:spPr>
-          <a:xfrm xmlns:a="http://schemas.openxmlformats.org/drawingml/2006/main" rot="0">
-            <a:off x="7677150" y="3762375"/>
-            <a:ext cx="876300" cy="190500"/>
-          </a:xfrm>
-          <a:prstGeom xmlns:a="http://schemas.openxmlformats.org/drawingml/2006/main" prst="rect">
-            <a:avLst/>
-          </a:prstGeom>
-          <a:noFill xmlns:a="http://schemas.openxmlformats.org/drawingml/2006/main"/>
-          <a:ln xmlns:a="http://schemas.openxmlformats.org/drawingml/2006/main" w="0">
-            <a:noFill/>
-            <a:prstDash val="solid"/>
-          </a:ln>
-        </p:spPr>
-        <p:txBody>
-          <a:bodyPr xmlns:a="http://schemas.openxmlformats.org/drawingml/2006/main" wrap="square" lIns="19050" tIns="9525" rIns="19050" bIns="9525" anchor="ctr">
-            <a:normAutofit fontScale="100000"/>
-          </a:bodyPr>
-          <a:lstStyle xmlns:a="http://schemas.openxmlformats.org/drawingml/2006/main"/>
-          <a:p xmlns:a="http://schemas.openxmlformats.org/drawingml/2006/main">
-            <a:pPr algn="ctr">
-              <a:defRPr sz="1050" b="1">
-                <a:solidFill>
-                  <a:srgbClr val="26355F"/>
-                </a:solidFill>
-                <a:latin typeface="Arial"/>
-                <a:ea typeface="Arial"/>
-                <a:cs typeface="Arial"/>
-              </a:defRPr>
-            </a:pPr>
-            <a:r>
-              <a:rPr sz="1050" b="1">
-                <a:solidFill>
-                  <a:srgbClr val="26355F"/>
-                </a:solidFill>
-                <a:latin typeface="Arial"/>
-                <a:ea typeface="Arial"/>
-                <a:cs typeface="Arial"/>
-              </a:rPr>
-              <a:t>global fill</a:t>
-            </a:r>
-          </a:p>
-        </p:txBody>
-      </p:sp>
-      <p:sp>
-        <p:nvSpPr>
-          <p:cNvPr id="74" name="allocation-slot-1">
-            <a:extLst xmlns:a="http://schemas.openxmlformats.org/drawingml/2006/main">
-              <a:ext uri="{FF2B5EF4-FFF2-40B4-BE49-F238E27FC236}">
-                <a16:creationId xmlns:a16="http://schemas.microsoft.com/office/drawing/2014/main" id="{868BAF45-0D18-4A4A-97BF-FB4DF902866A}"/>
-              </a:ext>
-            </a:extLst>
-          </p:cNvPr>
-          <p:cNvSpPr>
-            <a:spLocks xmlns:a="http://schemas.openxmlformats.org/drawingml/2006/main" noGrp="1"/>
-          </p:cNvSpPr>
-          <p:nvPr/>
-        </p:nvSpPr>
-        <p:spPr>
-          <a:xfrm xmlns:a="http://schemas.openxmlformats.org/drawingml/2006/main" rot="0">
-            <a:off x="5791200" y="4010025"/>
-            <a:ext cx="352425" cy="438150"/>
-          </a:xfrm>
-          <a:prstGeom xmlns:a="http://schemas.openxmlformats.org/drawingml/2006/main" prst="rect">
-            <a:avLst/>
-          </a:prstGeom>
-          <a:solidFill xmlns:a="http://schemas.openxmlformats.org/drawingml/2006/main">
-            <a:srgbClr val="E6F1EB"/>
-          </a:solidFill>
-          <a:ln xmlns:a="http://schemas.openxmlformats.org/drawingml/2006/main" w="12383">
-            <a:solidFill>
-              <a:srgbClr val="26785F"/>
-            </a:solidFill>
-            <a:prstDash val="solid"/>
-          </a:ln>
-        </p:spPr>
-      </p:sp>
-      <p:sp>
-        <p:nvSpPr>
-          <p:cNvPr id="75" name="allocation-slot-token-1">
-            <a:extLst xmlns:a="http://schemas.openxmlformats.org/drawingml/2006/main">
-              <a:ext uri="{FF2B5EF4-FFF2-40B4-BE49-F238E27FC236}">
-                <a16:creationId xmlns:a16="http://schemas.microsoft.com/office/drawing/2014/main" id="{CD988C16-7958-47D2-8B12-F2F161A16E98}"/>
-              </a:ext>
-            </a:extLst>
-          </p:cNvPr>
-          <p:cNvSpPr>
-            <a:spLocks xmlns:a="http://schemas.openxmlformats.org/drawingml/2006/main" noGrp="1"/>
-          </p:cNvSpPr>
-          <p:nvPr/>
-        </p:nvSpPr>
-        <p:spPr>
-          <a:xfrm xmlns:a="http://schemas.openxmlformats.org/drawingml/2006/main" rot="0">
-            <a:off x="5876925" y="4143375"/>
-            <a:ext cx="171450" cy="171450"/>
-          </a:xfrm>
-          <a:prstGeom xmlns:a="http://schemas.openxmlformats.org/drawingml/2006/main" prst="ellipse">
-            <a:avLst/>
-          </a:prstGeom>
-          <a:solidFill xmlns:a="http://schemas.openxmlformats.org/drawingml/2006/main">
-            <a:srgbClr val="257FA0"/>
-          </a:solidFill>
-          <a:ln xmlns:a="http://schemas.openxmlformats.org/drawingml/2006/main" w="7620">
-            <a:solidFill>
-              <a:srgbClr val="26355F"/>
-            </a:solidFill>
-            <a:prstDash val="solid"/>
-          </a:ln>
-        </p:spPr>
-      </p:sp>
-      <p:sp>
-        <p:nvSpPr>
-          <p:cNvPr id="76" name="allocation-slot-2">
-            <a:extLst xmlns:a="http://schemas.openxmlformats.org/drawingml/2006/main">
-              <a:ext uri="{FF2B5EF4-FFF2-40B4-BE49-F238E27FC236}">
-                <a16:creationId xmlns:a16="http://schemas.microsoft.com/office/drawing/2014/main" id="{18D35F1D-A87D-4A7C-9879-D15EEAA7439B}"/>
-              </a:ext>
-            </a:extLst>
-          </p:cNvPr>
-          <p:cNvSpPr>
-            <a:spLocks xmlns:a="http://schemas.openxmlformats.org/drawingml/2006/main" noGrp="1"/>
-          </p:cNvSpPr>
-          <p:nvPr/>
-        </p:nvSpPr>
-        <p:spPr>
-          <a:xfrm xmlns:a="http://schemas.openxmlformats.org/drawingml/2006/main" rot="0">
-            <a:off x="6162675" y="4010025"/>
-            <a:ext cx="352425" cy="438150"/>
-          </a:xfrm>
-          <a:prstGeom xmlns:a="http://schemas.openxmlformats.org/drawingml/2006/main" prst="rect">
-            <a:avLst/>
-          </a:prstGeom>
-          <a:solidFill xmlns:a="http://schemas.openxmlformats.org/drawingml/2006/main">
-            <a:srgbClr val="E6F1EB"/>
-          </a:solidFill>
-          <a:ln xmlns:a="http://schemas.openxmlformats.org/drawingml/2006/main" w="12383">
-            <a:solidFill>
-              <a:srgbClr val="26785F"/>
-            </a:solidFill>
-            <a:prstDash val="solid"/>
-          </a:ln>
-        </p:spPr>
-      </p:sp>
-      <p:sp>
-        <p:nvSpPr>
-          <p:cNvPr id="77" name="allocation-slot-token-2">
-            <a:extLst xmlns:a="http://schemas.openxmlformats.org/drawingml/2006/main">
-              <a:ext uri="{FF2B5EF4-FFF2-40B4-BE49-F238E27FC236}">
-                <a16:creationId xmlns:a16="http://schemas.microsoft.com/office/drawing/2014/main" id="{988ADFAA-D4A6-41A8-8D86-98B2F3E85FD3}"/>
-              </a:ext>
-            </a:extLst>
-          </p:cNvPr>
-          <p:cNvSpPr>
-            <a:spLocks xmlns:a="http://schemas.openxmlformats.org/drawingml/2006/main" noGrp="1"/>
-          </p:cNvSpPr>
-          <p:nvPr/>
-        </p:nvSpPr>
-        <p:spPr>
-          <a:xfrm xmlns:a="http://schemas.openxmlformats.org/drawingml/2006/main" rot="0">
-            <a:off x="6248400" y="4143375"/>
-            <a:ext cx="171450" cy="171450"/>
-          </a:xfrm>
-          <a:prstGeom xmlns:a="http://schemas.openxmlformats.org/drawingml/2006/main" prst="diamond">
-            <a:avLst/>
-          </a:prstGeom>
-          <a:solidFill xmlns:a="http://schemas.openxmlformats.org/drawingml/2006/main">
-            <a:srgbClr val="765A8D"/>
-          </a:solidFill>
-          <a:ln xmlns:a="http://schemas.openxmlformats.org/drawingml/2006/main" w="7620">
-            <a:solidFill>
-              <a:srgbClr val="26355F"/>
-            </a:solidFill>
-            <a:prstDash val="solid"/>
-          </a:ln>
-        </p:spPr>
-      </p:sp>
-      <p:sp>
-        <p:nvSpPr>
-          <p:cNvPr id="78" name="allocation-slot-3">
-            <a:extLst xmlns:a="http://schemas.openxmlformats.org/drawingml/2006/main">
-              <a:ext uri="{FF2B5EF4-FFF2-40B4-BE49-F238E27FC236}">
-                <a16:creationId xmlns:a16="http://schemas.microsoft.com/office/drawing/2014/main" id="{63EEA5A2-9A30-447B-8F97-C0295578938E}"/>
-              </a:ext>
-            </a:extLst>
-          </p:cNvPr>
-          <p:cNvSpPr>
-            <a:spLocks xmlns:a="http://schemas.openxmlformats.org/drawingml/2006/main" noGrp="1"/>
-          </p:cNvSpPr>
-          <p:nvPr/>
-        </p:nvSpPr>
-        <p:spPr>
-          <a:xfrm xmlns:a="http://schemas.openxmlformats.org/drawingml/2006/main" rot="0">
-            <a:off x="6534150" y="4010025"/>
-            <a:ext cx="352425" cy="438150"/>
-          </a:xfrm>
-          <a:prstGeom xmlns:a="http://schemas.openxmlformats.org/drawingml/2006/main" prst="rect">
-            <a:avLst/>
-          </a:prstGeom>
-          <a:solidFill xmlns:a="http://schemas.openxmlformats.org/drawingml/2006/main">
-            <a:srgbClr val="FFFFFF"/>
-          </a:solidFill>
-          <a:ln xmlns:a="http://schemas.openxmlformats.org/drawingml/2006/main" w="12383">
-            <a:solidFill>
-              <a:srgbClr val="26355F"/>
-            </a:solidFill>
-            <a:prstDash val="solid"/>
-          </a:ln>
-        </p:spPr>
-      </p:sp>
-      <p:sp>
-        <p:nvSpPr>
-          <p:cNvPr id="79" name="allocation-slot-token-3">
-            <a:extLst xmlns:a="http://schemas.openxmlformats.org/drawingml/2006/main">
-              <a:ext uri="{FF2B5EF4-FFF2-40B4-BE49-F238E27FC236}">
-                <a16:creationId xmlns:a16="http://schemas.microsoft.com/office/drawing/2014/main" id="{469C5A74-37D4-4164-A690-67F0EFF260B0}"/>
-              </a:ext>
-            </a:extLst>
-          </p:cNvPr>
-          <p:cNvSpPr>
-            <a:spLocks xmlns:a="http://schemas.openxmlformats.org/drawingml/2006/main" noGrp="1"/>
-          </p:cNvSpPr>
-          <p:nvPr/>
-        </p:nvSpPr>
-        <p:spPr>
-          <a:xfrm xmlns:a="http://schemas.openxmlformats.org/drawingml/2006/main" rot="0">
-            <a:off x="6619875" y="4143375"/>
-            <a:ext cx="171450" cy="171450"/>
-          </a:xfrm>
-          <a:prstGeom xmlns:a="http://schemas.openxmlformats.org/drawingml/2006/main" prst="rect">
-            <a:avLst/>
-          </a:prstGeom>
-          <a:solidFill xmlns:a="http://schemas.openxmlformats.org/drawingml/2006/main">
-            <a:srgbClr val="26355F"/>
-          </a:solidFill>
-          <a:ln xmlns:a="http://schemas.openxmlformats.org/drawingml/2006/main" w="0">
-            <a:noFill/>
-            <a:prstDash val="solid"/>
-          </a:ln>
-        </p:spPr>
-      </p:sp>
-      <p:sp>
-        <p:nvSpPr>
-          <p:cNvPr id="80" name="allocation-slot-4">
-            <a:extLst xmlns:a="http://schemas.openxmlformats.org/drawingml/2006/main">
-              <a:ext uri="{FF2B5EF4-FFF2-40B4-BE49-F238E27FC236}">
-                <a16:creationId xmlns:a16="http://schemas.microsoft.com/office/drawing/2014/main" id="{43E7AAF3-9C14-4038-A579-0178A3453B94}"/>
-              </a:ext>
-            </a:extLst>
-          </p:cNvPr>
-          <p:cNvSpPr>
-            <a:spLocks xmlns:a="http://schemas.openxmlformats.org/drawingml/2006/main" noGrp="1"/>
-          </p:cNvSpPr>
-          <p:nvPr/>
-        </p:nvSpPr>
-        <p:spPr>
-          <a:xfrm xmlns:a="http://schemas.openxmlformats.org/drawingml/2006/main" rot="0">
-            <a:off x="6905625" y="4010025"/>
-            <a:ext cx="352425" cy="438150"/>
-          </a:xfrm>
-          <a:prstGeom xmlns:a="http://schemas.openxmlformats.org/drawingml/2006/main" prst="rect">
-            <a:avLst/>
-          </a:prstGeom>
-          <a:solidFill xmlns:a="http://schemas.openxmlformats.org/drawingml/2006/main">
-            <a:srgbClr val="FFFFFF"/>
-          </a:solidFill>
-          <a:ln xmlns:a="http://schemas.openxmlformats.org/drawingml/2006/main" w="12383">
-            <a:solidFill>
-              <a:srgbClr val="26355F"/>
-            </a:solidFill>
-            <a:prstDash val="solid"/>
-          </a:ln>
-        </p:spPr>
-      </p:sp>
-      <p:sp>
-        <p:nvSpPr>
-          <p:cNvPr id="81" name="allocation-slot-token-4">
-            <a:extLst xmlns:a="http://schemas.openxmlformats.org/drawingml/2006/main">
-              <a:ext uri="{FF2B5EF4-FFF2-40B4-BE49-F238E27FC236}">
-                <a16:creationId xmlns:a16="http://schemas.microsoft.com/office/drawing/2014/main" id="{C04DEE4E-AFE6-4492-AA81-54ABC999C6FB}"/>
-              </a:ext>
-            </a:extLst>
-          </p:cNvPr>
-          <p:cNvSpPr>
-            <a:spLocks xmlns:a="http://schemas.openxmlformats.org/drawingml/2006/main" noGrp="1"/>
-          </p:cNvSpPr>
-          <p:nvPr/>
-        </p:nvSpPr>
-        <p:spPr>
-          <a:xfrm xmlns:a="http://schemas.openxmlformats.org/drawingml/2006/main" rot="0">
-            <a:off x="6991350" y="4143375"/>
-            <a:ext cx="171450" cy="171450"/>
-          </a:xfrm>
-          <a:prstGeom xmlns:a="http://schemas.openxmlformats.org/drawingml/2006/main" prst="ellipse">
-            <a:avLst/>
-          </a:prstGeom>
-          <a:solidFill xmlns:a="http://schemas.openxmlformats.org/drawingml/2006/main">
-            <a:srgbClr val="257FA0"/>
-          </a:solidFill>
-          <a:ln xmlns:a="http://schemas.openxmlformats.org/drawingml/2006/main" w="7620">
-            <a:solidFill>
-              <a:srgbClr val="26355F"/>
-            </a:solidFill>
-            <a:prstDash val="solid"/>
-          </a:ln>
-        </p:spPr>
-      </p:sp>
-      <p:sp>
-        <p:nvSpPr>
-          <p:cNvPr id="82" name="allocation-slot-5">
-            <a:extLst xmlns:a="http://schemas.openxmlformats.org/drawingml/2006/main">
-              <a:ext uri="{FF2B5EF4-FFF2-40B4-BE49-F238E27FC236}">
-                <a16:creationId xmlns:a16="http://schemas.microsoft.com/office/drawing/2014/main" id="{7E8E3CC9-967F-4FB9-8993-1D7F4824211E}"/>
-              </a:ext>
-            </a:extLst>
-          </p:cNvPr>
-          <p:cNvSpPr>
-            <a:spLocks xmlns:a="http://schemas.openxmlformats.org/drawingml/2006/main" noGrp="1"/>
-          </p:cNvSpPr>
-          <p:nvPr/>
-        </p:nvSpPr>
-        <p:spPr>
-          <a:xfrm xmlns:a="http://schemas.openxmlformats.org/drawingml/2006/main" rot="0">
-            <a:off x="7277100" y="4010025"/>
-            <a:ext cx="352425" cy="438150"/>
-          </a:xfrm>
-          <a:prstGeom xmlns:a="http://schemas.openxmlformats.org/drawingml/2006/main" prst="rect">
-            <a:avLst/>
-          </a:prstGeom>
-          <a:solidFill xmlns:a="http://schemas.openxmlformats.org/drawingml/2006/main">
-            <a:srgbClr val="FFFFFF"/>
-          </a:solidFill>
-          <a:ln xmlns:a="http://schemas.openxmlformats.org/drawingml/2006/main" w="12383">
-            <a:solidFill>
-              <a:srgbClr val="26355F"/>
-            </a:solidFill>
-            <a:prstDash val="solid"/>
-          </a:ln>
-        </p:spPr>
-      </p:sp>
-      <p:sp>
-        <p:nvSpPr>
-          <p:cNvPr id="83" name="allocation-slot-token-5">
-            <a:extLst xmlns:a="http://schemas.openxmlformats.org/drawingml/2006/main">
-              <a:ext uri="{FF2B5EF4-FFF2-40B4-BE49-F238E27FC236}">
-                <a16:creationId xmlns:a16="http://schemas.microsoft.com/office/drawing/2014/main" id="{6446FAE3-A497-4295-9A33-56ECA8447C83}"/>
-              </a:ext>
-            </a:extLst>
-          </p:cNvPr>
-          <p:cNvSpPr>
-            <a:spLocks xmlns:a="http://schemas.openxmlformats.org/drawingml/2006/main" noGrp="1"/>
-          </p:cNvSpPr>
-          <p:nvPr/>
-        </p:nvSpPr>
-        <p:spPr>
-          <a:xfrm xmlns:a="http://schemas.openxmlformats.org/drawingml/2006/main" rot="0">
-            <a:off x="7362825" y="4143375"/>
-            <a:ext cx="171450" cy="171450"/>
-          </a:xfrm>
-          <a:prstGeom xmlns:a="http://schemas.openxmlformats.org/drawingml/2006/main" prst="rect">
-            <a:avLst/>
-          </a:prstGeom>
-          <a:solidFill xmlns:a="http://schemas.openxmlformats.org/drawingml/2006/main">
-            <a:srgbClr val="26355F"/>
-          </a:solidFill>
-          <a:ln xmlns:a="http://schemas.openxmlformats.org/drawingml/2006/main" w="0">
-            <a:noFill/>
-            <a:prstDash val="solid"/>
-          </a:ln>
-        </p:spPr>
-      </p:sp>
-      <p:sp>
-        <p:nvSpPr>
-          <p:cNvPr id="84" name="allocation-slot-6">
-            <a:extLst xmlns:a="http://schemas.openxmlformats.org/drawingml/2006/main">
-              <a:ext uri="{FF2B5EF4-FFF2-40B4-BE49-F238E27FC236}">
-                <a16:creationId xmlns:a16="http://schemas.microsoft.com/office/drawing/2014/main" id="{26C112EF-0411-4DA3-9385-DB9FF4334206}"/>
-              </a:ext>
-            </a:extLst>
-          </p:cNvPr>
-          <p:cNvSpPr>
-            <a:spLocks xmlns:a="http://schemas.openxmlformats.org/drawingml/2006/main" noGrp="1"/>
-          </p:cNvSpPr>
-          <p:nvPr/>
-        </p:nvSpPr>
-        <p:spPr>
-          <a:xfrm xmlns:a="http://schemas.openxmlformats.org/drawingml/2006/main" rot="0">
-            <a:off x="7648575" y="4010025"/>
-            <a:ext cx="352425" cy="438150"/>
-          </a:xfrm>
-          <a:prstGeom xmlns:a="http://schemas.openxmlformats.org/drawingml/2006/main" prst="rect">
-            <a:avLst/>
-          </a:prstGeom>
-          <a:solidFill xmlns:a="http://schemas.openxmlformats.org/drawingml/2006/main">
-            <a:srgbClr val="FFFFFF"/>
-          </a:solidFill>
-          <a:ln xmlns:a="http://schemas.openxmlformats.org/drawingml/2006/main" w="12383">
-            <a:solidFill>
-              <a:srgbClr val="26355F"/>
-            </a:solidFill>
-            <a:prstDash val="solid"/>
-          </a:ln>
-        </p:spPr>
-      </p:sp>
-      <p:sp>
-        <p:nvSpPr>
-          <p:cNvPr id="85" name="allocation-slot-token-6">
-            <a:extLst xmlns:a="http://schemas.openxmlformats.org/drawingml/2006/main">
-              <a:ext uri="{FF2B5EF4-FFF2-40B4-BE49-F238E27FC236}">
-                <a16:creationId xmlns:a16="http://schemas.microsoft.com/office/drawing/2014/main" id="{6CAFF7F4-7B8E-49B5-97C6-35E935FEBF39}"/>
-              </a:ext>
-            </a:extLst>
-          </p:cNvPr>
-          <p:cNvSpPr>
-            <a:spLocks xmlns:a="http://schemas.openxmlformats.org/drawingml/2006/main" noGrp="1"/>
-          </p:cNvSpPr>
-          <p:nvPr/>
-        </p:nvSpPr>
-        <p:spPr>
-          <a:xfrm xmlns:a="http://schemas.openxmlformats.org/drawingml/2006/main" rot="0">
-            <a:off x="7734300" y="4143375"/>
-            <a:ext cx="171450" cy="171450"/>
-          </a:xfrm>
-          <a:prstGeom xmlns:a="http://schemas.openxmlformats.org/drawingml/2006/main" prst="ellipse">
-            <a:avLst/>
-          </a:prstGeom>
-          <a:solidFill xmlns:a="http://schemas.openxmlformats.org/drawingml/2006/main">
-            <a:srgbClr val="257FA0"/>
-          </a:solidFill>
-          <a:ln xmlns:a="http://schemas.openxmlformats.org/drawingml/2006/main" w="7620">
-            <a:solidFill>
-              <a:srgbClr val="26355F"/>
-            </a:solidFill>
-            <a:prstDash val="solid"/>
-          </a:ln>
-        </p:spPr>
-      </p:sp>
-      <p:sp>
-        <p:nvSpPr>
-          <p:cNvPr id="86" name="allocation-slot-7">
-            <a:extLst xmlns:a="http://schemas.openxmlformats.org/drawingml/2006/main">
-              <a:ext uri="{FF2B5EF4-FFF2-40B4-BE49-F238E27FC236}">
-                <a16:creationId xmlns:a16="http://schemas.microsoft.com/office/drawing/2014/main" id="{F3AC57F6-B5F0-4BD0-BC68-97A14E666550}"/>
-              </a:ext>
-            </a:extLst>
-          </p:cNvPr>
-          <p:cNvSpPr>
-            <a:spLocks xmlns:a="http://schemas.openxmlformats.org/drawingml/2006/main" noGrp="1"/>
-          </p:cNvSpPr>
-          <p:nvPr/>
-        </p:nvSpPr>
-        <p:spPr>
-          <a:xfrm xmlns:a="http://schemas.openxmlformats.org/drawingml/2006/main" rot="0">
-            <a:off x="8020050" y="4010025"/>
-            <a:ext cx="352425" cy="438150"/>
-          </a:xfrm>
-          <a:prstGeom xmlns:a="http://schemas.openxmlformats.org/drawingml/2006/main" prst="rect">
-            <a:avLst/>
-          </a:prstGeom>
-          <a:solidFill xmlns:a="http://schemas.openxmlformats.org/drawingml/2006/main">
-            <a:srgbClr val="FFFFFF"/>
-          </a:solidFill>
-          <a:ln xmlns:a="http://schemas.openxmlformats.org/drawingml/2006/main" w="12383">
-            <a:solidFill>
-              <a:srgbClr val="26355F"/>
-            </a:solidFill>
-            <a:prstDash val="solid"/>
-          </a:ln>
-        </p:spPr>
-      </p:sp>
-      <p:sp>
-        <p:nvSpPr>
-          <p:cNvPr id="87" name="allocation-slot-token-7">
-            <a:extLst xmlns:a="http://schemas.openxmlformats.org/drawingml/2006/main">
-              <a:ext uri="{FF2B5EF4-FFF2-40B4-BE49-F238E27FC236}">
-                <a16:creationId xmlns:a16="http://schemas.microsoft.com/office/drawing/2014/main" id="{84F1A593-D14F-477D-A37C-717C1AC6A436}"/>
-              </a:ext>
-            </a:extLst>
-          </p:cNvPr>
-          <p:cNvSpPr>
-            <a:spLocks xmlns:a="http://schemas.openxmlformats.org/drawingml/2006/main" noGrp="1"/>
-          </p:cNvSpPr>
-          <p:nvPr/>
-        </p:nvSpPr>
-        <p:spPr>
-          <a:xfrm xmlns:a="http://schemas.openxmlformats.org/drawingml/2006/main" rot="0">
-            <a:off x="8105775" y="4143375"/>
-            <a:ext cx="171450" cy="171450"/>
-          </a:xfrm>
-          <a:prstGeom xmlns:a="http://schemas.openxmlformats.org/drawingml/2006/main" prst="diamond">
-            <a:avLst/>
-          </a:prstGeom>
-          <a:solidFill xmlns:a="http://schemas.openxmlformats.org/drawingml/2006/main">
-            <a:srgbClr val="765A8D"/>
-          </a:solidFill>
-          <a:ln xmlns:a="http://schemas.openxmlformats.org/drawingml/2006/main" w="7620">
-            <a:solidFill>
-              <a:srgbClr val="26355F"/>
-            </a:solidFill>
-            <a:prstDash val="solid"/>
-          </a:ln>
-        </p:spPr>
-      </p:sp>
-      <p:sp>
-        <p:nvSpPr>
-          <p:cNvPr id="88" name="allocation-slot-8">
-            <a:extLst xmlns:a="http://schemas.openxmlformats.org/drawingml/2006/main">
-              <a:ext uri="{FF2B5EF4-FFF2-40B4-BE49-F238E27FC236}">
-                <a16:creationId xmlns:a16="http://schemas.microsoft.com/office/drawing/2014/main" id="{0491A8AD-CCAE-44FE-B40D-0910B5D17688}"/>
-              </a:ext>
-            </a:extLst>
-          </p:cNvPr>
-          <p:cNvSpPr>
-            <a:spLocks xmlns:a="http://schemas.openxmlformats.org/drawingml/2006/main" noGrp="1"/>
-          </p:cNvSpPr>
-          <p:nvPr/>
-        </p:nvSpPr>
-        <p:spPr>
-          <a:xfrm xmlns:a="http://schemas.openxmlformats.org/drawingml/2006/main" rot="0">
-            <a:off x="8391525" y="4010025"/>
-            <a:ext cx="352425" cy="438150"/>
-          </a:xfrm>
-          <a:prstGeom xmlns:a="http://schemas.openxmlformats.org/drawingml/2006/main" prst="rect">
-            <a:avLst/>
-          </a:prstGeom>
-          <a:solidFill xmlns:a="http://schemas.openxmlformats.org/drawingml/2006/main">
-            <a:srgbClr val="FFFFFF"/>
-          </a:solidFill>
-          <a:ln xmlns:a="http://schemas.openxmlformats.org/drawingml/2006/main" w="12383">
-            <a:solidFill>
-              <a:srgbClr val="26355F"/>
-            </a:solidFill>
-            <a:prstDash val="solid"/>
-          </a:ln>
-        </p:spPr>
-      </p:sp>
-      <p:sp>
-        <p:nvSpPr>
-          <p:cNvPr id="89" name="allocation-slot-token-8">
-            <a:extLst xmlns:a="http://schemas.openxmlformats.org/drawingml/2006/main">
-              <a:ext uri="{FF2B5EF4-FFF2-40B4-BE49-F238E27FC236}">
-                <a16:creationId xmlns:a16="http://schemas.microsoft.com/office/drawing/2014/main" id="{9351BD83-88F7-4D48-B906-7DEB13D6576F}"/>
-              </a:ext>
-            </a:extLst>
-          </p:cNvPr>
-          <p:cNvSpPr>
-            <a:spLocks xmlns:a="http://schemas.openxmlformats.org/drawingml/2006/main" noGrp="1"/>
-          </p:cNvSpPr>
-          <p:nvPr/>
-        </p:nvSpPr>
-        <p:spPr>
-          <a:xfrm xmlns:a="http://schemas.openxmlformats.org/drawingml/2006/main" rot="0">
-            <a:off x="8477250" y="4143375"/>
-            <a:ext cx="171450" cy="171450"/>
-          </a:xfrm>
-          <a:prstGeom xmlns:a="http://schemas.openxmlformats.org/drawingml/2006/main" prst="rect">
-            <a:avLst/>
-          </a:prstGeom>
-          <a:solidFill xmlns:a="http://schemas.openxmlformats.org/drawingml/2006/main">
-            <a:srgbClr val="26355F"/>
-          </a:solidFill>
-          <a:ln xmlns:a="http://schemas.openxmlformats.org/drawingml/2006/main" w="0">
-            <a:noFill/>
-            <a:prstDash val="solid"/>
-          </a:ln>
-        </p:spPr>
-      </p:sp>
-      <p:sp>
-        <p:nvSpPr>
-          <p:cNvPr id="90" name="allocation-capacity-bracket">
-            <a:extLst xmlns:a="http://schemas.openxmlformats.org/drawingml/2006/main">
-              <a:ext uri="{FF2B5EF4-FFF2-40B4-BE49-F238E27FC236}">
-                <a16:creationId xmlns:a16="http://schemas.microsoft.com/office/drawing/2014/main" id="{CC938C59-ADB8-4969-9DF3-1FC3C16C5E56}"/>
-              </a:ext>
-            </a:extLst>
-          </p:cNvPr>
-          <p:cNvSpPr>
-            <a:spLocks xmlns:a="http://schemas.openxmlformats.org/drawingml/2006/main" noGrp="1"/>
-          </p:cNvSpPr>
-          <p:nvPr/>
-        </p:nvSpPr>
-        <p:spPr>
-          <a:xfrm xmlns:a="http://schemas.openxmlformats.org/drawingml/2006/main" flipH="0" flipV="0">
-            <a:off x="5791200" y="4552950"/>
-            <a:ext cx="2943225" cy="9525"/>
-          </a:xfrm>
-          <a:prstGeom xmlns:a="http://schemas.openxmlformats.org/drawingml/2006/main" prst="line">
-            <a:avLst/>
-          </a:prstGeom>
-          <a:noFill xmlns:a="http://schemas.openxmlformats.org/drawingml/2006/main"/>
-          <a:ln xmlns:a="http://schemas.openxmlformats.org/drawingml/2006/main" w="13335">
-            <a:solidFill>
-              <a:srgbClr val="26355F"/>
-            </a:solidFill>
-            <a:prstDash val="solid"/>
-          </a:ln>
-        </p:spPr>
-      </p:sp>
-      <p:sp>
-        <p:nvSpPr>
-          <p:cNvPr id="91" name="">
-            <a:extLst xmlns:a="http://schemas.openxmlformats.org/drawingml/2006/main">
-              <a:ext uri="{FF2B5EF4-FFF2-40B4-BE49-F238E27FC236}">
-                <a16:creationId xmlns:a16="http://schemas.microsoft.com/office/drawing/2014/main" id="{67015102-9F7F-499F-A380-907B0EA2BF4F}"/>
-              </a:ext>
-            </a:extLst>
-          </p:cNvPr>
-          <p:cNvSpPr>
-            <a:spLocks xmlns:a="http://schemas.openxmlformats.org/drawingml/2006/main" noGrp="1"/>
-          </p:cNvSpPr>
-          <p:nvPr/>
-        </p:nvSpPr>
-        <p:spPr>
-          <a:xfrm xmlns:a="http://schemas.openxmlformats.org/drawingml/2006/main" flipH="0" flipV="0">
-            <a:off x="5791200" y="4495800"/>
-            <a:ext cx="9525" cy="114300"/>
-          </a:xfrm>
-          <a:prstGeom xmlns:a="http://schemas.openxmlformats.org/drawingml/2006/main" prst="line">
-            <a:avLst/>
-          </a:prstGeom>
-          <a:noFill xmlns:a="http://schemas.openxmlformats.org/drawingml/2006/main"/>
-          <a:ln xmlns:a="http://schemas.openxmlformats.org/drawingml/2006/main" w="13335">
-            <a:solidFill>
-              <a:srgbClr val="26355F"/>
-            </a:solidFill>
-            <a:prstDash val="solid"/>
-          </a:ln>
-        </p:spPr>
-      </p:sp>
-      <p:sp>
-        <p:nvSpPr>
-          <p:cNvPr id="92" name="">
-            <a:extLst xmlns:a="http://schemas.openxmlformats.org/drawingml/2006/main">
-              <a:ext uri="{FF2B5EF4-FFF2-40B4-BE49-F238E27FC236}">
-                <a16:creationId xmlns:a16="http://schemas.microsoft.com/office/drawing/2014/main" id="{E9DE5E58-3466-46E0-867A-9C19B9E8C6B5}"/>
-              </a:ext>
-            </a:extLst>
-          </p:cNvPr>
-          <p:cNvSpPr>
-            <a:spLocks xmlns:a="http://schemas.openxmlformats.org/drawingml/2006/main" noGrp="1"/>
-          </p:cNvSpPr>
-          <p:nvPr/>
-        </p:nvSpPr>
-        <p:spPr>
-          <a:xfrm xmlns:a="http://schemas.openxmlformats.org/drawingml/2006/main" flipH="0" flipV="0">
-            <a:off x="8734425" y="4495800"/>
-            <a:ext cx="9525" cy="114300"/>
-          </a:xfrm>
-          <a:prstGeom xmlns:a="http://schemas.openxmlformats.org/drawingml/2006/main" prst="line">
-            <a:avLst/>
-          </a:prstGeom>
-          <a:noFill xmlns:a="http://schemas.openxmlformats.org/drawingml/2006/main"/>
-          <a:ln xmlns:a="http://schemas.openxmlformats.org/drawingml/2006/main" w="13335">
-            <a:solidFill>
-              <a:srgbClr val="26355F"/>
-            </a:solidFill>
-            <a:prstDash val="solid"/>
-          </a:ln>
-        </p:spPr>
-      </p:sp>
-      <p:sp>
-        <p:nvSpPr>
-          <p:cNvPr id="93" name="allocation-capacity-label">
-            <a:extLst xmlns:a="http://schemas.openxmlformats.org/drawingml/2006/main">
-              <a:ext uri="{FF2B5EF4-FFF2-40B4-BE49-F238E27FC236}">
-                <a16:creationId xmlns:a16="http://schemas.microsoft.com/office/drawing/2014/main" id="{98D08434-9B14-4046-9E42-74F999AA910C}"/>
-              </a:ext>
-            </a:extLst>
-          </p:cNvPr>
-          <p:cNvSpPr>
-            <a:spLocks xmlns:a="http://schemas.openxmlformats.org/drawingml/2006/main" noGrp="1"/>
-          </p:cNvSpPr>
-          <p:nvPr/>
-        </p:nvSpPr>
-        <p:spPr>
-          <a:xfrm xmlns:a="http://schemas.openxmlformats.org/drawingml/2006/main" rot="0">
-            <a:off x="6629400" y="4572000"/>
-            <a:ext cx="1276350" cy="209550"/>
-          </a:xfrm>
-          <a:prstGeom xmlns:a="http://schemas.openxmlformats.org/drawingml/2006/main" prst="rect">
-            <a:avLst/>
-          </a:prstGeom>
-          <a:noFill xmlns:a="http://schemas.openxmlformats.org/drawingml/2006/main"/>
-          <a:ln xmlns:a="http://schemas.openxmlformats.org/drawingml/2006/main" w="0">
-            <a:noFill/>
-            <a:prstDash val="solid"/>
-          </a:ln>
-        </p:spPr>
-        <p:txBody>
-          <a:bodyPr xmlns:a="http://schemas.openxmlformats.org/drawingml/2006/main" wrap="square" lIns="19050" tIns="9525" rIns="19050" bIns="9525" anchor="ctr">
-            <a:normAutofit fontScale="100000"/>
-          </a:bodyPr>
-          <a:lstStyle xmlns:a="http://schemas.openxmlformats.org/drawingml/2006/main"/>
-          <a:p xmlns:a="http://schemas.openxmlformats.org/drawingml/2006/main">
-            <a:pPr algn="ctr">
-              <a:defRPr sz="1050" b="1">
-                <a:solidFill>
-                  <a:srgbClr val="26355F"/>
-                </a:solidFill>
-                <a:latin typeface="Arial"/>
-                <a:ea typeface="Arial"/>
-                <a:cs typeface="Arial"/>
-              </a:defRPr>
-            </a:pPr>
-            <a:r>
-              <a:rPr sz="1050" b="1">
-                <a:solidFill>
-                  <a:srgbClr val="26355F"/>
-                </a:solidFill>
-                <a:latin typeface="Arial"/>
-                <a:ea typeface="Arial"/>
-                <a:cs typeface="Arial"/>
-              </a:rPr>
-              <a:t>fixed capacity</a:t>
-            </a:r>
-          </a:p>
-        </p:txBody>
-      </p:sp>
-      <p:sp>
-        <p:nvSpPr>
-          <p:cNvPr id="94" name="allocation-note">
-            <a:extLst xmlns:a="http://schemas.openxmlformats.org/drawingml/2006/main">
-              <a:ext uri="{FF2B5EF4-FFF2-40B4-BE49-F238E27FC236}">
-                <a16:creationId xmlns:a16="http://schemas.microsoft.com/office/drawing/2014/main" id="{36EF5093-4CDE-4DCD-92C8-A92D02C59D93}"/>
-              </a:ext>
-            </a:extLst>
-          </p:cNvPr>
-          <p:cNvSpPr>
-            <a:spLocks xmlns:a="http://schemas.openxmlformats.org/drawingml/2006/main" noGrp="1"/>
-          </p:cNvSpPr>
-          <p:nvPr/>
-        </p:nvSpPr>
-        <p:spPr>
-          <a:xfrm xmlns:a="http://schemas.openxmlformats.org/drawingml/2006/main" rot="0">
-            <a:off x="5314950" y="4714875"/>
-            <a:ext cx="3905250" cy="285750"/>
-          </a:xfrm>
-          <a:prstGeom xmlns:a="http://schemas.openxmlformats.org/drawingml/2006/main" prst="rect">
-            <a:avLst/>
-          </a:prstGeom>
-          <a:noFill xmlns:a="http://schemas.openxmlformats.org/drawingml/2006/main"/>
-          <a:ln xmlns:a="http://schemas.openxmlformats.org/drawingml/2006/main" w="0">
-            <a:noFill/>
-            <a:prstDash val="solid"/>
-          </a:ln>
-        </p:spPr>
-        <p:txBody>
-          <a:bodyPr xmlns:a="http://schemas.openxmlformats.org/drawingml/2006/main" wrap="square" lIns="19050" tIns="9525" rIns="19050" bIns="9525" anchor="ctr">
-            <a:normAutofit fontScale="76853"/>
-          </a:bodyPr>
-          <a:lstStyle xmlns:a="http://schemas.openxmlformats.org/drawingml/2006/main"/>
-          <a:p xmlns:a="http://schemas.openxmlformats.org/drawingml/2006/main">
-            <a:pPr algn="ctr">
-              <a:defRPr sz="1200" b="0">
-                <a:solidFill>
-                  <a:srgbClr val="637077"/>
-                </a:solidFill>
-                <a:latin typeface="Arial"/>
-                <a:ea typeface="Arial"/>
-                <a:cs typeface="Arial"/>
-              </a:defRPr>
-            </a:pPr>
-            <a:r>
-              <a:rPr sz="1200" b="0">
-                <a:solidFill>
-                  <a:srgbClr val="637077"/>
-                </a:solidFill>
-                <a:latin typeface="Arial"/>
-                <a:ea typeface="Arial"/>
-                <a:cs typeface="Arial"/>
-              </a:rPr>
-              <a:t>Deduplicate before fill; unused reserve capacity returns to the global order.</a:t>
-            </a:r>
-          </a:p>
-        </p:txBody>
-      </p:sp>
-      <p:sp>
-        <p:nvSpPr>
-          <p:cNvPr id="95" name="output-heading">
-            <a:extLst xmlns:a="http://schemas.openxmlformats.org/drawingml/2006/main">
-              <a:ext uri="{FF2B5EF4-FFF2-40B4-BE49-F238E27FC236}">
-                <a16:creationId xmlns:a16="http://schemas.microsoft.com/office/drawing/2014/main" id="{3CD4D5E6-0656-4C50-926E-DD7DF8C5F6A8}"/>
-              </a:ext>
-            </a:extLst>
-          </p:cNvPr>
-          <p:cNvSpPr>
-            <a:spLocks xmlns:a="http://schemas.openxmlformats.org/drawingml/2006/main" noGrp="1"/>
-          </p:cNvSpPr>
-          <p:nvPr/>
-        </p:nvSpPr>
-        <p:spPr>
-          <a:xfrm xmlns:a="http://schemas.openxmlformats.org/drawingml/2006/main" rot="0">
-            <a:off x="9734550" y="1428750"/>
-            <a:ext cx="1847850" cy="323850"/>
-          </a:xfrm>
-          <a:prstGeom xmlns:a="http://schemas.openxmlformats.org/drawingml/2006/main" prst="rect">
-            <a:avLst/>
-          </a:prstGeom>
-          <a:noFill xmlns:a="http://schemas.openxmlformats.org/drawingml/2006/main"/>
-          <a:ln xmlns:a="http://schemas.openxmlformats.org/drawingml/2006/main" w="0">
-            <a:noFill/>
-            <a:prstDash val="solid"/>
-          </a:ln>
-        </p:spPr>
-        <p:txBody>
-          <a:bodyPr xmlns:a="http://schemas.openxmlformats.org/drawingml/2006/main" wrap="square" lIns="19050" tIns="9525" rIns="19050" bIns="9525" anchor="ctr">
-            <a:normAutofit fontScale="100000"/>
-          </a:bodyPr>
-          <a:lstStyle xmlns:a="http://schemas.openxmlformats.org/drawingml/2006/main"/>
-          <a:p xmlns:a="http://schemas.openxmlformats.org/drawingml/2006/main">
-            <a:pPr algn="ctr">
-              <a:defRPr sz="1725" b="1">
-                <a:solidFill>
-                  <a:srgbClr val="765A8D"/>
-                </a:solidFill>
-                <a:latin typeface="Arial"/>
-                <a:ea typeface="Arial"/>
-                <a:cs typeface="Arial"/>
-              </a:defRPr>
-            </a:pPr>
-            <a:r>
-              <a:rPr sz="1725" b="1">
-                <a:solidFill>
-                  <a:srgbClr val="765A8D"/>
-                </a:solidFill>
-                <a:latin typeface="Arial"/>
-                <a:ea typeface="Arial"/>
-                <a:cs typeface="Arial"/>
-              </a:rPr>
-              <a:t>Queue result</a:t>
-            </a:r>
-          </a:p>
-        </p:txBody>
-      </p:sp>
-      <p:sp>
-        <p:nvSpPr>
-          <p:cNvPr id="96" name="output-caption">
-            <a:extLst xmlns:a="http://schemas.openxmlformats.org/drawingml/2006/main">
-              <a:ext uri="{FF2B5EF4-FFF2-40B4-BE49-F238E27FC236}">
-                <a16:creationId xmlns:a16="http://schemas.microsoft.com/office/drawing/2014/main" id="{99683E0D-D3C4-4AAA-B396-9D4F54491D9A}"/>
-              </a:ext>
-            </a:extLst>
-          </p:cNvPr>
-          <p:cNvSpPr>
-            <a:spLocks xmlns:a="http://schemas.openxmlformats.org/drawingml/2006/main" noGrp="1"/>
-          </p:cNvSpPr>
-          <p:nvPr/>
-        </p:nvSpPr>
-        <p:spPr>
-          <a:xfrm xmlns:a="http://schemas.openxmlformats.org/drawingml/2006/main" rot="0">
-            <a:off x="9734550" y="1771650"/>
-            <a:ext cx="1847850" cy="304800"/>
-          </a:xfrm>
-          <a:prstGeom xmlns:a="http://schemas.openxmlformats.org/drawingml/2006/main" prst="rect">
-            <a:avLst/>
-          </a:prstGeom>
-          <a:noFill xmlns:a="http://schemas.openxmlformats.org/drawingml/2006/main"/>
-          <a:ln xmlns:a="http://schemas.openxmlformats.org/drawingml/2006/main" w="0">
-            <a:noFill/>
-            <a:prstDash val="solid"/>
-          </a:ln>
-        </p:spPr>
-        <p:txBody>
-          <a:bodyPr xmlns:a="http://schemas.openxmlformats.org/drawingml/2006/main" wrap="square" lIns="19050" tIns="9525" rIns="19050" bIns="9525" anchor="ctr">
-            <a:normAutofit fontScale="96078"/>
-          </a:bodyPr>
-          <a:lstStyle xmlns:a="http://schemas.openxmlformats.org/drawingml/2006/main"/>
-          <a:p xmlns:a="http://schemas.openxmlformats.org/drawingml/2006/main">
-            <a:pPr algn="ctr">
-              <a:defRPr sz="1200" b="0">
-                <a:solidFill>
-                  <a:srgbClr val="637077"/>
-                </a:solidFill>
-                <a:latin typeface="Arial"/>
-                <a:ea typeface="Arial"/>
-                <a:cs typeface="Arial"/>
-              </a:defRPr>
-            </a:pPr>
-            <a:r>
-              <a:rPr sz="1200" b="0">
-                <a:solidFill>
-                  <a:srgbClr val="637077"/>
-                </a:solidFill>
-                <a:latin typeface="Arial"/>
-                <a:ea typeface="Arial"/>
-                <a:cs typeface="Arial"/>
-              </a:rPr>
-              <a:t>selected_ids and slot ledger</a:t>
-            </a:r>
-          </a:p>
-        </p:txBody>
-      </p:sp>
-      <p:sp>
-        <p:nvSpPr>
-          <p:cNvPr id="97" name="queue-result-ledger">
-            <a:extLst xmlns:a="http://schemas.openxmlformats.org/drawingml/2006/main">
-              <a:ext uri="{FF2B5EF4-FFF2-40B4-BE49-F238E27FC236}">
-                <a16:creationId xmlns:a16="http://schemas.microsoft.com/office/drawing/2014/main" id="{955D2519-43DB-4EB7-BA1B-7D2313EF8545}"/>
-              </a:ext>
-            </a:extLst>
-          </p:cNvPr>
-          <p:cNvSpPr>
-            <a:spLocks xmlns:a="http://schemas.openxmlformats.org/drawingml/2006/main" noGrp="1"/>
-          </p:cNvSpPr>
-          <p:nvPr/>
-        </p:nvSpPr>
-        <p:spPr>
-          <a:xfrm xmlns:a="http://schemas.openxmlformats.org/drawingml/2006/main" rot="0">
-            <a:off x="9734550" y="2209800"/>
-            <a:ext cx="1847850" cy="1676400"/>
-          </a:xfrm>
-          <a:prstGeom xmlns:a="http://schemas.openxmlformats.org/drawingml/2006/main" prst="rect">
-            <a:avLst/>
-          </a:prstGeom>
-          <a:solidFill xmlns:a="http://schemas.openxmlformats.org/drawingml/2006/main">
-            <a:srgbClr val="FFFFFF"/>
-          </a:solidFill>
-          <a:ln xmlns:a="http://schemas.openxmlformats.org/drawingml/2006/main" w="16193">
-            <a:solidFill>
-              <a:srgbClr val="26355F"/>
-            </a:solidFill>
-            <a:prstDash val="solid"/>
-          </a:ln>
-        </p:spPr>
-      </p:sp>
-      <p:sp>
-        <p:nvSpPr>
-          <p:cNvPr id="98" name="queue-result-header">
-            <a:extLst xmlns:a="http://schemas.openxmlformats.org/drawingml/2006/main">
-              <a:ext uri="{FF2B5EF4-FFF2-40B4-BE49-F238E27FC236}">
-                <a16:creationId xmlns:a16="http://schemas.microsoft.com/office/drawing/2014/main" id="{96FB29E3-2372-4B95-89B9-6A4A47BB5527}"/>
-              </a:ext>
-            </a:extLst>
-          </p:cNvPr>
-          <p:cNvSpPr>
-            <a:spLocks xmlns:a="http://schemas.openxmlformats.org/drawingml/2006/main" noGrp="1"/>
-          </p:cNvSpPr>
-          <p:nvPr/>
-        </p:nvSpPr>
-        <p:spPr>
-          <a:xfrm xmlns:a="http://schemas.openxmlformats.org/drawingml/2006/main" rot="0">
-            <a:off x="9734550" y="2209800"/>
-            <a:ext cx="1847850" cy="361950"/>
-          </a:xfrm>
-          <a:prstGeom xmlns:a="http://schemas.openxmlformats.org/drawingml/2006/main" prst="rect">
-            <a:avLst/>
-          </a:prstGeom>
-          <a:solidFill xmlns:a="http://schemas.openxmlformats.org/drawingml/2006/main">
-            <a:srgbClr val="EEEAF3"/>
-          </a:solidFill>
-          <a:ln xmlns:a="http://schemas.openxmlformats.org/drawingml/2006/main" w="11430">
-            <a:solidFill>
-              <a:srgbClr val="26355F"/>
-            </a:solidFill>
-            <a:prstDash val="solid"/>
-          </a:ln>
-        </p:spPr>
-      </p:sp>
-      <p:sp>
-        <p:nvSpPr>
-          <p:cNvPr id="99" name="queue-result-title">
-            <a:extLst xmlns:a="http://schemas.openxmlformats.org/drawingml/2006/main">
-              <a:ext uri="{FF2B5EF4-FFF2-40B4-BE49-F238E27FC236}">
-                <a16:creationId xmlns:a16="http://schemas.microsoft.com/office/drawing/2014/main" id="{5665436B-D095-4D2D-A243-DABB23E19AF2}"/>
-              </a:ext>
-            </a:extLst>
-          </p:cNvPr>
-          <p:cNvSpPr>
-            <a:spLocks xmlns:a="http://schemas.openxmlformats.org/drawingml/2006/main" noGrp="1"/>
-          </p:cNvSpPr>
-          <p:nvPr/>
-        </p:nvSpPr>
-        <p:spPr>
-          <a:xfrm xmlns:a="http://schemas.openxmlformats.org/drawingml/2006/main" rot="0">
-            <a:off x="9848850" y="2247900"/>
-            <a:ext cx="1619250" cy="276225"/>
-          </a:xfrm>
-          <a:prstGeom xmlns:a="http://schemas.openxmlformats.org/drawingml/2006/main" prst="rect">
-            <a:avLst/>
-          </a:prstGeom>
-          <a:noFill xmlns:a="http://schemas.openxmlformats.org/drawingml/2006/main"/>
-          <a:ln xmlns:a="http://schemas.openxmlformats.org/drawingml/2006/main" w="0">
-            <a:noFill/>
-            <a:prstDash val="solid"/>
-          </a:ln>
-        </p:spPr>
-        <p:txBody>
-          <a:bodyPr xmlns:a="http://schemas.openxmlformats.org/drawingml/2006/main" wrap="square" lIns="19050" tIns="9525" rIns="19050" bIns="9525" anchor="ctr">
-            <a:normAutofit fontScale="100000"/>
-          </a:bodyPr>
-          <a:lstStyle xmlns:a="http://schemas.openxmlformats.org/drawingml/2006/main"/>
-          <a:p xmlns:a="http://schemas.openxmlformats.org/drawingml/2006/main">
-            <a:pPr algn="l">
-              <a:defRPr sz="1200" b="1">
-                <a:solidFill>
-                  <a:srgbClr val="26355F"/>
-                </a:solidFill>
-                <a:latin typeface="Arial"/>
-                <a:ea typeface="Arial"/>
-                <a:cs typeface="Arial"/>
-              </a:defRPr>
-            </a:pPr>
-            <a:r>
-              <a:rPr sz="1200" b="1">
-                <a:solidFill>
-                  <a:srgbClr val="26355F"/>
-                </a:solidFill>
-                <a:latin typeface="Arial"/>
-                <a:ea typeface="Arial"/>
-                <a:cs typeface="Arial"/>
-              </a:rPr>
-              <a:t>QueueResult</a:t>
-            </a:r>
-          </a:p>
-        </p:txBody>
-      </p:sp>
-      <p:sp>
-        <p:nvSpPr>
-          <p:cNvPr id="100" name="selected-ids-label">
-            <a:extLst xmlns:a="http://schemas.openxmlformats.org/drawingml/2006/main">
-              <a:ext uri="{FF2B5EF4-FFF2-40B4-BE49-F238E27FC236}">
-                <a16:creationId xmlns:a16="http://schemas.microsoft.com/office/drawing/2014/main" id="{7955624E-1FC1-4596-BA98-BE5EFBBBB733}"/>
-              </a:ext>
-            </a:extLst>
-          </p:cNvPr>
-          <p:cNvSpPr>
-            <a:spLocks xmlns:a="http://schemas.openxmlformats.org/drawingml/2006/main" noGrp="1"/>
-          </p:cNvSpPr>
-          <p:nvPr/>
-        </p:nvSpPr>
-        <p:spPr>
-          <a:xfrm xmlns:a="http://schemas.openxmlformats.org/drawingml/2006/main" rot="0">
-            <a:off x="9848850" y="2667000"/>
-            <a:ext cx="1619250" cy="228600"/>
-          </a:xfrm>
-          <a:prstGeom xmlns:a="http://schemas.openxmlformats.org/drawingml/2006/main" prst="rect">
-            <a:avLst/>
-          </a:prstGeom>
-          <a:noFill xmlns:a="http://schemas.openxmlformats.org/drawingml/2006/main"/>
-          <a:ln xmlns:a="http://schemas.openxmlformats.org/drawingml/2006/main" w="0">
-            <a:noFill/>
-            <a:prstDash val="solid"/>
-          </a:ln>
-        </p:spPr>
-        <p:txBody>
-          <a:bodyPr xmlns:a="http://schemas.openxmlformats.org/drawingml/2006/main" wrap="square" lIns="19050" tIns="9525" rIns="19050" bIns="9525" anchor="ctr">
-            <a:normAutofit fontScale="100000"/>
-          </a:bodyPr>
-          <a:lstStyle xmlns:a="http://schemas.openxmlformats.org/drawingml/2006/main"/>
-          <a:p xmlns:a="http://schemas.openxmlformats.org/drawingml/2006/main">
-            <a:pPr algn="l">
-              <a:defRPr sz="1200" b="1">
-                <a:solidFill>
-                  <a:srgbClr val="172027"/>
-                </a:solidFill>
-                <a:latin typeface="Arial"/>
-                <a:ea typeface="Arial"/>
-                <a:cs typeface="Arial"/>
-              </a:defRPr>
-            </a:pPr>
-            <a:r>
-              <a:rPr sz="1200" b="1">
-                <a:solidFill>
-                  <a:srgbClr val="172027"/>
-                </a:solidFill>
-                <a:latin typeface="Arial"/>
-                <a:ea typeface="Arial"/>
-                <a:cs typeface="Arial"/>
-              </a:rPr>
-              <a:t>selected_ids</a:t>
-            </a:r>
-          </a:p>
-        </p:txBody>
-      </p:sp>
-      <p:sp>
-        <p:nvSpPr>
-          <p:cNvPr id="101" name="result-token-1">
-            <a:extLst xmlns:a="http://schemas.openxmlformats.org/drawingml/2006/main">
-              <a:ext uri="{FF2B5EF4-FFF2-40B4-BE49-F238E27FC236}">
-                <a16:creationId xmlns:a16="http://schemas.microsoft.com/office/drawing/2014/main" id="{7A41647B-ED4F-4E55-B9CA-FD4D491539C3}"/>
-              </a:ext>
-            </a:extLst>
-          </p:cNvPr>
-          <p:cNvSpPr>
-            <a:spLocks xmlns:a="http://schemas.openxmlformats.org/drawingml/2006/main" noGrp="1"/>
-          </p:cNvSpPr>
-          <p:nvPr/>
-        </p:nvSpPr>
-        <p:spPr>
-          <a:xfrm xmlns:a="http://schemas.openxmlformats.org/drawingml/2006/main" rot="0">
-            <a:off x="9886950" y="2971800"/>
-            <a:ext cx="152400" cy="152400"/>
-          </a:xfrm>
-          <a:prstGeom xmlns:a="http://schemas.openxmlformats.org/drawingml/2006/main" prst="ellipse">
-            <a:avLst/>
-          </a:prstGeom>
-          <a:solidFill xmlns:a="http://schemas.openxmlformats.org/drawingml/2006/main">
-            <a:srgbClr val="257FA0"/>
-          </a:solidFill>
-          <a:ln xmlns:a="http://schemas.openxmlformats.org/drawingml/2006/main" w="7620">
-            <a:solidFill>
-              <a:srgbClr val="26355F"/>
-            </a:solidFill>
-            <a:prstDash val="solid"/>
-          </a:ln>
-        </p:spPr>
-      </p:sp>
-      <p:sp>
-        <p:nvSpPr>
-          <p:cNvPr id="102" name="result-token-2">
-            <a:extLst xmlns:a="http://schemas.openxmlformats.org/drawingml/2006/main">
-              <a:ext uri="{FF2B5EF4-FFF2-40B4-BE49-F238E27FC236}">
-                <a16:creationId xmlns:a16="http://schemas.microsoft.com/office/drawing/2014/main" id="{6A65457E-3519-4C83-8C89-EA592C53FEDC}"/>
-              </a:ext>
-            </a:extLst>
-          </p:cNvPr>
-          <p:cNvSpPr>
-            <a:spLocks xmlns:a="http://schemas.openxmlformats.org/drawingml/2006/main" noGrp="1"/>
-          </p:cNvSpPr>
-          <p:nvPr/>
-        </p:nvSpPr>
-        <p:spPr>
-          <a:xfrm xmlns:a="http://schemas.openxmlformats.org/drawingml/2006/main" rot="0">
-            <a:off x="10153650" y="2971800"/>
-            <a:ext cx="152400" cy="152400"/>
-          </a:xfrm>
-          <a:prstGeom xmlns:a="http://schemas.openxmlformats.org/drawingml/2006/main" prst="diamond">
-            <a:avLst/>
-          </a:prstGeom>
-          <a:solidFill xmlns:a="http://schemas.openxmlformats.org/drawingml/2006/main">
-            <a:srgbClr val="765A8D"/>
-          </a:solidFill>
-          <a:ln xmlns:a="http://schemas.openxmlformats.org/drawingml/2006/main" w="7620">
-            <a:solidFill>
-              <a:srgbClr val="26355F"/>
-            </a:solidFill>
-            <a:prstDash val="solid"/>
-          </a:ln>
-        </p:spPr>
-      </p:sp>
-      <p:sp>
-        <p:nvSpPr>
-          <p:cNvPr id="103" name="result-token-3">
-            <a:extLst xmlns:a="http://schemas.openxmlformats.org/drawingml/2006/main">
-              <a:ext uri="{FF2B5EF4-FFF2-40B4-BE49-F238E27FC236}">
-                <a16:creationId xmlns:a16="http://schemas.microsoft.com/office/drawing/2014/main" id="{DE2A451C-A3B6-4509-93D4-95222B586D80}"/>
-              </a:ext>
-            </a:extLst>
-          </p:cNvPr>
-          <p:cNvSpPr>
-            <a:spLocks xmlns:a="http://schemas.openxmlformats.org/drawingml/2006/main" noGrp="1"/>
-          </p:cNvSpPr>
-          <p:nvPr/>
-        </p:nvSpPr>
-        <p:spPr>
-          <a:xfrm xmlns:a="http://schemas.openxmlformats.org/drawingml/2006/main" rot="0">
-            <a:off x="10420350" y="2971800"/>
-            <a:ext cx="152400" cy="152400"/>
-          </a:xfrm>
-          <a:prstGeom xmlns:a="http://schemas.openxmlformats.org/drawingml/2006/main" prst="rect">
-            <a:avLst/>
-          </a:prstGeom>
-          <a:solidFill xmlns:a="http://schemas.openxmlformats.org/drawingml/2006/main">
-            <a:srgbClr val="26355F"/>
-          </a:solidFill>
-          <a:ln xmlns:a="http://schemas.openxmlformats.org/drawingml/2006/main" w="0">
-            <a:noFill/>
-            <a:prstDash val="solid"/>
-          </a:ln>
-        </p:spPr>
-      </p:sp>
-      <p:sp>
-        <p:nvSpPr>
-          <p:cNvPr id="104" name="result-token-4">
-            <a:extLst xmlns:a="http://schemas.openxmlformats.org/drawingml/2006/main">
-              <a:ext uri="{FF2B5EF4-FFF2-40B4-BE49-F238E27FC236}">
-                <a16:creationId xmlns:a16="http://schemas.microsoft.com/office/drawing/2014/main" id="{4F026F76-6193-4F57-9FD8-5F998CC1B8B0}"/>
-              </a:ext>
-            </a:extLst>
-          </p:cNvPr>
-          <p:cNvSpPr>
-            <a:spLocks xmlns:a="http://schemas.openxmlformats.org/drawingml/2006/main" noGrp="1"/>
-          </p:cNvSpPr>
-          <p:nvPr/>
-        </p:nvSpPr>
-        <p:spPr>
-          <a:xfrm xmlns:a="http://schemas.openxmlformats.org/drawingml/2006/main" rot="0">
-            <a:off x="10687050" y="2971800"/>
-            <a:ext cx="152400" cy="152400"/>
-          </a:xfrm>
-          <a:prstGeom xmlns:a="http://schemas.openxmlformats.org/drawingml/2006/main" prst="ellipse">
-            <a:avLst/>
-          </a:prstGeom>
-          <a:solidFill xmlns:a="http://schemas.openxmlformats.org/drawingml/2006/main">
-            <a:srgbClr val="257FA0"/>
-          </a:solidFill>
-          <a:ln xmlns:a="http://schemas.openxmlformats.org/drawingml/2006/main" w="7620">
-            <a:solidFill>
-              <a:srgbClr val="26355F"/>
-            </a:solidFill>
-            <a:prstDash val="solid"/>
-          </a:ln>
-        </p:spPr>
-      </p:sp>
-      <p:sp>
-        <p:nvSpPr>
-          <p:cNvPr id="105" name="result-divider">
-            <a:extLst xmlns:a="http://schemas.openxmlformats.org/drawingml/2006/main">
-              <a:ext uri="{FF2B5EF4-FFF2-40B4-BE49-F238E27FC236}">
-                <a16:creationId xmlns:a16="http://schemas.microsoft.com/office/drawing/2014/main" id="{9DFF66F4-9F4A-45D3-9F93-3F97F64F952F}"/>
-              </a:ext>
-            </a:extLst>
-          </p:cNvPr>
-          <p:cNvSpPr>
-            <a:spLocks xmlns:a="http://schemas.openxmlformats.org/drawingml/2006/main" noGrp="1"/>
-          </p:cNvSpPr>
-          <p:nvPr/>
-        </p:nvSpPr>
-        <p:spPr>
-          <a:xfrm xmlns:a="http://schemas.openxmlformats.org/drawingml/2006/main" flipH="0" flipV="0">
-            <a:off x="9848850" y="3267075"/>
-            <a:ext cx="1619250" cy="9525"/>
-          </a:xfrm>
-          <a:prstGeom xmlns:a="http://schemas.openxmlformats.org/drawingml/2006/main" prst="line">
-            <a:avLst/>
-          </a:prstGeom>
-          <a:noFill xmlns:a="http://schemas.openxmlformats.org/drawingml/2006/main"/>
-          <a:ln xmlns:a="http://schemas.openxmlformats.org/drawingml/2006/main" w="9525">
-            <a:solidFill>
-              <a:srgbClr val="CAD3D4"/>
-            </a:solidFill>
-            <a:prstDash val="solid"/>
-          </a:ln>
-        </p:spPr>
-      </p:sp>
-      <p:sp>
-        <p:nvSpPr>
-          <p:cNvPr id="106" name="ledger-slot-header">
-            <a:extLst xmlns:a="http://schemas.openxmlformats.org/drawingml/2006/main">
-              <a:ext uri="{FF2B5EF4-FFF2-40B4-BE49-F238E27FC236}">
-                <a16:creationId xmlns:a16="http://schemas.microsoft.com/office/drawing/2014/main" id="{9BDF3BD9-235A-474F-8E1C-C9A3B802297C}"/>
-              </a:ext>
-            </a:extLst>
-          </p:cNvPr>
-          <p:cNvSpPr>
-            <a:spLocks xmlns:a="http://schemas.openxmlformats.org/drawingml/2006/main" noGrp="1"/>
-          </p:cNvSpPr>
-          <p:nvPr/>
-        </p:nvSpPr>
-        <p:spPr>
-          <a:xfrm xmlns:a="http://schemas.openxmlformats.org/drawingml/2006/main" rot="0">
-            <a:off x="9867900" y="3343275"/>
-            <a:ext cx="381000" cy="209550"/>
-          </a:xfrm>
-          <a:prstGeom xmlns:a="http://schemas.openxmlformats.org/drawingml/2006/main" prst="rect">
-            <a:avLst/>
-          </a:prstGeom>
-          <a:noFill xmlns:a="http://schemas.openxmlformats.org/drawingml/2006/main"/>
-          <a:ln xmlns:a="http://schemas.openxmlformats.org/drawingml/2006/main" w="0">
-            <a:noFill/>
-            <a:prstDash val="solid"/>
-          </a:ln>
-        </p:spPr>
-        <p:txBody>
-          <a:bodyPr xmlns:a="http://schemas.openxmlformats.org/drawingml/2006/main" wrap="square" lIns="19050" tIns="9525" rIns="19050" bIns="9525" anchor="ctr">
-            <a:normAutofit fontScale="100000"/>
-          </a:bodyPr>
-          <a:lstStyle xmlns:a="http://schemas.openxmlformats.org/drawingml/2006/main"/>
-          <a:p xmlns:a="http://schemas.openxmlformats.org/drawingml/2006/main">
-            <a:pPr algn="l">
-              <a:defRPr sz="1050" b="1">
-                <a:solidFill>
-                  <a:srgbClr val="637077"/>
-                </a:solidFill>
-                <a:latin typeface="Arial"/>
-                <a:ea typeface="Arial"/>
-                <a:cs typeface="Arial"/>
-              </a:defRPr>
-            </a:pPr>
-            <a:r>
-              <a:rPr sz="1050" b="1">
-                <a:solidFill>
-                  <a:srgbClr val="637077"/>
-                </a:solidFill>
-                <a:latin typeface="Arial"/>
-                <a:ea typeface="Arial"/>
-                <a:cs typeface="Arial"/>
-              </a:rPr>
-              <a:t>slot</a:t>
-            </a:r>
-          </a:p>
-        </p:txBody>
-      </p:sp>
-      <p:sp>
-        <p:nvSpPr>
-          <p:cNvPr id="107" name="ledger-source-header">
-            <a:extLst xmlns:a="http://schemas.openxmlformats.org/drawingml/2006/main">
-              <a:ext uri="{FF2B5EF4-FFF2-40B4-BE49-F238E27FC236}">
-                <a16:creationId xmlns:a16="http://schemas.microsoft.com/office/drawing/2014/main" id="{B87A7A4B-68C9-4C78-980B-896801C1B723}"/>
-              </a:ext>
-            </a:extLst>
-          </p:cNvPr>
-          <p:cNvSpPr>
-            <a:spLocks xmlns:a="http://schemas.openxmlformats.org/drawingml/2006/main" noGrp="1"/>
-          </p:cNvSpPr>
-          <p:nvPr/>
-        </p:nvSpPr>
-        <p:spPr>
-          <a:xfrm xmlns:a="http://schemas.openxmlformats.org/drawingml/2006/main" rot="0">
-            <a:off x="10515600" y="3343275"/>
-            <a:ext cx="876300" cy="209550"/>
-          </a:xfrm>
-          <a:prstGeom xmlns:a="http://schemas.openxmlformats.org/drawingml/2006/main" prst="rect">
-            <a:avLst/>
-          </a:prstGeom>
-          <a:noFill xmlns:a="http://schemas.openxmlformats.org/drawingml/2006/main"/>
-          <a:ln xmlns:a="http://schemas.openxmlformats.org/drawingml/2006/main" w="0">
-            <a:noFill/>
-            <a:prstDash val="solid"/>
-          </a:ln>
-        </p:spPr>
-        <p:txBody>
-          <a:bodyPr xmlns:a="http://schemas.openxmlformats.org/drawingml/2006/main" wrap="square" lIns="19050" tIns="9525" rIns="19050" bIns="9525" anchor="ctr">
-            <a:normAutofit fontScale="100000"/>
-          </a:bodyPr>
-          <a:lstStyle xmlns:a="http://schemas.openxmlformats.org/drawingml/2006/main"/>
-          <a:p xmlns:a="http://schemas.openxmlformats.org/drawingml/2006/main">
-            <a:pPr algn="l">
-              <a:defRPr sz="1050" b="1">
-                <a:solidFill>
-                  <a:srgbClr val="637077"/>
-                </a:solidFill>
-                <a:latin typeface="Arial"/>
-                <a:ea typeface="Arial"/>
-                <a:cs typeface="Arial"/>
-              </a:defRPr>
-            </a:pPr>
-            <a:r>
-              <a:rPr sz="1050" b="1">
-                <a:solidFill>
-                  <a:srgbClr val="637077"/>
-                </a:solidFill>
-                <a:latin typeface="Arial"/>
-                <a:ea typeface="Arial"/>
-                <a:cs typeface="Arial"/>
-              </a:rPr>
-              <a:t>source</a:t>
-            </a:r>
-          </a:p>
-        </p:txBody>
-      </p:sp>
-      <p:sp>
-        <p:nvSpPr>
-          <p:cNvPr id="108" name="ledger-slot-1">
-            <a:extLst xmlns:a="http://schemas.openxmlformats.org/drawingml/2006/main">
-              <a:ext uri="{FF2B5EF4-FFF2-40B4-BE49-F238E27FC236}">
-                <a16:creationId xmlns:a16="http://schemas.microsoft.com/office/drawing/2014/main" id="{1C13A40B-B5B6-49B4-85B4-8642BA441A2C}"/>
-              </a:ext>
-            </a:extLst>
-          </p:cNvPr>
-          <p:cNvSpPr>
-            <a:spLocks xmlns:a="http://schemas.openxmlformats.org/drawingml/2006/main" noGrp="1"/>
-          </p:cNvSpPr>
-          <p:nvPr/>
-        </p:nvSpPr>
-        <p:spPr>
-          <a:xfrm xmlns:a="http://schemas.openxmlformats.org/drawingml/2006/main" rot="0">
-            <a:off x="9867900" y="3600450"/>
-            <a:ext cx="381000" cy="209550"/>
-          </a:xfrm>
-          <a:prstGeom xmlns:a="http://schemas.openxmlformats.org/drawingml/2006/main" prst="rect">
-            <a:avLst/>
-          </a:prstGeom>
-          <a:noFill xmlns:a="http://schemas.openxmlformats.org/drawingml/2006/main"/>
-          <a:ln xmlns:a="http://schemas.openxmlformats.org/drawingml/2006/main" w="0">
-            <a:noFill/>
-            <a:prstDash val="solid"/>
-          </a:ln>
-        </p:spPr>
-        <p:txBody>
-          <a:bodyPr xmlns:a="http://schemas.openxmlformats.org/drawingml/2006/main" wrap="square" lIns="19050" tIns="9525" rIns="19050" bIns="9525" anchor="ctr">
-            <a:normAutofit fontScale="100000"/>
-          </a:bodyPr>
-          <a:lstStyle xmlns:a="http://schemas.openxmlformats.org/drawingml/2006/main"/>
-          <a:p xmlns:a="http://schemas.openxmlformats.org/drawingml/2006/main">
-            <a:pPr algn="l">
-              <a:defRPr sz="1125" b="0">
-                <a:solidFill>
-                  <a:srgbClr val="172027"/>
-                </a:solidFill>
-                <a:latin typeface="Arial"/>
-                <a:ea typeface="Arial"/>
-                <a:cs typeface="Arial"/>
-              </a:defRPr>
-            </a:pPr>
-            <a:r>
-              <a:rPr sz="1125" b="0">
-                <a:solidFill>
-                  <a:srgbClr val="172027"/>
-                </a:solidFill>
-                <a:latin typeface="Arial"/>
-                <a:ea typeface="Arial"/>
-                <a:cs typeface="Arial"/>
-              </a:rPr>
-              <a:t>01</a:t>
-            </a:r>
-          </a:p>
-        </p:txBody>
-      </p:sp>
-      <p:sp>
-        <p:nvSpPr>
-          <p:cNvPr id="109" name="ledger-source-1">
-            <a:extLst xmlns:a="http://schemas.openxmlformats.org/drawingml/2006/main">
-              <a:ext uri="{FF2B5EF4-FFF2-40B4-BE49-F238E27FC236}">
-                <a16:creationId xmlns:a16="http://schemas.microsoft.com/office/drawing/2014/main" id="{54D3702D-5EB3-4E9A-BBE7-89931C4DBBE3}"/>
-              </a:ext>
-            </a:extLst>
-          </p:cNvPr>
-          <p:cNvSpPr>
-            <a:spLocks xmlns:a="http://schemas.openxmlformats.org/drawingml/2006/main" noGrp="1"/>
-          </p:cNvSpPr>
-          <p:nvPr/>
-        </p:nvSpPr>
-        <p:spPr>
-          <a:xfrm xmlns:a="http://schemas.openxmlformats.org/drawingml/2006/main" rot="0">
-            <a:off x="10515600" y="3600450"/>
-            <a:ext cx="876300" cy="209550"/>
-          </a:xfrm>
-          <a:prstGeom xmlns:a="http://schemas.openxmlformats.org/drawingml/2006/main" prst="rect">
-            <a:avLst/>
-          </a:prstGeom>
-          <a:noFill xmlns:a="http://schemas.openxmlformats.org/drawingml/2006/main"/>
-          <a:ln xmlns:a="http://schemas.openxmlformats.org/drawingml/2006/main" w="0">
-            <a:noFill/>
-            <a:prstDash val="solid"/>
-          </a:ln>
-        </p:spPr>
-        <p:txBody>
-          <a:bodyPr xmlns:a="http://schemas.openxmlformats.org/drawingml/2006/main" wrap="square" lIns="19050" tIns="9525" rIns="19050" bIns="9525" anchor="ctr">
-            <a:normAutofit fontScale="100000"/>
-          </a:bodyPr>
-          <a:lstStyle xmlns:a="http://schemas.openxmlformats.org/drawingml/2006/main"/>
-          <a:p xmlns:a="http://schemas.openxmlformats.org/drawingml/2006/main">
-            <a:pPr algn="l">
-              <a:defRPr sz="1125" b="1">
-                <a:solidFill>
-                  <a:srgbClr val="26785F"/>
-                </a:solidFill>
-                <a:latin typeface="Arial"/>
-                <a:ea typeface="Arial"/>
-                <a:cs typeface="Arial"/>
-              </a:defRPr>
-            </a:pPr>
-            <a:r>
-              <a:rPr sz="1125" b="1">
-                <a:solidFill>
-                  <a:srgbClr val="26785F"/>
-                </a:solidFill>
-                <a:latin typeface="Arial"/>
-                <a:ea typeface="Arial"/>
-                <a:cs typeface="Arial"/>
-              </a:rPr>
-              <a:t>reserve</a:t>
-            </a:r>
-          </a:p>
-        </p:txBody>
-      </p:sp>
-      <p:sp>
-        <p:nvSpPr>
-          <p:cNvPr id="110" name="contract-divider">
-            <a:extLst xmlns:a="http://schemas.openxmlformats.org/drawingml/2006/main">
-              <a:ext uri="{FF2B5EF4-FFF2-40B4-BE49-F238E27FC236}">
-                <a16:creationId xmlns:a16="http://schemas.microsoft.com/office/drawing/2014/main" id="{72930570-FF20-4E7A-97D1-C2BBE94BDAAE}"/>
-              </a:ext>
-            </a:extLst>
-          </p:cNvPr>
-          <p:cNvSpPr>
-            <a:spLocks xmlns:a="http://schemas.openxmlformats.org/drawingml/2006/main" noGrp="1"/>
-          </p:cNvSpPr>
-          <p:nvPr/>
-        </p:nvSpPr>
-        <p:spPr>
-          <a:xfrm xmlns:a="http://schemas.openxmlformats.org/drawingml/2006/main" flipH="0" flipV="0">
-            <a:off x="533400" y="5162550"/>
-            <a:ext cx="11125200" cy="9525"/>
-          </a:xfrm>
-          <a:prstGeom xmlns:a="http://schemas.openxmlformats.org/drawingml/2006/main" prst="line">
-            <a:avLst/>
-          </a:prstGeom>
-          <a:noFill xmlns:a="http://schemas.openxmlformats.org/drawingml/2006/main"/>
-          <a:ln xmlns:a="http://schemas.openxmlformats.org/drawingml/2006/main" w="12383">
-            <a:solidFill>
-              <a:srgbClr val="CAD3D4"/>
-            </a:solidFill>
-            <a:prstDash val="solid"/>
-          </a:ln>
-        </p:spPr>
-      </p:sp>
-      <p:sp>
-        <p:nvSpPr>
-          <p:cNvPr id="111" name="contract-heading">
-            <a:extLst xmlns:a="http://schemas.openxmlformats.org/drawingml/2006/main">
-              <a:ext uri="{FF2B5EF4-FFF2-40B4-BE49-F238E27FC236}">
-                <a16:creationId xmlns:a16="http://schemas.microsoft.com/office/drawing/2014/main" id="{03588589-C72A-49DB-BC6A-B2A1F2A40B13}"/>
-              </a:ext>
-            </a:extLst>
-          </p:cNvPr>
-          <p:cNvSpPr>
-            <a:spLocks xmlns:a="http://schemas.openxmlformats.org/drawingml/2006/main" noGrp="1"/>
-          </p:cNvSpPr>
-          <p:nvPr/>
-        </p:nvSpPr>
-        <p:spPr>
-          <a:xfrm xmlns:a="http://schemas.openxmlformats.org/drawingml/2006/main" rot="0">
-            <a:off x="533400" y="5238750"/>
-            <a:ext cx="11125200" cy="238125"/>
-          </a:xfrm>
-          <a:prstGeom xmlns:a="http://schemas.openxmlformats.org/drawingml/2006/main" prst="rect">
-            <a:avLst/>
-          </a:prstGeom>
-          <a:noFill xmlns:a="http://schemas.openxmlformats.org/drawingml/2006/main"/>
-          <a:ln xmlns:a="http://schemas.openxmlformats.org/drawingml/2006/main" w="0">
-            <a:noFill/>
-            <a:prstDash val="solid"/>
-          </a:ln>
-        </p:spPr>
-        <p:txBody>
-          <a:bodyPr xmlns:a="http://schemas.openxmlformats.org/drawingml/2006/main" wrap="square" lIns="19050" tIns="9525" rIns="19050" bIns="9525" anchor="ctr">
-            <a:normAutofit fontScale="100000"/>
-          </a:bodyPr>
-          <a:lstStyle xmlns:a="http://schemas.openxmlformats.org/drawingml/2006/main"/>
-          <a:p xmlns:a="http://schemas.openxmlformats.org/drawingml/2006/main">
-            <a:pPr algn="ctr">
-              <a:defRPr sz="1200" b="1">
-                <a:solidFill>
-                  <a:srgbClr val="26355F"/>
-                </a:solidFill>
-                <a:latin typeface="Arial"/>
-                <a:ea typeface="Arial"/>
-                <a:cs typeface="Arial"/>
-              </a:defRPr>
-            </a:pPr>
-            <a:r>
-              <a:rPr sz="1200" b="1">
-                <a:solidFill>
-                  <a:srgbClr val="26355F"/>
-                </a:solidFill>
-                <a:latin typeface="Arial"/>
-                <a:ea typeface="Arial"/>
-                <a:cs typeface="Arial"/>
-              </a:rPr>
-              <a:t>Selection contract</a:t>
-            </a:r>
-          </a:p>
-        </p:txBody>
-      </p:sp>
-      <p:sp>
-        <p:nvSpPr>
-          <p:cNvPr id="112" name="contract-copy">
-            <a:extLst xmlns:a="http://schemas.openxmlformats.org/drawingml/2006/main">
-              <a:ext uri="{FF2B5EF4-FFF2-40B4-BE49-F238E27FC236}">
-                <a16:creationId xmlns:a16="http://schemas.microsoft.com/office/drawing/2014/main" id="{93675602-0AAD-40A6-8DE6-C7FEB84D4326}"/>
-              </a:ext>
-            </a:extLst>
-          </p:cNvPr>
-          <p:cNvSpPr>
-            <a:spLocks xmlns:a="http://schemas.openxmlformats.org/drawingml/2006/main" noGrp="1"/>
-          </p:cNvSpPr>
-          <p:nvPr/>
-        </p:nvSpPr>
-        <p:spPr>
-          <a:xfrm xmlns:a="http://schemas.openxmlformats.org/drawingml/2006/main" rot="0">
-            <a:off x="533400" y="5476875"/>
-            <a:ext cx="11125200" cy="238125"/>
-          </a:xfrm>
-          <a:prstGeom xmlns:a="http://schemas.openxmlformats.org/drawingml/2006/main" prst="rect">
-            <a:avLst/>
-          </a:prstGeom>
-          <a:noFill xmlns:a="http://schemas.openxmlformats.org/drawingml/2006/main"/>
-          <a:ln xmlns:a="http://schemas.openxmlformats.org/drawingml/2006/main" w="0">
-            <a:noFill/>
-            <a:prstDash val="solid"/>
-          </a:ln>
-        </p:spPr>
-        <p:txBody>
-          <a:bodyPr xmlns:a="http://schemas.openxmlformats.org/drawingml/2006/main" wrap="square" lIns="19050" tIns="9525" rIns="19050" bIns="9525" anchor="ctr">
-            <a:normAutofit fontScale="100000"/>
-          </a:bodyPr>
-          <a:lstStyle xmlns:a="http://schemas.openxmlformats.org/drawingml/2006/main"/>
-          <a:p xmlns:a="http://schemas.openxmlformats.org/drawingml/2006/main">
-            <a:pPr algn="ctr">
-              <a:defRPr sz="1200" b="0">
-                <a:solidFill>
-                  <a:srgbClr val="172027"/>
-                </a:solidFill>
-                <a:latin typeface="Arial"/>
-                <a:ea typeface="Arial"/>
-                <a:cs typeface="Arial"/>
-              </a:defRPr>
-            </a:pPr>
-            <a:r>
-              <a:rPr sz="1200" b="0">
-                <a:solidFill>
-                  <a:srgbClr val="172027"/>
-                </a:solidFill>
-                <a:latin typeface="Arial"/>
-                <a:ea typeface="Arial"/>
-                <a:cs typeface="Arial"/>
-              </a:rPr>
-              <a:t>fixed capacity | stable ties | no duplicate slots | complete assignment ledger</a:t>
-            </a:r>
-          </a:p>
-        </p:txBody>
-      </p:sp>
-      <p:sp>
-        <p:nvSpPr>
-          <p:cNvPr id="113" name="scope-boundary">
-            <a:extLst xmlns:a="http://schemas.openxmlformats.org/drawingml/2006/main">
-              <a:ext uri="{FF2B5EF4-FFF2-40B4-BE49-F238E27FC236}">
-                <a16:creationId xmlns:a16="http://schemas.microsoft.com/office/drawing/2014/main" id="{752A89C1-35B9-4A9E-9184-6E906B882001}"/>
-              </a:ext>
-            </a:extLst>
-          </p:cNvPr>
-          <p:cNvSpPr>
-            <a:spLocks xmlns:a="http://schemas.openxmlformats.org/drawingml/2006/main" noGrp="1"/>
-          </p:cNvSpPr>
-          <p:nvPr/>
-        </p:nvSpPr>
-        <p:spPr>
-          <a:xfrm xmlns:a="http://schemas.openxmlformats.org/drawingml/2006/main" rot="0">
-            <a:off x="533400" y="5762625"/>
-            <a:ext cx="11125200" cy="209550"/>
-          </a:xfrm>
-          <a:prstGeom xmlns:a="http://schemas.openxmlformats.org/drawingml/2006/main" prst="rect">
-            <a:avLst/>
-          </a:prstGeom>
-          <a:noFill xmlns:a="http://schemas.openxmlformats.org/drawingml/2006/main"/>
-          <a:ln xmlns:a="http://schemas.openxmlformats.org/drawingml/2006/main" w="0">
-            <a:noFill/>
-            <a:prstDash val="solid"/>
-          </a:ln>
-        </p:spPr>
-        <p:txBody>
-          <a:bodyPr xmlns:a="http://schemas.openxmlformats.org/drawingml/2006/main" wrap="square" lIns="19050" tIns="9525" rIns="19050" bIns="9525" anchor="ctr">
-            <a:normAutofit fontScale="100000"/>
-          </a:bodyPr>
-          <a:lstStyle xmlns:a="http://schemas.openxmlformats.org/drawingml/2006/main"/>
-          <a:p xmlns:a="http://schemas.openxmlformats.org/drawingml/2006/main">
-            <a:pPr algn="ctr">
-              <a:defRPr sz="1050" b="0">
-                <a:solidFill>
-                  <a:srgbClr val="637077"/>
-                </a:solidFill>
-                <a:latin typeface="Arial"/>
-                <a:ea typeface="Arial"/>
-                <a:cs typeface="Arial"/>
-              </a:defRPr>
-            </a:pPr>
-            <a:r>
-              <a:rPr sz="1050" b="0">
-                <a:solidFill>
-                  <a:srgbClr val="637077"/>
-                </a:solidFill>
-                <a:latin typeface="Arial"/>
-                <a:ea typeface="Arial"/>
-                <a:cs typeface="Arial"/>
-              </a:rPr>
               <a:t>The package governs access to review capacity; it does not interpret the underlying evidence.</a:t>
             </a:r>
           </a:p>
@@ -6227,7 +6227,7 @@
     </p:spTree>
     <p:extLst>
       <p:ext uri="{BB962C8B-B14F-4D97-AF65-F5344CB8AC3E}">
-        <p14:creationId xmlns:p14="http://schemas.microsoft.com/office/powerpoint/2010/main" val="597812604"/>
+        <p14:creationId xmlns:p14="http://schemas.microsoft.com/office/powerpoint/2010/main" val="1522991963"/>
       </p:ext>
     </p:extLst>
   </p:cSld>

--- a/docs/source/repository_overview_editable.pptx
+++ b/docs/source/repository_overview_editable.pptx
@@ -2,13 +2,13 @@
 <file path=ppt/presentation.xml><?xml version="1.0" encoding="utf-8"?>
 <p:presentation xmlns:p="http://schemas.openxmlformats.org/presentationml/2006/main">
   <p:sldMasterIdLst>
-    <p:sldMasterId xmlns:r="http://schemas.openxmlformats.org/officeDocument/2006/relationships" id="2147483648" r:id="Rf84e3187d5cc4fcb"/>
+    <p:sldMasterId xmlns:r="http://schemas.openxmlformats.org/officeDocument/2006/relationships" id="2147483648" r:id="R2c6c1b5bef5347f9"/>
   </p:sldMasterIdLst>
   <p:notesMasterIdLst>
-    <p:notesMasterId xmlns:r="http://schemas.openxmlformats.org/officeDocument/2006/relationships" r:id="Rc7ff153440fe4e71"/>
+    <p:notesMasterId xmlns:r="http://schemas.openxmlformats.org/officeDocument/2006/relationships" r:id="Re0c6807ef88e4e3b"/>
   </p:notesMasterIdLst>
   <p:sldIdLst>
-    <p:sldId xmlns:r="http://schemas.openxmlformats.org/officeDocument/2006/relationships" id="256" r:id="R9910f969a1fa4b52"/>
+    <p:sldId xmlns:r="http://schemas.openxmlformats.org/officeDocument/2006/relationships" id="256" r:id="R5505981efdb046d3"/>
   </p:sldIdLst>
   <p:sldSz cx="12192000" cy="6096000"/>
   <p:notesSz cx="6858000" cy="9144000"/>
@@ -601,7 +601,7 @@
   </p:cSld>
   <p:clrMap bg1="lt1" tx1="dk1" bg2="lt2" tx2="dk2" accent1="accent1" accent2="accent2" accent3="accent3" accent4="accent4" accent5="accent5" accent6="accent6" hlink="hlink" folHlink="folHlink"/>
   <p:sldLayoutIdLst>
-    <p:sldLayoutId xmlns:r="http://schemas.openxmlformats.org/officeDocument/2006/relationships" id="2147483649" r:id="R079b6dde474c4f0c"/>
+    <p:sldLayoutId xmlns:r="http://schemas.openxmlformats.org/officeDocument/2006/relationships" id="2147483649" r:id="Rcf897cfaf1194116"/>
   </p:sldLayoutIdLst>
   <p:txStyles>
     <p:titleStyle>
@@ -1152,7 +1152,7 @@
           <p:cNvPr id="114" name="overview-takeaway">
             <a:extLst xmlns:a="http://schemas.openxmlformats.org/drawingml/2006/main">
               <a:ext uri="{FF2B5EF4-FFF2-40B4-BE49-F238E27FC236}">
-                <a16:creationId xmlns:a16="http://schemas.microsoft.com/office/drawing/2014/main" id="{A5126910-88BE-4F71-A082-CC8CB5843577}"/>
+                <a16:creationId xmlns:a16="http://schemas.microsoft.com/office/drawing/2014/main" id="{3F2199D7-C5BE-47D4-8963-EDB454C6556B}"/>
               </a:ext>
             </a:extLst>
           </p:cNvPr>
@@ -1210,7 +1210,7 @@
           <p:cNvPr id="2" name="overview-subtitle">
             <a:extLst xmlns:a="http://schemas.openxmlformats.org/drawingml/2006/main">
               <a:ext uri="{FF2B5EF4-FFF2-40B4-BE49-F238E27FC236}">
-                <a16:creationId xmlns:a16="http://schemas.microsoft.com/office/drawing/2014/main" id="{F4D89031-4FBD-45A2-A1C5-54673CD01055}"/>
+                <a16:creationId xmlns:a16="http://schemas.microsoft.com/office/drawing/2014/main" id="{D42D2517-E1F7-4A82-85DC-5339EB15ED3E}"/>
               </a:ext>
             </a:extLst>
           </p:cNvPr>
@@ -1268,7 +1268,7 @@
           <p:cNvPr id="3" name="overview-divider">
             <a:extLst xmlns:a="http://schemas.openxmlformats.org/drawingml/2006/main">
               <a:ext uri="{FF2B5EF4-FFF2-40B4-BE49-F238E27FC236}">
-                <a16:creationId xmlns:a16="http://schemas.microsoft.com/office/drawing/2014/main" id="{3E162649-D05B-4C4B-BD8C-18F11399246D}"/>
+                <a16:creationId xmlns:a16="http://schemas.microsoft.com/office/drawing/2014/main" id="{4ED46B8F-3B69-4AEA-8FFB-91F94D4209A5}"/>
               </a:ext>
             </a:extLst>
           </p:cNvPr>
@@ -1299,7 +1299,7 @@
           <p:cNvPr id="4" name="input-to-rank-arrow">
             <a:extLst xmlns:a="http://schemas.openxmlformats.org/drawingml/2006/main">
               <a:ext uri="{FF2B5EF4-FFF2-40B4-BE49-F238E27FC236}">
-                <a16:creationId xmlns:a16="http://schemas.microsoft.com/office/drawing/2014/main" id="{F7C86418-6AA6-4E4B-9B05-94EDF6B1F47D}"/>
+                <a16:creationId xmlns:a16="http://schemas.microsoft.com/office/drawing/2014/main" id="{D991D88B-6610-4458-87F4-9D36C51FB236}"/>
               </a:ext>
             </a:extLst>
           </p:cNvPr>
@@ -1330,7 +1330,7 @@
           <p:cNvPr id="5" name="rank-to-allocation-arrow">
             <a:extLst xmlns:a="http://schemas.openxmlformats.org/drawingml/2006/main">
               <a:ext uri="{FF2B5EF4-FFF2-40B4-BE49-F238E27FC236}">
-                <a16:creationId xmlns:a16="http://schemas.microsoft.com/office/drawing/2014/main" id="{42E43535-F79F-4C59-ACA0-1D7B61D061F3}"/>
+                <a16:creationId xmlns:a16="http://schemas.microsoft.com/office/drawing/2014/main" id="{584659CC-4C2D-4670-968C-4E9D3426FCB5}"/>
               </a:ext>
             </a:extLst>
           </p:cNvPr>
@@ -1361,18 +1361,18 @@
           <p:cNvPr id="6" name="allocation-to-result-arrow">
             <a:extLst xmlns:a="http://schemas.openxmlformats.org/drawingml/2006/main">
               <a:ext uri="{FF2B5EF4-FFF2-40B4-BE49-F238E27FC236}">
-                <a16:creationId xmlns:a16="http://schemas.microsoft.com/office/drawing/2014/main" id="{B60C1E43-F847-42DA-B470-FF00ADDDCA27}"/>
-              </a:ext>
-            </a:extLst>
-          </p:cNvPr>
-          <p:cNvSpPr>
-            <a:spLocks xmlns:a="http://schemas.openxmlformats.org/drawingml/2006/main" noGrp="1"/>
-          </p:cNvSpPr>
-          <p:nvPr/>
-        </p:nvSpPr>
-        <p:spPr>
-          <a:xfrm xmlns:a="http://schemas.openxmlformats.org/drawingml/2006/main" rot="0">
-            <a:off x="9267825" y="2952750"/>
+                <a16:creationId xmlns:a16="http://schemas.microsoft.com/office/drawing/2014/main" id="{99F2D7EC-C482-4CDF-AE4A-89A846C8907E}"/>
+              </a:ext>
+            </a:extLst>
+          </p:cNvPr>
+          <p:cNvSpPr>
+            <a:spLocks xmlns:a="http://schemas.openxmlformats.org/drawingml/2006/main" noGrp="1"/>
+          </p:cNvSpPr>
+          <p:nvPr/>
+        </p:nvSpPr>
+        <p:spPr>
+          <a:xfrm xmlns:a="http://schemas.openxmlformats.org/drawingml/2006/main" rot="0">
+            <a:off x="9553575" y="2952750"/>
             <a:ext cx="323850" cy="228600"/>
           </a:xfrm>
           <a:prstGeom xmlns:a="http://schemas.openxmlformats.org/drawingml/2006/main" prst="rightArrow">
@@ -1392,19 +1392,19 @@
           <p:cNvPr id="7" name="input-heading">
             <a:extLst xmlns:a="http://schemas.openxmlformats.org/drawingml/2006/main">
               <a:ext uri="{FF2B5EF4-FFF2-40B4-BE49-F238E27FC236}">
-                <a16:creationId xmlns:a16="http://schemas.microsoft.com/office/drawing/2014/main" id="{E4C75BF8-A350-4A20-A131-4A5E524DE48E}"/>
-              </a:ext>
-            </a:extLst>
-          </p:cNvPr>
-          <p:cNvSpPr>
-            <a:spLocks xmlns:a="http://schemas.openxmlformats.org/drawingml/2006/main" noGrp="1"/>
-          </p:cNvSpPr>
-          <p:nvPr/>
-        </p:nvSpPr>
-        <p:spPr>
-          <a:xfrm xmlns:a="http://schemas.openxmlformats.org/drawingml/2006/main" rot="0">
-            <a:off x="352425" y="1428750"/>
-            <a:ext cx="2381250" cy="323850"/>
+                <a16:creationId xmlns:a16="http://schemas.microsoft.com/office/drawing/2014/main" id="{7742B6D8-5970-4FA6-90D8-3483317CDAF6}"/>
+              </a:ext>
+            </a:extLst>
+          </p:cNvPr>
+          <p:cNvSpPr>
+            <a:spLocks xmlns:a="http://schemas.openxmlformats.org/drawingml/2006/main" noGrp="1"/>
+          </p:cNvSpPr>
+          <p:nvPr/>
+        </p:nvSpPr>
+        <p:spPr>
+          <a:xfrm xmlns:a="http://schemas.openxmlformats.org/drawingml/2006/main" rot="0">
+            <a:off x="590550" y="1428750"/>
+            <a:ext cx="2286000" cy="323850"/>
           </a:xfrm>
           <a:prstGeom xmlns:a="http://schemas.openxmlformats.org/drawingml/2006/main" prst="rect">
             <a:avLst/>
@@ -1421,7 +1421,7 @@
           </a:bodyPr>
           <a:lstStyle xmlns:a="http://schemas.openxmlformats.org/drawingml/2006/main"/>
           <a:p xmlns:a="http://schemas.openxmlformats.org/drawingml/2006/main">
-            <a:pPr algn="ctr">
+            <a:pPr algn="l">
               <a:defRPr sz="1725" b="1">
                 <a:solidFill>
                   <a:srgbClr val="26355F"/>
@@ -1450,19 +1450,19 @@
           <p:cNvPr id="8" name="input-caption">
             <a:extLst xmlns:a="http://schemas.openxmlformats.org/drawingml/2006/main">
               <a:ext uri="{FF2B5EF4-FFF2-40B4-BE49-F238E27FC236}">
-                <a16:creationId xmlns:a16="http://schemas.microsoft.com/office/drawing/2014/main" id="{80A00002-E4AF-4047-869D-DC8150066254}"/>
-              </a:ext>
-            </a:extLst>
-          </p:cNvPr>
-          <p:cNvSpPr>
-            <a:spLocks xmlns:a="http://schemas.openxmlformats.org/drawingml/2006/main" noGrp="1"/>
-          </p:cNvSpPr>
-          <p:nvPr/>
-        </p:nvSpPr>
-        <p:spPr>
-          <a:xfrm xmlns:a="http://schemas.openxmlformats.org/drawingml/2006/main" rot="0">
-            <a:off x="400050" y="1771650"/>
-            <a:ext cx="2286000" cy="361950"/>
+                <a16:creationId xmlns:a16="http://schemas.microsoft.com/office/drawing/2014/main" id="{2A39554E-7A48-4829-8F0A-AA3324C79279}"/>
+              </a:ext>
+            </a:extLst>
+          </p:cNvPr>
+          <p:cNvSpPr>
+            <a:spLocks xmlns:a="http://schemas.openxmlformats.org/drawingml/2006/main" noGrp="1"/>
+          </p:cNvSpPr>
+          <p:nvPr/>
+        </p:nvSpPr>
+        <p:spPr>
+          <a:xfrm xmlns:a="http://schemas.openxmlformats.org/drawingml/2006/main" rot="0">
+            <a:off x="590550" y="1771650"/>
+            <a:ext cx="1905000" cy="361950"/>
           </a:xfrm>
           <a:prstGeom xmlns:a="http://schemas.openxmlformats.org/drawingml/2006/main" prst="rect">
             <a:avLst/>
@@ -1474,12 +1474,12 @@
           </a:ln>
         </p:spPr>
         <p:txBody>
-          <a:bodyPr xmlns:a="http://schemas.openxmlformats.org/drawingml/2006/main" wrap="square" lIns="19050" tIns="9525" rIns="19050" bIns="9525" anchor="ctr">
-            <a:normAutofit fontScale="95491"/>
+          <a:bodyPr xmlns:a="http://schemas.openxmlformats.org/drawingml/2006/main" wrap="square" lIns="19050" tIns="9525" rIns="19050" bIns="9525" anchor="t">
+            <a:normAutofit fontScale="93750"/>
           </a:bodyPr>
           <a:lstStyle xmlns:a="http://schemas.openxmlformats.org/drawingml/2006/main"/>
           <a:p xmlns:a="http://schemas.openxmlformats.org/drawingml/2006/main">
-            <a:pPr algn="ctr">
+            <a:pPr algn="l">
               <a:defRPr sz="1200" b="0">
                 <a:solidFill>
                   <a:srgbClr val="637077"/>
@@ -1508,7 +1508,7 @@
           <p:cNvPr id="9" name="candidate-records-sheet">
             <a:extLst xmlns:a="http://schemas.openxmlformats.org/drawingml/2006/main">
               <a:ext uri="{FF2B5EF4-FFF2-40B4-BE49-F238E27FC236}">
-                <a16:creationId xmlns:a16="http://schemas.microsoft.com/office/drawing/2014/main" id="{431A8D41-338D-4C28-A9E2-EB5B3B4C9344}"/>
+                <a16:creationId xmlns:a16="http://schemas.microsoft.com/office/drawing/2014/main" id="{03D633E9-C4A8-4607-AE4A-59AA23A82A36}"/>
               </a:ext>
             </a:extLst>
           </p:cNvPr>
@@ -1541,7 +1541,7 @@
           <p:cNvPr id="10" name="candidate-records-header">
             <a:extLst xmlns:a="http://schemas.openxmlformats.org/drawingml/2006/main">
               <a:ext uri="{FF2B5EF4-FFF2-40B4-BE49-F238E27FC236}">
-                <a16:creationId xmlns:a16="http://schemas.microsoft.com/office/drawing/2014/main" id="{1D3548A5-DD34-4C1F-A3FD-ACE22E20AE14}"/>
+                <a16:creationId xmlns:a16="http://schemas.microsoft.com/office/drawing/2014/main" id="{F7A31561-48E6-49CC-8D54-6EF8AB8AC1D8}"/>
               </a:ext>
             </a:extLst>
           </p:cNvPr>
@@ -1574,7 +1574,7 @@
           <p:cNvPr id="11" name="candidate-id-header">
             <a:extLst xmlns:a="http://schemas.openxmlformats.org/drawingml/2006/main">
               <a:ext uri="{FF2B5EF4-FFF2-40B4-BE49-F238E27FC236}">
-                <a16:creationId xmlns:a16="http://schemas.microsoft.com/office/drawing/2014/main" id="{D17BC123-92BE-48F1-A935-4A1315AAEC71}"/>
+                <a16:creationId xmlns:a16="http://schemas.microsoft.com/office/drawing/2014/main" id="{D04634D7-724C-4296-8CF1-1B439024DEA8}"/>
               </a:ext>
             </a:extLst>
           </p:cNvPr>
@@ -1632,7 +1632,7 @@
           <p:cNvPr id="12" name="score-header">
             <a:extLst xmlns:a="http://schemas.openxmlformats.org/drawingml/2006/main">
               <a:ext uri="{FF2B5EF4-FFF2-40B4-BE49-F238E27FC236}">
-                <a16:creationId xmlns:a16="http://schemas.microsoft.com/office/drawing/2014/main" id="{4103AD1A-1C68-4ECF-89B9-0E6ED904F3BE}"/>
+                <a16:creationId xmlns:a16="http://schemas.microsoft.com/office/drawing/2014/main" id="{DAB903E2-9C60-4CC8-AEDA-1356752BB31F}"/>
               </a:ext>
             </a:extLst>
           </p:cNvPr>
@@ -1690,7 +1690,7 @@
           <p:cNvPr id="13" name="candidate-token-1">
             <a:extLst xmlns:a="http://schemas.openxmlformats.org/drawingml/2006/main">
               <a:ext uri="{FF2B5EF4-FFF2-40B4-BE49-F238E27FC236}">
-                <a16:creationId xmlns:a16="http://schemas.microsoft.com/office/drawing/2014/main" id="{FE4119AE-84CF-4741-98AB-A942663DC1FC}"/>
+                <a16:creationId xmlns:a16="http://schemas.microsoft.com/office/drawing/2014/main" id="{5BBB666F-8C44-48FC-95EF-C0C3E62BFFCD}"/>
               </a:ext>
             </a:extLst>
           </p:cNvPr>
@@ -1721,7 +1721,7 @@
           <p:cNvPr id="14" name="candidate-id-1">
             <a:extLst xmlns:a="http://schemas.openxmlformats.org/drawingml/2006/main">
               <a:ext uri="{FF2B5EF4-FFF2-40B4-BE49-F238E27FC236}">
-                <a16:creationId xmlns:a16="http://schemas.microsoft.com/office/drawing/2014/main" id="{B76DA80A-72AF-4A5D-A5E8-2CBC12DC7345}"/>
+                <a16:creationId xmlns:a16="http://schemas.microsoft.com/office/drawing/2014/main" id="{7EBBE20A-D89F-46DE-86C3-66C79A396F15}"/>
               </a:ext>
             </a:extLst>
           </p:cNvPr>
@@ -1779,7 +1779,7 @@
           <p:cNvPr id="15" name="candidate-score-1">
             <a:extLst xmlns:a="http://schemas.openxmlformats.org/drawingml/2006/main">
               <a:ext uri="{FF2B5EF4-FFF2-40B4-BE49-F238E27FC236}">
-                <a16:creationId xmlns:a16="http://schemas.microsoft.com/office/drawing/2014/main" id="{90B6D1AF-0CBA-4731-8F6C-7EBF4413F34A}"/>
+                <a16:creationId xmlns:a16="http://schemas.microsoft.com/office/drawing/2014/main" id="{8D4CFA2A-B28F-406A-8C76-3F5AE0A87D20}"/>
               </a:ext>
             </a:extLst>
           </p:cNvPr>
@@ -1837,7 +1837,7 @@
           <p:cNvPr id="16" name="candidate-row-line-1">
             <a:extLst xmlns:a="http://schemas.openxmlformats.org/drawingml/2006/main">
               <a:ext uri="{FF2B5EF4-FFF2-40B4-BE49-F238E27FC236}">
-                <a16:creationId xmlns:a16="http://schemas.microsoft.com/office/drawing/2014/main" id="{47909C3D-392E-4111-8DDB-A280268F921A}"/>
+                <a16:creationId xmlns:a16="http://schemas.microsoft.com/office/drawing/2014/main" id="{E58AA97B-5224-40B9-8CF5-CFCA6DFCC48B}"/>
               </a:ext>
             </a:extLst>
           </p:cNvPr>
@@ -1868,7 +1868,7 @@
           <p:cNvPr id="17" name="candidate-token-2">
             <a:extLst xmlns:a="http://schemas.openxmlformats.org/drawingml/2006/main">
               <a:ext uri="{FF2B5EF4-FFF2-40B4-BE49-F238E27FC236}">
-                <a16:creationId xmlns:a16="http://schemas.microsoft.com/office/drawing/2014/main" id="{DEC7182C-BF61-4815-BCC0-AB353FBB7025}"/>
+                <a16:creationId xmlns:a16="http://schemas.microsoft.com/office/drawing/2014/main" id="{FE186896-7DD8-4273-9849-4B13527626DE}"/>
               </a:ext>
             </a:extLst>
           </p:cNvPr>
@@ -1901,7 +1901,7 @@
           <p:cNvPr id="18" name="candidate-id-2">
             <a:extLst xmlns:a="http://schemas.openxmlformats.org/drawingml/2006/main">
               <a:ext uri="{FF2B5EF4-FFF2-40B4-BE49-F238E27FC236}">
-                <a16:creationId xmlns:a16="http://schemas.microsoft.com/office/drawing/2014/main" id="{D05561A1-CFAE-4A7D-9E59-8685FDD010BA}"/>
+                <a16:creationId xmlns:a16="http://schemas.microsoft.com/office/drawing/2014/main" id="{F20E5CF5-F7B9-41B3-A648-0C614EAC3FE4}"/>
               </a:ext>
             </a:extLst>
           </p:cNvPr>
@@ -1959,7 +1959,7 @@
           <p:cNvPr id="19" name="candidate-score-2">
             <a:extLst xmlns:a="http://schemas.openxmlformats.org/drawingml/2006/main">
               <a:ext uri="{FF2B5EF4-FFF2-40B4-BE49-F238E27FC236}">
-                <a16:creationId xmlns:a16="http://schemas.microsoft.com/office/drawing/2014/main" id="{A97FC39E-C406-48A8-8D3E-0CBF73D1BE84}"/>
+                <a16:creationId xmlns:a16="http://schemas.microsoft.com/office/drawing/2014/main" id="{F070F040-352E-45DF-97F8-E1E5E91C39A6}"/>
               </a:ext>
             </a:extLst>
           </p:cNvPr>
@@ -2017,7 +2017,7 @@
           <p:cNvPr id="20" name="candidate-row-line-2">
             <a:extLst xmlns:a="http://schemas.openxmlformats.org/drawingml/2006/main">
               <a:ext uri="{FF2B5EF4-FFF2-40B4-BE49-F238E27FC236}">
-                <a16:creationId xmlns:a16="http://schemas.microsoft.com/office/drawing/2014/main" id="{5B377CEC-0491-4AA7-9B64-C3C08400EEC7}"/>
+                <a16:creationId xmlns:a16="http://schemas.microsoft.com/office/drawing/2014/main" id="{B4730FE9-25ED-43CD-8976-D905F58AA90D}"/>
               </a:ext>
             </a:extLst>
           </p:cNvPr>
@@ -2048,7 +2048,7 @@
           <p:cNvPr id="21" name="candidate-token-3">
             <a:extLst xmlns:a="http://schemas.openxmlformats.org/drawingml/2006/main">
               <a:ext uri="{FF2B5EF4-FFF2-40B4-BE49-F238E27FC236}">
-                <a16:creationId xmlns:a16="http://schemas.microsoft.com/office/drawing/2014/main" id="{9B078B27-4930-4A99-918D-F84A080C2B9B}"/>
+                <a16:creationId xmlns:a16="http://schemas.microsoft.com/office/drawing/2014/main" id="{CB601255-FAC3-4417-BA84-92385925E761}"/>
               </a:ext>
             </a:extLst>
           </p:cNvPr>
@@ -2081,7 +2081,7 @@
           <p:cNvPr id="22" name="candidate-id-3">
             <a:extLst xmlns:a="http://schemas.openxmlformats.org/drawingml/2006/main">
               <a:ext uri="{FF2B5EF4-FFF2-40B4-BE49-F238E27FC236}">
-                <a16:creationId xmlns:a16="http://schemas.microsoft.com/office/drawing/2014/main" id="{8D9FC5AC-9097-42CD-8120-80DE01A03CD4}"/>
+                <a16:creationId xmlns:a16="http://schemas.microsoft.com/office/drawing/2014/main" id="{A5F09EA1-8042-489B-80E4-78AE2DD8698A}"/>
               </a:ext>
             </a:extLst>
           </p:cNvPr>
@@ -2139,7 +2139,7 @@
           <p:cNvPr id="23" name="candidate-score-3">
             <a:extLst xmlns:a="http://schemas.openxmlformats.org/drawingml/2006/main">
               <a:ext uri="{FF2B5EF4-FFF2-40B4-BE49-F238E27FC236}">
-                <a16:creationId xmlns:a16="http://schemas.microsoft.com/office/drawing/2014/main" id="{CCD3F8F8-4715-4DB7-98A6-272DB59EDC8D}"/>
+                <a16:creationId xmlns:a16="http://schemas.microsoft.com/office/drawing/2014/main" id="{93C23831-7426-4B96-AC77-89459149E0D9}"/>
               </a:ext>
             </a:extLst>
           </p:cNvPr>
@@ -2197,7 +2197,7 @@
           <p:cNvPr id="24" name="candidate-row-line-3">
             <a:extLst xmlns:a="http://schemas.openxmlformats.org/drawingml/2006/main">
               <a:ext uri="{FF2B5EF4-FFF2-40B4-BE49-F238E27FC236}">
-                <a16:creationId xmlns:a16="http://schemas.microsoft.com/office/drawing/2014/main" id="{F284FACD-D933-4AD9-8E16-C5BF4AD236E8}"/>
+                <a16:creationId xmlns:a16="http://schemas.microsoft.com/office/drawing/2014/main" id="{6E3D91BE-266D-46C2-8D66-E210C11F6B1C}"/>
               </a:ext>
             </a:extLst>
           </p:cNvPr>
@@ -2228,7 +2228,7 @@
           <p:cNvPr id="25" name="candidate-token-4">
             <a:extLst xmlns:a="http://schemas.openxmlformats.org/drawingml/2006/main">
               <a:ext uri="{FF2B5EF4-FFF2-40B4-BE49-F238E27FC236}">
-                <a16:creationId xmlns:a16="http://schemas.microsoft.com/office/drawing/2014/main" id="{582570AC-1D8D-45F1-A3C6-00FB9C31193D}"/>
+                <a16:creationId xmlns:a16="http://schemas.microsoft.com/office/drawing/2014/main" id="{7BF8887E-ECB9-46BC-8815-8626DC395111}"/>
               </a:ext>
             </a:extLst>
           </p:cNvPr>
@@ -2259,7 +2259,7 @@
           <p:cNvPr id="26" name="candidate-id-4">
             <a:extLst xmlns:a="http://schemas.openxmlformats.org/drawingml/2006/main">
               <a:ext uri="{FF2B5EF4-FFF2-40B4-BE49-F238E27FC236}">
-                <a16:creationId xmlns:a16="http://schemas.microsoft.com/office/drawing/2014/main" id="{72C8B356-17CB-45D1-8D76-2208D6F11F00}"/>
+                <a16:creationId xmlns:a16="http://schemas.microsoft.com/office/drawing/2014/main" id="{57066620-2210-4C1C-98D7-FFFD58E8D317}"/>
               </a:ext>
             </a:extLst>
           </p:cNvPr>
@@ -2317,7 +2317,7 @@
           <p:cNvPr id="27" name="candidate-score-4">
             <a:extLst xmlns:a="http://schemas.openxmlformats.org/drawingml/2006/main">
               <a:ext uri="{FF2B5EF4-FFF2-40B4-BE49-F238E27FC236}">
-                <a16:creationId xmlns:a16="http://schemas.microsoft.com/office/drawing/2014/main" id="{7FE9F185-41A9-4635-9C9D-C296FEDD7CBD}"/>
+                <a16:creationId xmlns:a16="http://schemas.microsoft.com/office/drawing/2014/main" id="{2C19512B-7A89-4557-B22A-E5C296DFC3F8}"/>
               </a:ext>
             </a:extLst>
           </p:cNvPr>
@@ -2375,19 +2375,19 @@
           <p:cNvPr id="28" name="ranking-heading">
             <a:extLst xmlns:a="http://schemas.openxmlformats.org/drawingml/2006/main">
               <a:ext uri="{FF2B5EF4-FFF2-40B4-BE49-F238E27FC236}">
-                <a16:creationId xmlns:a16="http://schemas.microsoft.com/office/drawing/2014/main" id="{8CB8BF20-1AEF-49B9-B7C8-CB4A02AD8539}"/>
-              </a:ext>
-            </a:extLst>
-          </p:cNvPr>
-          <p:cNvSpPr>
-            <a:spLocks xmlns:a="http://schemas.openxmlformats.org/drawingml/2006/main" noGrp="1"/>
-          </p:cNvSpPr>
-          <p:nvPr/>
-        </p:nvSpPr>
-        <p:spPr>
-          <a:xfrm xmlns:a="http://schemas.openxmlformats.org/drawingml/2006/main" rot="0">
-            <a:off x="2733675" y="1428750"/>
-            <a:ext cx="2190750" cy="323850"/>
+                <a16:creationId xmlns:a16="http://schemas.microsoft.com/office/drawing/2014/main" id="{7D05AED6-94D1-434E-B629-8F84DE7C25F6}"/>
+              </a:ext>
+            </a:extLst>
+          </p:cNvPr>
+          <p:cNvSpPr>
+            <a:spLocks xmlns:a="http://schemas.openxmlformats.org/drawingml/2006/main" noGrp="1"/>
+          </p:cNvSpPr>
+          <p:nvPr/>
+        </p:nvSpPr>
+        <p:spPr>
+          <a:xfrm xmlns:a="http://schemas.openxmlformats.org/drawingml/2006/main" rot="0">
+            <a:off x="2952750" y="1428750"/>
+            <a:ext cx="2038350" cy="323850"/>
           </a:xfrm>
           <a:prstGeom xmlns:a="http://schemas.openxmlformats.org/drawingml/2006/main" prst="rect">
             <a:avLst/>
@@ -2404,7 +2404,7 @@
           </a:bodyPr>
           <a:lstStyle xmlns:a="http://schemas.openxmlformats.org/drawingml/2006/main"/>
           <a:p xmlns:a="http://schemas.openxmlformats.org/drawingml/2006/main">
-            <a:pPr algn="ctr">
+            <a:pPr algn="l">
               <a:defRPr sz="1725" b="1">
                 <a:solidFill>
                   <a:srgbClr val="26355F"/>
@@ -2433,19 +2433,19 @@
           <p:cNvPr id="29" name="ranking-score-caption">
             <a:extLst xmlns:a="http://schemas.openxmlformats.org/drawingml/2006/main">
               <a:ext uri="{FF2B5EF4-FFF2-40B4-BE49-F238E27FC236}">
-                <a16:creationId xmlns:a16="http://schemas.microsoft.com/office/drawing/2014/main" id="{BF3DAB87-37B1-4450-8911-6166055442A7}"/>
-              </a:ext>
-            </a:extLst>
-          </p:cNvPr>
-          <p:cNvSpPr>
-            <a:spLocks xmlns:a="http://schemas.openxmlformats.org/drawingml/2006/main" noGrp="1"/>
-          </p:cNvSpPr>
-          <p:nvPr/>
-        </p:nvSpPr>
-        <p:spPr>
-          <a:xfrm xmlns:a="http://schemas.openxmlformats.org/drawingml/2006/main" rot="0">
-            <a:off x="2733675" y="1771650"/>
-            <a:ext cx="2190750" cy="228600"/>
+                <a16:creationId xmlns:a16="http://schemas.microsoft.com/office/drawing/2014/main" id="{46BA2399-BD2E-4FB8-82E2-F14A62B9449A}"/>
+              </a:ext>
+            </a:extLst>
+          </p:cNvPr>
+          <p:cNvSpPr>
+            <a:spLocks xmlns:a="http://schemas.openxmlformats.org/drawingml/2006/main" noGrp="1"/>
+          </p:cNvSpPr>
+          <p:nvPr/>
+        </p:nvSpPr>
+        <p:spPr>
+          <a:xfrm xmlns:a="http://schemas.openxmlformats.org/drawingml/2006/main" rot="0">
+            <a:off x="2952750" y="1771650"/>
+            <a:ext cx="2038350" cy="361950"/>
           </a:xfrm>
           <a:prstGeom xmlns:a="http://schemas.openxmlformats.org/drawingml/2006/main" prst="rect">
             <a:avLst/>
@@ -2457,12 +2457,12 @@
           </a:ln>
         </p:spPr>
         <p:txBody>
-          <a:bodyPr xmlns:a="http://schemas.openxmlformats.org/drawingml/2006/main" wrap="square" lIns="19050" tIns="9525" rIns="19050" bIns="9525" anchor="ctr">
+          <a:bodyPr xmlns:a="http://schemas.openxmlformats.org/drawingml/2006/main" wrap="square" lIns="19050" tIns="9525" rIns="19050" bIns="9525" anchor="t">
             <a:normAutofit fontScale="100000"/>
           </a:bodyPr>
           <a:lstStyle xmlns:a="http://schemas.openxmlformats.org/drawingml/2006/main"/>
           <a:p xmlns:a="http://schemas.openxmlformats.org/drawingml/2006/main">
-            <a:pPr algn="ctr">
+            <a:pPr algn="l">
               <a:defRPr sz="1200" b="0">
                 <a:solidFill>
                   <a:srgbClr val="637077"/>
@@ -2491,7 +2491,7 @@
           <p:cNvPr id="30" name="rank-number-1">
             <a:extLst xmlns:a="http://schemas.openxmlformats.org/drawingml/2006/main">
               <a:ext uri="{FF2B5EF4-FFF2-40B4-BE49-F238E27FC236}">
-                <a16:creationId xmlns:a16="http://schemas.microsoft.com/office/drawing/2014/main" id="{B23EACAD-43AD-4D9E-8867-10C8A7F49008}"/>
+                <a16:creationId xmlns:a16="http://schemas.microsoft.com/office/drawing/2014/main" id="{A3A8F681-C994-4AF2-90BB-181600DFFC97}"/>
               </a:ext>
             </a:extLst>
           </p:cNvPr>
@@ -2549,7 +2549,7 @@
           <p:cNvPr id="31" name="rank-row-1">
             <a:extLst xmlns:a="http://schemas.openxmlformats.org/drawingml/2006/main">
               <a:ext uri="{FF2B5EF4-FFF2-40B4-BE49-F238E27FC236}">
-                <a16:creationId xmlns:a16="http://schemas.microsoft.com/office/drawing/2014/main" id="{FAA68132-4B1B-4C60-A3B1-B4164CD2CE77}"/>
+                <a16:creationId xmlns:a16="http://schemas.microsoft.com/office/drawing/2014/main" id="{6884ABCA-CDCB-4391-A1D2-CD481BCA497F}"/>
               </a:ext>
             </a:extLst>
           </p:cNvPr>
@@ -2582,7 +2582,7 @@
           <p:cNvPr id="32" name="rank-id-1">
             <a:extLst xmlns:a="http://schemas.openxmlformats.org/drawingml/2006/main">
               <a:ext uri="{FF2B5EF4-FFF2-40B4-BE49-F238E27FC236}">
-                <a16:creationId xmlns:a16="http://schemas.microsoft.com/office/drawing/2014/main" id="{152FB334-4A0F-4347-B1AB-EF280889C992}"/>
+                <a16:creationId xmlns:a16="http://schemas.microsoft.com/office/drawing/2014/main" id="{D1A43FE5-CE5E-4542-8FA0-0A60B4A193F6}"/>
               </a:ext>
             </a:extLst>
           </p:cNvPr>
@@ -2640,7 +2640,7 @@
           <p:cNvPr id="33" name="rank-score-1">
             <a:extLst xmlns:a="http://schemas.openxmlformats.org/drawingml/2006/main">
               <a:ext uri="{FF2B5EF4-FFF2-40B4-BE49-F238E27FC236}">
-                <a16:creationId xmlns:a16="http://schemas.microsoft.com/office/drawing/2014/main" id="{1A21F3D7-CDB9-4403-BC48-8848995391C2}"/>
+                <a16:creationId xmlns:a16="http://schemas.microsoft.com/office/drawing/2014/main" id="{377CC67A-0FA3-474F-9414-E96F887EBDE9}"/>
               </a:ext>
             </a:extLst>
           </p:cNvPr>
@@ -2698,7 +2698,7 @@
           <p:cNvPr id="34" name="rank-number-2">
             <a:extLst xmlns:a="http://schemas.openxmlformats.org/drawingml/2006/main">
               <a:ext uri="{FF2B5EF4-FFF2-40B4-BE49-F238E27FC236}">
-                <a16:creationId xmlns:a16="http://schemas.microsoft.com/office/drawing/2014/main" id="{413A19B6-76D9-4580-AD2C-7508FD1869E9}"/>
+                <a16:creationId xmlns:a16="http://schemas.microsoft.com/office/drawing/2014/main" id="{0BF78664-65F0-4AA0-879A-E23CDD95BA05}"/>
               </a:ext>
             </a:extLst>
           </p:cNvPr>
@@ -2756,7 +2756,7 @@
           <p:cNvPr id="35" name="rank-row-2">
             <a:extLst xmlns:a="http://schemas.openxmlformats.org/drawingml/2006/main">
               <a:ext uri="{FF2B5EF4-FFF2-40B4-BE49-F238E27FC236}">
-                <a16:creationId xmlns:a16="http://schemas.microsoft.com/office/drawing/2014/main" id="{65374D32-BF33-446E-A131-62CB77FC4067}"/>
+                <a16:creationId xmlns:a16="http://schemas.microsoft.com/office/drawing/2014/main" id="{D9E31733-D652-4548-A899-E55635A10E3B}"/>
               </a:ext>
             </a:extLst>
           </p:cNvPr>
@@ -2789,7 +2789,7 @@
           <p:cNvPr id="36" name="rank-id-2">
             <a:extLst xmlns:a="http://schemas.openxmlformats.org/drawingml/2006/main">
               <a:ext uri="{FF2B5EF4-FFF2-40B4-BE49-F238E27FC236}">
-                <a16:creationId xmlns:a16="http://schemas.microsoft.com/office/drawing/2014/main" id="{565229A1-AFBC-4880-BA58-DBCBDF7D1904}"/>
+                <a16:creationId xmlns:a16="http://schemas.microsoft.com/office/drawing/2014/main" id="{2F3C0A15-CE3C-4AF2-B458-5310EFC442E7}"/>
               </a:ext>
             </a:extLst>
           </p:cNvPr>
@@ -2847,7 +2847,7 @@
           <p:cNvPr id="37" name="rank-score-2">
             <a:extLst xmlns:a="http://schemas.openxmlformats.org/drawingml/2006/main">
               <a:ext uri="{FF2B5EF4-FFF2-40B4-BE49-F238E27FC236}">
-                <a16:creationId xmlns:a16="http://schemas.microsoft.com/office/drawing/2014/main" id="{08B5CBE1-9ACA-4C57-9088-802179A8F484}"/>
+                <a16:creationId xmlns:a16="http://schemas.microsoft.com/office/drawing/2014/main" id="{A45BF959-498A-46FB-8013-EF53E77DE19F}"/>
               </a:ext>
             </a:extLst>
           </p:cNvPr>
@@ -2905,7 +2905,7 @@
           <p:cNvPr id="38" name="rank-number-3">
             <a:extLst xmlns:a="http://schemas.openxmlformats.org/drawingml/2006/main">
               <a:ext uri="{FF2B5EF4-FFF2-40B4-BE49-F238E27FC236}">
-                <a16:creationId xmlns:a16="http://schemas.microsoft.com/office/drawing/2014/main" id="{57ECC4B2-C836-424B-9E4C-807764EB3A03}"/>
+                <a16:creationId xmlns:a16="http://schemas.microsoft.com/office/drawing/2014/main" id="{BA95D99C-28FF-4E40-9688-CB3E90E3360C}"/>
               </a:ext>
             </a:extLst>
           </p:cNvPr>
@@ -2963,7 +2963,7 @@
           <p:cNvPr id="39" name="rank-row-3">
             <a:extLst xmlns:a="http://schemas.openxmlformats.org/drawingml/2006/main">
               <a:ext uri="{FF2B5EF4-FFF2-40B4-BE49-F238E27FC236}">
-                <a16:creationId xmlns:a16="http://schemas.microsoft.com/office/drawing/2014/main" id="{5A2FC2BF-7D78-47FF-8694-40DEAD54B6E7}"/>
+                <a16:creationId xmlns:a16="http://schemas.microsoft.com/office/drawing/2014/main" id="{45742255-F255-4B52-81A1-06C01BDF8259}"/>
               </a:ext>
             </a:extLst>
           </p:cNvPr>
@@ -2996,7 +2996,7 @@
           <p:cNvPr id="40" name="rank-id-3">
             <a:extLst xmlns:a="http://schemas.openxmlformats.org/drawingml/2006/main">
               <a:ext uri="{FF2B5EF4-FFF2-40B4-BE49-F238E27FC236}">
-                <a16:creationId xmlns:a16="http://schemas.microsoft.com/office/drawing/2014/main" id="{E2EE779D-8946-4E76-B3A2-AC532C37F2AC}"/>
+                <a16:creationId xmlns:a16="http://schemas.microsoft.com/office/drawing/2014/main" id="{2B7B7763-7010-4681-AF4F-B562363DC5EA}"/>
               </a:ext>
             </a:extLst>
           </p:cNvPr>
@@ -3054,7 +3054,7 @@
           <p:cNvPr id="41" name="rank-score-3">
             <a:extLst xmlns:a="http://schemas.openxmlformats.org/drawingml/2006/main">
               <a:ext uri="{FF2B5EF4-FFF2-40B4-BE49-F238E27FC236}">
-                <a16:creationId xmlns:a16="http://schemas.microsoft.com/office/drawing/2014/main" id="{D9EF0EB5-98CF-4127-BDE5-ADA946D1A612}"/>
+                <a16:creationId xmlns:a16="http://schemas.microsoft.com/office/drawing/2014/main" id="{B879B571-D620-4CB3-9999-6C78D973BD81}"/>
               </a:ext>
             </a:extLst>
           </p:cNvPr>
@@ -3112,7 +3112,7 @@
           <p:cNvPr id="42" name="rank-number-4">
             <a:extLst xmlns:a="http://schemas.openxmlformats.org/drawingml/2006/main">
               <a:ext uri="{FF2B5EF4-FFF2-40B4-BE49-F238E27FC236}">
-                <a16:creationId xmlns:a16="http://schemas.microsoft.com/office/drawing/2014/main" id="{C4E90B57-EFC5-4617-9E0B-092D2C6E99A0}"/>
+                <a16:creationId xmlns:a16="http://schemas.microsoft.com/office/drawing/2014/main" id="{DA66397F-DE42-4AC9-8ED8-D5504BFB7EE1}"/>
               </a:ext>
             </a:extLst>
           </p:cNvPr>
@@ -3170,7 +3170,7 @@
           <p:cNvPr id="43" name="rank-row-4">
             <a:extLst xmlns:a="http://schemas.openxmlformats.org/drawingml/2006/main">
               <a:ext uri="{FF2B5EF4-FFF2-40B4-BE49-F238E27FC236}">
-                <a16:creationId xmlns:a16="http://schemas.microsoft.com/office/drawing/2014/main" id="{A774120E-B5E0-40E7-82CB-5770D0F884B7}"/>
+                <a16:creationId xmlns:a16="http://schemas.microsoft.com/office/drawing/2014/main" id="{8A7796E0-B8E2-481F-BBFC-E2DB8BB69B92}"/>
               </a:ext>
             </a:extLst>
           </p:cNvPr>
@@ -3203,7 +3203,7 @@
           <p:cNvPr id="44" name="rank-id-4">
             <a:extLst xmlns:a="http://schemas.openxmlformats.org/drawingml/2006/main">
               <a:ext uri="{FF2B5EF4-FFF2-40B4-BE49-F238E27FC236}">
-                <a16:creationId xmlns:a16="http://schemas.microsoft.com/office/drawing/2014/main" id="{15252D50-D027-4E45-9C34-13634B7B6C46}"/>
+                <a16:creationId xmlns:a16="http://schemas.microsoft.com/office/drawing/2014/main" id="{A378DB78-9C4B-4594-A913-8CF860D59B9C}"/>
               </a:ext>
             </a:extLst>
           </p:cNvPr>
@@ -3261,7 +3261,7 @@
           <p:cNvPr id="45" name="rank-score-4">
             <a:extLst xmlns:a="http://schemas.openxmlformats.org/drawingml/2006/main">
               <a:ext uri="{FF2B5EF4-FFF2-40B4-BE49-F238E27FC236}">
-                <a16:creationId xmlns:a16="http://schemas.microsoft.com/office/drawing/2014/main" id="{08F56E90-4F55-4D96-BB52-88086E7C35E3}"/>
+                <a16:creationId xmlns:a16="http://schemas.microsoft.com/office/drawing/2014/main" id="{3B63D0C2-492D-429A-A2EE-3101344AB3C1}"/>
               </a:ext>
             </a:extLst>
           </p:cNvPr>
@@ -3319,7 +3319,7 @@
           <p:cNvPr id="46" name="stable-tie-bracket">
             <a:extLst xmlns:a="http://schemas.openxmlformats.org/drawingml/2006/main">
               <a:ext uri="{FF2B5EF4-FFF2-40B4-BE49-F238E27FC236}">
-                <a16:creationId xmlns:a16="http://schemas.microsoft.com/office/drawing/2014/main" id="{F6CA9EAA-FB2E-4070-ADCA-F0218D6902F0}"/>
+                <a16:creationId xmlns:a16="http://schemas.microsoft.com/office/drawing/2014/main" id="{4C7F893D-5998-4210-8EE2-9682B028042C}"/>
               </a:ext>
             </a:extLst>
           </p:cNvPr>
@@ -3350,7 +3350,7 @@
           <p:cNvPr id="47" name="">
             <a:extLst xmlns:a="http://schemas.openxmlformats.org/drawingml/2006/main">
               <a:ext uri="{FF2B5EF4-FFF2-40B4-BE49-F238E27FC236}">
-                <a16:creationId xmlns:a16="http://schemas.microsoft.com/office/drawing/2014/main" id="{18D0601B-6991-4775-BDF8-0254BFEEF4FF}"/>
+                <a16:creationId xmlns:a16="http://schemas.microsoft.com/office/drawing/2014/main" id="{0F01C678-95D2-451B-B835-690DB7BFC8EB}"/>
               </a:ext>
             </a:extLst>
           </p:cNvPr>
@@ -3381,7 +3381,7 @@
           <p:cNvPr id="48" name="">
             <a:extLst xmlns:a="http://schemas.openxmlformats.org/drawingml/2006/main">
               <a:ext uri="{FF2B5EF4-FFF2-40B4-BE49-F238E27FC236}">
-                <a16:creationId xmlns:a16="http://schemas.microsoft.com/office/drawing/2014/main" id="{85C73A5E-9571-482B-9785-27CFEAC826CD}"/>
+                <a16:creationId xmlns:a16="http://schemas.microsoft.com/office/drawing/2014/main" id="{21431ACC-6DF0-4F14-B5A3-EDBA71EBBCEF}"/>
               </a:ext>
             </a:extLst>
           </p:cNvPr>
@@ -3412,7 +3412,7 @@
           <p:cNvPr id="49" name="stable-tie-label">
             <a:extLst xmlns:a="http://schemas.openxmlformats.org/drawingml/2006/main">
               <a:ext uri="{FF2B5EF4-FFF2-40B4-BE49-F238E27FC236}">
-                <a16:creationId xmlns:a16="http://schemas.microsoft.com/office/drawing/2014/main" id="{E5F01D5F-9CD7-431A-8473-CA2CBE6DB11F}"/>
+                <a16:creationId xmlns:a16="http://schemas.microsoft.com/office/drawing/2014/main" id="{CDCB75C3-BCD0-480B-86F1-5AF183F39039}"/>
               </a:ext>
             </a:extLst>
           </p:cNvPr>
@@ -3470,7 +3470,7 @@
           <p:cNvPr id="50" name="ranking-tie-caption">
             <a:extLst xmlns:a="http://schemas.openxmlformats.org/drawingml/2006/main">
               <a:ext uri="{FF2B5EF4-FFF2-40B4-BE49-F238E27FC236}">
-                <a16:creationId xmlns:a16="http://schemas.microsoft.com/office/drawing/2014/main" id="{BA5DA827-D111-4EFA-994B-8253B3516673}"/>
+                <a16:creationId xmlns:a16="http://schemas.microsoft.com/office/drawing/2014/main" id="{ADF7E9C4-27D2-4A29-AAAD-FA9791D719F4}"/>
               </a:ext>
             </a:extLst>
           </p:cNvPr>
@@ -3499,7 +3499,7 @@
           </a:bodyPr>
           <a:lstStyle xmlns:a="http://schemas.openxmlformats.org/drawingml/2006/main"/>
           <a:p xmlns:a="http://schemas.openxmlformats.org/drawingml/2006/main">
-            <a:pPr algn="ctr">
+            <a:pPr algn="l">
               <a:defRPr sz="1125" b="0">
                 <a:solidFill>
                   <a:srgbClr val="637077"/>
@@ -3528,7 +3528,7 @@
           <p:cNvPr id="51" name="allocation-heading">
             <a:extLst xmlns:a="http://schemas.openxmlformats.org/drawingml/2006/main">
               <a:ext uri="{FF2B5EF4-FFF2-40B4-BE49-F238E27FC236}">
-                <a16:creationId xmlns:a16="http://schemas.microsoft.com/office/drawing/2014/main" id="{52E13C7B-661F-45DC-8D17-BE19DD732F0C}"/>
+                <a16:creationId xmlns:a16="http://schemas.microsoft.com/office/drawing/2014/main" id="{514652EC-B38C-4ABF-BE2E-D63F6A7B7B7A}"/>
               </a:ext>
             </a:extLst>
           </p:cNvPr>
@@ -3557,7 +3557,7 @@
           </a:bodyPr>
           <a:lstStyle xmlns:a="http://schemas.openxmlformats.org/drawingml/2006/main"/>
           <a:p xmlns:a="http://schemas.openxmlformats.org/drawingml/2006/main">
-            <a:pPr algn="ctr">
+            <a:pPr algn="l">
               <a:defRPr sz="1725" b="1">
                 <a:solidFill>
                   <a:srgbClr val="26785F"/>
@@ -3586,7 +3586,7 @@
           <p:cNvPr id="52" name="allocation-caption">
             <a:extLst xmlns:a="http://schemas.openxmlformats.org/drawingml/2006/main">
               <a:ext uri="{FF2B5EF4-FFF2-40B4-BE49-F238E27FC236}">
-                <a16:creationId xmlns:a16="http://schemas.microsoft.com/office/drawing/2014/main" id="{4B1B2F7A-5BAD-49F3-9BE3-508C5E0636AC}"/>
+                <a16:creationId xmlns:a16="http://schemas.microsoft.com/office/drawing/2014/main" id="{EB848A8C-B430-4DBB-AD85-0B407A878845}"/>
               </a:ext>
             </a:extLst>
           </p:cNvPr>
@@ -3598,7 +3598,7 @@
         <p:spPr>
           <a:xfrm xmlns:a="http://schemas.openxmlformats.org/drawingml/2006/main" rot="0">
             <a:off x="5314950" y="1771650"/>
-            <a:ext cx="3905250" cy="266700"/>
+            <a:ext cx="3905250" cy="361950"/>
           </a:xfrm>
           <a:prstGeom xmlns:a="http://schemas.openxmlformats.org/drawingml/2006/main" prst="rect">
             <a:avLst/>
@@ -3610,12 +3610,12 @@
           </a:ln>
         </p:spPr>
         <p:txBody>
-          <a:bodyPr xmlns:a="http://schemas.openxmlformats.org/drawingml/2006/main" wrap="square" lIns="19050" tIns="9525" rIns="19050" bIns="9525" anchor="ctr">
+          <a:bodyPr xmlns:a="http://schemas.openxmlformats.org/drawingml/2006/main" wrap="square" lIns="19050" tIns="9525" rIns="19050" bIns="9525" anchor="t">
             <a:normAutofit fontScale="100000"/>
           </a:bodyPr>
           <a:lstStyle xmlns:a="http://schemas.openxmlformats.org/drawingml/2006/main"/>
           <a:p xmlns:a="http://schemas.openxmlformats.org/drawingml/2006/main">
-            <a:pPr algn="ctr">
+            <a:pPr algn="l">
               <a:defRPr sz="1200" b="0">
                 <a:solidFill>
                   <a:srgbClr val="637077"/>
@@ -3644,7 +3644,7 @@
           <p:cNvPr id="53" name="policy-to-queue-arrow">
             <a:extLst xmlns:a="http://schemas.openxmlformats.org/drawingml/2006/main">
               <a:ext uri="{FF2B5EF4-FFF2-40B4-BE49-F238E27FC236}">
-                <a16:creationId xmlns:a16="http://schemas.microsoft.com/office/drawing/2014/main" id="{FA3AA5A9-2750-4CCA-AD70-185D0992B2DE}"/>
+                <a16:creationId xmlns:a16="http://schemas.microsoft.com/office/drawing/2014/main" id="{840A9F6A-91DC-4384-9FE4-6AD917ED8BCF}"/>
               </a:ext>
             </a:extLst>
           </p:cNvPr>
@@ -3675,7 +3675,7 @@
           <p:cNvPr id="54" name="global-to-queue-arrow">
             <a:extLst xmlns:a="http://schemas.openxmlformats.org/drawingml/2006/main">
               <a:ext uri="{FF2B5EF4-FFF2-40B4-BE49-F238E27FC236}">
-                <a16:creationId xmlns:a16="http://schemas.microsoft.com/office/drawing/2014/main" id="{B31891CC-7A5F-486E-AA93-8F514BEBC6D5}"/>
+                <a16:creationId xmlns:a16="http://schemas.microsoft.com/office/drawing/2014/main" id="{BF86755D-D724-4DB0-915C-9AC5626F4097}"/>
               </a:ext>
             </a:extLst>
           </p:cNvPr>
@@ -3706,7 +3706,7 @@
           <p:cNvPr id="55" name="allocation-policy">
             <a:extLst xmlns:a="http://schemas.openxmlformats.org/drawingml/2006/main">
               <a:ext uri="{FF2B5EF4-FFF2-40B4-BE49-F238E27FC236}">
-                <a16:creationId xmlns:a16="http://schemas.microsoft.com/office/drawing/2014/main" id="{E6D33484-2377-45B7-BF71-C8338A573D11}"/>
+                <a16:creationId xmlns:a16="http://schemas.microsoft.com/office/drawing/2014/main" id="{CD76DBCA-8932-46D1-A6BA-4A223A3FAD48}"/>
               </a:ext>
             </a:extLst>
           </p:cNvPr>
@@ -3739,7 +3739,7 @@
           <p:cNvPr id="56" name="allocation-policy-name">
             <a:extLst xmlns:a="http://schemas.openxmlformats.org/drawingml/2006/main">
               <a:ext uri="{FF2B5EF4-FFF2-40B4-BE49-F238E27FC236}">
-                <a16:creationId xmlns:a16="http://schemas.microsoft.com/office/drawing/2014/main" id="{A02461FA-E7B7-4A70-9BF3-7D22C69F2C67}"/>
+                <a16:creationId xmlns:a16="http://schemas.microsoft.com/office/drawing/2014/main" id="{A2786121-8335-4F4E-8CF2-026B8B59C016}"/>
               </a:ext>
             </a:extLst>
           </p:cNvPr>
@@ -3797,7 +3797,7 @@
           <p:cNvPr id="57" name="allocation-policy-profile">
             <a:extLst xmlns:a="http://schemas.openxmlformats.org/drawingml/2006/main">
               <a:ext uri="{FF2B5EF4-FFF2-40B4-BE49-F238E27FC236}">
-                <a16:creationId xmlns:a16="http://schemas.microsoft.com/office/drawing/2014/main" id="{D630D256-B72C-4EFD-B8A0-3142006D4BA0}"/>
+                <a16:creationId xmlns:a16="http://schemas.microsoft.com/office/drawing/2014/main" id="{1D9AA398-75B5-40E6-89F5-DCE282D259A2}"/>
               </a:ext>
             </a:extLst>
           </p:cNvPr>
@@ -3855,7 +3855,7 @@
           <p:cNvPr id="58" name="allocation-policy-fraction">
             <a:extLst xmlns:a="http://schemas.openxmlformats.org/drawingml/2006/main">
               <a:ext uri="{FF2B5EF4-FFF2-40B4-BE49-F238E27FC236}">
-                <a16:creationId xmlns:a16="http://schemas.microsoft.com/office/drawing/2014/main" id="{ADD187BB-31DF-44AF-A1E5-567E0422231A}"/>
+                <a16:creationId xmlns:a16="http://schemas.microsoft.com/office/drawing/2014/main" id="{4B86B31B-93E7-4869-82AB-05AA4390BC33}"/>
               </a:ext>
             </a:extLst>
           </p:cNvPr>
@@ -3913,7 +3913,7 @@
           <p:cNvPr id="59" name="allocation-policy-token-1">
             <a:extLst xmlns:a="http://schemas.openxmlformats.org/drawingml/2006/main">
               <a:ext uri="{FF2B5EF4-FFF2-40B4-BE49-F238E27FC236}">
-                <a16:creationId xmlns:a16="http://schemas.microsoft.com/office/drawing/2014/main" id="{4D79B9A8-9BA6-47D2-88E9-0F45B74F3590}"/>
+                <a16:creationId xmlns:a16="http://schemas.microsoft.com/office/drawing/2014/main" id="{2155FD56-0C73-4011-A504-49818D5A96E5}"/>
               </a:ext>
             </a:extLst>
           </p:cNvPr>
@@ -3946,7 +3946,7 @@
           <p:cNvPr id="60" name="allocation-policy-token-2">
             <a:extLst xmlns:a="http://schemas.openxmlformats.org/drawingml/2006/main">
               <a:ext uri="{FF2B5EF4-FFF2-40B4-BE49-F238E27FC236}">
-                <a16:creationId xmlns:a16="http://schemas.microsoft.com/office/drawing/2014/main" id="{233C9093-5803-4FCD-87E4-AF41C83C1D18}"/>
+                <a16:creationId xmlns:a16="http://schemas.microsoft.com/office/drawing/2014/main" id="{78137A0A-BC04-42B3-AD8A-F6FB6A82242F}"/>
               </a:ext>
             </a:extLst>
           </p:cNvPr>
@@ -3979,7 +3979,7 @@
           <p:cNvPr id="61" name="allocation-policy-order">
             <a:extLst xmlns:a="http://schemas.openxmlformats.org/drawingml/2006/main">
               <a:ext uri="{FF2B5EF4-FFF2-40B4-BE49-F238E27FC236}">
-                <a16:creationId xmlns:a16="http://schemas.microsoft.com/office/drawing/2014/main" id="{BC02DFF8-AE44-47DE-816C-9DB668D0B448}"/>
+                <a16:creationId xmlns:a16="http://schemas.microsoft.com/office/drawing/2014/main" id="{6D72293E-76CD-47D4-8BD7-0C26DADE316E}"/>
               </a:ext>
             </a:extLst>
           </p:cNvPr>
@@ -4037,7 +4037,7 @@
           <p:cNvPr id="62" name="allocation-global-label">
             <a:extLst xmlns:a="http://schemas.openxmlformats.org/drawingml/2006/main">
               <a:ext uri="{FF2B5EF4-FFF2-40B4-BE49-F238E27FC236}">
-                <a16:creationId xmlns:a16="http://schemas.microsoft.com/office/drawing/2014/main" id="{4F920531-EFC4-404F-B865-2EBCEAF3EB62}"/>
+                <a16:creationId xmlns:a16="http://schemas.microsoft.com/office/drawing/2014/main" id="{36DEE64A-FD1C-476A-8FB5-70A1FC15EC96}"/>
               </a:ext>
             </a:extLst>
           </p:cNvPr>
@@ -4095,7 +4095,7 @@
           <p:cNvPr id="63" name="allocation-global-token-1">
             <a:extLst xmlns:a="http://schemas.openxmlformats.org/drawingml/2006/main">
               <a:ext uri="{FF2B5EF4-FFF2-40B4-BE49-F238E27FC236}">
-                <a16:creationId xmlns:a16="http://schemas.microsoft.com/office/drawing/2014/main" id="{C01D112A-1E98-4785-96F8-298B6C30F493}"/>
+                <a16:creationId xmlns:a16="http://schemas.microsoft.com/office/drawing/2014/main" id="{775FCDD8-26F9-40A1-8E1E-231C04956EE7}"/>
               </a:ext>
             </a:extLst>
           </p:cNvPr>
@@ -4126,7 +4126,7 @@
           <p:cNvPr id="64" name="allocation-global-rank-1">
             <a:extLst xmlns:a="http://schemas.openxmlformats.org/drawingml/2006/main">
               <a:ext uri="{FF2B5EF4-FFF2-40B4-BE49-F238E27FC236}">
-                <a16:creationId xmlns:a16="http://schemas.microsoft.com/office/drawing/2014/main" id="{2A41FEEE-98CD-47F2-8E1C-309DB5DD79B3}"/>
+                <a16:creationId xmlns:a16="http://schemas.microsoft.com/office/drawing/2014/main" id="{06128AD7-65C7-419D-A4F3-73D4EBA0A12F}"/>
               </a:ext>
             </a:extLst>
           </p:cNvPr>
@@ -4184,7 +4184,7 @@
           <p:cNvPr id="65" name="allocation-global-token-2">
             <a:extLst xmlns:a="http://schemas.openxmlformats.org/drawingml/2006/main">
               <a:ext uri="{FF2B5EF4-FFF2-40B4-BE49-F238E27FC236}">
-                <a16:creationId xmlns:a16="http://schemas.microsoft.com/office/drawing/2014/main" id="{054C4A07-1CE0-4F09-B328-20F1108ACB4C}"/>
+                <a16:creationId xmlns:a16="http://schemas.microsoft.com/office/drawing/2014/main" id="{EDEC1E67-8CA1-4807-83C3-5F8AAED5D0F3}"/>
               </a:ext>
             </a:extLst>
           </p:cNvPr>
@@ -4217,7 +4217,7 @@
           <p:cNvPr id="66" name="allocation-global-rank-2">
             <a:extLst xmlns:a="http://schemas.openxmlformats.org/drawingml/2006/main">
               <a:ext uri="{FF2B5EF4-FFF2-40B4-BE49-F238E27FC236}">
-                <a16:creationId xmlns:a16="http://schemas.microsoft.com/office/drawing/2014/main" id="{6F6121D7-875F-4250-96ED-4DDBEA5ED569}"/>
+                <a16:creationId xmlns:a16="http://schemas.microsoft.com/office/drawing/2014/main" id="{B46747B2-81CF-4D96-BEC6-FDDD85F0E50F}"/>
               </a:ext>
             </a:extLst>
           </p:cNvPr>
@@ -4275,7 +4275,7 @@
           <p:cNvPr id="67" name="allocation-global-token-3">
             <a:extLst xmlns:a="http://schemas.openxmlformats.org/drawingml/2006/main">
               <a:ext uri="{FF2B5EF4-FFF2-40B4-BE49-F238E27FC236}">
-                <a16:creationId xmlns:a16="http://schemas.microsoft.com/office/drawing/2014/main" id="{E060EA77-C445-45CB-A1E5-B460B0DB57DB}"/>
+                <a16:creationId xmlns:a16="http://schemas.microsoft.com/office/drawing/2014/main" id="{BD33C9EA-78ED-45FF-B2C8-D542FD43A008}"/>
               </a:ext>
             </a:extLst>
           </p:cNvPr>
@@ -4308,7 +4308,7 @@
           <p:cNvPr id="68" name="allocation-global-rank-3">
             <a:extLst xmlns:a="http://schemas.openxmlformats.org/drawingml/2006/main">
               <a:ext uri="{FF2B5EF4-FFF2-40B4-BE49-F238E27FC236}">
-                <a16:creationId xmlns:a16="http://schemas.microsoft.com/office/drawing/2014/main" id="{CD545F40-D949-42FB-BEDA-8708FE3E86BE}"/>
+                <a16:creationId xmlns:a16="http://schemas.microsoft.com/office/drawing/2014/main" id="{F96E4A04-D249-4B69-BF13-2AE4BA77B3B0}"/>
               </a:ext>
             </a:extLst>
           </p:cNvPr>
@@ -4366,7 +4366,7 @@
           <p:cNvPr id="69" name="allocation-global-token-4">
             <a:extLst xmlns:a="http://schemas.openxmlformats.org/drawingml/2006/main">
               <a:ext uri="{FF2B5EF4-FFF2-40B4-BE49-F238E27FC236}">
-                <a16:creationId xmlns:a16="http://schemas.microsoft.com/office/drawing/2014/main" id="{4E504996-F520-40DE-9E41-A57616E056E4}"/>
+                <a16:creationId xmlns:a16="http://schemas.microsoft.com/office/drawing/2014/main" id="{610EA4C6-8453-4F8C-A8A6-40E868234FC1}"/>
               </a:ext>
             </a:extLst>
           </p:cNvPr>
@@ -4397,7 +4397,7 @@
           <p:cNvPr id="70" name="allocation-global-rank-4">
             <a:extLst xmlns:a="http://schemas.openxmlformats.org/drawingml/2006/main">
               <a:ext uri="{FF2B5EF4-FFF2-40B4-BE49-F238E27FC236}">
-                <a16:creationId xmlns:a16="http://schemas.microsoft.com/office/drawing/2014/main" id="{7E94C0C0-94B4-4927-8386-9599C0261690}"/>
+                <a16:creationId xmlns:a16="http://schemas.microsoft.com/office/drawing/2014/main" id="{CFB087F9-EEEF-4647-9F74-7CB654A7B7DF}"/>
               </a:ext>
             </a:extLst>
           </p:cNvPr>
@@ -4455,7 +4455,7 @@
           <p:cNvPr id="71" name="allocation-global-baseline">
             <a:extLst xmlns:a="http://schemas.openxmlformats.org/drawingml/2006/main">
               <a:ext uri="{FF2B5EF4-FFF2-40B4-BE49-F238E27FC236}">
-                <a16:creationId xmlns:a16="http://schemas.microsoft.com/office/drawing/2014/main" id="{17E276B4-40C6-4B10-A6E7-D1D26E2EEDC6}"/>
+                <a16:creationId xmlns:a16="http://schemas.microsoft.com/office/drawing/2014/main" id="{E82733F3-56BB-4DA6-8453-7BFA3D268D36}"/>
               </a:ext>
             </a:extLst>
           </p:cNvPr>
@@ -4486,7 +4486,7 @@
           <p:cNvPr id="72" name="allocation-reserved-label">
             <a:extLst xmlns:a="http://schemas.openxmlformats.org/drawingml/2006/main">
               <a:ext uri="{FF2B5EF4-FFF2-40B4-BE49-F238E27FC236}">
-                <a16:creationId xmlns:a16="http://schemas.microsoft.com/office/drawing/2014/main" id="{57841E6F-EABA-4247-9EF5-52E52E2F3AEC}"/>
+                <a16:creationId xmlns:a16="http://schemas.microsoft.com/office/drawing/2014/main" id="{5EB5D7D0-9AD4-42DE-9057-544537E15211}"/>
               </a:ext>
             </a:extLst>
           </p:cNvPr>
@@ -4544,7 +4544,7 @@
           <p:cNvPr id="73" name="allocation-fill-label">
             <a:extLst xmlns:a="http://schemas.openxmlformats.org/drawingml/2006/main">
               <a:ext uri="{FF2B5EF4-FFF2-40B4-BE49-F238E27FC236}">
-                <a16:creationId xmlns:a16="http://schemas.microsoft.com/office/drawing/2014/main" id="{619040F7-8C8A-4CA5-B339-50B44ED5A805}"/>
+                <a16:creationId xmlns:a16="http://schemas.microsoft.com/office/drawing/2014/main" id="{58905538-D7C2-431D-B4C9-E25358932869}"/>
               </a:ext>
             </a:extLst>
           </p:cNvPr>
@@ -4602,7 +4602,7 @@
           <p:cNvPr id="74" name="allocation-slot-1">
             <a:extLst xmlns:a="http://schemas.openxmlformats.org/drawingml/2006/main">
               <a:ext uri="{FF2B5EF4-FFF2-40B4-BE49-F238E27FC236}">
-                <a16:creationId xmlns:a16="http://schemas.microsoft.com/office/drawing/2014/main" id="{6441C0B4-09F7-4CE7-BE84-502333BF1E3E}"/>
+                <a16:creationId xmlns:a16="http://schemas.microsoft.com/office/drawing/2014/main" id="{FC28115E-F413-4211-AAB1-33E45585DEB2}"/>
               </a:ext>
             </a:extLst>
           </p:cNvPr>
@@ -4635,7 +4635,7 @@
           <p:cNvPr id="75" name="allocation-slot-token-1">
             <a:extLst xmlns:a="http://schemas.openxmlformats.org/drawingml/2006/main">
               <a:ext uri="{FF2B5EF4-FFF2-40B4-BE49-F238E27FC236}">
-                <a16:creationId xmlns:a16="http://schemas.microsoft.com/office/drawing/2014/main" id="{315BEBD9-7777-4DF0-82AE-6BE10F85ACC4}"/>
+                <a16:creationId xmlns:a16="http://schemas.microsoft.com/office/drawing/2014/main" id="{8A809C25-072F-45EC-A64B-7F95AD54D66E}"/>
               </a:ext>
             </a:extLst>
           </p:cNvPr>
@@ -4668,7 +4668,7 @@
           <p:cNvPr id="76" name="allocation-slot-2">
             <a:extLst xmlns:a="http://schemas.openxmlformats.org/drawingml/2006/main">
               <a:ext uri="{FF2B5EF4-FFF2-40B4-BE49-F238E27FC236}">
-                <a16:creationId xmlns:a16="http://schemas.microsoft.com/office/drawing/2014/main" id="{3EC3FE39-9208-484C-8FDC-CFF7BD41A600}"/>
+                <a16:creationId xmlns:a16="http://schemas.microsoft.com/office/drawing/2014/main" id="{9AB07EAC-15EB-42BF-BF6D-C2B113B4EFCD}"/>
               </a:ext>
             </a:extLst>
           </p:cNvPr>
@@ -4701,7 +4701,7 @@
           <p:cNvPr id="77" name="allocation-slot-token-2">
             <a:extLst xmlns:a="http://schemas.openxmlformats.org/drawingml/2006/main">
               <a:ext uri="{FF2B5EF4-FFF2-40B4-BE49-F238E27FC236}">
-                <a16:creationId xmlns:a16="http://schemas.microsoft.com/office/drawing/2014/main" id="{7725E9D1-2E34-4FE0-81E7-D471ED39BB6D}"/>
+                <a16:creationId xmlns:a16="http://schemas.microsoft.com/office/drawing/2014/main" id="{398464DE-900B-48D6-97F8-CA9D3C14E06A}"/>
               </a:ext>
             </a:extLst>
           </p:cNvPr>
@@ -4734,7 +4734,7 @@
           <p:cNvPr id="78" name="allocation-slot-3">
             <a:extLst xmlns:a="http://schemas.openxmlformats.org/drawingml/2006/main">
               <a:ext uri="{FF2B5EF4-FFF2-40B4-BE49-F238E27FC236}">
-                <a16:creationId xmlns:a16="http://schemas.microsoft.com/office/drawing/2014/main" id="{3ACD4D96-2BD0-4782-B698-0AB4F86D35D5}"/>
+                <a16:creationId xmlns:a16="http://schemas.microsoft.com/office/drawing/2014/main" id="{C89D51A7-1D05-413F-865F-B7CC425371FD}"/>
               </a:ext>
             </a:extLst>
           </p:cNvPr>
@@ -4767,7 +4767,7 @@
           <p:cNvPr id="79" name="allocation-slot-token-3">
             <a:extLst xmlns:a="http://schemas.openxmlformats.org/drawingml/2006/main">
               <a:ext uri="{FF2B5EF4-FFF2-40B4-BE49-F238E27FC236}">
-                <a16:creationId xmlns:a16="http://schemas.microsoft.com/office/drawing/2014/main" id="{C4281113-869C-497B-8EA7-9A8AAD0F3940}"/>
+                <a16:creationId xmlns:a16="http://schemas.microsoft.com/office/drawing/2014/main" id="{A92EC4BB-82EE-4A71-B002-A72E7E7DDF17}"/>
               </a:ext>
             </a:extLst>
           </p:cNvPr>
@@ -4798,7 +4798,7 @@
           <p:cNvPr id="80" name="allocation-slot-4">
             <a:extLst xmlns:a="http://schemas.openxmlformats.org/drawingml/2006/main">
               <a:ext uri="{FF2B5EF4-FFF2-40B4-BE49-F238E27FC236}">
-                <a16:creationId xmlns:a16="http://schemas.microsoft.com/office/drawing/2014/main" id="{66999BA6-C3C4-4183-9C68-D3F727B45A58}"/>
+                <a16:creationId xmlns:a16="http://schemas.microsoft.com/office/drawing/2014/main" id="{90C2BD6B-6ECE-42F1-BDE1-39C9F57C99F2}"/>
               </a:ext>
             </a:extLst>
           </p:cNvPr>
@@ -4831,7 +4831,7 @@
           <p:cNvPr id="81" name="allocation-slot-token-4">
             <a:extLst xmlns:a="http://schemas.openxmlformats.org/drawingml/2006/main">
               <a:ext uri="{FF2B5EF4-FFF2-40B4-BE49-F238E27FC236}">
-                <a16:creationId xmlns:a16="http://schemas.microsoft.com/office/drawing/2014/main" id="{5CB083DA-2B5C-413F-A820-4F31EA7DB685}"/>
+                <a16:creationId xmlns:a16="http://schemas.microsoft.com/office/drawing/2014/main" id="{1D7FA37D-51AB-492B-896C-030ED78DFD90}"/>
               </a:ext>
             </a:extLst>
           </p:cNvPr>
@@ -4864,7 +4864,7 @@
           <p:cNvPr id="82" name="allocation-slot-5">
             <a:extLst xmlns:a="http://schemas.openxmlformats.org/drawingml/2006/main">
               <a:ext uri="{FF2B5EF4-FFF2-40B4-BE49-F238E27FC236}">
-                <a16:creationId xmlns:a16="http://schemas.microsoft.com/office/drawing/2014/main" id="{307DDD61-4855-4A45-ACEE-99D0406B3997}"/>
+                <a16:creationId xmlns:a16="http://schemas.microsoft.com/office/drawing/2014/main" id="{C8027854-DF4E-481B-861D-51BEE9561B88}"/>
               </a:ext>
             </a:extLst>
           </p:cNvPr>
@@ -4897,7 +4897,7 @@
           <p:cNvPr id="83" name="allocation-slot-token-5">
             <a:extLst xmlns:a="http://schemas.openxmlformats.org/drawingml/2006/main">
               <a:ext uri="{FF2B5EF4-FFF2-40B4-BE49-F238E27FC236}">
-                <a16:creationId xmlns:a16="http://schemas.microsoft.com/office/drawing/2014/main" id="{C50FC76F-11FE-4FC6-8D3D-DD1CB85A7F10}"/>
+                <a16:creationId xmlns:a16="http://schemas.microsoft.com/office/drawing/2014/main" id="{1B08BAC0-DC3E-471D-924D-B8BA6137BE43}"/>
               </a:ext>
             </a:extLst>
           </p:cNvPr>
@@ -4928,7 +4928,7 @@
           <p:cNvPr id="84" name="allocation-slot-6">
             <a:extLst xmlns:a="http://schemas.openxmlformats.org/drawingml/2006/main">
               <a:ext uri="{FF2B5EF4-FFF2-40B4-BE49-F238E27FC236}">
-                <a16:creationId xmlns:a16="http://schemas.microsoft.com/office/drawing/2014/main" id="{9AE6561C-9AD1-43F3-857B-30AC01044CCF}"/>
+                <a16:creationId xmlns:a16="http://schemas.microsoft.com/office/drawing/2014/main" id="{80AE180B-6C96-4BE5-A145-C00075EB2D24}"/>
               </a:ext>
             </a:extLst>
           </p:cNvPr>
@@ -4961,7 +4961,7 @@
           <p:cNvPr id="85" name="allocation-slot-token-6">
             <a:extLst xmlns:a="http://schemas.openxmlformats.org/drawingml/2006/main">
               <a:ext uri="{FF2B5EF4-FFF2-40B4-BE49-F238E27FC236}">
-                <a16:creationId xmlns:a16="http://schemas.microsoft.com/office/drawing/2014/main" id="{41DFADFA-5EE5-4BAA-9E7B-A95B15394C26}"/>
+                <a16:creationId xmlns:a16="http://schemas.microsoft.com/office/drawing/2014/main" id="{8B4135C3-AF8C-40A7-94FB-7B8B82651B3C}"/>
               </a:ext>
             </a:extLst>
           </p:cNvPr>
@@ -4994,7 +4994,7 @@
           <p:cNvPr id="86" name="allocation-slot-7">
             <a:extLst xmlns:a="http://schemas.openxmlformats.org/drawingml/2006/main">
               <a:ext uri="{FF2B5EF4-FFF2-40B4-BE49-F238E27FC236}">
-                <a16:creationId xmlns:a16="http://schemas.microsoft.com/office/drawing/2014/main" id="{E317DCE7-CF9D-4FBB-AE28-48AEF0879042}"/>
+                <a16:creationId xmlns:a16="http://schemas.microsoft.com/office/drawing/2014/main" id="{CFDFED43-3304-4BF0-ADB1-971DAB4C9E46}"/>
               </a:ext>
             </a:extLst>
           </p:cNvPr>
@@ -5027,7 +5027,7 @@
           <p:cNvPr id="87" name="allocation-slot-token-7">
             <a:extLst xmlns:a="http://schemas.openxmlformats.org/drawingml/2006/main">
               <a:ext uri="{FF2B5EF4-FFF2-40B4-BE49-F238E27FC236}">
-                <a16:creationId xmlns:a16="http://schemas.microsoft.com/office/drawing/2014/main" id="{E004F3AB-5EC9-46C0-AA41-56480A9BC698}"/>
+                <a16:creationId xmlns:a16="http://schemas.microsoft.com/office/drawing/2014/main" id="{B8EFA8A8-3834-4B00-A737-E7EE470FF885}"/>
               </a:ext>
             </a:extLst>
           </p:cNvPr>
@@ -5060,7 +5060,7 @@
           <p:cNvPr id="88" name="allocation-slot-8">
             <a:extLst xmlns:a="http://schemas.openxmlformats.org/drawingml/2006/main">
               <a:ext uri="{FF2B5EF4-FFF2-40B4-BE49-F238E27FC236}">
-                <a16:creationId xmlns:a16="http://schemas.microsoft.com/office/drawing/2014/main" id="{59848973-DE7B-40B5-8027-3AAE3E1709EE}"/>
+                <a16:creationId xmlns:a16="http://schemas.microsoft.com/office/drawing/2014/main" id="{0D610E69-9A3B-4A6F-B716-BBB7B02A2C4F}"/>
               </a:ext>
             </a:extLst>
           </p:cNvPr>
@@ -5093,7 +5093,7 @@
           <p:cNvPr id="89" name="allocation-slot-token-8">
             <a:extLst xmlns:a="http://schemas.openxmlformats.org/drawingml/2006/main">
               <a:ext uri="{FF2B5EF4-FFF2-40B4-BE49-F238E27FC236}">
-                <a16:creationId xmlns:a16="http://schemas.microsoft.com/office/drawing/2014/main" id="{1D6FAC0F-E709-4866-9431-850E5198E764}"/>
+                <a16:creationId xmlns:a16="http://schemas.microsoft.com/office/drawing/2014/main" id="{BD8DF7BF-4C57-4A1F-BAD5-558E28A6691E}"/>
               </a:ext>
             </a:extLst>
           </p:cNvPr>
@@ -5124,7 +5124,7 @@
           <p:cNvPr id="90" name="allocation-capacity-bracket">
             <a:extLst xmlns:a="http://schemas.openxmlformats.org/drawingml/2006/main">
               <a:ext uri="{FF2B5EF4-FFF2-40B4-BE49-F238E27FC236}">
-                <a16:creationId xmlns:a16="http://schemas.microsoft.com/office/drawing/2014/main" id="{E96030A9-69A8-4624-8C77-4AD28C77CFCE}"/>
+                <a16:creationId xmlns:a16="http://schemas.microsoft.com/office/drawing/2014/main" id="{C66087E8-BF1D-40FA-BEAD-6530B241162A}"/>
               </a:ext>
             </a:extLst>
           </p:cNvPr>
@@ -5155,7 +5155,7 @@
           <p:cNvPr id="91" name="">
             <a:extLst xmlns:a="http://schemas.openxmlformats.org/drawingml/2006/main">
               <a:ext uri="{FF2B5EF4-FFF2-40B4-BE49-F238E27FC236}">
-                <a16:creationId xmlns:a16="http://schemas.microsoft.com/office/drawing/2014/main" id="{E4258281-8B38-4085-8E4C-7B23015CE5F3}"/>
+                <a16:creationId xmlns:a16="http://schemas.microsoft.com/office/drawing/2014/main" id="{5C9A64A4-2417-42FF-8C16-7B10E1731DE8}"/>
               </a:ext>
             </a:extLst>
           </p:cNvPr>
@@ -5186,7 +5186,7 @@
           <p:cNvPr id="92" name="">
             <a:extLst xmlns:a="http://schemas.openxmlformats.org/drawingml/2006/main">
               <a:ext uri="{FF2B5EF4-FFF2-40B4-BE49-F238E27FC236}">
-                <a16:creationId xmlns:a16="http://schemas.microsoft.com/office/drawing/2014/main" id="{BA425858-F94D-43AE-ABA8-E4D9D2BE0635}"/>
+                <a16:creationId xmlns:a16="http://schemas.microsoft.com/office/drawing/2014/main" id="{9960C9BC-B2B6-49FA-AADF-99EFAF104F30}"/>
               </a:ext>
             </a:extLst>
           </p:cNvPr>
@@ -5217,7 +5217,7 @@
           <p:cNvPr id="93" name="allocation-capacity-label">
             <a:extLst xmlns:a="http://schemas.openxmlformats.org/drawingml/2006/main">
               <a:ext uri="{FF2B5EF4-FFF2-40B4-BE49-F238E27FC236}">
-                <a16:creationId xmlns:a16="http://schemas.microsoft.com/office/drawing/2014/main" id="{AA4F573B-6476-41E3-BCFF-45962665D697}"/>
+                <a16:creationId xmlns:a16="http://schemas.microsoft.com/office/drawing/2014/main" id="{AC9DE24B-77AF-4E91-8A32-92F3D676C3E4}"/>
               </a:ext>
             </a:extLst>
           </p:cNvPr>
@@ -5275,7 +5275,7 @@
           <p:cNvPr id="94" name="allocation-note">
             <a:extLst xmlns:a="http://schemas.openxmlformats.org/drawingml/2006/main">
               <a:ext uri="{FF2B5EF4-FFF2-40B4-BE49-F238E27FC236}">
-                <a16:creationId xmlns:a16="http://schemas.microsoft.com/office/drawing/2014/main" id="{2F0559D0-A07B-4C7B-A42D-B6B295269E1D}"/>
+                <a16:creationId xmlns:a16="http://schemas.microsoft.com/office/drawing/2014/main" id="{D0F57C99-79CC-401A-B454-A02512BDA1CA}"/>
               </a:ext>
             </a:extLst>
           </p:cNvPr>
@@ -5304,7 +5304,7 @@
           </a:bodyPr>
           <a:lstStyle xmlns:a="http://schemas.openxmlformats.org/drawingml/2006/main"/>
           <a:p xmlns:a="http://schemas.openxmlformats.org/drawingml/2006/main">
-            <a:pPr algn="ctr">
+            <a:pPr algn="l">
               <a:defRPr sz="1200" b="0">
                 <a:solidFill>
                   <a:srgbClr val="637077"/>
@@ -5333,19 +5333,19 @@
           <p:cNvPr id="95" name="output-heading">
             <a:extLst xmlns:a="http://schemas.openxmlformats.org/drawingml/2006/main">
               <a:ext uri="{FF2B5EF4-FFF2-40B4-BE49-F238E27FC236}">
-                <a16:creationId xmlns:a16="http://schemas.microsoft.com/office/drawing/2014/main" id="{B7B271C8-828B-4A69-8C75-B93E3F090271}"/>
-              </a:ext>
-            </a:extLst>
-          </p:cNvPr>
-          <p:cNvSpPr>
-            <a:spLocks xmlns:a="http://schemas.openxmlformats.org/drawingml/2006/main" noGrp="1"/>
-          </p:cNvSpPr>
-          <p:nvPr/>
-        </p:nvSpPr>
-        <p:spPr>
-          <a:xfrm xmlns:a="http://schemas.openxmlformats.org/drawingml/2006/main" rot="0">
-            <a:off x="9734550" y="1428750"/>
-            <a:ext cx="1847850" cy="323850"/>
+                <a16:creationId xmlns:a16="http://schemas.microsoft.com/office/drawing/2014/main" id="{8EA0717F-460D-4B9F-80BD-11783F167784}"/>
+              </a:ext>
+            </a:extLst>
+          </p:cNvPr>
+          <p:cNvSpPr>
+            <a:spLocks xmlns:a="http://schemas.openxmlformats.org/drawingml/2006/main" noGrp="1"/>
+          </p:cNvSpPr>
+          <p:nvPr/>
+        </p:nvSpPr>
+        <p:spPr>
+          <a:xfrm xmlns:a="http://schemas.openxmlformats.org/drawingml/2006/main" rot="0">
+            <a:off x="10020300" y="1428750"/>
+            <a:ext cx="1562100" cy="323850"/>
           </a:xfrm>
           <a:prstGeom xmlns:a="http://schemas.openxmlformats.org/drawingml/2006/main" prst="rect">
             <a:avLst/>
@@ -5362,7 +5362,7 @@
           </a:bodyPr>
           <a:lstStyle xmlns:a="http://schemas.openxmlformats.org/drawingml/2006/main"/>
           <a:p xmlns:a="http://schemas.openxmlformats.org/drawingml/2006/main">
-            <a:pPr algn="ctr">
+            <a:pPr algn="l">
               <a:defRPr sz="1725" b="1">
                 <a:solidFill>
                   <a:srgbClr val="765A8D"/>
@@ -5391,19 +5391,19 @@
           <p:cNvPr id="96" name="output-caption">
             <a:extLst xmlns:a="http://schemas.openxmlformats.org/drawingml/2006/main">
               <a:ext uri="{FF2B5EF4-FFF2-40B4-BE49-F238E27FC236}">
-                <a16:creationId xmlns:a16="http://schemas.microsoft.com/office/drawing/2014/main" id="{8B9F8A9A-E3C5-47EE-9766-E5BAA9138FE3}"/>
-              </a:ext>
-            </a:extLst>
-          </p:cNvPr>
-          <p:cNvSpPr>
-            <a:spLocks xmlns:a="http://schemas.openxmlformats.org/drawingml/2006/main" noGrp="1"/>
-          </p:cNvSpPr>
-          <p:nvPr/>
-        </p:nvSpPr>
-        <p:spPr>
-          <a:xfrm xmlns:a="http://schemas.openxmlformats.org/drawingml/2006/main" rot="0">
-            <a:off x="9734550" y="1771650"/>
-            <a:ext cx="1847850" cy="304800"/>
+                <a16:creationId xmlns:a16="http://schemas.microsoft.com/office/drawing/2014/main" id="{7C257B9D-1F6D-435D-8D50-7CE0656846F4}"/>
+              </a:ext>
+            </a:extLst>
+          </p:cNvPr>
+          <p:cNvSpPr>
+            <a:spLocks xmlns:a="http://schemas.openxmlformats.org/drawingml/2006/main" noGrp="1"/>
+          </p:cNvSpPr>
+          <p:nvPr/>
+        </p:nvSpPr>
+        <p:spPr>
+          <a:xfrm xmlns:a="http://schemas.openxmlformats.org/drawingml/2006/main" rot="0">
+            <a:off x="10020300" y="1771650"/>
+            <a:ext cx="1562100" cy="361950"/>
           </a:xfrm>
           <a:prstGeom xmlns:a="http://schemas.openxmlformats.org/drawingml/2006/main" prst="rect">
             <a:avLst/>
@@ -5415,12 +5415,12 @@
           </a:ln>
         </p:spPr>
         <p:txBody>
-          <a:bodyPr xmlns:a="http://schemas.openxmlformats.org/drawingml/2006/main" wrap="square" lIns="19050" tIns="9525" rIns="19050" bIns="9525" anchor="ctr">
-            <a:normAutofit fontScale="94809"/>
+          <a:bodyPr xmlns:a="http://schemas.openxmlformats.org/drawingml/2006/main" wrap="square" lIns="19050" tIns="9525" rIns="19050" bIns="9525" anchor="t">
+            <a:normAutofit fontScale="93750"/>
           </a:bodyPr>
           <a:lstStyle xmlns:a="http://schemas.openxmlformats.org/drawingml/2006/main"/>
           <a:p xmlns:a="http://schemas.openxmlformats.org/drawingml/2006/main">
-            <a:pPr algn="ctr">
+            <a:pPr algn="l">
               <a:defRPr sz="1200" b="0">
                 <a:solidFill>
                   <a:srgbClr val="637077"/>
@@ -5449,18 +5449,18 @@
           <p:cNvPr id="97" name="queue-result-ledger">
             <a:extLst xmlns:a="http://schemas.openxmlformats.org/drawingml/2006/main">
               <a:ext uri="{FF2B5EF4-FFF2-40B4-BE49-F238E27FC236}">
-                <a16:creationId xmlns:a16="http://schemas.microsoft.com/office/drawing/2014/main" id="{48CD94DA-EEBB-401D-AD23-A28B1EBF7616}"/>
-              </a:ext>
-            </a:extLst>
-          </p:cNvPr>
-          <p:cNvSpPr>
-            <a:spLocks xmlns:a="http://schemas.openxmlformats.org/drawingml/2006/main" noGrp="1"/>
-          </p:cNvSpPr>
-          <p:nvPr/>
-        </p:nvSpPr>
-        <p:spPr>
-          <a:xfrm xmlns:a="http://schemas.openxmlformats.org/drawingml/2006/main" rot="0">
-            <a:off x="9877425" y="2209800"/>
+                <a16:creationId xmlns:a16="http://schemas.microsoft.com/office/drawing/2014/main" id="{86CBFDA0-D2BD-4595-8E34-67C3823EFB93}"/>
+              </a:ext>
+            </a:extLst>
+          </p:cNvPr>
+          <p:cNvSpPr>
+            <a:spLocks xmlns:a="http://schemas.openxmlformats.org/drawingml/2006/main" noGrp="1"/>
+          </p:cNvSpPr>
+          <p:nvPr/>
+        </p:nvSpPr>
+        <p:spPr>
+          <a:xfrm xmlns:a="http://schemas.openxmlformats.org/drawingml/2006/main" rot="0">
+            <a:off x="10020300" y="2209800"/>
             <a:ext cx="1562100" cy="1676400"/>
           </a:xfrm>
           <a:prstGeom xmlns:a="http://schemas.openxmlformats.org/drawingml/2006/main" prst="rect">
@@ -5482,18 +5482,18 @@
           <p:cNvPr id="98" name="queue-result-header">
             <a:extLst xmlns:a="http://schemas.openxmlformats.org/drawingml/2006/main">
               <a:ext uri="{FF2B5EF4-FFF2-40B4-BE49-F238E27FC236}">
-                <a16:creationId xmlns:a16="http://schemas.microsoft.com/office/drawing/2014/main" id="{94625D73-39C8-43C3-AD87-DD0CF76D09B5}"/>
-              </a:ext>
-            </a:extLst>
-          </p:cNvPr>
-          <p:cNvSpPr>
-            <a:spLocks xmlns:a="http://schemas.openxmlformats.org/drawingml/2006/main" noGrp="1"/>
-          </p:cNvSpPr>
-          <p:nvPr/>
-        </p:nvSpPr>
-        <p:spPr>
-          <a:xfrm xmlns:a="http://schemas.openxmlformats.org/drawingml/2006/main" rot="0">
-            <a:off x="9877425" y="2209800"/>
+                <a16:creationId xmlns:a16="http://schemas.microsoft.com/office/drawing/2014/main" id="{1B0BCDBD-7D10-43E1-919E-5875A9E72D0B}"/>
+              </a:ext>
+            </a:extLst>
+          </p:cNvPr>
+          <p:cNvSpPr>
+            <a:spLocks xmlns:a="http://schemas.openxmlformats.org/drawingml/2006/main" noGrp="1"/>
+          </p:cNvSpPr>
+          <p:nvPr/>
+        </p:nvSpPr>
+        <p:spPr>
+          <a:xfrm xmlns:a="http://schemas.openxmlformats.org/drawingml/2006/main" rot="0">
+            <a:off x="10020300" y="2209800"/>
             <a:ext cx="1562100" cy="361950"/>
           </a:xfrm>
           <a:prstGeom xmlns:a="http://schemas.openxmlformats.org/drawingml/2006/main" prst="rect">
@@ -5515,18 +5515,18 @@
           <p:cNvPr id="99" name="queue-result-title">
             <a:extLst xmlns:a="http://schemas.openxmlformats.org/drawingml/2006/main">
               <a:ext uri="{FF2B5EF4-FFF2-40B4-BE49-F238E27FC236}">
-                <a16:creationId xmlns:a16="http://schemas.microsoft.com/office/drawing/2014/main" id="{7A9163F3-6D7F-4F52-A672-A6B14795E0F4}"/>
-              </a:ext>
-            </a:extLst>
-          </p:cNvPr>
-          <p:cNvSpPr>
-            <a:spLocks xmlns:a="http://schemas.openxmlformats.org/drawingml/2006/main" noGrp="1"/>
-          </p:cNvSpPr>
-          <p:nvPr/>
-        </p:nvSpPr>
-        <p:spPr>
-          <a:xfrm xmlns:a="http://schemas.openxmlformats.org/drawingml/2006/main" rot="0">
-            <a:off x="9991725" y="2247900"/>
+                <a16:creationId xmlns:a16="http://schemas.microsoft.com/office/drawing/2014/main" id="{90096A99-EA34-4EC4-89E0-BBFF5FCDF8D0}"/>
+              </a:ext>
+            </a:extLst>
+          </p:cNvPr>
+          <p:cNvSpPr>
+            <a:spLocks xmlns:a="http://schemas.openxmlformats.org/drawingml/2006/main" noGrp="1"/>
+          </p:cNvSpPr>
+          <p:nvPr/>
+        </p:nvSpPr>
+        <p:spPr>
+          <a:xfrm xmlns:a="http://schemas.openxmlformats.org/drawingml/2006/main" rot="0">
+            <a:off x="10134600" y="2247900"/>
             <a:ext cx="1333500" cy="276225"/>
           </a:xfrm>
           <a:prstGeom xmlns:a="http://schemas.openxmlformats.org/drawingml/2006/main" prst="rect">
@@ -5573,18 +5573,18 @@
           <p:cNvPr id="100" name="selected-ids-label">
             <a:extLst xmlns:a="http://schemas.openxmlformats.org/drawingml/2006/main">
               <a:ext uri="{FF2B5EF4-FFF2-40B4-BE49-F238E27FC236}">
-                <a16:creationId xmlns:a16="http://schemas.microsoft.com/office/drawing/2014/main" id="{C162A55E-73AE-458A-ADD4-1EFD2084AAAF}"/>
-              </a:ext>
-            </a:extLst>
-          </p:cNvPr>
-          <p:cNvSpPr>
-            <a:spLocks xmlns:a="http://schemas.openxmlformats.org/drawingml/2006/main" noGrp="1"/>
-          </p:cNvSpPr>
-          <p:nvPr/>
-        </p:nvSpPr>
-        <p:spPr>
-          <a:xfrm xmlns:a="http://schemas.openxmlformats.org/drawingml/2006/main" rot="0">
-            <a:off x="9991725" y="2667000"/>
+                <a16:creationId xmlns:a16="http://schemas.microsoft.com/office/drawing/2014/main" id="{9F28E7FE-2D67-4457-A60F-D6032E89B3AB}"/>
+              </a:ext>
+            </a:extLst>
+          </p:cNvPr>
+          <p:cNvSpPr>
+            <a:spLocks xmlns:a="http://schemas.openxmlformats.org/drawingml/2006/main" noGrp="1"/>
+          </p:cNvSpPr>
+          <p:nvPr/>
+        </p:nvSpPr>
+        <p:spPr>
+          <a:xfrm xmlns:a="http://schemas.openxmlformats.org/drawingml/2006/main" rot="0">
+            <a:off x="10134600" y="2667000"/>
             <a:ext cx="1333500" cy="228600"/>
           </a:xfrm>
           <a:prstGeom xmlns:a="http://schemas.openxmlformats.org/drawingml/2006/main" prst="rect">
@@ -5631,18 +5631,18 @@
           <p:cNvPr id="101" name="result-token-1">
             <a:extLst xmlns:a="http://schemas.openxmlformats.org/drawingml/2006/main">
               <a:ext uri="{FF2B5EF4-FFF2-40B4-BE49-F238E27FC236}">
-                <a16:creationId xmlns:a16="http://schemas.microsoft.com/office/drawing/2014/main" id="{CFFC4FF9-AD17-4D9F-81A8-4DF6A74745C1}"/>
-              </a:ext>
-            </a:extLst>
-          </p:cNvPr>
-          <p:cNvSpPr>
-            <a:spLocks xmlns:a="http://schemas.openxmlformats.org/drawingml/2006/main" noGrp="1"/>
-          </p:cNvSpPr>
-          <p:nvPr/>
-        </p:nvSpPr>
-        <p:spPr>
-          <a:xfrm xmlns:a="http://schemas.openxmlformats.org/drawingml/2006/main" rot="0">
-            <a:off x="10182225" y="2971800"/>
+                <a16:creationId xmlns:a16="http://schemas.microsoft.com/office/drawing/2014/main" id="{0B3DF968-25EE-4502-B12A-A283BA5CF415}"/>
+              </a:ext>
+            </a:extLst>
+          </p:cNvPr>
+          <p:cNvSpPr>
+            <a:spLocks xmlns:a="http://schemas.openxmlformats.org/drawingml/2006/main" noGrp="1"/>
+          </p:cNvSpPr>
+          <p:nvPr/>
+        </p:nvSpPr>
+        <p:spPr>
+          <a:xfrm xmlns:a="http://schemas.openxmlformats.org/drawingml/2006/main" rot="0">
+            <a:off x="10325100" y="2971800"/>
             <a:ext cx="152400" cy="152400"/>
           </a:xfrm>
           <a:prstGeom xmlns:a="http://schemas.openxmlformats.org/drawingml/2006/main" prst="ellipse">
@@ -5664,18 +5664,18 @@
           <p:cNvPr id="102" name="result-token-2">
             <a:extLst xmlns:a="http://schemas.openxmlformats.org/drawingml/2006/main">
               <a:ext uri="{FF2B5EF4-FFF2-40B4-BE49-F238E27FC236}">
-                <a16:creationId xmlns:a16="http://schemas.microsoft.com/office/drawing/2014/main" id="{EBFADC5C-116D-4EF6-82FD-83372390D787}"/>
-              </a:ext>
-            </a:extLst>
-          </p:cNvPr>
-          <p:cNvSpPr>
-            <a:spLocks xmlns:a="http://schemas.openxmlformats.org/drawingml/2006/main" noGrp="1"/>
-          </p:cNvSpPr>
-          <p:nvPr/>
-        </p:nvSpPr>
-        <p:spPr>
-          <a:xfrm xmlns:a="http://schemas.openxmlformats.org/drawingml/2006/main" rot="0">
-            <a:off x="10448925" y="2971800"/>
+                <a16:creationId xmlns:a16="http://schemas.microsoft.com/office/drawing/2014/main" id="{DB609C8D-3C58-4612-962C-8F65B0AB89EF}"/>
+              </a:ext>
+            </a:extLst>
+          </p:cNvPr>
+          <p:cNvSpPr>
+            <a:spLocks xmlns:a="http://schemas.openxmlformats.org/drawingml/2006/main" noGrp="1"/>
+          </p:cNvSpPr>
+          <p:nvPr/>
+        </p:nvSpPr>
+        <p:spPr>
+          <a:xfrm xmlns:a="http://schemas.openxmlformats.org/drawingml/2006/main" rot="0">
+            <a:off x="10591800" y="2971800"/>
             <a:ext cx="152400" cy="152400"/>
           </a:xfrm>
           <a:prstGeom xmlns:a="http://schemas.openxmlformats.org/drawingml/2006/main" prst="diamond">
@@ -5697,18 +5697,18 @@
           <p:cNvPr id="103" name="result-token-3">
             <a:extLst xmlns:a="http://schemas.openxmlformats.org/drawingml/2006/main">
               <a:ext uri="{FF2B5EF4-FFF2-40B4-BE49-F238E27FC236}">
-                <a16:creationId xmlns:a16="http://schemas.microsoft.com/office/drawing/2014/main" id="{5F8050A4-0CEE-4982-97B8-6E782F55E781}"/>
-              </a:ext>
-            </a:extLst>
-          </p:cNvPr>
-          <p:cNvSpPr>
-            <a:spLocks xmlns:a="http://schemas.openxmlformats.org/drawingml/2006/main" noGrp="1"/>
-          </p:cNvSpPr>
-          <p:nvPr/>
-        </p:nvSpPr>
-        <p:spPr>
-          <a:xfrm xmlns:a="http://schemas.openxmlformats.org/drawingml/2006/main" rot="0">
-            <a:off x="10715625" y="2971800"/>
+                <a16:creationId xmlns:a16="http://schemas.microsoft.com/office/drawing/2014/main" id="{713DA1B2-240A-4AED-A155-D921A4EB3276}"/>
+              </a:ext>
+            </a:extLst>
+          </p:cNvPr>
+          <p:cNvSpPr>
+            <a:spLocks xmlns:a="http://schemas.openxmlformats.org/drawingml/2006/main" noGrp="1"/>
+          </p:cNvSpPr>
+          <p:nvPr/>
+        </p:nvSpPr>
+        <p:spPr>
+          <a:xfrm xmlns:a="http://schemas.openxmlformats.org/drawingml/2006/main" rot="0">
+            <a:off x="10858500" y="2971800"/>
             <a:ext cx="152400" cy="152400"/>
           </a:xfrm>
           <a:prstGeom xmlns:a="http://schemas.openxmlformats.org/drawingml/2006/main" prst="rect">
@@ -5728,18 +5728,18 @@
           <p:cNvPr id="104" name="result-token-4">
             <a:extLst xmlns:a="http://schemas.openxmlformats.org/drawingml/2006/main">
               <a:ext uri="{FF2B5EF4-FFF2-40B4-BE49-F238E27FC236}">
-                <a16:creationId xmlns:a16="http://schemas.microsoft.com/office/drawing/2014/main" id="{35498B7B-75E8-44CD-BDF4-8C941AF6D368}"/>
-              </a:ext>
-            </a:extLst>
-          </p:cNvPr>
-          <p:cNvSpPr>
-            <a:spLocks xmlns:a="http://schemas.openxmlformats.org/drawingml/2006/main" noGrp="1"/>
-          </p:cNvSpPr>
-          <p:nvPr/>
-        </p:nvSpPr>
-        <p:spPr>
-          <a:xfrm xmlns:a="http://schemas.openxmlformats.org/drawingml/2006/main" rot="0">
-            <a:off x="10982325" y="2971800"/>
+                <a16:creationId xmlns:a16="http://schemas.microsoft.com/office/drawing/2014/main" id="{CB8B257A-4701-49B7-82F3-21EB2304A448}"/>
+              </a:ext>
+            </a:extLst>
+          </p:cNvPr>
+          <p:cNvSpPr>
+            <a:spLocks xmlns:a="http://schemas.openxmlformats.org/drawingml/2006/main" noGrp="1"/>
+          </p:cNvSpPr>
+          <p:nvPr/>
+        </p:nvSpPr>
+        <p:spPr>
+          <a:xfrm xmlns:a="http://schemas.openxmlformats.org/drawingml/2006/main" rot="0">
+            <a:off x="11125200" y="2971800"/>
             <a:ext cx="152400" cy="152400"/>
           </a:xfrm>
           <a:prstGeom xmlns:a="http://schemas.openxmlformats.org/drawingml/2006/main" prst="ellipse">
@@ -5761,7 +5761,7 @@
           <p:cNvPr id="105" name="result-divider">
             <a:extLst xmlns:a="http://schemas.openxmlformats.org/drawingml/2006/main">
               <a:ext uri="{FF2B5EF4-FFF2-40B4-BE49-F238E27FC236}">
-                <a16:creationId xmlns:a16="http://schemas.microsoft.com/office/drawing/2014/main" id="{88B500E1-F012-4958-9364-9377CFC3EC34}"/>
+                <a16:creationId xmlns:a16="http://schemas.microsoft.com/office/drawing/2014/main" id="{752490EE-569C-47EB-85B1-FF29A078639F}"/>
               </a:ext>
             </a:extLst>
           </p:cNvPr>
@@ -5772,7 +5772,7 @@
         </p:nvSpPr>
         <p:spPr>
           <a:xfrm xmlns:a="http://schemas.openxmlformats.org/drawingml/2006/main" flipH="0" flipV="0">
-            <a:off x="9991725" y="3267075"/>
+            <a:off x="10134600" y="3267075"/>
             <a:ext cx="1333500" cy="9525"/>
           </a:xfrm>
           <a:prstGeom xmlns:a="http://schemas.openxmlformats.org/drawingml/2006/main" prst="line">
@@ -5792,18 +5792,18 @@
           <p:cNvPr id="106" name="ledger-slot-header">
             <a:extLst xmlns:a="http://schemas.openxmlformats.org/drawingml/2006/main">
               <a:ext uri="{FF2B5EF4-FFF2-40B4-BE49-F238E27FC236}">
-                <a16:creationId xmlns:a16="http://schemas.microsoft.com/office/drawing/2014/main" id="{F3AA411A-C137-4C1B-8CD2-0D8E5F6EF5E0}"/>
-              </a:ext>
-            </a:extLst>
-          </p:cNvPr>
-          <p:cNvSpPr>
-            <a:spLocks xmlns:a="http://schemas.openxmlformats.org/drawingml/2006/main" noGrp="1"/>
-          </p:cNvSpPr>
-          <p:nvPr/>
-        </p:nvSpPr>
-        <p:spPr>
-          <a:xfrm xmlns:a="http://schemas.openxmlformats.org/drawingml/2006/main" rot="0">
-            <a:off x="10010775" y="3343275"/>
+                <a16:creationId xmlns:a16="http://schemas.microsoft.com/office/drawing/2014/main" id="{635346AA-02B3-48C3-ABAF-5FBE6CEDC88F}"/>
+              </a:ext>
+            </a:extLst>
+          </p:cNvPr>
+          <p:cNvSpPr>
+            <a:spLocks xmlns:a="http://schemas.openxmlformats.org/drawingml/2006/main" noGrp="1"/>
+          </p:cNvSpPr>
+          <p:nvPr/>
+        </p:nvSpPr>
+        <p:spPr>
+          <a:xfrm xmlns:a="http://schemas.openxmlformats.org/drawingml/2006/main" rot="0">
+            <a:off x="10153650" y="3343275"/>
             <a:ext cx="381000" cy="209550"/>
           </a:xfrm>
           <a:prstGeom xmlns:a="http://schemas.openxmlformats.org/drawingml/2006/main" prst="rect">
@@ -5850,18 +5850,18 @@
           <p:cNvPr id="107" name="ledger-source-header">
             <a:extLst xmlns:a="http://schemas.openxmlformats.org/drawingml/2006/main">
               <a:ext uri="{FF2B5EF4-FFF2-40B4-BE49-F238E27FC236}">
-                <a16:creationId xmlns:a16="http://schemas.microsoft.com/office/drawing/2014/main" id="{CA8832DE-2458-4A2C-A635-90CE37A24999}"/>
-              </a:ext>
-            </a:extLst>
-          </p:cNvPr>
-          <p:cNvSpPr>
-            <a:spLocks xmlns:a="http://schemas.openxmlformats.org/drawingml/2006/main" noGrp="1"/>
-          </p:cNvSpPr>
-          <p:nvPr/>
-        </p:nvSpPr>
-        <p:spPr>
-          <a:xfrm xmlns:a="http://schemas.openxmlformats.org/drawingml/2006/main" rot="0">
-            <a:off x="10582275" y="3343275"/>
+                <a16:creationId xmlns:a16="http://schemas.microsoft.com/office/drawing/2014/main" id="{987974F4-770D-4066-B3A8-7CB3F0807AA4}"/>
+              </a:ext>
+            </a:extLst>
+          </p:cNvPr>
+          <p:cNvSpPr>
+            <a:spLocks xmlns:a="http://schemas.openxmlformats.org/drawingml/2006/main" noGrp="1"/>
+          </p:cNvSpPr>
+          <p:nvPr/>
+        </p:nvSpPr>
+        <p:spPr>
+          <a:xfrm xmlns:a="http://schemas.openxmlformats.org/drawingml/2006/main" rot="0">
+            <a:off x="10725150" y="3343275"/>
             <a:ext cx="742950" cy="209550"/>
           </a:xfrm>
           <a:prstGeom xmlns:a="http://schemas.openxmlformats.org/drawingml/2006/main" prst="rect">
@@ -5908,18 +5908,18 @@
           <p:cNvPr id="108" name="ledger-slot-1">
             <a:extLst xmlns:a="http://schemas.openxmlformats.org/drawingml/2006/main">
               <a:ext uri="{FF2B5EF4-FFF2-40B4-BE49-F238E27FC236}">
-                <a16:creationId xmlns:a16="http://schemas.microsoft.com/office/drawing/2014/main" id="{6D81C5C6-D617-40C7-9F7A-8F4BADA4F878}"/>
-              </a:ext>
-            </a:extLst>
-          </p:cNvPr>
-          <p:cNvSpPr>
-            <a:spLocks xmlns:a="http://schemas.openxmlformats.org/drawingml/2006/main" noGrp="1"/>
-          </p:cNvSpPr>
-          <p:nvPr/>
-        </p:nvSpPr>
-        <p:spPr>
-          <a:xfrm xmlns:a="http://schemas.openxmlformats.org/drawingml/2006/main" rot="0">
-            <a:off x="10010775" y="3600450"/>
+                <a16:creationId xmlns:a16="http://schemas.microsoft.com/office/drawing/2014/main" id="{180D0673-25F4-4B1B-A525-C2FCC48BDB01}"/>
+              </a:ext>
+            </a:extLst>
+          </p:cNvPr>
+          <p:cNvSpPr>
+            <a:spLocks xmlns:a="http://schemas.openxmlformats.org/drawingml/2006/main" noGrp="1"/>
+          </p:cNvSpPr>
+          <p:nvPr/>
+        </p:nvSpPr>
+        <p:spPr>
+          <a:xfrm xmlns:a="http://schemas.openxmlformats.org/drawingml/2006/main" rot="0">
+            <a:off x="10153650" y="3600450"/>
             <a:ext cx="381000" cy="209550"/>
           </a:xfrm>
           <a:prstGeom xmlns:a="http://schemas.openxmlformats.org/drawingml/2006/main" prst="rect">
@@ -5966,18 +5966,18 @@
           <p:cNvPr id="109" name="ledger-source-1">
             <a:extLst xmlns:a="http://schemas.openxmlformats.org/drawingml/2006/main">
               <a:ext uri="{FF2B5EF4-FFF2-40B4-BE49-F238E27FC236}">
-                <a16:creationId xmlns:a16="http://schemas.microsoft.com/office/drawing/2014/main" id="{624E6773-177E-4052-83E4-8D47990332B4}"/>
-              </a:ext>
-            </a:extLst>
-          </p:cNvPr>
-          <p:cNvSpPr>
-            <a:spLocks xmlns:a="http://schemas.openxmlformats.org/drawingml/2006/main" noGrp="1"/>
-          </p:cNvSpPr>
-          <p:nvPr/>
-        </p:nvSpPr>
-        <p:spPr>
-          <a:xfrm xmlns:a="http://schemas.openxmlformats.org/drawingml/2006/main" rot="0">
-            <a:off x="10582275" y="3600450"/>
+                <a16:creationId xmlns:a16="http://schemas.microsoft.com/office/drawing/2014/main" id="{FFFA4EC2-3094-475A-A846-AC7E14DF3174}"/>
+              </a:ext>
+            </a:extLst>
+          </p:cNvPr>
+          <p:cNvSpPr>
+            <a:spLocks xmlns:a="http://schemas.openxmlformats.org/drawingml/2006/main" noGrp="1"/>
+          </p:cNvSpPr>
+          <p:nvPr/>
+        </p:nvSpPr>
+        <p:spPr>
+          <a:xfrm xmlns:a="http://schemas.openxmlformats.org/drawingml/2006/main" rot="0">
+            <a:off x="10725150" y="3600450"/>
             <a:ext cx="742950" cy="209550"/>
           </a:xfrm>
           <a:prstGeom xmlns:a="http://schemas.openxmlformats.org/drawingml/2006/main" prst="rect">
@@ -6024,7 +6024,7 @@
           <p:cNvPr id="110" name="contract-divider">
             <a:extLst xmlns:a="http://schemas.openxmlformats.org/drawingml/2006/main">
               <a:ext uri="{FF2B5EF4-FFF2-40B4-BE49-F238E27FC236}">
-                <a16:creationId xmlns:a16="http://schemas.microsoft.com/office/drawing/2014/main" id="{62E234BD-C8CB-476E-A1DA-EBDB44E27306}"/>
+                <a16:creationId xmlns:a16="http://schemas.microsoft.com/office/drawing/2014/main" id="{CD151488-93EB-4492-80A3-EE96E8981905}"/>
               </a:ext>
             </a:extLst>
           </p:cNvPr>
@@ -6055,7 +6055,7 @@
           <p:cNvPr id="111" name="contract-heading">
             <a:extLst xmlns:a="http://schemas.openxmlformats.org/drawingml/2006/main">
               <a:ext uri="{FF2B5EF4-FFF2-40B4-BE49-F238E27FC236}">
-                <a16:creationId xmlns:a16="http://schemas.microsoft.com/office/drawing/2014/main" id="{477E5434-E550-4B19-8997-16DE4136ADBC}"/>
+                <a16:creationId xmlns:a16="http://schemas.microsoft.com/office/drawing/2014/main" id="{49550682-ACA6-46E3-B75E-090147C99BD3}"/>
               </a:ext>
             </a:extLst>
           </p:cNvPr>
@@ -6113,7 +6113,7 @@
           <p:cNvPr id="112" name="contract-copy">
             <a:extLst xmlns:a="http://schemas.openxmlformats.org/drawingml/2006/main">
               <a:ext uri="{FF2B5EF4-FFF2-40B4-BE49-F238E27FC236}">
-                <a16:creationId xmlns:a16="http://schemas.microsoft.com/office/drawing/2014/main" id="{62E17605-3A31-4C08-9534-997EEA47EF53}"/>
+                <a16:creationId xmlns:a16="http://schemas.microsoft.com/office/drawing/2014/main" id="{487284AA-CB01-47F5-8F0C-7C98A6668900}"/>
               </a:ext>
             </a:extLst>
           </p:cNvPr>
@@ -6171,7 +6171,7 @@
           <p:cNvPr id="113" name="scope-boundary">
             <a:extLst xmlns:a="http://schemas.openxmlformats.org/drawingml/2006/main">
               <a:ext uri="{FF2B5EF4-FFF2-40B4-BE49-F238E27FC236}">
-                <a16:creationId xmlns:a16="http://schemas.microsoft.com/office/drawing/2014/main" id="{81FA19F4-6F53-4520-8510-3FBC33239414}"/>
+                <a16:creationId xmlns:a16="http://schemas.microsoft.com/office/drawing/2014/main" id="{161E7BDD-F77F-421C-A04A-D03B9E18A3D9}"/>
               </a:ext>
             </a:extLst>
           </p:cNvPr>
@@ -6227,7 +6227,7 @@
     </p:spTree>
     <p:extLst>
       <p:ext uri="{BB962C8B-B14F-4D97-AF65-F5344CB8AC3E}">
-        <p14:creationId xmlns:p14="http://schemas.microsoft.com/office/powerpoint/2010/main" val="1522991963"/>
+        <p14:creationId xmlns:p14="http://schemas.microsoft.com/office/powerpoint/2010/main" val="1155485414"/>
       </p:ext>
     </p:extLst>
   </p:cSld>

--- a/docs/source/repository_overview_editable.pptx
+++ b/docs/source/repository_overview_editable.pptx
@@ -2,13 +2,13 @@
 <file path=ppt/presentation.xml><?xml version="1.0" encoding="utf-8"?>
 <p:presentation xmlns:p="http://schemas.openxmlformats.org/presentationml/2006/main">
   <p:sldMasterIdLst>
-    <p:sldMasterId xmlns:r="http://schemas.openxmlformats.org/officeDocument/2006/relationships" id="2147483648" r:id="R2c6c1b5bef5347f9"/>
+    <p:sldMasterId xmlns:r="http://schemas.openxmlformats.org/officeDocument/2006/relationships" id="2147483648" r:id="R8641ab6b4b5f465c"/>
   </p:sldMasterIdLst>
   <p:notesMasterIdLst>
-    <p:notesMasterId xmlns:r="http://schemas.openxmlformats.org/officeDocument/2006/relationships" r:id="Re0c6807ef88e4e3b"/>
+    <p:notesMasterId xmlns:r="http://schemas.openxmlformats.org/officeDocument/2006/relationships" r:id="Ra1aeffd4a8844f83"/>
   </p:notesMasterIdLst>
   <p:sldIdLst>
-    <p:sldId xmlns:r="http://schemas.openxmlformats.org/officeDocument/2006/relationships" id="256" r:id="R5505981efdb046d3"/>
+    <p:sldId xmlns:r="http://schemas.openxmlformats.org/officeDocument/2006/relationships" id="256" r:id="Ref746d387acb4676"/>
   </p:sldIdLst>
   <p:sldSz cx="12192000" cy="6096000"/>
   <p:notesSz cx="6858000" cy="9144000"/>
@@ -601,7 +601,7 @@
   </p:cSld>
   <p:clrMap bg1="lt1" tx1="dk1" bg2="lt2" tx2="dk2" accent1="accent1" accent2="accent2" accent3="accent3" accent4="accent4" accent5="accent5" accent6="accent6" hlink="hlink" folHlink="folHlink"/>
   <p:sldLayoutIdLst>
-    <p:sldLayoutId xmlns:r="http://schemas.openxmlformats.org/officeDocument/2006/relationships" id="2147483649" r:id="Rcf897cfaf1194116"/>
+    <p:sldLayoutId xmlns:r="http://schemas.openxmlformats.org/officeDocument/2006/relationships" id="2147483649" r:id="R38034d95d20449dc"/>
   </p:sldLayoutIdLst>
   <p:txStyles>
     <p:titleStyle>
@@ -1149,10 +1149,10 @@
       </p:grpSpPr>
       <p:sp>
         <p:nvSpPr>
-          <p:cNvPr id="114" name="overview-takeaway">
-            <a:extLst xmlns:a="http://schemas.openxmlformats.org/drawingml/2006/main">
-              <a:ext uri="{FF2B5EF4-FFF2-40B4-BE49-F238E27FC236}">
-                <a16:creationId xmlns:a16="http://schemas.microsoft.com/office/drawing/2014/main" id="{3F2199D7-C5BE-47D4-8963-EDB454C6556B}"/>
+          <p:cNvPr id="117" name="overview-takeaway">
+            <a:extLst xmlns:a="http://schemas.openxmlformats.org/drawingml/2006/main">
+              <a:ext uri="{FF2B5EF4-FFF2-40B4-BE49-F238E27FC236}">
+                <a16:creationId xmlns:a16="http://schemas.microsoft.com/office/drawing/2014/main" id="{86B9D571-9E03-45B1-90FC-0E26F664F618}"/>
               </a:ext>
             </a:extLst>
           </p:cNvPr>
@@ -1200,7 +1200,7 @@
                 <a:ea typeface="Arial"/>
                 <a:cs typeface="Arial"/>
               </a:rPr>
-              <a:t>How the governed review queue is constructed</a:t>
+              <a:t>Constructing a governed evidence-review queue</a:t>
             </a:r>
           </a:p>
         </p:txBody>
@@ -1210,7 +1210,7 @@
           <p:cNvPr id="2" name="overview-subtitle">
             <a:extLst xmlns:a="http://schemas.openxmlformats.org/drawingml/2006/main">
               <a:ext uri="{FF2B5EF4-FFF2-40B4-BE49-F238E27FC236}">
-                <a16:creationId xmlns:a16="http://schemas.microsoft.com/office/drawing/2014/main" id="{D42D2517-E1F7-4A82-85DC-5339EB15ED3E}"/>
+                <a16:creationId xmlns:a16="http://schemas.microsoft.com/office/drawing/2014/main" id="{0E1BB48B-DC70-4B8A-BB63-B972E3301643}"/>
               </a:ext>
             </a:extLst>
           </p:cNvPr>
@@ -1258,7 +1258,7 @@
                 <a:ea typeface="Arial"/>
                 <a:cs typeface="Arial"/>
               </a:rPr>
-              <a:t>One ranked candidate pool, one fixed capacity, and an explicit record of how every slot was assigned.</a:t>
+              <a:t>Illustrative records show one eligible evidence pool, one fixed capacity, and a source for every selected slot.</a:t>
             </a:r>
           </a:p>
         </p:txBody>
@@ -1268,7 +1268,7 @@
           <p:cNvPr id="3" name="overview-divider">
             <a:extLst xmlns:a="http://schemas.openxmlformats.org/drawingml/2006/main">
               <a:ext uri="{FF2B5EF4-FFF2-40B4-BE49-F238E27FC236}">
-                <a16:creationId xmlns:a16="http://schemas.microsoft.com/office/drawing/2014/main" id="{4ED46B8F-3B69-4AEA-8FFB-91F94D4209A5}"/>
+                <a16:creationId xmlns:a16="http://schemas.microsoft.com/office/drawing/2014/main" id="{E48B1D9C-A9F3-4BD9-9D53-11B6A8579240}"/>
               </a:ext>
             </a:extLst>
           </p:cNvPr>
@@ -1299,7 +1299,7 @@
           <p:cNvPr id="4" name="input-to-rank-arrow">
             <a:extLst xmlns:a="http://schemas.openxmlformats.org/drawingml/2006/main">
               <a:ext uri="{FF2B5EF4-FFF2-40B4-BE49-F238E27FC236}">
-                <a16:creationId xmlns:a16="http://schemas.microsoft.com/office/drawing/2014/main" id="{D991D88B-6610-4458-87F4-9D36C51FB236}"/>
+                <a16:creationId xmlns:a16="http://schemas.microsoft.com/office/drawing/2014/main" id="{8BE229B1-73EF-4DAE-B644-C2DB8D580DA7}"/>
               </a:ext>
             </a:extLst>
           </p:cNvPr>
@@ -1330,7 +1330,7 @@
           <p:cNvPr id="5" name="rank-to-allocation-arrow">
             <a:extLst xmlns:a="http://schemas.openxmlformats.org/drawingml/2006/main">
               <a:ext uri="{FF2B5EF4-FFF2-40B4-BE49-F238E27FC236}">
-                <a16:creationId xmlns:a16="http://schemas.microsoft.com/office/drawing/2014/main" id="{584659CC-4C2D-4670-968C-4E9D3426FCB5}"/>
+                <a16:creationId xmlns:a16="http://schemas.microsoft.com/office/drawing/2014/main" id="{148514FB-DBB1-4961-AAAB-570056CDD68A}"/>
               </a:ext>
             </a:extLst>
           </p:cNvPr>
@@ -1361,7 +1361,7 @@
           <p:cNvPr id="6" name="allocation-to-result-arrow">
             <a:extLst xmlns:a="http://schemas.openxmlformats.org/drawingml/2006/main">
               <a:ext uri="{FF2B5EF4-FFF2-40B4-BE49-F238E27FC236}">
-                <a16:creationId xmlns:a16="http://schemas.microsoft.com/office/drawing/2014/main" id="{99F2D7EC-C482-4CDF-AE4A-89A846C8907E}"/>
+                <a16:creationId xmlns:a16="http://schemas.microsoft.com/office/drawing/2014/main" id="{BEF55140-EFC0-4AE0-91EE-117ECDB96778}"/>
               </a:ext>
             </a:extLst>
           </p:cNvPr>
@@ -1392,7 +1392,7 @@
           <p:cNvPr id="7" name="input-heading">
             <a:extLst xmlns:a="http://schemas.openxmlformats.org/drawingml/2006/main">
               <a:ext uri="{FF2B5EF4-FFF2-40B4-BE49-F238E27FC236}">
-                <a16:creationId xmlns:a16="http://schemas.microsoft.com/office/drawing/2014/main" id="{7742B6D8-5970-4FA6-90D8-3483317CDAF6}"/>
+                <a16:creationId xmlns:a16="http://schemas.microsoft.com/office/drawing/2014/main" id="{9DEC1458-E2F6-43EA-A247-54B8E9AFCC81}"/>
               </a:ext>
             </a:extLst>
           </p:cNvPr>
@@ -1440,7 +1440,7 @@
                 <a:ea typeface="Arial"/>
                 <a:cs typeface="Arial"/>
               </a:rPr>
-              <a:t>Candidate records</a:t>
+              <a:t>Eligible evidence</a:t>
             </a:r>
           </a:p>
         </p:txBody>
@@ -1450,7 +1450,7 @@
           <p:cNvPr id="8" name="input-caption">
             <a:extLst xmlns:a="http://schemas.openxmlformats.org/drawingml/2006/main">
               <a:ext uri="{FF2B5EF4-FFF2-40B4-BE49-F238E27FC236}">
-                <a16:creationId xmlns:a16="http://schemas.microsoft.com/office/drawing/2014/main" id="{2A39554E-7A48-4829-8F0A-AA3324C79279}"/>
+                <a16:creationId xmlns:a16="http://schemas.microsoft.com/office/drawing/2014/main" id="{0CBA03C8-CD55-4E23-B544-B4BC9C26B852}"/>
               </a:ext>
             </a:extLst>
           </p:cNvPr>
@@ -1498,7 +1498,7 @@
                 <a:ea typeface="Arial"/>
                 <a:cs typeface="Arial"/>
               </a:rPr>
-              <a:t>Python mappings or synthetic CSV</a:t>
+              <a:t>Measurement-qualified candidates</a:t>
             </a:r>
           </a:p>
         </p:txBody>
@@ -1508,7 +1508,7 @@
           <p:cNvPr id="9" name="candidate-records-sheet">
             <a:extLst xmlns:a="http://schemas.openxmlformats.org/drawingml/2006/main">
               <a:ext uri="{FF2B5EF4-FFF2-40B4-BE49-F238E27FC236}">
-                <a16:creationId xmlns:a16="http://schemas.microsoft.com/office/drawing/2014/main" id="{03D633E9-C4A8-4607-AE4A-59AA23A82A36}"/>
+                <a16:creationId xmlns:a16="http://schemas.microsoft.com/office/drawing/2014/main" id="{744498A8-69D6-442A-9027-2F739C6AF90C}"/>
               </a:ext>
             </a:extLst>
           </p:cNvPr>
@@ -1541,7 +1541,7 @@
           <p:cNvPr id="10" name="candidate-records-header">
             <a:extLst xmlns:a="http://schemas.openxmlformats.org/drawingml/2006/main">
               <a:ext uri="{FF2B5EF4-FFF2-40B4-BE49-F238E27FC236}">
-                <a16:creationId xmlns:a16="http://schemas.microsoft.com/office/drawing/2014/main" id="{F7A31561-48E6-49CC-8D54-6EF8AB8AC1D8}"/>
+                <a16:creationId xmlns:a16="http://schemas.microsoft.com/office/drawing/2014/main" id="{35782F68-02C4-40E1-98B5-B9E4BB28F643}"/>
               </a:ext>
             </a:extLst>
           </p:cNvPr>
@@ -1574,7 +1574,7 @@
           <p:cNvPr id="11" name="candidate-id-header">
             <a:extLst xmlns:a="http://schemas.openxmlformats.org/drawingml/2006/main">
               <a:ext uri="{FF2B5EF4-FFF2-40B4-BE49-F238E27FC236}">
-                <a16:creationId xmlns:a16="http://schemas.microsoft.com/office/drawing/2014/main" id="{D04634D7-724C-4296-8CF1-1B439024DEA8}"/>
+                <a16:creationId xmlns:a16="http://schemas.microsoft.com/office/drawing/2014/main" id="{4F84D1B8-55F2-4591-8813-1AC70F0BDAD5}"/>
               </a:ext>
             </a:extLst>
           </p:cNvPr>
@@ -1586,7 +1586,7 @@
         <p:spPr>
           <a:xfrm xmlns:a="http://schemas.openxmlformats.org/drawingml/2006/main" rot="0">
             <a:off x="704850" y="2247900"/>
-            <a:ext cx="1104900" cy="257175"/>
+            <a:ext cx="1028700" cy="257175"/>
           </a:xfrm>
           <a:prstGeom xmlns:a="http://schemas.openxmlformats.org/drawingml/2006/main" prst="rect">
             <a:avLst/>
@@ -1622,7 +1622,7 @@
                 <a:ea typeface="Arial"/>
                 <a:cs typeface="Arial"/>
               </a:rPr>
-              <a:t>Candidate ID</a:t>
+              <a:t>Evidence ID</a:t>
             </a:r>
           </a:p>
         </p:txBody>
@@ -1632,19 +1632,19 @@
           <p:cNvPr id="12" name="score-header">
             <a:extLst xmlns:a="http://schemas.openxmlformats.org/drawingml/2006/main">
               <a:ext uri="{FF2B5EF4-FFF2-40B4-BE49-F238E27FC236}">
-                <a16:creationId xmlns:a16="http://schemas.microsoft.com/office/drawing/2014/main" id="{DAB903E2-9C60-4CC8-AEDA-1356752BB31F}"/>
-              </a:ext>
-            </a:extLst>
-          </p:cNvPr>
-          <p:cNvSpPr>
-            <a:spLocks xmlns:a="http://schemas.openxmlformats.org/drawingml/2006/main" noGrp="1"/>
-          </p:cNvSpPr>
-          <p:nvPr/>
-        </p:nvSpPr>
-        <p:spPr>
-          <a:xfrm xmlns:a="http://schemas.openxmlformats.org/drawingml/2006/main" rot="0">
-            <a:off x="1924050" y="2247900"/>
-            <a:ext cx="457200" cy="257175"/>
+                <a16:creationId xmlns:a16="http://schemas.microsoft.com/office/drawing/2014/main" id="{DDAE0421-0EEE-4384-ADD8-D5D6AB1FD9CA}"/>
+              </a:ext>
+            </a:extLst>
+          </p:cNvPr>
+          <p:cNvSpPr>
+            <a:spLocks xmlns:a="http://schemas.openxmlformats.org/drawingml/2006/main" noGrp="1"/>
+          </p:cNvSpPr>
+          <p:nvPr/>
+        </p:nvSpPr>
+        <p:spPr>
+          <a:xfrm xmlns:a="http://schemas.openxmlformats.org/drawingml/2006/main" rot="0">
+            <a:off x="1828800" y="2247900"/>
+            <a:ext cx="552450" cy="257175"/>
           </a:xfrm>
           <a:prstGeom xmlns:a="http://schemas.openxmlformats.org/drawingml/2006/main" prst="rect">
             <a:avLst/>
@@ -1680,7 +1680,7 @@
                 <a:ea typeface="Arial"/>
                 <a:cs typeface="Arial"/>
               </a:rPr>
-              <a:t>Score</a:t>
+              <a:t>Priority</a:t>
             </a:r>
           </a:p>
         </p:txBody>
@@ -1690,7 +1690,7 @@
           <p:cNvPr id="13" name="candidate-token-1">
             <a:extLst xmlns:a="http://schemas.openxmlformats.org/drawingml/2006/main">
               <a:ext uri="{FF2B5EF4-FFF2-40B4-BE49-F238E27FC236}">
-                <a16:creationId xmlns:a16="http://schemas.microsoft.com/office/drawing/2014/main" id="{5BBB666F-8C44-48FC-95EF-C0C3E62BFFCD}"/>
+                <a16:creationId xmlns:a16="http://schemas.microsoft.com/office/drawing/2014/main" id="{6DD54C64-FA04-4322-812C-63C1874992FE}"/>
               </a:ext>
             </a:extLst>
           </p:cNvPr>
@@ -1721,7 +1721,7 @@
           <p:cNvPr id="14" name="candidate-id-1">
             <a:extLst xmlns:a="http://schemas.openxmlformats.org/drawingml/2006/main">
               <a:ext uri="{FF2B5EF4-FFF2-40B4-BE49-F238E27FC236}">
-                <a16:creationId xmlns:a16="http://schemas.microsoft.com/office/drawing/2014/main" id="{7EBBE20A-D89F-46DE-86C3-66C79A396F15}"/>
+                <a16:creationId xmlns:a16="http://schemas.microsoft.com/office/drawing/2014/main" id="{0ABE06EE-7847-494F-BA63-064855ED6B43}"/>
               </a:ext>
             </a:extLst>
           </p:cNvPr>
@@ -1779,7 +1779,7 @@
           <p:cNvPr id="15" name="candidate-score-1">
             <a:extLst xmlns:a="http://schemas.openxmlformats.org/drawingml/2006/main">
               <a:ext uri="{FF2B5EF4-FFF2-40B4-BE49-F238E27FC236}">
-                <a16:creationId xmlns:a16="http://schemas.microsoft.com/office/drawing/2014/main" id="{8D4CFA2A-B28F-406A-8C76-3F5AE0A87D20}"/>
+                <a16:creationId xmlns:a16="http://schemas.microsoft.com/office/drawing/2014/main" id="{7C47CB34-4BA5-4D9D-8505-5C51CECE3301}"/>
               </a:ext>
             </a:extLst>
           </p:cNvPr>
@@ -1837,7 +1837,7 @@
           <p:cNvPr id="16" name="candidate-row-line-1">
             <a:extLst xmlns:a="http://schemas.openxmlformats.org/drawingml/2006/main">
               <a:ext uri="{FF2B5EF4-FFF2-40B4-BE49-F238E27FC236}">
-                <a16:creationId xmlns:a16="http://schemas.microsoft.com/office/drawing/2014/main" id="{E58AA97B-5224-40B9-8CF5-CFCA6DFCC48B}"/>
+                <a16:creationId xmlns:a16="http://schemas.microsoft.com/office/drawing/2014/main" id="{B4FD4C59-73AA-4D64-B013-3CE706827B71}"/>
               </a:ext>
             </a:extLst>
           </p:cNvPr>
@@ -1868,7 +1868,7 @@
           <p:cNvPr id="17" name="candidate-token-2">
             <a:extLst xmlns:a="http://schemas.openxmlformats.org/drawingml/2006/main">
               <a:ext uri="{FF2B5EF4-FFF2-40B4-BE49-F238E27FC236}">
-                <a16:creationId xmlns:a16="http://schemas.microsoft.com/office/drawing/2014/main" id="{FE186896-7DD8-4273-9849-4B13527626DE}"/>
+                <a16:creationId xmlns:a16="http://schemas.microsoft.com/office/drawing/2014/main" id="{7F228C3D-7885-4E29-AE4F-5E181833BE83}"/>
               </a:ext>
             </a:extLst>
           </p:cNvPr>
@@ -1901,7 +1901,7 @@
           <p:cNvPr id="18" name="candidate-id-2">
             <a:extLst xmlns:a="http://schemas.openxmlformats.org/drawingml/2006/main">
               <a:ext uri="{FF2B5EF4-FFF2-40B4-BE49-F238E27FC236}">
-                <a16:creationId xmlns:a16="http://schemas.microsoft.com/office/drawing/2014/main" id="{F20E5CF5-F7B9-41B3-A648-0C614EAC3FE4}"/>
+                <a16:creationId xmlns:a16="http://schemas.microsoft.com/office/drawing/2014/main" id="{E6DBEFD0-D536-410A-8525-AFB49BE2F644}"/>
               </a:ext>
             </a:extLst>
           </p:cNvPr>
@@ -1959,7 +1959,7 @@
           <p:cNvPr id="19" name="candidate-score-2">
             <a:extLst xmlns:a="http://schemas.openxmlformats.org/drawingml/2006/main">
               <a:ext uri="{FF2B5EF4-FFF2-40B4-BE49-F238E27FC236}">
-                <a16:creationId xmlns:a16="http://schemas.microsoft.com/office/drawing/2014/main" id="{F070F040-352E-45DF-97F8-E1E5E91C39A6}"/>
+                <a16:creationId xmlns:a16="http://schemas.microsoft.com/office/drawing/2014/main" id="{5E33CA9B-FA99-43B7-A796-17314C65F9EB}"/>
               </a:ext>
             </a:extLst>
           </p:cNvPr>
@@ -2017,7 +2017,7 @@
           <p:cNvPr id="20" name="candidate-row-line-2">
             <a:extLst xmlns:a="http://schemas.openxmlformats.org/drawingml/2006/main">
               <a:ext uri="{FF2B5EF4-FFF2-40B4-BE49-F238E27FC236}">
-                <a16:creationId xmlns:a16="http://schemas.microsoft.com/office/drawing/2014/main" id="{B4730FE9-25ED-43CD-8976-D905F58AA90D}"/>
+                <a16:creationId xmlns:a16="http://schemas.microsoft.com/office/drawing/2014/main" id="{49746E89-9251-464F-B233-75E35CF6E5E9}"/>
               </a:ext>
             </a:extLst>
           </p:cNvPr>
@@ -2048,7 +2048,7 @@
           <p:cNvPr id="21" name="candidate-token-3">
             <a:extLst xmlns:a="http://schemas.openxmlformats.org/drawingml/2006/main">
               <a:ext uri="{FF2B5EF4-FFF2-40B4-BE49-F238E27FC236}">
-                <a16:creationId xmlns:a16="http://schemas.microsoft.com/office/drawing/2014/main" id="{CB601255-FAC3-4417-BA84-92385925E761}"/>
+                <a16:creationId xmlns:a16="http://schemas.microsoft.com/office/drawing/2014/main" id="{9F6CD2E2-3269-4359-85CB-BCE641BB6D63}"/>
               </a:ext>
             </a:extLst>
           </p:cNvPr>
@@ -2081,7 +2081,7 @@
           <p:cNvPr id="22" name="candidate-id-3">
             <a:extLst xmlns:a="http://schemas.openxmlformats.org/drawingml/2006/main">
               <a:ext uri="{FF2B5EF4-FFF2-40B4-BE49-F238E27FC236}">
-                <a16:creationId xmlns:a16="http://schemas.microsoft.com/office/drawing/2014/main" id="{A5F09EA1-8042-489B-80E4-78AE2DD8698A}"/>
+                <a16:creationId xmlns:a16="http://schemas.microsoft.com/office/drawing/2014/main" id="{2246AE8F-BEDC-47AF-A808-1A2D04379E45}"/>
               </a:ext>
             </a:extLst>
           </p:cNvPr>
@@ -2139,7 +2139,7 @@
           <p:cNvPr id="23" name="candidate-score-3">
             <a:extLst xmlns:a="http://schemas.openxmlformats.org/drawingml/2006/main">
               <a:ext uri="{FF2B5EF4-FFF2-40B4-BE49-F238E27FC236}">
-                <a16:creationId xmlns:a16="http://schemas.microsoft.com/office/drawing/2014/main" id="{93C23831-7426-4B96-AC77-89459149E0D9}"/>
+                <a16:creationId xmlns:a16="http://schemas.microsoft.com/office/drawing/2014/main" id="{300D37B5-C45E-4CF8-A24A-C2C88DF583A2}"/>
               </a:ext>
             </a:extLst>
           </p:cNvPr>
@@ -2197,7 +2197,7 @@
           <p:cNvPr id="24" name="candidate-row-line-3">
             <a:extLst xmlns:a="http://schemas.openxmlformats.org/drawingml/2006/main">
               <a:ext uri="{FF2B5EF4-FFF2-40B4-BE49-F238E27FC236}">
-                <a16:creationId xmlns:a16="http://schemas.microsoft.com/office/drawing/2014/main" id="{6E3D91BE-266D-46C2-8D66-E210C11F6B1C}"/>
+                <a16:creationId xmlns:a16="http://schemas.microsoft.com/office/drawing/2014/main" id="{41E6BF8E-E20A-4231-8644-21128854135E}"/>
               </a:ext>
             </a:extLst>
           </p:cNvPr>
@@ -2228,7 +2228,7 @@
           <p:cNvPr id="25" name="candidate-token-4">
             <a:extLst xmlns:a="http://schemas.openxmlformats.org/drawingml/2006/main">
               <a:ext uri="{FF2B5EF4-FFF2-40B4-BE49-F238E27FC236}">
-                <a16:creationId xmlns:a16="http://schemas.microsoft.com/office/drawing/2014/main" id="{7BF8887E-ECB9-46BC-8815-8626DC395111}"/>
+                <a16:creationId xmlns:a16="http://schemas.microsoft.com/office/drawing/2014/main" id="{2CCDFCE6-039C-41BE-BE44-331F810DD8B5}"/>
               </a:ext>
             </a:extLst>
           </p:cNvPr>
@@ -2259,7 +2259,7 @@
           <p:cNvPr id="26" name="candidate-id-4">
             <a:extLst xmlns:a="http://schemas.openxmlformats.org/drawingml/2006/main">
               <a:ext uri="{FF2B5EF4-FFF2-40B4-BE49-F238E27FC236}">
-                <a16:creationId xmlns:a16="http://schemas.microsoft.com/office/drawing/2014/main" id="{57066620-2210-4C1C-98D7-FFFD58E8D317}"/>
+                <a16:creationId xmlns:a16="http://schemas.microsoft.com/office/drawing/2014/main" id="{82F4CD43-7235-40DE-A9A1-E9B0F5369689}"/>
               </a:ext>
             </a:extLst>
           </p:cNvPr>
@@ -2317,7 +2317,7 @@
           <p:cNvPr id="27" name="candidate-score-4">
             <a:extLst xmlns:a="http://schemas.openxmlformats.org/drawingml/2006/main">
               <a:ext uri="{FF2B5EF4-FFF2-40B4-BE49-F238E27FC236}">
-                <a16:creationId xmlns:a16="http://schemas.microsoft.com/office/drawing/2014/main" id="{2C19512B-7A89-4557-B22A-E5C296DFC3F8}"/>
+                <a16:creationId xmlns:a16="http://schemas.microsoft.com/office/drawing/2014/main" id="{3483B1F3-B161-4A8B-BF2F-15F0ED77AAEE}"/>
               </a:ext>
             </a:extLst>
           </p:cNvPr>
@@ -2375,7 +2375,7 @@
           <p:cNvPr id="28" name="ranking-heading">
             <a:extLst xmlns:a="http://schemas.openxmlformats.org/drawingml/2006/main">
               <a:ext uri="{FF2B5EF4-FFF2-40B4-BE49-F238E27FC236}">
-                <a16:creationId xmlns:a16="http://schemas.microsoft.com/office/drawing/2014/main" id="{7D05AED6-94D1-434E-B629-8F84DE7C25F6}"/>
+                <a16:creationId xmlns:a16="http://schemas.microsoft.com/office/drawing/2014/main" id="{CACFF2AF-CE44-4AA2-97D6-8D69B6F0BC40}"/>
               </a:ext>
             </a:extLst>
           </p:cNvPr>
@@ -2433,7 +2433,7 @@
           <p:cNvPr id="29" name="ranking-score-caption">
             <a:extLst xmlns:a="http://schemas.openxmlformats.org/drawingml/2006/main">
               <a:ext uri="{FF2B5EF4-FFF2-40B4-BE49-F238E27FC236}">
-                <a16:creationId xmlns:a16="http://schemas.microsoft.com/office/drawing/2014/main" id="{46BA2399-BD2E-4FB8-82E2-F14A62B9449A}"/>
+                <a16:creationId xmlns:a16="http://schemas.microsoft.com/office/drawing/2014/main" id="{5B96B414-B47E-4B70-B143-E833ECD90678}"/>
               </a:ext>
             </a:extLst>
           </p:cNvPr>
@@ -2481,7 +2481,7 @@
                 <a:ea typeface="Arial"/>
                 <a:cs typeface="Arial"/>
               </a:rPr>
-              <a:t>Global score (descending)</a:t>
+              <a:t>Priority score (descending)</a:t>
             </a:r>
           </a:p>
         </p:txBody>
@@ -2491,7 +2491,7 @@
           <p:cNvPr id="30" name="rank-number-1">
             <a:extLst xmlns:a="http://schemas.openxmlformats.org/drawingml/2006/main">
               <a:ext uri="{FF2B5EF4-FFF2-40B4-BE49-F238E27FC236}">
-                <a16:creationId xmlns:a16="http://schemas.microsoft.com/office/drawing/2014/main" id="{A3A8F681-C994-4AF2-90BB-181600DFFC97}"/>
+                <a16:creationId xmlns:a16="http://schemas.microsoft.com/office/drawing/2014/main" id="{5AA5D7FA-3B78-4D66-A732-9ADBAC3DED15}"/>
               </a:ext>
             </a:extLst>
           </p:cNvPr>
@@ -2549,7 +2549,7 @@
           <p:cNvPr id="31" name="rank-row-1">
             <a:extLst xmlns:a="http://schemas.openxmlformats.org/drawingml/2006/main">
               <a:ext uri="{FF2B5EF4-FFF2-40B4-BE49-F238E27FC236}">
-                <a16:creationId xmlns:a16="http://schemas.microsoft.com/office/drawing/2014/main" id="{6884ABCA-CDCB-4391-A1D2-CD481BCA497F}"/>
+                <a16:creationId xmlns:a16="http://schemas.microsoft.com/office/drawing/2014/main" id="{C8E53D59-A19E-40C8-99FB-F6B8C4FA2566}"/>
               </a:ext>
             </a:extLst>
           </p:cNvPr>
@@ -2582,7 +2582,7 @@
           <p:cNvPr id="32" name="rank-id-1">
             <a:extLst xmlns:a="http://schemas.openxmlformats.org/drawingml/2006/main">
               <a:ext uri="{FF2B5EF4-FFF2-40B4-BE49-F238E27FC236}">
-                <a16:creationId xmlns:a16="http://schemas.microsoft.com/office/drawing/2014/main" id="{D1A43FE5-CE5E-4542-8FA0-0A60B4A193F6}"/>
+                <a16:creationId xmlns:a16="http://schemas.microsoft.com/office/drawing/2014/main" id="{699DFF5C-87E1-4C45-8247-C55F481C7218}"/>
               </a:ext>
             </a:extLst>
           </p:cNvPr>
@@ -2640,7 +2640,7 @@
           <p:cNvPr id="33" name="rank-score-1">
             <a:extLst xmlns:a="http://schemas.openxmlformats.org/drawingml/2006/main">
               <a:ext uri="{FF2B5EF4-FFF2-40B4-BE49-F238E27FC236}">
-                <a16:creationId xmlns:a16="http://schemas.microsoft.com/office/drawing/2014/main" id="{377CC67A-0FA3-474F-9414-E96F887EBDE9}"/>
+                <a16:creationId xmlns:a16="http://schemas.microsoft.com/office/drawing/2014/main" id="{14373DFB-CB5C-4AFD-BA5D-71B4C17630FA}"/>
               </a:ext>
             </a:extLst>
           </p:cNvPr>
@@ -2698,7 +2698,7 @@
           <p:cNvPr id="34" name="rank-number-2">
             <a:extLst xmlns:a="http://schemas.openxmlformats.org/drawingml/2006/main">
               <a:ext uri="{FF2B5EF4-FFF2-40B4-BE49-F238E27FC236}">
-                <a16:creationId xmlns:a16="http://schemas.microsoft.com/office/drawing/2014/main" id="{0BF78664-65F0-4AA0-879A-E23CDD95BA05}"/>
+                <a16:creationId xmlns:a16="http://schemas.microsoft.com/office/drawing/2014/main" id="{9F3B3611-FFCF-4D11-BF2B-88CB04B4994A}"/>
               </a:ext>
             </a:extLst>
           </p:cNvPr>
@@ -2756,7 +2756,7 @@
           <p:cNvPr id="35" name="rank-row-2">
             <a:extLst xmlns:a="http://schemas.openxmlformats.org/drawingml/2006/main">
               <a:ext uri="{FF2B5EF4-FFF2-40B4-BE49-F238E27FC236}">
-                <a16:creationId xmlns:a16="http://schemas.microsoft.com/office/drawing/2014/main" id="{D9E31733-D652-4548-A899-E55635A10E3B}"/>
+                <a16:creationId xmlns:a16="http://schemas.microsoft.com/office/drawing/2014/main" id="{F99C5684-3DFF-43FF-B041-B8E7C267BF9E}"/>
               </a:ext>
             </a:extLst>
           </p:cNvPr>
@@ -2789,7 +2789,7 @@
           <p:cNvPr id="36" name="rank-id-2">
             <a:extLst xmlns:a="http://schemas.openxmlformats.org/drawingml/2006/main">
               <a:ext uri="{FF2B5EF4-FFF2-40B4-BE49-F238E27FC236}">
-                <a16:creationId xmlns:a16="http://schemas.microsoft.com/office/drawing/2014/main" id="{2F3C0A15-CE3C-4AF2-B458-5310EFC442E7}"/>
+                <a16:creationId xmlns:a16="http://schemas.microsoft.com/office/drawing/2014/main" id="{A295A84B-2A11-4A90-95B5-577741146974}"/>
               </a:ext>
             </a:extLst>
           </p:cNvPr>
@@ -2847,7 +2847,7 @@
           <p:cNvPr id="37" name="rank-score-2">
             <a:extLst xmlns:a="http://schemas.openxmlformats.org/drawingml/2006/main">
               <a:ext uri="{FF2B5EF4-FFF2-40B4-BE49-F238E27FC236}">
-                <a16:creationId xmlns:a16="http://schemas.microsoft.com/office/drawing/2014/main" id="{A45BF959-498A-46FB-8013-EF53E77DE19F}"/>
+                <a16:creationId xmlns:a16="http://schemas.microsoft.com/office/drawing/2014/main" id="{09E2ED97-7C3A-421F-A7C7-8D3A903C394A}"/>
               </a:ext>
             </a:extLst>
           </p:cNvPr>
@@ -2905,7 +2905,7 @@
           <p:cNvPr id="38" name="rank-number-3">
             <a:extLst xmlns:a="http://schemas.openxmlformats.org/drawingml/2006/main">
               <a:ext uri="{FF2B5EF4-FFF2-40B4-BE49-F238E27FC236}">
-                <a16:creationId xmlns:a16="http://schemas.microsoft.com/office/drawing/2014/main" id="{BA95D99C-28FF-4E40-9688-CB3E90E3360C}"/>
+                <a16:creationId xmlns:a16="http://schemas.microsoft.com/office/drawing/2014/main" id="{DFA6313C-3432-489B-B0AD-6C908C82FF49}"/>
               </a:ext>
             </a:extLst>
           </p:cNvPr>
@@ -2963,7 +2963,7 @@
           <p:cNvPr id="39" name="rank-row-3">
             <a:extLst xmlns:a="http://schemas.openxmlformats.org/drawingml/2006/main">
               <a:ext uri="{FF2B5EF4-FFF2-40B4-BE49-F238E27FC236}">
-                <a16:creationId xmlns:a16="http://schemas.microsoft.com/office/drawing/2014/main" id="{45742255-F255-4B52-81A1-06C01BDF8259}"/>
+                <a16:creationId xmlns:a16="http://schemas.microsoft.com/office/drawing/2014/main" id="{60A5655F-4262-4218-A13D-71B2A24AD379}"/>
               </a:ext>
             </a:extLst>
           </p:cNvPr>
@@ -2996,7 +2996,7 @@
           <p:cNvPr id="40" name="rank-id-3">
             <a:extLst xmlns:a="http://schemas.openxmlformats.org/drawingml/2006/main">
               <a:ext uri="{FF2B5EF4-FFF2-40B4-BE49-F238E27FC236}">
-                <a16:creationId xmlns:a16="http://schemas.microsoft.com/office/drawing/2014/main" id="{2B7B7763-7010-4681-AF4F-B562363DC5EA}"/>
+                <a16:creationId xmlns:a16="http://schemas.microsoft.com/office/drawing/2014/main" id="{FD35E480-0780-4BA8-84F6-EFB19106D75D}"/>
               </a:ext>
             </a:extLst>
           </p:cNvPr>
@@ -3054,7 +3054,7 @@
           <p:cNvPr id="41" name="rank-score-3">
             <a:extLst xmlns:a="http://schemas.openxmlformats.org/drawingml/2006/main">
               <a:ext uri="{FF2B5EF4-FFF2-40B4-BE49-F238E27FC236}">
-                <a16:creationId xmlns:a16="http://schemas.microsoft.com/office/drawing/2014/main" id="{B879B571-D620-4CB3-9999-6C78D973BD81}"/>
+                <a16:creationId xmlns:a16="http://schemas.microsoft.com/office/drawing/2014/main" id="{D457CF3C-BC58-4380-A705-AEFCACBEA541}"/>
               </a:ext>
             </a:extLst>
           </p:cNvPr>
@@ -3112,7 +3112,7 @@
           <p:cNvPr id="42" name="rank-number-4">
             <a:extLst xmlns:a="http://schemas.openxmlformats.org/drawingml/2006/main">
               <a:ext uri="{FF2B5EF4-FFF2-40B4-BE49-F238E27FC236}">
-                <a16:creationId xmlns:a16="http://schemas.microsoft.com/office/drawing/2014/main" id="{DA66397F-DE42-4AC9-8ED8-D5504BFB7EE1}"/>
+                <a16:creationId xmlns:a16="http://schemas.microsoft.com/office/drawing/2014/main" id="{68D7CF4D-F0B3-4A3A-8485-76C75C61D3BF}"/>
               </a:ext>
             </a:extLst>
           </p:cNvPr>
@@ -3170,7 +3170,7 @@
           <p:cNvPr id="43" name="rank-row-4">
             <a:extLst xmlns:a="http://schemas.openxmlformats.org/drawingml/2006/main">
               <a:ext uri="{FF2B5EF4-FFF2-40B4-BE49-F238E27FC236}">
-                <a16:creationId xmlns:a16="http://schemas.microsoft.com/office/drawing/2014/main" id="{8A7796E0-B8E2-481F-BBFC-E2DB8BB69B92}"/>
+                <a16:creationId xmlns:a16="http://schemas.microsoft.com/office/drawing/2014/main" id="{E598ECA6-7B6B-438D-90E4-092CAD382C6B}"/>
               </a:ext>
             </a:extLst>
           </p:cNvPr>
@@ -3203,7 +3203,7 @@
           <p:cNvPr id="44" name="rank-id-4">
             <a:extLst xmlns:a="http://schemas.openxmlformats.org/drawingml/2006/main">
               <a:ext uri="{FF2B5EF4-FFF2-40B4-BE49-F238E27FC236}">
-                <a16:creationId xmlns:a16="http://schemas.microsoft.com/office/drawing/2014/main" id="{A378DB78-9C4B-4594-A913-8CF860D59B9C}"/>
+                <a16:creationId xmlns:a16="http://schemas.microsoft.com/office/drawing/2014/main" id="{70D4E0DE-DB56-4DD4-A6CF-872C025D0BF1}"/>
               </a:ext>
             </a:extLst>
           </p:cNvPr>
@@ -3261,7 +3261,7 @@
           <p:cNvPr id="45" name="rank-score-4">
             <a:extLst xmlns:a="http://schemas.openxmlformats.org/drawingml/2006/main">
               <a:ext uri="{FF2B5EF4-FFF2-40B4-BE49-F238E27FC236}">
-                <a16:creationId xmlns:a16="http://schemas.microsoft.com/office/drawing/2014/main" id="{3B63D0C2-492D-429A-A2EE-3101344AB3C1}"/>
+                <a16:creationId xmlns:a16="http://schemas.microsoft.com/office/drawing/2014/main" id="{D9E933B4-6B1E-4D4E-8251-D7885CCFC8ED}"/>
               </a:ext>
             </a:extLst>
           </p:cNvPr>
@@ -3319,7 +3319,7 @@
           <p:cNvPr id="46" name="stable-tie-bracket">
             <a:extLst xmlns:a="http://schemas.openxmlformats.org/drawingml/2006/main">
               <a:ext uri="{FF2B5EF4-FFF2-40B4-BE49-F238E27FC236}">
-                <a16:creationId xmlns:a16="http://schemas.microsoft.com/office/drawing/2014/main" id="{4C7F893D-5998-4210-8EE2-9682B028042C}"/>
+                <a16:creationId xmlns:a16="http://schemas.microsoft.com/office/drawing/2014/main" id="{CA465BA7-86B1-4771-B791-D23833CDB087}"/>
               </a:ext>
             </a:extLst>
           </p:cNvPr>
@@ -3350,7 +3350,7 @@
           <p:cNvPr id="47" name="">
             <a:extLst xmlns:a="http://schemas.openxmlformats.org/drawingml/2006/main">
               <a:ext uri="{FF2B5EF4-FFF2-40B4-BE49-F238E27FC236}">
-                <a16:creationId xmlns:a16="http://schemas.microsoft.com/office/drawing/2014/main" id="{0F01C678-95D2-451B-B835-690DB7BFC8EB}"/>
+                <a16:creationId xmlns:a16="http://schemas.microsoft.com/office/drawing/2014/main" id="{4653D25B-D9C7-4620-A4B1-B4B9A82615EB}"/>
               </a:ext>
             </a:extLst>
           </p:cNvPr>
@@ -3381,7 +3381,7 @@
           <p:cNvPr id="48" name="">
             <a:extLst xmlns:a="http://schemas.openxmlformats.org/drawingml/2006/main">
               <a:ext uri="{FF2B5EF4-FFF2-40B4-BE49-F238E27FC236}">
-                <a16:creationId xmlns:a16="http://schemas.microsoft.com/office/drawing/2014/main" id="{21431ACC-6DF0-4F14-B5A3-EDBA71EBBCEF}"/>
+                <a16:creationId xmlns:a16="http://schemas.microsoft.com/office/drawing/2014/main" id="{E0B46C1C-67CD-4D91-A38F-C185E10C4545}"/>
               </a:ext>
             </a:extLst>
           </p:cNvPr>
@@ -3412,19 +3412,19 @@
           <p:cNvPr id="49" name="stable-tie-label">
             <a:extLst xmlns:a="http://schemas.openxmlformats.org/drawingml/2006/main">
               <a:ext uri="{FF2B5EF4-FFF2-40B4-BE49-F238E27FC236}">
-                <a16:creationId xmlns:a16="http://schemas.microsoft.com/office/drawing/2014/main" id="{CDCB75C3-BCD0-480B-86F1-5AF183F39039}"/>
-              </a:ext>
-            </a:extLst>
-          </p:cNvPr>
-          <p:cNvSpPr>
-            <a:spLocks xmlns:a="http://schemas.openxmlformats.org/drawingml/2006/main" noGrp="1"/>
-          </p:cNvSpPr>
-          <p:nvPr/>
-        </p:nvSpPr>
-        <p:spPr>
-          <a:xfrm xmlns:a="http://schemas.openxmlformats.org/drawingml/2006/main" rot="0">
-            <a:off x="4114800" y="3409950"/>
-            <a:ext cx="590550" cy="247650"/>
+                <a16:creationId xmlns:a16="http://schemas.microsoft.com/office/drawing/2014/main" id="{A56CF612-091E-4229-8DAD-73292D0AF80D}"/>
+              </a:ext>
+            </a:extLst>
+          </p:cNvPr>
+          <p:cNvSpPr>
+            <a:spLocks xmlns:a="http://schemas.openxmlformats.org/drawingml/2006/main" noGrp="1"/>
+          </p:cNvSpPr>
+          <p:nvPr/>
+        </p:nvSpPr>
+        <p:spPr>
+          <a:xfrm xmlns:a="http://schemas.openxmlformats.org/drawingml/2006/main" rot="0">
+            <a:off x="3790950" y="3409950"/>
+            <a:ext cx="914400" cy="247650"/>
           </a:xfrm>
           <a:prstGeom xmlns:a="http://schemas.openxmlformats.org/drawingml/2006/main" prst="rect">
             <a:avLst/>
@@ -3437,12 +3437,12 @@
         </p:spPr>
         <p:txBody>
           <a:bodyPr xmlns:a="http://schemas.openxmlformats.org/drawingml/2006/main" wrap="square" lIns="19050" tIns="9525" rIns="19050" bIns="9525" anchor="ctr">
-            <a:normAutofit fontScale="95232"/>
+            <a:normAutofit fontScale="100000"/>
           </a:bodyPr>
           <a:lstStyle xmlns:a="http://schemas.openxmlformats.org/drawingml/2006/main"/>
           <a:p xmlns:a="http://schemas.openxmlformats.org/drawingml/2006/main">
             <a:pPr algn="r">
-              <a:defRPr sz="1050" b="1">
+              <a:defRPr sz="975" b="1">
                 <a:solidFill>
                   <a:srgbClr val="26785F"/>
                 </a:solidFill>
@@ -3452,7 +3452,7 @@
               </a:defRPr>
             </a:pPr>
             <a:r>
-              <a:rPr sz="1050" b="1">
+              <a:rPr sz="975" b="1">
                 <a:solidFill>
                   <a:srgbClr val="26785F"/>
                 </a:solidFill>
@@ -3460,7 +3460,7 @@
                 <a:ea typeface="Arial"/>
                 <a:cs typeface="Arial"/>
               </a:rPr>
-              <a:t>stable tie</a:t>
+              <a:t>equal scores</a:t>
             </a:r>
           </a:p>
         </p:txBody>
@@ -3470,7 +3470,7 @@
           <p:cNvPr id="50" name="ranking-tie-caption">
             <a:extLst xmlns:a="http://schemas.openxmlformats.org/drawingml/2006/main">
               <a:ext uri="{FF2B5EF4-FFF2-40B4-BE49-F238E27FC236}">
-                <a16:creationId xmlns:a16="http://schemas.microsoft.com/office/drawing/2014/main" id="{ADF7E9C4-27D2-4A29-AAAD-FA9791D719F4}"/>
+                <a16:creationId xmlns:a16="http://schemas.microsoft.com/office/drawing/2014/main" id="{F0AD1A6E-C297-48FE-8F13-BDF59F05E9C8}"/>
               </a:ext>
             </a:extLst>
           </p:cNvPr>
@@ -3518,7 +3518,7 @@
                 <a:ea typeface="Arial"/>
                 <a:cs typeface="Arial"/>
               </a:rPr>
-              <a:t>Equal scores: candidate ID</a:t>
+              <a:t>Stable deterministic ties</a:t>
             </a:r>
           </a:p>
         </p:txBody>
@@ -3528,7 +3528,7 @@
           <p:cNvPr id="51" name="allocation-heading">
             <a:extLst xmlns:a="http://schemas.openxmlformats.org/drawingml/2006/main">
               <a:ext uri="{FF2B5EF4-FFF2-40B4-BE49-F238E27FC236}">
-                <a16:creationId xmlns:a16="http://schemas.microsoft.com/office/drawing/2014/main" id="{514652EC-B38C-4ABF-BE2E-D63F6A7B7B7A}"/>
+                <a16:creationId xmlns:a16="http://schemas.microsoft.com/office/drawing/2014/main" id="{59C4086A-AC46-4A85-99DD-488569B6B465}"/>
               </a:ext>
             </a:extLst>
           </p:cNvPr>
@@ -3586,7 +3586,7 @@
           <p:cNvPr id="52" name="allocation-caption">
             <a:extLst xmlns:a="http://schemas.openxmlformats.org/drawingml/2006/main">
               <a:ext uri="{FF2B5EF4-FFF2-40B4-BE49-F238E27FC236}">
-                <a16:creationId xmlns:a16="http://schemas.microsoft.com/office/drawing/2014/main" id="{EB848A8C-B430-4DBB-AD85-0B407A878845}"/>
+                <a16:creationId xmlns:a16="http://schemas.microsoft.com/office/drawing/2014/main" id="{A23A7942-F3D6-4028-9E4C-025978BC842A}"/>
               </a:ext>
             </a:extLst>
           </p:cNvPr>
@@ -3634,7 +3634,7 @@
                 <a:ea typeface="Arial"/>
                 <a:cs typeface="Arial"/>
               </a:rPr>
-              <a:t>Apply declared reserves, then fill from the global order</a:t>
+              <a:t>Apply reserves in declared order, then fill by global rank</a:t>
             </a:r>
           </a:p>
         </p:txBody>
@@ -3644,7 +3644,7 @@
           <p:cNvPr id="53" name="policy-to-queue-arrow">
             <a:extLst xmlns:a="http://schemas.openxmlformats.org/drawingml/2006/main">
               <a:ext uri="{FF2B5EF4-FFF2-40B4-BE49-F238E27FC236}">
-                <a16:creationId xmlns:a16="http://schemas.microsoft.com/office/drawing/2014/main" id="{840A9F6A-91DC-4384-9FE4-6AD917ED8BCF}"/>
+                <a16:creationId xmlns:a16="http://schemas.microsoft.com/office/drawing/2014/main" id="{1EF59C6B-3DF8-44A9-96D5-3F9A117D4B41}"/>
               </a:ext>
             </a:extLst>
           </p:cNvPr>
@@ -3675,7 +3675,7 @@
           <p:cNvPr id="54" name="global-to-queue-arrow">
             <a:extLst xmlns:a="http://schemas.openxmlformats.org/drawingml/2006/main">
               <a:ext uri="{FF2B5EF4-FFF2-40B4-BE49-F238E27FC236}">
-                <a16:creationId xmlns:a16="http://schemas.microsoft.com/office/drawing/2014/main" id="{BF86755D-D724-4DB0-915C-9AC5626F4097}"/>
+                <a16:creationId xmlns:a16="http://schemas.microsoft.com/office/drawing/2014/main" id="{A0D3B1AE-3213-4261-9B91-DED753A1033E}"/>
               </a:ext>
             </a:extLst>
           </p:cNvPr>
@@ -3706,7 +3706,7 @@
           <p:cNvPr id="55" name="allocation-policy">
             <a:extLst xmlns:a="http://schemas.openxmlformats.org/drawingml/2006/main">
               <a:ext uri="{FF2B5EF4-FFF2-40B4-BE49-F238E27FC236}">
-                <a16:creationId xmlns:a16="http://schemas.microsoft.com/office/drawing/2014/main" id="{CD76DBCA-8932-46D1-A6BA-4A223A3FAD48}"/>
+                <a16:creationId xmlns:a16="http://schemas.microsoft.com/office/drawing/2014/main" id="{C7DA9A6A-6B5D-4A88-A358-B22A56AA213F}"/>
               </a:ext>
             </a:extLst>
           </p:cNvPr>
@@ -3739,7 +3739,7 @@
           <p:cNvPr id="56" name="allocation-policy-name">
             <a:extLst xmlns:a="http://schemas.openxmlformats.org/drawingml/2006/main">
               <a:ext uri="{FF2B5EF4-FFF2-40B4-BE49-F238E27FC236}">
-                <a16:creationId xmlns:a16="http://schemas.microsoft.com/office/drawing/2014/main" id="{A2786121-8335-4F4E-8CF2-026B8B59C016}"/>
+                <a16:creationId xmlns:a16="http://schemas.microsoft.com/office/drawing/2014/main" id="{01F0B57F-35F2-4473-AB58-2D715CA7F722}"/>
               </a:ext>
             </a:extLst>
           </p:cNvPr>
@@ -3787,87 +3787,62 @@
                 <a:ea typeface="Arial"/>
                 <a:cs typeface="Arial"/>
               </a:rPr>
-              <a:t>Reserve policy</a:t>
+              <a:t>Reserve policies</a:t>
             </a:r>
           </a:p>
         </p:txBody>
       </p:sp>
       <p:sp>
         <p:nvSpPr>
-          <p:cNvPr id="57" name="allocation-policy-profile">
-            <a:extLst xmlns:a="http://schemas.openxmlformats.org/drawingml/2006/main">
-              <a:ext uri="{FF2B5EF4-FFF2-40B4-BE49-F238E27FC236}">
-                <a16:creationId xmlns:a16="http://schemas.microsoft.com/office/drawing/2014/main" id="{1D9AA398-75B5-40E6-89F5-DCE282D259A2}"/>
-              </a:ext>
-            </a:extLst>
-          </p:cNvPr>
-          <p:cNvSpPr>
-            <a:spLocks xmlns:a="http://schemas.openxmlformats.org/drawingml/2006/main" noGrp="1"/>
-          </p:cNvSpPr>
-          <p:nvPr/>
-        </p:nvSpPr>
-        <p:spPr>
-          <a:xfrm xmlns:a="http://schemas.openxmlformats.org/drawingml/2006/main" rot="0">
-            <a:off x="5486400" y="2619375"/>
-            <a:ext cx="819150" cy="209550"/>
-          </a:xfrm>
-          <a:prstGeom xmlns:a="http://schemas.openxmlformats.org/drawingml/2006/main" prst="rect">
-            <a:avLst/>
-          </a:prstGeom>
-          <a:noFill xmlns:a="http://schemas.openxmlformats.org/drawingml/2006/main"/>
-          <a:ln xmlns:a="http://schemas.openxmlformats.org/drawingml/2006/main" w="0">
-            <a:noFill/>
-            <a:prstDash val="solid"/>
-          </a:ln>
-        </p:spPr>
-        <p:txBody>
-          <a:bodyPr xmlns:a="http://schemas.openxmlformats.org/drawingml/2006/main" wrap="square" lIns="19050" tIns="9525" rIns="19050" bIns="9525" anchor="ctr">
-            <a:normAutofit fontScale="100000"/>
-          </a:bodyPr>
-          <a:lstStyle xmlns:a="http://schemas.openxmlformats.org/drawingml/2006/main"/>
-          <a:p xmlns:a="http://schemas.openxmlformats.org/drawingml/2006/main">
-            <a:pPr algn="l">
-              <a:defRPr sz="1200" b="0">
-                <a:solidFill>
-                  <a:srgbClr val="172027"/>
-                </a:solidFill>
-                <a:latin typeface="Arial"/>
-                <a:ea typeface="Arial"/>
-                <a:cs typeface="Arial"/>
-              </a:defRPr>
-            </a:pPr>
-            <a:r>
-              <a:rPr sz="1200" b="0">
-                <a:solidFill>
-                  <a:srgbClr val="172027"/>
-                </a:solidFill>
-                <a:latin typeface="Arial"/>
-                <a:ea typeface="Arial"/>
-                <a:cs typeface="Arial"/>
-              </a:rPr>
-              <a:t>profile</a:t>
-            </a:r>
-          </a:p>
-        </p:txBody>
-      </p:sp>
-      <p:sp>
-        <p:nvSpPr>
-          <p:cNvPr id="58" name="allocation-policy-fraction">
-            <a:extLst xmlns:a="http://schemas.openxmlformats.org/drawingml/2006/main">
-              <a:ext uri="{FF2B5EF4-FFF2-40B4-BE49-F238E27FC236}">
-                <a16:creationId xmlns:a16="http://schemas.microsoft.com/office/drawing/2014/main" id="{4B86B31B-93E7-4869-82AB-05AA4390BC33}"/>
-              </a:ext>
-            </a:extLst>
-          </p:cNvPr>
-          <p:cNvSpPr>
-            <a:spLocks xmlns:a="http://schemas.openxmlformats.org/drawingml/2006/main" noGrp="1"/>
-          </p:cNvSpPr>
-          <p:nvPr/>
-        </p:nvSpPr>
-        <p:spPr>
-          <a:xfrm xmlns:a="http://schemas.openxmlformats.org/drawingml/2006/main" rot="0">
-            <a:off x="5486400" y="2895600"/>
-            <a:ext cx="1390650" cy="209550"/>
+          <p:cNvPr id="57" name="allocation-policy-token-1">
+            <a:extLst xmlns:a="http://schemas.openxmlformats.org/drawingml/2006/main">
+              <a:ext uri="{FF2B5EF4-FFF2-40B4-BE49-F238E27FC236}">
+                <a16:creationId xmlns:a16="http://schemas.microsoft.com/office/drawing/2014/main" id="{619734CA-BC02-40E1-A7FF-CC5A744485D4}"/>
+              </a:ext>
+            </a:extLst>
+          </p:cNvPr>
+          <p:cNvSpPr>
+            <a:spLocks xmlns:a="http://schemas.openxmlformats.org/drawingml/2006/main" noGrp="1"/>
+          </p:cNvSpPr>
+          <p:nvPr/>
+        </p:nvSpPr>
+        <p:spPr>
+          <a:xfrm xmlns:a="http://schemas.openxmlformats.org/drawingml/2006/main" rot="0">
+            <a:off x="5486400" y="2600325"/>
+            <a:ext cx="152400" cy="152400"/>
+          </a:xfrm>
+          <a:prstGeom xmlns:a="http://schemas.openxmlformats.org/drawingml/2006/main" prst="ellipse">
+            <a:avLst/>
+          </a:prstGeom>
+          <a:solidFill xmlns:a="http://schemas.openxmlformats.org/drawingml/2006/main">
+            <a:srgbClr val="257FA0"/>
+          </a:solidFill>
+          <a:ln xmlns:a="http://schemas.openxmlformats.org/drawingml/2006/main" w="7620">
+            <a:solidFill>
+              <a:srgbClr val="26355F"/>
+            </a:solidFill>
+            <a:prstDash val="solid"/>
+          </a:ln>
+        </p:spPr>
+      </p:sp>
+      <p:sp>
+        <p:nvSpPr>
+          <p:cNvPr id="58" name="allocation-policy-profile">
+            <a:extLst xmlns:a="http://schemas.openxmlformats.org/drawingml/2006/main">
+              <a:ext uri="{FF2B5EF4-FFF2-40B4-BE49-F238E27FC236}">
+                <a16:creationId xmlns:a16="http://schemas.microsoft.com/office/drawing/2014/main" id="{505FC8F3-F370-468F-882D-C21D8B19323E}"/>
+              </a:ext>
+            </a:extLst>
+          </p:cNvPr>
+          <p:cNvSpPr>
+            <a:spLocks xmlns:a="http://schemas.openxmlformats.org/drawingml/2006/main" noGrp="1"/>
+          </p:cNvSpPr>
+          <p:nvPr/>
+        </p:nvSpPr>
+        <p:spPr>
+          <a:xfrm xmlns:a="http://schemas.openxmlformats.org/drawingml/2006/main" rot="0">
+            <a:off x="5734050" y="2571750"/>
+            <a:ext cx="1066800" cy="209550"/>
           </a:xfrm>
           <a:prstGeom xmlns:a="http://schemas.openxmlformats.org/drawingml/2006/main" prst="rect">
             <a:avLst/>
@@ -3903,35 +3878,35 @@
                 <a:ea typeface="Arial"/>
                 <a:cs typeface="Arial"/>
               </a:rPr>
-              <a:t>fraction = 0.10</a:t>
+              <a:t>profile</a:t>
             </a:r>
           </a:p>
         </p:txBody>
       </p:sp>
       <p:sp>
         <p:nvSpPr>
-          <p:cNvPr id="59" name="allocation-policy-token-1">
-            <a:extLst xmlns:a="http://schemas.openxmlformats.org/drawingml/2006/main">
-              <a:ext uri="{FF2B5EF4-FFF2-40B4-BE49-F238E27FC236}">
-                <a16:creationId xmlns:a16="http://schemas.microsoft.com/office/drawing/2014/main" id="{2155FD56-0C73-4011-A504-49818D5A96E5}"/>
-              </a:ext>
-            </a:extLst>
-          </p:cNvPr>
-          <p:cNvSpPr>
-            <a:spLocks xmlns:a="http://schemas.openxmlformats.org/drawingml/2006/main" noGrp="1"/>
-          </p:cNvSpPr>
-          <p:nvPr/>
-        </p:nvSpPr>
-        <p:spPr>
-          <a:xfrm xmlns:a="http://schemas.openxmlformats.org/drawingml/2006/main" rot="0">
-            <a:off x="6438900" y="2600325"/>
-            <a:ext cx="171450" cy="171450"/>
-          </a:xfrm>
-          <a:prstGeom xmlns:a="http://schemas.openxmlformats.org/drawingml/2006/main" prst="ellipse">
+          <p:cNvPr id="59" name="allocation-policy-token-2">
+            <a:extLst xmlns:a="http://schemas.openxmlformats.org/drawingml/2006/main">
+              <a:ext uri="{FF2B5EF4-FFF2-40B4-BE49-F238E27FC236}">
+                <a16:creationId xmlns:a16="http://schemas.microsoft.com/office/drawing/2014/main" id="{B0F36F13-58CA-4AC5-937D-4F57DD36F703}"/>
+              </a:ext>
+            </a:extLst>
+          </p:cNvPr>
+          <p:cNvSpPr>
+            <a:spLocks xmlns:a="http://schemas.openxmlformats.org/drawingml/2006/main" noGrp="1"/>
+          </p:cNvSpPr>
+          <p:nvPr/>
+        </p:nvSpPr>
+        <p:spPr>
+          <a:xfrm xmlns:a="http://schemas.openxmlformats.org/drawingml/2006/main" rot="0">
+            <a:off x="5486400" y="2857500"/>
+            <a:ext cx="152400" cy="152400"/>
+          </a:xfrm>
+          <a:prstGeom xmlns:a="http://schemas.openxmlformats.org/drawingml/2006/main" prst="diamond">
             <a:avLst/>
           </a:prstGeom>
           <a:solidFill xmlns:a="http://schemas.openxmlformats.org/drawingml/2006/main">
-            <a:srgbClr val="257FA0"/>
+            <a:srgbClr val="765A8D"/>
           </a:solidFill>
           <a:ln xmlns:a="http://schemas.openxmlformats.org/drawingml/2006/main" w="7620">
             <a:solidFill>
@@ -3943,28 +3918,291 @@
       </p:sp>
       <p:sp>
         <p:nvSpPr>
-          <p:cNvPr id="60" name="allocation-policy-token-2">
-            <a:extLst xmlns:a="http://schemas.openxmlformats.org/drawingml/2006/main">
-              <a:ext uri="{FF2B5EF4-FFF2-40B4-BE49-F238E27FC236}">
-                <a16:creationId xmlns:a16="http://schemas.microsoft.com/office/drawing/2014/main" id="{78137A0A-BC04-42B3-AD8A-F6FB6A82242F}"/>
-              </a:ext>
-            </a:extLst>
-          </p:cNvPr>
-          <p:cNvSpPr>
-            <a:spLocks xmlns:a="http://schemas.openxmlformats.org/drawingml/2006/main" noGrp="1"/>
-          </p:cNvSpPr>
-          <p:nvPr/>
-        </p:nvSpPr>
-        <p:spPr>
-          <a:xfrm xmlns:a="http://schemas.openxmlformats.org/drawingml/2006/main" rot="0">
-            <a:off x="6686550" y="2600325"/>
-            <a:ext cx="171450" cy="171450"/>
-          </a:xfrm>
-          <a:prstGeom xmlns:a="http://schemas.openxmlformats.org/drawingml/2006/main" prst="diamond">
+          <p:cNvPr id="60" name="allocation-policy-signal-type">
+            <a:extLst xmlns:a="http://schemas.openxmlformats.org/drawingml/2006/main">
+              <a:ext uri="{FF2B5EF4-FFF2-40B4-BE49-F238E27FC236}">
+                <a16:creationId xmlns:a16="http://schemas.microsoft.com/office/drawing/2014/main" id="{7DA94F9A-0B0E-460F-8360-479B7F1B4A6D}"/>
+              </a:ext>
+            </a:extLst>
+          </p:cNvPr>
+          <p:cNvSpPr>
+            <a:spLocks xmlns:a="http://schemas.openxmlformats.org/drawingml/2006/main" noGrp="1"/>
+          </p:cNvSpPr>
+          <p:nvPr/>
+        </p:nvSpPr>
+        <p:spPr>
+          <a:xfrm xmlns:a="http://schemas.openxmlformats.org/drawingml/2006/main" rot="0">
+            <a:off x="5734050" y="2828925"/>
+            <a:ext cx="1066800" cy="209550"/>
+          </a:xfrm>
+          <a:prstGeom xmlns:a="http://schemas.openxmlformats.org/drawingml/2006/main" prst="rect">
+            <a:avLst/>
+          </a:prstGeom>
+          <a:noFill xmlns:a="http://schemas.openxmlformats.org/drawingml/2006/main"/>
+          <a:ln xmlns:a="http://schemas.openxmlformats.org/drawingml/2006/main" w="0">
+            <a:noFill/>
+            <a:prstDash val="solid"/>
+          </a:ln>
+        </p:spPr>
+        <p:txBody>
+          <a:bodyPr xmlns:a="http://schemas.openxmlformats.org/drawingml/2006/main" wrap="square" lIns="19050" tIns="9525" rIns="19050" bIns="9525" anchor="ctr">
+            <a:normAutofit fontScale="100000"/>
+          </a:bodyPr>
+          <a:lstStyle xmlns:a="http://schemas.openxmlformats.org/drawingml/2006/main"/>
+          <a:p xmlns:a="http://schemas.openxmlformats.org/drawingml/2006/main">
+            <a:pPr algn="l">
+              <a:defRPr sz="1125" b="0">
+                <a:solidFill>
+                  <a:srgbClr val="172027"/>
+                </a:solidFill>
+                <a:latin typeface="Arial"/>
+                <a:ea typeface="Arial"/>
+                <a:cs typeface="Arial"/>
+              </a:defRPr>
+            </a:pPr>
+            <a:r>
+              <a:rPr sz="1125" b="0">
+                <a:solidFill>
+                  <a:srgbClr val="172027"/>
+                </a:solidFill>
+                <a:latin typeface="Arial"/>
+                <a:ea typeface="Arial"/>
+                <a:cs typeface="Arial"/>
+              </a:rPr>
+              <a:t>signal type</a:t>
+            </a:r>
+          </a:p>
+        </p:txBody>
+      </p:sp>
+      <p:sp>
+        <p:nvSpPr>
+          <p:cNvPr id="61" name="allocation-policy-order">
+            <a:extLst xmlns:a="http://schemas.openxmlformats.org/drawingml/2006/main">
+              <a:ext uri="{FF2B5EF4-FFF2-40B4-BE49-F238E27FC236}">
+                <a16:creationId xmlns:a16="http://schemas.microsoft.com/office/drawing/2014/main" id="{F05FA9AF-CEB4-4BE8-91EC-37177F9773B3}"/>
+              </a:ext>
+            </a:extLst>
+          </p:cNvPr>
+          <p:cNvSpPr>
+            <a:spLocks xmlns:a="http://schemas.openxmlformats.org/drawingml/2006/main" noGrp="1"/>
+          </p:cNvSpPr>
+          <p:nvPr/>
+        </p:nvSpPr>
+        <p:spPr>
+          <a:xfrm xmlns:a="http://schemas.openxmlformats.org/drawingml/2006/main" rot="0">
+            <a:off x="5429250" y="3124200"/>
+            <a:ext cx="1447800" cy="190500"/>
+          </a:xfrm>
+          <a:prstGeom xmlns:a="http://schemas.openxmlformats.org/drawingml/2006/main" prst="rect">
+            <a:avLst/>
+          </a:prstGeom>
+          <a:noFill xmlns:a="http://schemas.openxmlformats.org/drawingml/2006/main"/>
+          <a:ln xmlns:a="http://schemas.openxmlformats.org/drawingml/2006/main" w="0">
+            <a:noFill/>
+            <a:prstDash val="solid"/>
+          </a:ln>
+        </p:spPr>
+        <p:txBody>
+          <a:bodyPr xmlns:a="http://schemas.openxmlformats.org/drawingml/2006/main" wrap="square" lIns="19050" tIns="9525" rIns="19050" bIns="9525" anchor="ctr">
+            <a:normAutofit fontScale="96621"/>
+          </a:bodyPr>
+          <a:lstStyle xmlns:a="http://schemas.openxmlformats.org/drawingml/2006/main"/>
+          <a:p xmlns:a="http://schemas.openxmlformats.org/drawingml/2006/main">
+            <a:pPr algn="l">
+              <a:defRPr sz="900" b="1">
+                <a:solidFill>
+                  <a:srgbClr val="26785F"/>
+                </a:solidFill>
+                <a:latin typeface="Arial"/>
+                <a:ea typeface="Arial"/>
+                <a:cs typeface="Arial"/>
+              </a:defRPr>
+            </a:pPr>
+            <a:r>
+              <a:rPr sz="900" b="1">
+                <a:solidFill>
+                  <a:srgbClr val="26785F"/>
+                </a:solidFill>
+                <a:latin typeface="Arial"/>
+                <a:ea typeface="Arial"/>
+                <a:cs typeface="Arial"/>
+              </a:rPr>
+              <a:t>Exact-floor; declared order</a:t>
+            </a:r>
+          </a:p>
+        </p:txBody>
+      </p:sp>
+      <p:sp>
+        <p:nvSpPr>
+          <p:cNvPr id="62" name="allocation-global-label">
+            <a:extLst xmlns:a="http://schemas.openxmlformats.org/drawingml/2006/main">
+              <a:ext uri="{FF2B5EF4-FFF2-40B4-BE49-F238E27FC236}">
+                <a16:creationId xmlns:a16="http://schemas.microsoft.com/office/drawing/2014/main" id="{0FA36BDE-77E3-40CF-9E63-D6426C92BFAC}"/>
+              </a:ext>
+            </a:extLst>
+          </p:cNvPr>
+          <p:cNvSpPr>
+            <a:spLocks xmlns:a="http://schemas.openxmlformats.org/drawingml/2006/main" noGrp="1"/>
+          </p:cNvSpPr>
+          <p:nvPr/>
+        </p:nvSpPr>
+        <p:spPr>
+          <a:xfrm xmlns:a="http://schemas.openxmlformats.org/drawingml/2006/main" rot="0">
+            <a:off x="7391400" y="2219325"/>
+            <a:ext cx="1257300" cy="228600"/>
+          </a:xfrm>
+          <a:prstGeom xmlns:a="http://schemas.openxmlformats.org/drawingml/2006/main" prst="rect">
+            <a:avLst/>
+          </a:prstGeom>
+          <a:noFill xmlns:a="http://schemas.openxmlformats.org/drawingml/2006/main"/>
+          <a:ln xmlns:a="http://schemas.openxmlformats.org/drawingml/2006/main" w="0">
+            <a:noFill/>
+            <a:prstDash val="solid"/>
+          </a:ln>
+        </p:spPr>
+        <p:txBody>
+          <a:bodyPr xmlns:a="http://schemas.openxmlformats.org/drawingml/2006/main" wrap="square" lIns="19050" tIns="9525" rIns="19050" bIns="9525" anchor="ctr">
+            <a:normAutofit fontScale="100000"/>
+          </a:bodyPr>
+          <a:lstStyle xmlns:a="http://schemas.openxmlformats.org/drawingml/2006/main"/>
+          <a:p xmlns:a="http://schemas.openxmlformats.org/drawingml/2006/main">
+            <a:pPr algn="l">
+              <a:defRPr sz="1200" b="1">
+                <a:solidFill>
+                  <a:srgbClr val="26355F"/>
+                </a:solidFill>
+                <a:latin typeface="Arial"/>
+                <a:ea typeface="Arial"/>
+                <a:cs typeface="Arial"/>
+              </a:defRPr>
+            </a:pPr>
+            <a:r>
+              <a:rPr sz="1200" b="1">
+                <a:solidFill>
+                  <a:srgbClr val="26355F"/>
+                </a:solidFill>
+                <a:latin typeface="Arial"/>
+                <a:ea typeface="Arial"/>
+                <a:cs typeface="Arial"/>
+              </a:rPr>
+              <a:t>Global ranking</a:t>
+            </a:r>
+          </a:p>
+        </p:txBody>
+      </p:sp>
+      <p:sp>
+        <p:nvSpPr>
+          <p:cNvPr id="63" name="allocation-global-token-1">
+            <a:extLst xmlns:a="http://schemas.openxmlformats.org/drawingml/2006/main">
+              <a:ext uri="{FF2B5EF4-FFF2-40B4-BE49-F238E27FC236}">
+                <a16:creationId xmlns:a16="http://schemas.microsoft.com/office/drawing/2014/main" id="{1F47AD67-B9DE-46F2-8450-32D599CC5FA5}"/>
+              </a:ext>
+            </a:extLst>
+          </p:cNvPr>
+          <p:cNvSpPr>
+            <a:spLocks xmlns:a="http://schemas.openxmlformats.org/drawingml/2006/main" noGrp="1"/>
+          </p:cNvSpPr>
+          <p:nvPr/>
+        </p:nvSpPr>
+        <p:spPr>
+          <a:xfrm xmlns:a="http://schemas.openxmlformats.org/drawingml/2006/main" rot="0">
+            <a:off x="7410450" y="2571750"/>
+            <a:ext cx="190500" cy="190500"/>
+          </a:xfrm>
+          <a:prstGeom xmlns:a="http://schemas.openxmlformats.org/drawingml/2006/main" prst="rect">
             <a:avLst/>
           </a:prstGeom>
           <a:solidFill xmlns:a="http://schemas.openxmlformats.org/drawingml/2006/main">
-            <a:srgbClr val="765A8D"/>
+            <a:srgbClr val="26355F"/>
+          </a:solidFill>
+          <a:ln xmlns:a="http://schemas.openxmlformats.org/drawingml/2006/main" w="0">
+            <a:noFill/>
+            <a:prstDash val="solid"/>
+          </a:ln>
+        </p:spPr>
+      </p:sp>
+      <p:sp>
+        <p:nvSpPr>
+          <p:cNvPr id="64" name="allocation-global-rank-1">
+            <a:extLst xmlns:a="http://schemas.openxmlformats.org/drawingml/2006/main">
+              <a:ext uri="{FF2B5EF4-FFF2-40B4-BE49-F238E27FC236}">
+                <a16:creationId xmlns:a16="http://schemas.microsoft.com/office/drawing/2014/main" id="{EF76D164-C473-4EE4-AB45-797D94A47019}"/>
+              </a:ext>
+            </a:extLst>
+          </p:cNvPr>
+          <p:cNvSpPr>
+            <a:spLocks xmlns:a="http://schemas.openxmlformats.org/drawingml/2006/main" noGrp="1"/>
+          </p:cNvSpPr>
+          <p:nvPr/>
+        </p:nvSpPr>
+        <p:spPr>
+          <a:xfrm xmlns:a="http://schemas.openxmlformats.org/drawingml/2006/main" rot="0">
+            <a:off x="7410450" y="2819400"/>
+            <a:ext cx="190500" cy="190500"/>
+          </a:xfrm>
+          <a:prstGeom xmlns:a="http://schemas.openxmlformats.org/drawingml/2006/main" prst="rect">
+            <a:avLst/>
+          </a:prstGeom>
+          <a:noFill xmlns:a="http://schemas.openxmlformats.org/drawingml/2006/main"/>
+          <a:ln xmlns:a="http://schemas.openxmlformats.org/drawingml/2006/main" w="0">
+            <a:noFill/>
+            <a:prstDash val="solid"/>
+          </a:ln>
+        </p:spPr>
+        <p:txBody>
+          <a:bodyPr xmlns:a="http://schemas.openxmlformats.org/drawingml/2006/main" wrap="square" lIns="19050" tIns="9525" rIns="19050" bIns="9525" anchor="ctr">
+            <a:normAutofit fontScale="100000"/>
+          </a:bodyPr>
+          <a:lstStyle xmlns:a="http://schemas.openxmlformats.org/drawingml/2006/main"/>
+          <a:p xmlns:a="http://schemas.openxmlformats.org/drawingml/2006/main">
+            <a:pPr algn="ctr">
+              <a:defRPr sz="975" b="0">
+                <a:solidFill>
+                  <a:srgbClr val="637077"/>
+                </a:solidFill>
+                <a:latin typeface="Arial"/>
+                <a:ea typeface="Arial"/>
+                <a:cs typeface="Arial"/>
+              </a:defRPr>
+            </a:pPr>
+            <a:r>
+              <a:rPr sz="975" b="0">
+                <a:solidFill>
+                  <a:srgbClr val="637077"/>
+                </a:solidFill>
+                <a:latin typeface="Arial"/>
+                <a:ea typeface="Arial"/>
+                <a:cs typeface="Arial"/>
+              </a:rPr>
+              <a:t>1</a:t>
+            </a:r>
+          </a:p>
+        </p:txBody>
+      </p:sp>
+      <p:sp>
+        <p:nvSpPr>
+          <p:cNvPr id="65" name="allocation-global-token-2">
+            <a:extLst xmlns:a="http://schemas.openxmlformats.org/drawingml/2006/main">
+              <a:ext uri="{FF2B5EF4-FFF2-40B4-BE49-F238E27FC236}">
+                <a16:creationId xmlns:a16="http://schemas.microsoft.com/office/drawing/2014/main" id="{94A0EB28-3EF3-48EA-B537-B1DE097F9191}"/>
+              </a:ext>
+            </a:extLst>
+          </p:cNvPr>
+          <p:cNvSpPr>
+            <a:spLocks xmlns:a="http://schemas.openxmlformats.org/drawingml/2006/main" noGrp="1"/>
+          </p:cNvSpPr>
+          <p:nvPr/>
+        </p:nvSpPr>
+        <p:spPr>
+          <a:xfrm xmlns:a="http://schemas.openxmlformats.org/drawingml/2006/main" rot="0">
+            <a:off x="7772400" y="2571750"/>
+            <a:ext cx="190500" cy="190500"/>
+          </a:xfrm>
+          <a:prstGeom xmlns:a="http://schemas.openxmlformats.org/drawingml/2006/main" prst="ellipse">
+            <a:avLst/>
+          </a:prstGeom>
+          <a:solidFill xmlns:a="http://schemas.openxmlformats.org/drawingml/2006/main">
+            <a:srgbClr val="257FA0"/>
           </a:solidFill>
           <a:ln xmlns:a="http://schemas.openxmlformats.org/drawingml/2006/main" w="7620">
             <a:solidFill>
@@ -3976,22 +4214,1771 @@
       </p:sp>
       <p:sp>
         <p:nvSpPr>
-          <p:cNvPr id="61" name="allocation-policy-order">
-            <a:extLst xmlns:a="http://schemas.openxmlformats.org/drawingml/2006/main">
-              <a:ext uri="{FF2B5EF4-FFF2-40B4-BE49-F238E27FC236}">
-                <a16:creationId xmlns:a16="http://schemas.microsoft.com/office/drawing/2014/main" id="{6D72293E-76CD-47D4-8BD7-0C26DADE316E}"/>
-              </a:ext>
-            </a:extLst>
-          </p:cNvPr>
-          <p:cNvSpPr>
-            <a:spLocks xmlns:a="http://schemas.openxmlformats.org/drawingml/2006/main" noGrp="1"/>
-          </p:cNvSpPr>
-          <p:nvPr/>
-        </p:nvSpPr>
-        <p:spPr>
-          <a:xfrm xmlns:a="http://schemas.openxmlformats.org/drawingml/2006/main" rot="0">
-            <a:off x="5486400" y="3133725"/>
-            <a:ext cx="1314450" cy="190500"/>
+          <p:cNvPr id="66" name="allocation-global-rank-2">
+            <a:extLst xmlns:a="http://schemas.openxmlformats.org/drawingml/2006/main">
+              <a:ext uri="{FF2B5EF4-FFF2-40B4-BE49-F238E27FC236}">
+                <a16:creationId xmlns:a16="http://schemas.microsoft.com/office/drawing/2014/main" id="{E533CC9A-0891-4129-8508-68FBE0AAEA2B}"/>
+              </a:ext>
+            </a:extLst>
+          </p:cNvPr>
+          <p:cNvSpPr>
+            <a:spLocks xmlns:a="http://schemas.openxmlformats.org/drawingml/2006/main" noGrp="1"/>
+          </p:cNvSpPr>
+          <p:nvPr/>
+        </p:nvSpPr>
+        <p:spPr>
+          <a:xfrm xmlns:a="http://schemas.openxmlformats.org/drawingml/2006/main" rot="0">
+            <a:off x="7772400" y="2819400"/>
+            <a:ext cx="190500" cy="190500"/>
+          </a:xfrm>
+          <a:prstGeom xmlns:a="http://schemas.openxmlformats.org/drawingml/2006/main" prst="rect">
+            <a:avLst/>
+          </a:prstGeom>
+          <a:noFill xmlns:a="http://schemas.openxmlformats.org/drawingml/2006/main"/>
+          <a:ln xmlns:a="http://schemas.openxmlformats.org/drawingml/2006/main" w="0">
+            <a:noFill/>
+            <a:prstDash val="solid"/>
+          </a:ln>
+        </p:spPr>
+        <p:txBody>
+          <a:bodyPr xmlns:a="http://schemas.openxmlformats.org/drawingml/2006/main" wrap="square" lIns="19050" tIns="9525" rIns="19050" bIns="9525" anchor="ctr">
+            <a:normAutofit fontScale="100000"/>
+          </a:bodyPr>
+          <a:lstStyle xmlns:a="http://schemas.openxmlformats.org/drawingml/2006/main"/>
+          <a:p xmlns:a="http://schemas.openxmlformats.org/drawingml/2006/main">
+            <a:pPr algn="ctr">
+              <a:defRPr sz="975" b="0">
+                <a:solidFill>
+                  <a:srgbClr val="637077"/>
+                </a:solidFill>
+                <a:latin typeface="Arial"/>
+                <a:ea typeface="Arial"/>
+                <a:cs typeface="Arial"/>
+              </a:defRPr>
+            </a:pPr>
+            <a:r>
+              <a:rPr sz="975" b="0">
+                <a:solidFill>
+                  <a:srgbClr val="637077"/>
+                </a:solidFill>
+                <a:latin typeface="Arial"/>
+                <a:ea typeface="Arial"/>
+                <a:cs typeface="Arial"/>
+              </a:rPr>
+              <a:t>2</a:t>
+            </a:r>
+          </a:p>
+        </p:txBody>
+      </p:sp>
+      <p:sp>
+        <p:nvSpPr>
+          <p:cNvPr id="67" name="allocation-global-token-3">
+            <a:extLst xmlns:a="http://schemas.openxmlformats.org/drawingml/2006/main">
+              <a:ext uri="{FF2B5EF4-FFF2-40B4-BE49-F238E27FC236}">
+                <a16:creationId xmlns:a16="http://schemas.microsoft.com/office/drawing/2014/main" id="{8843714A-A87C-4F37-B850-4F5CDA2EB740}"/>
+              </a:ext>
+            </a:extLst>
+          </p:cNvPr>
+          <p:cNvSpPr>
+            <a:spLocks xmlns:a="http://schemas.openxmlformats.org/drawingml/2006/main" noGrp="1"/>
+          </p:cNvSpPr>
+          <p:nvPr/>
+        </p:nvSpPr>
+        <p:spPr>
+          <a:xfrm xmlns:a="http://schemas.openxmlformats.org/drawingml/2006/main" rot="0">
+            <a:off x="8134350" y="2571750"/>
+            <a:ext cx="190500" cy="190500"/>
+          </a:xfrm>
+          <a:prstGeom xmlns:a="http://schemas.openxmlformats.org/drawingml/2006/main" prst="diamond">
+            <a:avLst/>
+          </a:prstGeom>
+          <a:solidFill xmlns:a="http://schemas.openxmlformats.org/drawingml/2006/main">
+            <a:srgbClr val="765A8D"/>
+          </a:solidFill>
+          <a:ln xmlns:a="http://schemas.openxmlformats.org/drawingml/2006/main" w="7620">
+            <a:solidFill>
+              <a:srgbClr val="26355F"/>
+            </a:solidFill>
+            <a:prstDash val="solid"/>
+          </a:ln>
+        </p:spPr>
+      </p:sp>
+      <p:sp>
+        <p:nvSpPr>
+          <p:cNvPr id="68" name="allocation-global-rank-3">
+            <a:extLst xmlns:a="http://schemas.openxmlformats.org/drawingml/2006/main">
+              <a:ext uri="{FF2B5EF4-FFF2-40B4-BE49-F238E27FC236}">
+                <a16:creationId xmlns:a16="http://schemas.microsoft.com/office/drawing/2014/main" id="{5B4E74E5-1B38-4E1A-8FEC-2AD88E3A2E88}"/>
+              </a:ext>
+            </a:extLst>
+          </p:cNvPr>
+          <p:cNvSpPr>
+            <a:spLocks xmlns:a="http://schemas.openxmlformats.org/drawingml/2006/main" noGrp="1"/>
+          </p:cNvSpPr>
+          <p:nvPr/>
+        </p:nvSpPr>
+        <p:spPr>
+          <a:xfrm xmlns:a="http://schemas.openxmlformats.org/drawingml/2006/main" rot="0">
+            <a:off x="8134350" y="2819400"/>
+            <a:ext cx="190500" cy="190500"/>
+          </a:xfrm>
+          <a:prstGeom xmlns:a="http://schemas.openxmlformats.org/drawingml/2006/main" prst="rect">
+            <a:avLst/>
+          </a:prstGeom>
+          <a:noFill xmlns:a="http://schemas.openxmlformats.org/drawingml/2006/main"/>
+          <a:ln xmlns:a="http://schemas.openxmlformats.org/drawingml/2006/main" w="0">
+            <a:noFill/>
+            <a:prstDash val="solid"/>
+          </a:ln>
+        </p:spPr>
+        <p:txBody>
+          <a:bodyPr xmlns:a="http://schemas.openxmlformats.org/drawingml/2006/main" wrap="square" lIns="19050" tIns="9525" rIns="19050" bIns="9525" anchor="ctr">
+            <a:normAutofit fontScale="100000"/>
+          </a:bodyPr>
+          <a:lstStyle xmlns:a="http://schemas.openxmlformats.org/drawingml/2006/main"/>
+          <a:p xmlns:a="http://schemas.openxmlformats.org/drawingml/2006/main">
+            <a:pPr algn="ctr">
+              <a:defRPr sz="975" b="0">
+                <a:solidFill>
+                  <a:srgbClr val="637077"/>
+                </a:solidFill>
+                <a:latin typeface="Arial"/>
+                <a:ea typeface="Arial"/>
+                <a:cs typeface="Arial"/>
+              </a:defRPr>
+            </a:pPr>
+            <a:r>
+              <a:rPr sz="975" b="0">
+                <a:solidFill>
+                  <a:srgbClr val="637077"/>
+                </a:solidFill>
+                <a:latin typeface="Arial"/>
+                <a:ea typeface="Arial"/>
+                <a:cs typeface="Arial"/>
+              </a:rPr>
+              <a:t>3</a:t>
+            </a:r>
+          </a:p>
+        </p:txBody>
+      </p:sp>
+      <p:sp>
+        <p:nvSpPr>
+          <p:cNvPr id="69" name="allocation-global-token-4">
+            <a:extLst xmlns:a="http://schemas.openxmlformats.org/drawingml/2006/main">
+              <a:ext uri="{FF2B5EF4-FFF2-40B4-BE49-F238E27FC236}">
+                <a16:creationId xmlns:a16="http://schemas.microsoft.com/office/drawing/2014/main" id="{884B9FCD-897A-4086-A81D-29E541FB4762}"/>
+              </a:ext>
+            </a:extLst>
+          </p:cNvPr>
+          <p:cNvSpPr>
+            <a:spLocks xmlns:a="http://schemas.openxmlformats.org/drawingml/2006/main" noGrp="1"/>
+          </p:cNvSpPr>
+          <p:nvPr/>
+        </p:nvSpPr>
+        <p:spPr>
+          <a:xfrm xmlns:a="http://schemas.openxmlformats.org/drawingml/2006/main" rot="0">
+            <a:off x="8496300" y="2571750"/>
+            <a:ext cx="190500" cy="190500"/>
+          </a:xfrm>
+          <a:prstGeom xmlns:a="http://schemas.openxmlformats.org/drawingml/2006/main" prst="rect">
+            <a:avLst/>
+          </a:prstGeom>
+          <a:solidFill xmlns:a="http://schemas.openxmlformats.org/drawingml/2006/main">
+            <a:srgbClr val="26355F"/>
+          </a:solidFill>
+          <a:ln xmlns:a="http://schemas.openxmlformats.org/drawingml/2006/main" w="0">
+            <a:noFill/>
+            <a:prstDash val="solid"/>
+          </a:ln>
+        </p:spPr>
+      </p:sp>
+      <p:sp>
+        <p:nvSpPr>
+          <p:cNvPr id="70" name="allocation-global-rank-4">
+            <a:extLst xmlns:a="http://schemas.openxmlformats.org/drawingml/2006/main">
+              <a:ext uri="{FF2B5EF4-FFF2-40B4-BE49-F238E27FC236}">
+                <a16:creationId xmlns:a16="http://schemas.microsoft.com/office/drawing/2014/main" id="{563CE6D6-515F-4916-9DA1-4D8CF328186F}"/>
+              </a:ext>
+            </a:extLst>
+          </p:cNvPr>
+          <p:cNvSpPr>
+            <a:spLocks xmlns:a="http://schemas.openxmlformats.org/drawingml/2006/main" noGrp="1"/>
+          </p:cNvSpPr>
+          <p:nvPr/>
+        </p:nvSpPr>
+        <p:spPr>
+          <a:xfrm xmlns:a="http://schemas.openxmlformats.org/drawingml/2006/main" rot="0">
+            <a:off x="8496300" y="2819400"/>
+            <a:ext cx="190500" cy="190500"/>
+          </a:xfrm>
+          <a:prstGeom xmlns:a="http://schemas.openxmlformats.org/drawingml/2006/main" prst="rect">
+            <a:avLst/>
+          </a:prstGeom>
+          <a:noFill xmlns:a="http://schemas.openxmlformats.org/drawingml/2006/main"/>
+          <a:ln xmlns:a="http://schemas.openxmlformats.org/drawingml/2006/main" w="0">
+            <a:noFill/>
+            <a:prstDash val="solid"/>
+          </a:ln>
+        </p:spPr>
+        <p:txBody>
+          <a:bodyPr xmlns:a="http://schemas.openxmlformats.org/drawingml/2006/main" wrap="square" lIns="19050" tIns="9525" rIns="19050" bIns="9525" anchor="ctr">
+            <a:normAutofit fontScale="100000"/>
+          </a:bodyPr>
+          <a:lstStyle xmlns:a="http://schemas.openxmlformats.org/drawingml/2006/main"/>
+          <a:p xmlns:a="http://schemas.openxmlformats.org/drawingml/2006/main">
+            <a:pPr algn="ctr">
+              <a:defRPr sz="975" b="0">
+                <a:solidFill>
+                  <a:srgbClr val="637077"/>
+                </a:solidFill>
+                <a:latin typeface="Arial"/>
+                <a:ea typeface="Arial"/>
+                <a:cs typeface="Arial"/>
+              </a:defRPr>
+            </a:pPr>
+            <a:r>
+              <a:rPr sz="975" b="0">
+                <a:solidFill>
+                  <a:srgbClr val="637077"/>
+                </a:solidFill>
+                <a:latin typeface="Arial"/>
+                <a:ea typeface="Arial"/>
+                <a:cs typeface="Arial"/>
+              </a:rPr>
+              <a:t>4</a:t>
+            </a:r>
+          </a:p>
+        </p:txBody>
+      </p:sp>
+      <p:sp>
+        <p:nvSpPr>
+          <p:cNvPr id="71" name="allocation-global-baseline">
+            <a:extLst xmlns:a="http://schemas.openxmlformats.org/drawingml/2006/main">
+              <a:ext uri="{FF2B5EF4-FFF2-40B4-BE49-F238E27FC236}">
+                <a16:creationId xmlns:a16="http://schemas.microsoft.com/office/drawing/2014/main" id="{758A3F6B-9281-4938-BA36-F2FB996E38B5}"/>
+              </a:ext>
+            </a:extLst>
+          </p:cNvPr>
+          <p:cNvSpPr>
+            <a:spLocks xmlns:a="http://schemas.openxmlformats.org/drawingml/2006/main" noGrp="1"/>
+          </p:cNvSpPr>
+          <p:nvPr/>
+        </p:nvSpPr>
+        <p:spPr>
+          <a:xfrm xmlns:a="http://schemas.openxmlformats.org/drawingml/2006/main" flipH="0" flipV="0">
+            <a:off x="7391400" y="3057525"/>
+            <a:ext cx="1428750" cy="9525"/>
+          </a:xfrm>
+          <a:prstGeom xmlns:a="http://schemas.openxmlformats.org/drawingml/2006/main" prst="line">
+            <a:avLst/>
+          </a:prstGeom>
+          <a:noFill xmlns:a="http://schemas.openxmlformats.org/drawingml/2006/main"/>
+          <a:ln xmlns:a="http://schemas.openxmlformats.org/drawingml/2006/main" w="11430">
+            <a:solidFill>
+              <a:srgbClr val="CAD3D4"/>
+            </a:solidFill>
+            <a:prstDash val="solid"/>
+          </a:ln>
+        </p:spPr>
+      </p:sp>
+      <p:sp>
+        <p:nvSpPr>
+          <p:cNvPr id="72" name="allocation-reserved-label">
+            <a:extLst xmlns:a="http://schemas.openxmlformats.org/drawingml/2006/main">
+              <a:ext uri="{FF2B5EF4-FFF2-40B4-BE49-F238E27FC236}">
+                <a16:creationId xmlns:a16="http://schemas.microsoft.com/office/drawing/2014/main" id="{240F3F7D-0EDC-4DCF-89C2-3DAB3ECE4018}"/>
+              </a:ext>
+            </a:extLst>
+          </p:cNvPr>
+          <p:cNvSpPr>
+            <a:spLocks xmlns:a="http://schemas.openxmlformats.org/drawingml/2006/main" noGrp="1"/>
+          </p:cNvSpPr>
+          <p:nvPr/>
+        </p:nvSpPr>
+        <p:spPr>
+          <a:xfrm xmlns:a="http://schemas.openxmlformats.org/drawingml/2006/main" rot="0">
+            <a:off x="5943600" y="3762375"/>
+            <a:ext cx="685800" cy="190500"/>
+          </a:xfrm>
+          <a:prstGeom xmlns:a="http://schemas.openxmlformats.org/drawingml/2006/main" prst="rect">
+            <a:avLst/>
+          </a:prstGeom>
+          <a:noFill xmlns:a="http://schemas.openxmlformats.org/drawingml/2006/main"/>
+          <a:ln xmlns:a="http://schemas.openxmlformats.org/drawingml/2006/main" w="0">
+            <a:noFill/>
+            <a:prstDash val="solid"/>
+          </a:ln>
+        </p:spPr>
+        <p:txBody>
+          <a:bodyPr xmlns:a="http://schemas.openxmlformats.org/drawingml/2006/main" wrap="square" lIns="19050" tIns="9525" rIns="19050" bIns="9525" anchor="ctr">
+            <a:normAutofit fontScale="100000"/>
+          </a:bodyPr>
+          <a:lstStyle xmlns:a="http://schemas.openxmlformats.org/drawingml/2006/main"/>
+          <a:p xmlns:a="http://schemas.openxmlformats.org/drawingml/2006/main">
+            <a:pPr algn="ctr">
+              <a:defRPr sz="1050" b="1">
+                <a:solidFill>
+                  <a:srgbClr val="26785F"/>
+                </a:solidFill>
+                <a:latin typeface="Arial"/>
+                <a:ea typeface="Arial"/>
+                <a:cs typeface="Arial"/>
+              </a:defRPr>
+            </a:pPr>
+            <a:r>
+              <a:rPr sz="1050" b="1">
+                <a:solidFill>
+                  <a:srgbClr val="26785F"/>
+                </a:solidFill>
+                <a:latin typeface="Arial"/>
+                <a:ea typeface="Arial"/>
+                <a:cs typeface="Arial"/>
+              </a:rPr>
+              <a:t>Reserved</a:t>
+            </a:r>
+          </a:p>
+        </p:txBody>
+      </p:sp>
+      <p:sp>
+        <p:nvSpPr>
+          <p:cNvPr id="73" name="allocation-fill-label">
+            <a:extLst xmlns:a="http://schemas.openxmlformats.org/drawingml/2006/main">
+              <a:ext uri="{FF2B5EF4-FFF2-40B4-BE49-F238E27FC236}">
+                <a16:creationId xmlns:a16="http://schemas.microsoft.com/office/drawing/2014/main" id="{C3043E8A-B087-4BE9-B773-966B9315F22F}"/>
+              </a:ext>
+            </a:extLst>
+          </p:cNvPr>
+          <p:cNvSpPr>
+            <a:spLocks xmlns:a="http://schemas.openxmlformats.org/drawingml/2006/main" noGrp="1"/>
+          </p:cNvSpPr>
+          <p:nvPr/>
+        </p:nvSpPr>
+        <p:spPr>
+          <a:xfrm xmlns:a="http://schemas.openxmlformats.org/drawingml/2006/main" rot="0">
+            <a:off x="7677150" y="3762375"/>
+            <a:ext cx="876300" cy="190500"/>
+          </a:xfrm>
+          <a:prstGeom xmlns:a="http://schemas.openxmlformats.org/drawingml/2006/main" prst="rect">
+            <a:avLst/>
+          </a:prstGeom>
+          <a:noFill xmlns:a="http://schemas.openxmlformats.org/drawingml/2006/main"/>
+          <a:ln xmlns:a="http://schemas.openxmlformats.org/drawingml/2006/main" w="0">
+            <a:noFill/>
+            <a:prstDash val="solid"/>
+          </a:ln>
+        </p:spPr>
+        <p:txBody>
+          <a:bodyPr xmlns:a="http://schemas.openxmlformats.org/drawingml/2006/main" wrap="square" lIns="19050" tIns="9525" rIns="19050" bIns="9525" anchor="ctr">
+            <a:normAutofit fontScale="100000"/>
+          </a:bodyPr>
+          <a:lstStyle xmlns:a="http://schemas.openxmlformats.org/drawingml/2006/main"/>
+          <a:p xmlns:a="http://schemas.openxmlformats.org/drawingml/2006/main">
+            <a:pPr algn="ctr">
+              <a:defRPr sz="1050" b="1">
+                <a:solidFill>
+                  <a:srgbClr val="26355F"/>
+                </a:solidFill>
+                <a:latin typeface="Arial"/>
+                <a:ea typeface="Arial"/>
+                <a:cs typeface="Arial"/>
+              </a:defRPr>
+            </a:pPr>
+            <a:r>
+              <a:rPr sz="1050" b="1">
+                <a:solidFill>
+                  <a:srgbClr val="26355F"/>
+                </a:solidFill>
+                <a:latin typeface="Arial"/>
+                <a:ea typeface="Arial"/>
+                <a:cs typeface="Arial"/>
+              </a:rPr>
+              <a:t>Global fill</a:t>
+            </a:r>
+          </a:p>
+        </p:txBody>
+      </p:sp>
+      <p:sp>
+        <p:nvSpPr>
+          <p:cNvPr id="74" name="allocation-slot-1">
+            <a:extLst xmlns:a="http://schemas.openxmlformats.org/drawingml/2006/main">
+              <a:ext uri="{FF2B5EF4-FFF2-40B4-BE49-F238E27FC236}">
+                <a16:creationId xmlns:a16="http://schemas.microsoft.com/office/drawing/2014/main" id="{6F1449A1-8B7C-4F33-A03E-5CE1806A3277}"/>
+              </a:ext>
+            </a:extLst>
+          </p:cNvPr>
+          <p:cNvSpPr>
+            <a:spLocks xmlns:a="http://schemas.openxmlformats.org/drawingml/2006/main" noGrp="1"/>
+          </p:cNvSpPr>
+          <p:nvPr/>
+        </p:nvSpPr>
+        <p:spPr>
+          <a:xfrm xmlns:a="http://schemas.openxmlformats.org/drawingml/2006/main" rot="0">
+            <a:off x="5791200" y="4010025"/>
+            <a:ext cx="352425" cy="438150"/>
+          </a:xfrm>
+          <a:prstGeom xmlns:a="http://schemas.openxmlformats.org/drawingml/2006/main" prst="rect">
+            <a:avLst/>
+          </a:prstGeom>
+          <a:solidFill xmlns:a="http://schemas.openxmlformats.org/drawingml/2006/main">
+            <a:srgbClr val="E6F1EB"/>
+          </a:solidFill>
+          <a:ln xmlns:a="http://schemas.openxmlformats.org/drawingml/2006/main" w="12383">
+            <a:solidFill>
+              <a:srgbClr val="26785F"/>
+            </a:solidFill>
+            <a:prstDash val="solid"/>
+          </a:ln>
+        </p:spPr>
+      </p:sp>
+      <p:sp>
+        <p:nvSpPr>
+          <p:cNvPr id="75" name="allocation-slot-token-1">
+            <a:extLst xmlns:a="http://schemas.openxmlformats.org/drawingml/2006/main">
+              <a:ext uri="{FF2B5EF4-FFF2-40B4-BE49-F238E27FC236}">
+                <a16:creationId xmlns:a16="http://schemas.microsoft.com/office/drawing/2014/main" id="{2EACFC8C-09D5-4766-99EF-667849A745C4}"/>
+              </a:ext>
+            </a:extLst>
+          </p:cNvPr>
+          <p:cNvSpPr>
+            <a:spLocks xmlns:a="http://schemas.openxmlformats.org/drawingml/2006/main" noGrp="1"/>
+          </p:cNvSpPr>
+          <p:nvPr/>
+        </p:nvSpPr>
+        <p:spPr>
+          <a:xfrm xmlns:a="http://schemas.openxmlformats.org/drawingml/2006/main" rot="0">
+            <a:off x="5876925" y="4143375"/>
+            <a:ext cx="171450" cy="171450"/>
+          </a:xfrm>
+          <a:prstGeom xmlns:a="http://schemas.openxmlformats.org/drawingml/2006/main" prst="ellipse">
+            <a:avLst/>
+          </a:prstGeom>
+          <a:solidFill xmlns:a="http://schemas.openxmlformats.org/drawingml/2006/main">
+            <a:srgbClr val="257FA0"/>
+          </a:solidFill>
+          <a:ln xmlns:a="http://schemas.openxmlformats.org/drawingml/2006/main" w="7620">
+            <a:solidFill>
+              <a:srgbClr val="26355F"/>
+            </a:solidFill>
+            <a:prstDash val="solid"/>
+          </a:ln>
+        </p:spPr>
+      </p:sp>
+      <p:sp>
+        <p:nvSpPr>
+          <p:cNvPr id="76" name="allocation-slot-2">
+            <a:extLst xmlns:a="http://schemas.openxmlformats.org/drawingml/2006/main">
+              <a:ext uri="{FF2B5EF4-FFF2-40B4-BE49-F238E27FC236}">
+                <a16:creationId xmlns:a16="http://schemas.microsoft.com/office/drawing/2014/main" id="{13ABACCC-741B-4C85-ADD5-8DC9E7C6C8CB}"/>
+              </a:ext>
+            </a:extLst>
+          </p:cNvPr>
+          <p:cNvSpPr>
+            <a:spLocks xmlns:a="http://schemas.openxmlformats.org/drawingml/2006/main" noGrp="1"/>
+          </p:cNvSpPr>
+          <p:nvPr/>
+        </p:nvSpPr>
+        <p:spPr>
+          <a:xfrm xmlns:a="http://schemas.openxmlformats.org/drawingml/2006/main" rot="0">
+            <a:off x="6162675" y="4010025"/>
+            <a:ext cx="352425" cy="438150"/>
+          </a:xfrm>
+          <a:prstGeom xmlns:a="http://schemas.openxmlformats.org/drawingml/2006/main" prst="rect">
+            <a:avLst/>
+          </a:prstGeom>
+          <a:solidFill xmlns:a="http://schemas.openxmlformats.org/drawingml/2006/main">
+            <a:srgbClr val="E6F1EB"/>
+          </a:solidFill>
+          <a:ln xmlns:a="http://schemas.openxmlformats.org/drawingml/2006/main" w="12383">
+            <a:solidFill>
+              <a:srgbClr val="26785F"/>
+            </a:solidFill>
+            <a:prstDash val="solid"/>
+          </a:ln>
+        </p:spPr>
+      </p:sp>
+      <p:sp>
+        <p:nvSpPr>
+          <p:cNvPr id="77" name="allocation-slot-token-2">
+            <a:extLst xmlns:a="http://schemas.openxmlformats.org/drawingml/2006/main">
+              <a:ext uri="{FF2B5EF4-FFF2-40B4-BE49-F238E27FC236}">
+                <a16:creationId xmlns:a16="http://schemas.microsoft.com/office/drawing/2014/main" id="{C384AEE4-7F8C-4F76-9E2B-C9EB12453C7A}"/>
+              </a:ext>
+            </a:extLst>
+          </p:cNvPr>
+          <p:cNvSpPr>
+            <a:spLocks xmlns:a="http://schemas.openxmlformats.org/drawingml/2006/main" noGrp="1"/>
+          </p:cNvSpPr>
+          <p:nvPr/>
+        </p:nvSpPr>
+        <p:spPr>
+          <a:xfrm xmlns:a="http://schemas.openxmlformats.org/drawingml/2006/main" rot="0">
+            <a:off x="6248400" y="4143375"/>
+            <a:ext cx="171450" cy="171450"/>
+          </a:xfrm>
+          <a:prstGeom xmlns:a="http://schemas.openxmlformats.org/drawingml/2006/main" prst="diamond">
+            <a:avLst/>
+          </a:prstGeom>
+          <a:solidFill xmlns:a="http://schemas.openxmlformats.org/drawingml/2006/main">
+            <a:srgbClr val="765A8D"/>
+          </a:solidFill>
+          <a:ln xmlns:a="http://schemas.openxmlformats.org/drawingml/2006/main" w="7620">
+            <a:solidFill>
+              <a:srgbClr val="26355F"/>
+            </a:solidFill>
+            <a:prstDash val="solid"/>
+          </a:ln>
+        </p:spPr>
+      </p:sp>
+      <p:sp>
+        <p:nvSpPr>
+          <p:cNvPr id="78" name="allocation-slot-3">
+            <a:extLst xmlns:a="http://schemas.openxmlformats.org/drawingml/2006/main">
+              <a:ext uri="{FF2B5EF4-FFF2-40B4-BE49-F238E27FC236}">
+                <a16:creationId xmlns:a16="http://schemas.microsoft.com/office/drawing/2014/main" id="{35979F46-CD22-4D0D-A24A-AE93B19F5E6D}"/>
+              </a:ext>
+            </a:extLst>
+          </p:cNvPr>
+          <p:cNvSpPr>
+            <a:spLocks xmlns:a="http://schemas.openxmlformats.org/drawingml/2006/main" noGrp="1"/>
+          </p:cNvSpPr>
+          <p:nvPr/>
+        </p:nvSpPr>
+        <p:spPr>
+          <a:xfrm xmlns:a="http://schemas.openxmlformats.org/drawingml/2006/main" rot="0">
+            <a:off x="6534150" y="4010025"/>
+            <a:ext cx="352425" cy="438150"/>
+          </a:xfrm>
+          <a:prstGeom xmlns:a="http://schemas.openxmlformats.org/drawingml/2006/main" prst="rect">
+            <a:avLst/>
+          </a:prstGeom>
+          <a:solidFill xmlns:a="http://schemas.openxmlformats.org/drawingml/2006/main">
+            <a:srgbClr val="FFFFFF"/>
+          </a:solidFill>
+          <a:ln xmlns:a="http://schemas.openxmlformats.org/drawingml/2006/main" w="12383">
+            <a:solidFill>
+              <a:srgbClr val="26355F"/>
+            </a:solidFill>
+            <a:prstDash val="solid"/>
+          </a:ln>
+        </p:spPr>
+      </p:sp>
+      <p:sp>
+        <p:nvSpPr>
+          <p:cNvPr id="79" name="allocation-slot-token-3">
+            <a:extLst xmlns:a="http://schemas.openxmlformats.org/drawingml/2006/main">
+              <a:ext uri="{FF2B5EF4-FFF2-40B4-BE49-F238E27FC236}">
+                <a16:creationId xmlns:a16="http://schemas.microsoft.com/office/drawing/2014/main" id="{8D36BC9F-C4B2-4D0A-9F63-3183E4149695}"/>
+              </a:ext>
+            </a:extLst>
+          </p:cNvPr>
+          <p:cNvSpPr>
+            <a:spLocks xmlns:a="http://schemas.openxmlformats.org/drawingml/2006/main" noGrp="1"/>
+          </p:cNvSpPr>
+          <p:nvPr/>
+        </p:nvSpPr>
+        <p:spPr>
+          <a:xfrm xmlns:a="http://schemas.openxmlformats.org/drawingml/2006/main" rot="0">
+            <a:off x="6619875" y="4143375"/>
+            <a:ext cx="171450" cy="171450"/>
+          </a:xfrm>
+          <a:prstGeom xmlns:a="http://schemas.openxmlformats.org/drawingml/2006/main" prst="rect">
+            <a:avLst/>
+          </a:prstGeom>
+          <a:solidFill xmlns:a="http://schemas.openxmlformats.org/drawingml/2006/main">
+            <a:srgbClr val="26355F"/>
+          </a:solidFill>
+          <a:ln xmlns:a="http://schemas.openxmlformats.org/drawingml/2006/main" w="0">
+            <a:noFill/>
+            <a:prstDash val="solid"/>
+          </a:ln>
+        </p:spPr>
+      </p:sp>
+      <p:sp>
+        <p:nvSpPr>
+          <p:cNvPr id="80" name="allocation-slot-4">
+            <a:extLst xmlns:a="http://schemas.openxmlformats.org/drawingml/2006/main">
+              <a:ext uri="{FF2B5EF4-FFF2-40B4-BE49-F238E27FC236}">
+                <a16:creationId xmlns:a16="http://schemas.microsoft.com/office/drawing/2014/main" id="{D357C4E9-4BE7-4CC9-AE18-166D65676EAB}"/>
+              </a:ext>
+            </a:extLst>
+          </p:cNvPr>
+          <p:cNvSpPr>
+            <a:spLocks xmlns:a="http://schemas.openxmlformats.org/drawingml/2006/main" noGrp="1"/>
+          </p:cNvSpPr>
+          <p:nvPr/>
+        </p:nvSpPr>
+        <p:spPr>
+          <a:xfrm xmlns:a="http://schemas.openxmlformats.org/drawingml/2006/main" rot="0">
+            <a:off x="6905625" y="4010025"/>
+            <a:ext cx="352425" cy="438150"/>
+          </a:xfrm>
+          <a:prstGeom xmlns:a="http://schemas.openxmlformats.org/drawingml/2006/main" prst="rect">
+            <a:avLst/>
+          </a:prstGeom>
+          <a:solidFill xmlns:a="http://schemas.openxmlformats.org/drawingml/2006/main">
+            <a:srgbClr val="FFFFFF"/>
+          </a:solidFill>
+          <a:ln xmlns:a="http://schemas.openxmlformats.org/drawingml/2006/main" w="12383">
+            <a:solidFill>
+              <a:srgbClr val="26355F"/>
+            </a:solidFill>
+            <a:prstDash val="solid"/>
+          </a:ln>
+        </p:spPr>
+      </p:sp>
+      <p:sp>
+        <p:nvSpPr>
+          <p:cNvPr id="81" name="allocation-slot-token-4">
+            <a:extLst xmlns:a="http://schemas.openxmlformats.org/drawingml/2006/main">
+              <a:ext uri="{FF2B5EF4-FFF2-40B4-BE49-F238E27FC236}">
+                <a16:creationId xmlns:a16="http://schemas.microsoft.com/office/drawing/2014/main" id="{57C8770D-8443-45EE-8350-0EF250069507}"/>
+              </a:ext>
+            </a:extLst>
+          </p:cNvPr>
+          <p:cNvSpPr>
+            <a:spLocks xmlns:a="http://schemas.openxmlformats.org/drawingml/2006/main" noGrp="1"/>
+          </p:cNvSpPr>
+          <p:nvPr/>
+        </p:nvSpPr>
+        <p:spPr>
+          <a:xfrm xmlns:a="http://schemas.openxmlformats.org/drawingml/2006/main" rot="0">
+            <a:off x="6991350" y="4143375"/>
+            <a:ext cx="171450" cy="171450"/>
+          </a:xfrm>
+          <a:prstGeom xmlns:a="http://schemas.openxmlformats.org/drawingml/2006/main" prst="ellipse">
+            <a:avLst/>
+          </a:prstGeom>
+          <a:solidFill xmlns:a="http://schemas.openxmlformats.org/drawingml/2006/main">
+            <a:srgbClr val="257FA0"/>
+          </a:solidFill>
+          <a:ln xmlns:a="http://schemas.openxmlformats.org/drawingml/2006/main" w="7620">
+            <a:solidFill>
+              <a:srgbClr val="26355F"/>
+            </a:solidFill>
+            <a:prstDash val="solid"/>
+          </a:ln>
+        </p:spPr>
+      </p:sp>
+      <p:sp>
+        <p:nvSpPr>
+          <p:cNvPr id="82" name="allocation-slot-5">
+            <a:extLst xmlns:a="http://schemas.openxmlformats.org/drawingml/2006/main">
+              <a:ext uri="{FF2B5EF4-FFF2-40B4-BE49-F238E27FC236}">
+                <a16:creationId xmlns:a16="http://schemas.microsoft.com/office/drawing/2014/main" id="{1C77590E-EBA8-4826-8B07-2AC3FF73A9FE}"/>
+              </a:ext>
+            </a:extLst>
+          </p:cNvPr>
+          <p:cNvSpPr>
+            <a:spLocks xmlns:a="http://schemas.openxmlformats.org/drawingml/2006/main" noGrp="1"/>
+          </p:cNvSpPr>
+          <p:nvPr/>
+        </p:nvSpPr>
+        <p:spPr>
+          <a:xfrm xmlns:a="http://schemas.openxmlformats.org/drawingml/2006/main" rot="0">
+            <a:off x="7277100" y="4010025"/>
+            <a:ext cx="352425" cy="438150"/>
+          </a:xfrm>
+          <a:prstGeom xmlns:a="http://schemas.openxmlformats.org/drawingml/2006/main" prst="rect">
+            <a:avLst/>
+          </a:prstGeom>
+          <a:solidFill xmlns:a="http://schemas.openxmlformats.org/drawingml/2006/main">
+            <a:srgbClr val="FFFFFF"/>
+          </a:solidFill>
+          <a:ln xmlns:a="http://schemas.openxmlformats.org/drawingml/2006/main" w="12383">
+            <a:solidFill>
+              <a:srgbClr val="26355F"/>
+            </a:solidFill>
+            <a:prstDash val="solid"/>
+          </a:ln>
+        </p:spPr>
+      </p:sp>
+      <p:sp>
+        <p:nvSpPr>
+          <p:cNvPr id="83" name="allocation-slot-token-5">
+            <a:extLst xmlns:a="http://schemas.openxmlformats.org/drawingml/2006/main">
+              <a:ext uri="{FF2B5EF4-FFF2-40B4-BE49-F238E27FC236}">
+                <a16:creationId xmlns:a16="http://schemas.microsoft.com/office/drawing/2014/main" id="{4B3BDCF9-3859-474C-8A3F-F0D2316D7BCD}"/>
+              </a:ext>
+            </a:extLst>
+          </p:cNvPr>
+          <p:cNvSpPr>
+            <a:spLocks xmlns:a="http://schemas.openxmlformats.org/drawingml/2006/main" noGrp="1"/>
+          </p:cNvSpPr>
+          <p:nvPr/>
+        </p:nvSpPr>
+        <p:spPr>
+          <a:xfrm xmlns:a="http://schemas.openxmlformats.org/drawingml/2006/main" rot="0">
+            <a:off x="7362825" y="4143375"/>
+            <a:ext cx="171450" cy="171450"/>
+          </a:xfrm>
+          <a:prstGeom xmlns:a="http://schemas.openxmlformats.org/drawingml/2006/main" prst="rect">
+            <a:avLst/>
+          </a:prstGeom>
+          <a:solidFill xmlns:a="http://schemas.openxmlformats.org/drawingml/2006/main">
+            <a:srgbClr val="26355F"/>
+          </a:solidFill>
+          <a:ln xmlns:a="http://schemas.openxmlformats.org/drawingml/2006/main" w="0">
+            <a:noFill/>
+            <a:prstDash val="solid"/>
+          </a:ln>
+        </p:spPr>
+      </p:sp>
+      <p:sp>
+        <p:nvSpPr>
+          <p:cNvPr id="84" name="allocation-slot-6">
+            <a:extLst xmlns:a="http://schemas.openxmlformats.org/drawingml/2006/main">
+              <a:ext uri="{FF2B5EF4-FFF2-40B4-BE49-F238E27FC236}">
+                <a16:creationId xmlns:a16="http://schemas.microsoft.com/office/drawing/2014/main" id="{67175579-6838-475D-B49C-92BF3AD59213}"/>
+              </a:ext>
+            </a:extLst>
+          </p:cNvPr>
+          <p:cNvSpPr>
+            <a:spLocks xmlns:a="http://schemas.openxmlformats.org/drawingml/2006/main" noGrp="1"/>
+          </p:cNvSpPr>
+          <p:nvPr/>
+        </p:nvSpPr>
+        <p:spPr>
+          <a:xfrm xmlns:a="http://schemas.openxmlformats.org/drawingml/2006/main" rot="0">
+            <a:off x="7648575" y="4010025"/>
+            <a:ext cx="352425" cy="438150"/>
+          </a:xfrm>
+          <a:prstGeom xmlns:a="http://schemas.openxmlformats.org/drawingml/2006/main" prst="rect">
+            <a:avLst/>
+          </a:prstGeom>
+          <a:solidFill xmlns:a="http://schemas.openxmlformats.org/drawingml/2006/main">
+            <a:srgbClr val="FFFFFF"/>
+          </a:solidFill>
+          <a:ln xmlns:a="http://schemas.openxmlformats.org/drawingml/2006/main" w="12383">
+            <a:solidFill>
+              <a:srgbClr val="26355F"/>
+            </a:solidFill>
+            <a:prstDash val="solid"/>
+          </a:ln>
+        </p:spPr>
+      </p:sp>
+      <p:sp>
+        <p:nvSpPr>
+          <p:cNvPr id="85" name="allocation-slot-token-6">
+            <a:extLst xmlns:a="http://schemas.openxmlformats.org/drawingml/2006/main">
+              <a:ext uri="{FF2B5EF4-FFF2-40B4-BE49-F238E27FC236}">
+                <a16:creationId xmlns:a16="http://schemas.microsoft.com/office/drawing/2014/main" id="{2EB7DC57-460D-456D-9765-99A7DA53161A}"/>
+              </a:ext>
+            </a:extLst>
+          </p:cNvPr>
+          <p:cNvSpPr>
+            <a:spLocks xmlns:a="http://schemas.openxmlformats.org/drawingml/2006/main" noGrp="1"/>
+          </p:cNvSpPr>
+          <p:nvPr/>
+        </p:nvSpPr>
+        <p:spPr>
+          <a:xfrm xmlns:a="http://schemas.openxmlformats.org/drawingml/2006/main" rot="0">
+            <a:off x="7734300" y="4143375"/>
+            <a:ext cx="171450" cy="171450"/>
+          </a:xfrm>
+          <a:prstGeom xmlns:a="http://schemas.openxmlformats.org/drawingml/2006/main" prst="ellipse">
+            <a:avLst/>
+          </a:prstGeom>
+          <a:solidFill xmlns:a="http://schemas.openxmlformats.org/drawingml/2006/main">
+            <a:srgbClr val="257FA0"/>
+          </a:solidFill>
+          <a:ln xmlns:a="http://schemas.openxmlformats.org/drawingml/2006/main" w="7620">
+            <a:solidFill>
+              <a:srgbClr val="26355F"/>
+            </a:solidFill>
+            <a:prstDash val="solid"/>
+          </a:ln>
+        </p:spPr>
+      </p:sp>
+      <p:sp>
+        <p:nvSpPr>
+          <p:cNvPr id="86" name="allocation-slot-7">
+            <a:extLst xmlns:a="http://schemas.openxmlformats.org/drawingml/2006/main">
+              <a:ext uri="{FF2B5EF4-FFF2-40B4-BE49-F238E27FC236}">
+                <a16:creationId xmlns:a16="http://schemas.microsoft.com/office/drawing/2014/main" id="{627142AD-112F-4A98-994D-59A7F2376E28}"/>
+              </a:ext>
+            </a:extLst>
+          </p:cNvPr>
+          <p:cNvSpPr>
+            <a:spLocks xmlns:a="http://schemas.openxmlformats.org/drawingml/2006/main" noGrp="1"/>
+          </p:cNvSpPr>
+          <p:nvPr/>
+        </p:nvSpPr>
+        <p:spPr>
+          <a:xfrm xmlns:a="http://schemas.openxmlformats.org/drawingml/2006/main" rot="0">
+            <a:off x="8020050" y="4010025"/>
+            <a:ext cx="352425" cy="438150"/>
+          </a:xfrm>
+          <a:prstGeom xmlns:a="http://schemas.openxmlformats.org/drawingml/2006/main" prst="rect">
+            <a:avLst/>
+          </a:prstGeom>
+          <a:solidFill xmlns:a="http://schemas.openxmlformats.org/drawingml/2006/main">
+            <a:srgbClr val="FFFFFF"/>
+          </a:solidFill>
+          <a:ln xmlns:a="http://schemas.openxmlformats.org/drawingml/2006/main" w="12383">
+            <a:solidFill>
+              <a:srgbClr val="26355F"/>
+            </a:solidFill>
+            <a:prstDash val="solid"/>
+          </a:ln>
+        </p:spPr>
+      </p:sp>
+      <p:sp>
+        <p:nvSpPr>
+          <p:cNvPr id="87" name="allocation-slot-token-7">
+            <a:extLst xmlns:a="http://schemas.openxmlformats.org/drawingml/2006/main">
+              <a:ext uri="{FF2B5EF4-FFF2-40B4-BE49-F238E27FC236}">
+                <a16:creationId xmlns:a16="http://schemas.microsoft.com/office/drawing/2014/main" id="{B0CABDE5-81A4-4AF5-BECD-47C13029B268}"/>
+              </a:ext>
+            </a:extLst>
+          </p:cNvPr>
+          <p:cNvSpPr>
+            <a:spLocks xmlns:a="http://schemas.openxmlformats.org/drawingml/2006/main" noGrp="1"/>
+          </p:cNvSpPr>
+          <p:nvPr/>
+        </p:nvSpPr>
+        <p:spPr>
+          <a:xfrm xmlns:a="http://schemas.openxmlformats.org/drawingml/2006/main" rot="0">
+            <a:off x="8105775" y="4143375"/>
+            <a:ext cx="171450" cy="171450"/>
+          </a:xfrm>
+          <a:prstGeom xmlns:a="http://schemas.openxmlformats.org/drawingml/2006/main" prst="diamond">
+            <a:avLst/>
+          </a:prstGeom>
+          <a:solidFill xmlns:a="http://schemas.openxmlformats.org/drawingml/2006/main">
+            <a:srgbClr val="765A8D"/>
+          </a:solidFill>
+          <a:ln xmlns:a="http://schemas.openxmlformats.org/drawingml/2006/main" w="7620">
+            <a:solidFill>
+              <a:srgbClr val="26355F"/>
+            </a:solidFill>
+            <a:prstDash val="solid"/>
+          </a:ln>
+        </p:spPr>
+      </p:sp>
+      <p:sp>
+        <p:nvSpPr>
+          <p:cNvPr id="88" name="allocation-slot-8">
+            <a:extLst xmlns:a="http://schemas.openxmlformats.org/drawingml/2006/main">
+              <a:ext uri="{FF2B5EF4-FFF2-40B4-BE49-F238E27FC236}">
+                <a16:creationId xmlns:a16="http://schemas.microsoft.com/office/drawing/2014/main" id="{AD3FB3D6-34AF-45CF-AD65-5A2BEC891322}"/>
+              </a:ext>
+            </a:extLst>
+          </p:cNvPr>
+          <p:cNvSpPr>
+            <a:spLocks xmlns:a="http://schemas.openxmlformats.org/drawingml/2006/main" noGrp="1"/>
+          </p:cNvSpPr>
+          <p:nvPr/>
+        </p:nvSpPr>
+        <p:spPr>
+          <a:xfrm xmlns:a="http://schemas.openxmlformats.org/drawingml/2006/main" rot="0">
+            <a:off x="8391525" y="4010025"/>
+            <a:ext cx="352425" cy="438150"/>
+          </a:xfrm>
+          <a:prstGeom xmlns:a="http://schemas.openxmlformats.org/drawingml/2006/main" prst="rect">
+            <a:avLst/>
+          </a:prstGeom>
+          <a:solidFill xmlns:a="http://schemas.openxmlformats.org/drawingml/2006/main">
+            <a:srgbClr val="FFFFFF"/>
+          </a:solidFill>
+          <a:ln xmlns:a="http://schemas.openxmlformats.org/drawingml/2006/main" w="12383">
+            <a:solidFill>
+              <a:srgbClr val="26355F"/>
+            </a:solidFill>
+            <a:prstDash val="solid"/>
+          </a:ln>
+        </p:spPr>
+      </p:sp>
+      <p:sp>
+        <p:nvSpPr>
+          <p:cNvPr id="89" name="allocation-slot-token-8">
+            <a:extLst xmlns:a="http://schemas.openxmlformats.org/drawingml/2006/main">
+              <a:ext uri="{FF2B5EF4-FFF2-40B4-BE49-F238E27FC236}">
+                <a16:creationId xmlns:a16="http://schemas.microsoft.com/office/drawing/2014/main" id="{B37E2303-ADBA-405B-954C-8596A572D062}"/>
+              </a:ext>
+            </a:extLst>
+          </p:cNvPr>
+          <p:cNvSpPr>
+            <a:spLocks xmlns:a="http://schemas.openxmlformats.org/drawingml/2006/main" noGrp="1"/>
+          </p:cNvSpPr>
+          <p:nvPr/>
+        </p:nvSpPr>
+        <p:spPr>
+          <a:xfrm xmlns:a="http://schemas.openxmlformats.org/drawingml/2006/main" rot="0">
+            <a:off x="8477250" y="4143375"/>
+            <a:ext cx="171450" cy="171450"/>
+          </a:xfrm>
+          <a:prstGeom xmlns:a="http://schemas.openxmlformats.org/drawingml/2006/main" prst="rect">
+            <a:avLst/>
+          </a:prstGeom>
+          <a:solidFill xmlns:a="http://schemas.openxmlformats.org/drawingml/2006/main">
+            <a:srgbClr val="26355F"/>
+          </a:solidFill>
+          <a:ln xmlns:a="http://schemas.openxmlformats.org/drawingml/2006/main" w="0">
+            <a:noFill/>
+            <a:prstDash val="solid"/>
+          </a:ln>
+        </p:spPr>
+      </p:sp>
+      <p:sp>
+        <p:nvSpPr>
+          <p:cNvPr id="90" name="allocation-capacity-bracket">
+            <a:extLst xmlns:a="http://schemas.openxmlformats.org/drawingml/2006/main">
+              <a:ext uri="{FF2B5EF4-FFF2-40B4-BE49-F238E27FC236}">
+                <a16:creationId xmlns:a16="http://schemas.microsoft.com/office/drawing/2014/main" id="{F5375C51-65A3-4988-BB19-B6BFDA211261}"/>
+              </a:ext>
+            </a:extLst>
+          </p:cNvPr>
+          <p:cNvSpPr>
+            <a:spLocks xmlns:a="http://schemas.openxmlformats.org/drawingml/2006/main" noGrp="1"/>
+          </p:cNvSpPr>
+          <p:nvPr/>
+        </p:nvSpPr>
+        <p:spPr>
+          <a:xfrm xmlns:a="http://schemas.openxmlformats.org/drawingml/2006/main" flipH="0" flipV="0">
+            <a:off x="5791200" y="4552950"/>
+            <a:ext cx="2943225" cy="9525"/>
+          </a:xfrm>
+          <a:prstGeom xmlns:a="http://schemas.openxmlformats.org/drawingml/2006/main" prst="line">
+            <a:avLst/>
+          </a:prstGeom>
+          <a:noFill xmlns:a="http://schemas.openxmlformats.org/drawingml/2006/main"/>
+          <a:ln xmlns:a="http://schemas.openxmlformats.org/drawingml/2006/main" w="13335">
+            <a:solidFill>
+              <a:srgbClr val="26355F"/>
+            </a:solidFill>
+            <a:prstDash val="solid"/>
+          </a:ln>
+        </p:spPr>
+      </p:sp>
+      <p:sp>
+        <p:nvSpPr>
+          <p:cNvPr id="91" name="">
+            <a:extLst xmlns:a="http://schemas.openxmlformats.org/drawingml/2006/main">
+              <a:ext uri="{FF2B5EF4-FFF2-40B4-BE49-F238E27FC236}">
+                <a16:creationId xmlns:a16="http://schemas.microsoft.com/office/drawing/2014/main" id="{19E7BCF8-C883-470A-8B59-A879FBD4D8BB}"/>
+              </a:ext>
+            </a:extLst>
+          </p:cNvPr>
+          <p:cNvSpPr>
+            <a:spLocks xmlns:a="http://schemas.openxmlformats.org/drawingml/2006/main" noGrp="1"/>
+          </p:cNvSpPr>
+          <p:nvPr/>
+        </p:nvSpPr>
+        <p:spPr>
+          <a:xfrm xmlns:a="http://schemas.openxmlformats.org/drawingml/2006/main" flipH="0" flipV="0">
+            <a:off x="5791200" y="4495800"/>
+            <a:ext cx="9525" cy="114300"/>
+          </a:xfrm>
+          <a:prstGeom xmlns:a="http://schemas.openxmlformats.org/drawingml/2006/main" prst="line">
+            <a:avLst/>
+          </a:prstGeom>
+          <a:noFill xmlns:a="http://schemas.openxmlformats.org/drawingml/2006/main"/>
+          <a:ln xmlns:a="http://schemas.openxmlformats.org/drawingml/2006/main" w="13335">
+            <a:solidFill>
+              <a:srgbClr val="26355F"/>
+            </a:solidFill>
+            <a:prstDash val="solid"/>
+          </a:ln>
+        </p:spPr>
+      </p:sp>
+      <p:sp>
+        <p:nvSpPr>
+          <p:cNvPr id="92" name="">
+            <a:extLst xmlns:a="http://schemas.openxmlformats.org/drawingml/2006/main">
+              <a:ext uri="{FF2B5EF4-FFF2-40B4-BE49-F238E27FC236}">
+                <a16:creationId xmlns:a16="http://schemas.microsoft.com/office/drawing/2014/main" id="{ED87FE69-8932-480D-AF18-7BF4090638B3}"/>
+              </a:ext>
+            </a:extLst>
+          </p:cNvPr>
+          <p:cNvSpPr>
+            <a:spLocks xmlns:a="http://schemas.openxmlformats.org/drawingml/2006/main" noGrp="1"/>
+          </p:cNvSpPr>
+          <p:nvPr/>
+        </p:nvSpPr>
+        <p:spPr>
+          <a:xfrm xmlns:a="http://schemas.openxmlformats.org/drawingml/2006/main" flipH="0" flipV="0">
+            <a:off x="8734425" y="4495800"/>
+            <a:ext cx="9525" cy="114300"/>
+          </a:xfrm>
+          <a:prstGeom xmlns:a="http://schemas.openxmlformats.org/drawingml/2006/main" prst="line">
+            <a:avLst/>
+          </a:prstGeom>
+          <a:noFill xmlns:a="http://schemas.openxmlformats.org/drawingml/2006/main"/>
+          <a:ln xmlns:a="http://schemas.openxmlformats.org/drawingml/2006/main" w="13335">
+            <a:solidFill>
+              <a:srgbClr val="26355F"/>
+            </a:solidFill>
+            <a:prstDash val="solid"/>
+          </a:ln>
+        </p:spPr>
+      </p:sp>
+      <p:sp>
+        <p:nvSpPr>
+          <p:cNvPr id="93" name="allocation-capacity-label">
+            <a:extLst xmlns:a="http://schemas.openxmlformats.org/drawingml/2006/main">
+              <a:ext uri="{FF2B5EF4-FFF2-40B4-BE49-F238E27FC236}">
+                <a16:creationId xmlns:a16="http://schemas.microsoft.com/office/drawing/2014/main" id="{3896AA12-98C6-4D16-A19A-09C6A55904AB}"/>
+              </a:ext>
+            </a:extLst>
+          </p:cNvPr>
+          <p:cNvSpPr>
+            <a:spLocks xmlns:a="http://schemas.openxmlformats.org/drawingml/2006/main" noGrp="1"/>
+          </p:cNvSpPr>
+          <p:nvPr/>
+        </p:nvSpPr>
+        <p:spPr>
+          <a:xfrm xmlns:a="http://schemas.openxmlformats.org/drawingml/2006/main" rot="0">
+            <a:off x="6629400" y="4572000"/>
+            <a:ext cx="1276350" cy="209550"/>
+          </a:xfrm>
+          <a:prstGeom xmlns:a="http://schemas.openxmlformats.org/drawingml/2006/main" prst="rect">
+            <a:avLst/>
+          </a:prstGeom>
+          <a:noFill xmlns:a="http://schemas.openxmlformats.org/drawingml/2006/main"/>
+          <a:ln xmlns:a="http://schemas.openxmlformats.org/drawingml/2006/main" w="0">
+            <a:noFill/>
+            <a:prstDash val="solid"/>
+          </a:ln>
+        </p:spPr>
+        <p:txBody>
+          <a:bodyPr xmlns:a="http://schemas.openxmlformats.org/drawingml/2006/main" wrap="square" lIns="19050" tIns="9525" rIns="19050" bIns="9525" anchor="ctr">
+            <a:normAutofit fontScale="100000"/>
+          </a:bodyPr>
+          <a:lstStyle xmlns:a="http://schemas.openxmlformats.org/drawingml/2006/main"/>
+          <a:p xmlns:a="http://schemas.openxmlformats.org/drawingml/2006/main">
+            <a:pPr algn="ctr">
+              <a:defRPr sz="1050" b="1">
+                <a:solidFill>
+                  <a:srgbClr val="26355F"/>
+                </a:solidFill>
+                <a:latin typeface="Arial"/>
+                <a:ea typeface="Arial"/>
+                <a:cs typeface="Arial"/>
+              </a:defRPr>
+            </a:pPr>
+            <a:r>
+              <a:rPr sz="1050" b="1">
+                <a:solidFill>
+                  <a:srgbClr val="26355F"/>
+                </a:solidFill>
+                <a:latin typeface="Arial"/>
+                <a:ea typeface="Arial"/>
+                <a:cs typeface="Arial"/>
+              </a:rPr>
+              <a:t>Fixed capacity, k</a:t>
+            </a:r>
+          </a:p>
+        </p:txBody>
+      </p:sp>
+      <p:sp>
+        <p:nvSpPr>
+          <p:cNvPr id="94" name="allocation-note">
+            <a:extLst xmlns:a="http://schemas.openxmlformats.org/drawingml/2006/main">
+              <a:ext uri="{FF2B5EF4-FFF2-40B4-BE49-F238E27FC236}">
+                <a16:creationId xmlns:a16="http://schemas.microsoft.com/office/drawing/2014/main" id="{9D4ADF71-EBC0-4503-9B50-51A0ACF6812E}"/>
+              </a:ext>
+            </a:extLst>
+          </p:cNvPr>
+          <p:cNvSpPr>
+            <a:spLocks xmlns:a="http://schemas.openxmlformats.org/drawingml/2006/main" noGrp="1"/>
+          </p:cNvSpPr>
+          <p:nvPr/>
+        </p:nvSpPr>
+        <p:spPr>
+          <a:xfrm xmlns:a="http://schemas.openxmlformats.org/drawingml/2006/main" rot="0">
+            <a:off x="5314950" y="4714875"/>
+            <a:ext cx="3905250" cy="285750"/>
+          </a:xfrm>
+          <a:prstGeom xmlns:a="http://schemas.openxmlformats.org/drawingml/2006/main" prst="rect">
+            <a:avLst/>
+          </a:prstGeom>
+          <a:noFill xmlns:a="http://schemas.openxmlformats.org/drawingml/2006/main"/>
+          <a:ln xmlns:a="http://schemas.openxmlformats.org/drawingml/2006/main" w="0">
+            <a:noFill/>
+            <a:prstDash val="solid"/>
+          </a:ln>
+        </p:spPr>
+        <p:txBody>
+          <a:bodyPr xmlns:a="http://schemas.openxmlformats.org/drawingml/2006/main" wrap="square" lIns="19050" tIns="9525" rIns="19050" bIns="9525" anchor="ctr">
+            <a:normAutofit fontScale="75772"/>
+          </a:bodyPr>
+          <a:lstStyle xmlns:a="http://schemas.openxmlformats.org/drawingml/2006/main"/>
+          <a:p xmlns:a="http://schemas.openxmlformats.org/drawingml/2006/main">
+            <a:pPr algn="l">
+              <a:defRPr sz="1200" b="0">
+                <a:solidFill>
+                  <a:srgbClr val="637077"/>
+                </a:solidFill>
+                <a:latin typeface="Arial"/>
+                <a:ea typeface="Arial"/>
+                <a:cs typeface="Arial"/>
+              </a:defRPr>
+            </a:pPr>
+            <a:r>
+              <a:rPr sz="1200" b="0">
+                <a:solidFill>
+                  <a:srgbClr val="637077"/>
+                </a:solidFill>
+                <a:latin typeface="Arial"/>
+                <a:ea typeface="Arial"/>
+                <a:cs typeface="Arial"/>
+              </a:rPr>
+              <a:t>Deduplicate before global fill; unused reserve slots return to the global order.</a:t>
+            </a:r>
+          </a:p>
+        </p:txBody>
+      </p:sp>
+      <p:sp>
+        <p:nvSpPr>
+          <p:cNvPr id="95" name="output-heading">
+            <a:extLst xmlns:a="http://schemas.openxmlformats.org/drawingml/2006/main">
+              <a:ext uri="{FF2B5EF4-FFF2-40B4-BE49-F238E27FC236}">
+                <a16:creationId xmlns:a16="http://schemas.microsoft.com/office/drawing/2014/main" id="{E76DA1D6-46E7-4D6B-A647-18E75B91C1D2}"/>
+              </a:ext>
+            </a:extLst>
+          </p:cNvPr>
+          <p:cNvSpPr>
+            <a:spLocks xmlns:a="http://schemas.openxmlformats.org/drawingml/2006/main" noGrp="1"/>
+          </p:cNvSpPr>
+          <p:nvPr/>
+        </p:nvSpPr>
+        <p:spPr>
+          <a:xfrm xmlns:a="http://schemas.openxmlformats.org/drawingml/2006/main" rot="0">
+            <a:off x="10020300" y="1428750"/>
+            <a:ext cx="1562100" cy="323850"/>
+          </a:xfrm>
+          <a:prstGeom xmlns:a="http://schemas.openxmlformats.org/drawingml/2006/main" prst="rect">
+            <a:avLst/>
+          </a:prstGeom>
+          <a:noFill xmlns:a="http://schemas.openxmlformats.org/drawingml/2006/main"/>
+          <a:ln xmlns:a="http://schemas.openxmlformats.org/drawingml/2006/main" w="0">
+            <a:noFill/>
+            <a:prstDash val="solid"/>
+          </a:ln>
+        </p:spPr>
+        <p:txBody>
+          <a:bodyPr xmlns:a="http://schemas.openxmlformats.org/drawingml/2006/main" wrap="square" lIns="19050" tIns="9525" rIns="19050" bIns="9525" anchor="ctr">
+            <a:normAutofit fontScale="100000"/>
+          </a:bodyPr>
+          <a:lstStyle xmlns:a="http://schemas.openxmlformats.org/drawingml/2006/main"/>
+          <a:p xmlns:a="http://schemas.openxmlformats.org/drawingml/2006/main">
+            <a:pPr algn="l">
+              <a:defRPr sz="1725" b="1">
+                <a:solidFill>
+                  <a:srgbClr val="26355F"/>
+                </a:solidFill>
+                <a:latin typeface="Arial"/>
+                <a:ea typeface="Arial"/>
+                <a:cs typeface="Arial"/>
+              </a:defRPr>
+            </a:pPr>
+            <a:r>
+              <a:rPr sz="1725" b="1">
+                <a:solidFill>
+                  <a:srgbClr val="26355F"/>
+                </a:solidFill>
+                <a:latin typeface="Arial"/>
+                <a:ea typeface="Arial"/>
+                <a:cs typeface="Arial"/>
+              </a:rPr>
+              <a:t>Slot ledger</a:t>
+            </a:r>
+          </a:p>
+        </p:txBody>
+      </p:sp>
+      <p:sp>
+        <p:nvSpPr>
+          <p:cNvPr id="96" name="output-caption">
+            <a:extLst xmlns:a="http://schemas.openxmlformats.org/drawingml/2006/main">
+              <a:ext uri="{FF2B5EF4-FFF2-40B4-BE49-F238E27FC236}">
+                <a16:creationId xmlns:a16="http://schemas.microsoft.com/office/drawing/2014/main" id="{74ABAE3C-49C5-434E-AB03-636164FB4E89}"/>
+              </a:ext>
+            </a:extLst>
+          </p:cNvPr>
+          <p:cNvSpPr>
+            <a:spLocks xmlns:a="http://schemas.openxmlformats.org/drawingml/2006/main" noGrp="1"/>
+          </p:cNvSpPr>
+          <p:nvPr/>
+        </p:nvSpPr>
+        <p:spPr>
+          <a:xfrm xmlns:a="http://schemas.openxmlformats.org/drawingml/2006/main" rot="0">
+            <a:off x="10020300" y="1771650"/>
+            <a:ext cx="1562100" cy="361950"/>
+          </a:xfrm>
+          <a:prstGeom xmlns:a="http://schemas.openxmlformats.org/drawingml/2006/main" prst="rect">
+            <a:avLst/>
+          </a:prstGeom>
+          <a:noFill xmlns:a="http://schemas.openxmlformats.org/drawingml/2006/main"/>
+          <a:ln xmlns:a="http://schemas.openxmlformats.org/drawingml/2006/main" w="0">
+            <a:noFill/>
+            <a:prstDash val="solid"/>
+          </a:ln>
+        </p:spPr>
+        <p:txBody>
+          <a:bodyPr xmlns:a="http://schemas.openxmlformats.org/drawingml/2006/main" wrap="square" lIns="19050" tIns="9525" rIns="19050" bIns="9525" anchor="t">
+            <a:normAutofit fontScale="93750"/>
+          </a:bodyPr>
+          <a:lstStyle xmlns:a="http://schemas.openxmlformats.org/drawingml/2006/main"/>
+          <a:p xmlns:a="http://schemas.openxmlformats.org/drawingml/2006/main">
+            <a:pPr algn="l">
+              <a:defRPr sz="1200" b="0">
+                <a:solidFill>
+                  <a:srgbClr val="637077"/>
+                </a:solidFill>
+                <a:latin typeface="Arial"/>
+                <a:ea typeface="Arial"/>
+                <a:cs typeface="Arial"/>
+              </a:defRPr>
+            </a:pPr>
+            <a:r>
+              <a:rPr sz="1200" b="0">
+                <a:solidFill>
+                  <a:srgbClr val="637077"/>
+                </a:solidFill>
+                <a:latin typeface="Arial"/>
+                <a:ea typeface="Arial"/>
+                <a:cs typeface="Arial"/>
+              </a:rPr>
+              <a:t>Source recorded for every slot</a:t>
+            </a:r>
+          </a:p>
+        </p:txBody>
+      </p:sp>
+      <p:sp>
+        <p:nvSpPr>
+          <p:cNvPr id="97" name="queue-result-ledger">
+            <a:extLst xmlns:a="http://schemas.openxmlformats.org/drawingml/2006/main">
+              <a:ext uri="{FF2B5EF4-FFF2-40B4-BE49-F238E27FC236}">
+                <a16:creationId xmlns:a16="http://schemas.microsoft.com/office/drawing/2014/main" id="{F1D6836F-9385-4E06-AA12-E69916AA90E5}"/>
+              </a:ext>
+            </a:extLst>
+          </p:cNvPr>
+          <p:cNvSpPr>
+            <a:spLocks xmlns:a="http://schemas.openxmlformats.org/drawingml/2006/main" noGrp="1"/>
+          </p:cNvSpPr>
+          <p:nvPr/>
+        </p:nvSpPr>
+        <p:spPr>
+          <a:xfrm xmlns:a="http://schemas.openxmlformats.org/drawingml/2006/main" rot="0">
+            <a:off x="10020300" y="2209800"/>
+            <a:ext cx="1562100" cy="1676400"/>
+          </a:xfrm>
+          <a:prstGeom xmlns:a="http://schemas.openxmlformats.org/drawingml/2006/main" prst="rect">
+            <a:avLst/>
+          </a:prstGeom>
+          <a:solidFill xmlns:a="http://schemas.openxmlformats.org/drawingml/2006/main">
+            <a:srgbClr val="FFFFFF"/>
+          </a:solidFill>
+          <a:ln xmlns:a="http://schemas.openxmlformats.org/drawingml/2006/main" w="16193">
+            <a:solidFill>
+              <a:srgbClr val="26785F"/>
+            </a:solidFill>
+            <a:prstDash val="solid"/>
+          </a:ln>
+        </p:spPr>
+      </p:sp>
+      <p:sp>
+        <p:nvSpPr>
+          <p:cNvPr id="98" name="queue-result-header">
+            <a:extLst xmlns:a="http://schemas.openxmlformats.org/drawingml/2006/main">
+              <a:ext uri="{FF2B5EF4-FFF2-40B4-BE49-F238E27FC236}">
+                <a16:creationId xmlns:a16="http://schemas.microsoft.com/office/drawing/2014/main" id="{42458E13-3FB6-4BAC-A5CB-3774DB234094}"/>
+              </a:ext>
+            </a:extLst>
+          </p:cNvPr>
+          <p:cNvSpPr>
+            <a:spLocks xmlns:a="http://schemas.openxmlformats.org/drawingml/2006/main" noGrp="1"/>
+          </p:cNvSpPr>
+          <p:nvPr/>
+        </p:nvSpPr>
+        <p:spPr>
+          <a:xfrm xmlns:a="http://schemas.openxmlformats.org/drawingml/2006/main" rot="0">
+            <a:off x="10020300" y="2209800"/>
+            <a:ext cx="1562100" cy="342900"/>
+          </a:xfrm>
+          <a:prstGeom xmlns:a="http://schemas.openxmlformats.org/drawingml/2006/main" prst="rect">
+            <a:avLst/>
+          </a:prstGeom>
+          <a:solidFill xmlns:a="http://schemas.openxmlformats.org/drawingml/2006/main">
+            <a:srgbClr val="E6F1EB"/>
+          </a:solidFill>
+          <a:ln xmlns:a="http://schemas.openxmlformats.org/drawingml/2006/main" w="11430">
+            <a:solidFill>
+              <a:srgbClr val="26785F"/>
+            </a:solidFill>
+            <a:prstDash val="solid"/>
+          </a:ln>
+        </p:spPr>
+      </p:sp>
+      <p:sp>
+        <p:nvSpPr>
+          <p:cNvPr id="99" name="queue-result-title">
+            <a:extLst xmlns:a="http://schemas.openxmlformats.org/drawingml/2006/main">
+              <a:ext uri="{FF2B5EF4-FFF2-40B4-BE49-F238E27FC236}">
+                <a16:creationId xmlns:a16="http://schemas.microsoft.com/office/drawing/2014/main" id="{1DEBBE39-C551-4448-9F20-59E37E491A6A}"/>
+              </a:ext>
+            </a:extLst>
+          </p:cNvPr>
+          <p:cNvSpPr>
+            <a:spLocks xmlns:a="http://schemas.openxmlformats.org/drawingml/2006/main" noGrp="1"/>
+          </p:cNvSpPr>
+          <p:nvPr/>
+        </p:nvSpPr>
+        <p:spPr>
+          <a:xfrm xmlns:a="http://schemas.openxmlformats.org/drawingml/2006/main" rot="0">
+            <a:off x="10134600" y="2238375"/>
+            <a:ext cx="1333500" cy="266700"/>
+          </a:xfrm>
+          <a:prstGeom xmlns:a="http://schemas.openxmlformats.org/drawingml/2006/main" prst="rect">
+            <a:avLst/>
+          </a:prstGeom>
+          <a:noFill xmlns:a="http://schemas.openxmlformats.org/drawingml/2006/main"/>
+          <a:ln xmlns:a="http://schemas.openxmlformats.org/drawingml/2006/main" w="0">
+            <a:noFill/>
+            <a:prstDash val="solid"/>
+          </a:ln>
+        </p:spPr>
+        <p:txBody>
+          <a:bodyPr xmlns:a="http://schemas.openxmlformats.org/drawingml/2006/main" wrap="square" lIns="19050" tIns="9525" rIns="19050" bIns="9525" anchor="ctr">
+            <a:normAutofit fontScale="100000"/>
+          </a:bodyPr>
+          <a:lstStyle xmlns:a="http://schemas.openxmlformats.org/drawingml/2006/main"/>
+          <a:p xmlns:a="http://schemas.openxmlformats.org/drawingml/2006/main">
+            <a:pPr algn="l">
+              <a:defRPr sz="1200" b="1">
+                <a:solidFill>
+                  <a:srgbClr val="26785F"/>
+                </a:solidFill>
+                <a:latin typeface="Arial"/>
+                <a:ea typeface="Arial"/>
+                <a:cs typeface="Arial"/>
+              </a:defRPr>
+            </a:pPr>
+            <a:r>
+              <a:rPr sz="1200" b="1">
+                <a:solidFill>
+                  <a:srgbClr val="26785F"/>
+                </a:solidFill>
+                <a:latin typeface="Arial"/>
+                <a:ea typeface="Arial"/>
+                <a:cs typeface="Arial"/>
+              </a:rPr>
+              <a:t>Queue result</a:t>
+            </a:r>
+          </a:p>
+        </p:txBody>
+      </p:sp>
+      <p:sp>
+        <p:nvSpPr>
+          <p:cNvPr id="100" name="selected-ids-label">
+            <a:extLst xmlns:a="http://schemas.openxmlformats.org/drawingml/2006/main">
+              <a:ext uri="{FF2B5EF4-FFF2-40B4-BE49-F238E27FC236}">
+                <a16:creationId xmlns:a16="http://schemas.microsoft.com/office/drawing/2014/main" id="{5ABD9F63-BFFA-4967-A050-37367AA48ABA}"/>
+              </a:ext>
+            </a:extLst>
+          </p:cNvPr>
+          <p:cNvSpPr>
+            <a:spLocks xmlns:a="http://schemas.openxmlformats.org/drawingml/2006/main" noGrp="1"/>
+          </p:cNvSpPr>
+          <p:nvPr/>
+        </p:nvSpPr>
+        <p:spPr>
+          <a:xfrm xmlns:a="http://schemas.openxmlformats.org/drawingml/2006/main" rot="0">
+            <a:off x="10134600" y="2619375"/>
+            <a:ext cx="1333500" cy="209550"/>
+          </a:xfrm>
+          <a:prstGeom xmlns:a="http://schemas.openxmlformats.org/drawingml/2006/main" prst="rect">
+            <a:avLst/>
+          </a:prstGeom>
+          <a:noFill xmlns:a="http://schemas.openxmlformats.org/drawingml/2006/main"/>
+          <a:ln xmlns:a="http://schemas.openxmlformats.org/drawingml/2006/main" w="0">
+            <a:noFill/>
+            <a:prstDash val="solid"/>
+          </a:ln>
+        </p:spPr>
+        <p:txBody>
+          <a:bodyPr xmlns:a="http://schemas.openxmlformats.org/drawingml/2006/main" wrap="square" lIns="19050" tIns="9525" rIns="19050" bIns="9525" anchor="ctr">
+            <a:normAutofit fontScale="100000"/>
+          </a:bodyPr>
+          <a:lstStyle xmlns:a="http://schemas.openxmlformats.org/drawingml/2006/main"/>
+          <a:p xmlns:a="http://schemas.openxmlformats.org/drawingml/2006/main">
+            <a:pPr algn="l">
+              <a:defRPr sz="975" b="1">
+                <a:solidFill>
+                  <a:srgbClr val="172027"/>
+                </a:solidFill>
+                <a:latin typeface="Arial"/>
+                <a:ea typeface="Arial"/>
+                <a:cs typeface="Arial"/>
+              </a:defRPr>
+            </a:pPr>
+            <a:r>
+              <a:rPr sz="975" b="1">
+                <a:solidFill>
+                  <a:srgbClr val="172027"/>
+                </a:solidFill>
+                <a:latin typeface="Arial"/>
+                <a:ea typeface="Arial"/>
+                <a:cs typeface="Arial"/>
+              </a:rPr>
+              <a:t>Selected IDs (sample)</a:t>
+            </a:r>
+          </a:p>
+        </p:txBody>
+      </p:sp>
+      <p:sp>
+        <p:nvSpPr>
+          <p:cNvPr id="101" name="result-token-1">
+            <a:extLst xmlns:a="http://schemas.openxmlformats.org/drawingml/2006/main">
+              <a:ext uri="{FF2B5EF4-FFF2-40B4-BE49-F238E27FC236}">
+                <a16:creationId xmlns:a16="http://schemas.microsoft.com/office/drawing/2014/main" id="{19703D09-1DA8-4AD4-83DE-73BA7C2EA971}"/>
+              </a:ext>
+            </a:extLst>
+          </p:cNvPr>
+          <p:cNvSpPr>
+            <a:spLocks xmlns:a="http://schemas.openxmlformats.org/drawingml/2006/main" noGrp="1"/>
+          </p:cNvSpPr>
+          <p:nvPr/>
+        </p:nvSpPr>
+        <p:spPr>
+          <a:xfrm xmlns:a="http://schemas.openxmlformats.org/drawingml/2006/main" rot="0">
+            <a:off x="10363200" y="2857500"/>
+            <a:ext cx="133350" cy="133350"/>
+          </a:xfrm>
+          <a:prstGeom xmlns:a="http://schemas.openxmlformats.org/drawingml/2006/main" prst="ellipse">
+            <a:avLst/>
+          </a:prstGeom>
+          <a:solidFill xmlns:a="http://schemas.openxmlformats.org/drawingml/2006/main">
+            <a:srgbClr val="257FA0"/>
+          </a:solidFill>
+          <a:ln xmlns:a="http://schemas.openxmlformats.org/drawingml/2006/main" w="7620">
+            <a:solidFill>
+              <a:srgbClr val="26355F"/>
+            </a:solidFill>
+            <a:prstDash val="solid"/>
+          </a:ln>
+        </p:spPr>
+      </p:sp>
+      <p:sp>
+        <p:nvSpPr>
+          <p:cNvPr id="102" name="result-token-2">
+            <a:extLst xmlns:a="http://schemas.openxmlformats.org/drawingml/2006/main">
+              <a:ext uri="{FF2B5EF4-FFF2-40B4-BE49-F238E27FC236}">
+                <a16:creationId xmlns:a16="http://schemas.microsoft.com/office/drawing/2014/main" id="{9E553E96-7E35-4AE8-BF94-AF1A690641CB}"/>
+              </a:ext>
+            </a:extLst>
+          </p:cNvPr>
+          <p:cNvSpPr>
+            <a:spLocks xmlns:a="http://schemas.openxmlformats.org/drawingml/2006/main" noGrp="1"/>
+          </p:cNvSpPr>
+          <p:nvPr/>
+        </p:nvSpPr>
+        <p:spPr>
+          <a:xfrm xmlns:a="http://schemas.openxmlformats.org/drawingml/2006/main" rot="0">
+            <a:off x="10610850" y="2857500"/>
+            <a:ext cx="133350" cy="133350"/>
+          </a:xfrm>
+          <a:prstGeom xmlns:a="http://schemas.openxmlformats.org/drawingml/2006/main" prst="diamond">
+            <a:avLst/>
+          </a:prstGeom>
+          <a:solidFill xmlns:a="http://schemas.openxmlformats.org/drawingml/2006/main">
+            <a:srgbClr val="765A8D"/>
+          </a:solidFill>
+          <a:ln xmlns:a="http://schemas.openxmlformats.org/drawingml/2006/main" w="7620">
+            <a:solidFill>
+              <a:srgbClr val="26355F"/>
+            </a:solidFill>
+            <a:prstDash val="solid"/>
+          </a:ln>
+        </p:spPr>
+      </p:sp>
+      <p:sp>
+        <p:nvSpPr>
+          <p:cNvPr id="103" name="result-token-3">
+            <a:extLst xmlns:a="http://schemas.openxmlformats.org/drawingml/2006/main">
+              <a:ext uri="{FF2B5EF4-FFF2-40B4-BE49-F238E27FC236}">
+                <a16:creationId xmlns:a16="http://schemas.microsoft.com/office/drawing/2014/main" id="{A438A8DF-4F89-4B7D-A0F9-BA51958CCD9B}"/>
+              </a:ext>
+            </a:extLst>
+          </p:cNvPr>
+          <p:cNvSpPr>
+            <a:spLocks xmlns:a="http://schemas.openxmlformats.org/drawingml/2006/main" noGrp="1"/>
+          </p:cNvSpPr>
+          <p:nvPr/>
+        </p:nvSpPr>
+        <p:spPr>
+          <a:xfrm xmlns:a="http://schemas.openxmlformats.org/drawingml/2006/main" rot="0">
+            <a:off x="10858500" y="2857500"/>
+            <a:ext cx="133350" cy="133350"/>
+          </a:xfrm>
+          <a:prstGeom xmlns:a="http://schemas.openxmlformats.org/drawingml/2006/main" prst="rect">
+            <a:avLst/>
+          </a:prstGeom>
+          <a:solidFill xmlns:a="http://schemas.openxmlformats.org/drawingml/2006/main">
+            <a:srgbClr val="26355F"/>
+          </a:solidFill>
+          <a:ln xmlns:a="http://schemas.openxmlformats.org/drawingml/2006/main" w="0">
+            <a:noFill/>
+            <a:prstDash val="solid"/>
+          </a:ln>
+        </p:spPr>
+      </p:sp>
+      <p:sp>
+        <p:nvSpPr>
+          <p:cNvPr id="104" name="result-token-4">
+            <a:extLst xmlns:a="http://schemas.openxmlformats.org/drawingml/2006/main">
+              <a:ext uri="{FF2B5EF4-FFF2-40B4-BE49-F238E27FC236}">
+                <a16:creationId xmlns:a16="http://schemas.microsoft.com/office/drawing/2014/main" id="{64FC9547-78D6-4F03-896C-79DF9FC388E2}"/>
+              </a:ext>
+            </a:extLst>
+          </p:cNvPr>
+          <p:cNvSpPr>
+            <a:spLocks xmlns:a="http://schemas.openxmlformats.org/drawingml/2006/main" noGrp="1"/>
+          </p:cNvSpPr>
+          <p:nvPr/>
+        </p:nvSpPr>
+        <p:spPr>
+          <a:xfrm xmlns:a="http://schemas.openxmlformats.org/drawingml/2006/main" rot="0">
+            <a:off x="11106150" y="2857500"/>
+            <a:ext cx="133350" cy="133350"/>
+          </a:xfrm>
+          <a:prstGeom xmlns:a="http://schemas.openxmlformats.org/drawingml/2006/main" prst="ellipse">
+            <a:avLst/>
+          </a:prstGeom>
+          <a:solidFill xmlns:a="http://schemas.openxmlformats.org/drawingml/2006/main">
+            <a:srgbClr val="257FA0"/>
+          </a:solidFill>
+          <a:ln xmlns:a="http://schemas.openxmlformats.org/drawingml/2006/main" w="7620">
+            <a:solidFill>
+              <a:srgbClr val="26355F"/>
+            </a:solidFill>
+            <a:prstDash val="solid"/>
+          </a:ln>
+        </p:spPr>
+      </p:sp>
+      <p:sp>
+        <p:nvSpPr>
+          <p:cNvPr id="105" name="result-divider">
+            <a:extLst xmlns:a="http://schemas.openxmlformats.org/drawingml/2006/main">
+              <a:ext uri="{FF2B5EF4-FFF2-40B4-BE49-F238E27FC236}">
+                <a16:creationId xmlns:a16="http://schemas.microsoft.com/office/drawing/2014/main" id="{67A9E637-21AB-4DAC-8DD9-58FA6D350975}"/>
+              </a:ext>
+            </a:extLst>
+          </p:cNvPr>
+          <p:cNvSpPr>
+            <a:spLocks xmlns:a="http://schemas.openxmlformats.org/drawingml/2006/main" noGrp="1"/>
+          </p:cNvSpPr>
+          <p:nvPr/>
+        </p:nvSpPr>
+        <p:spPr>
+          <a:xfrm xmlns:a="http://schemas.openxmlformats.org/drawingml/2006/main" flipH="0" flipV="0">
+            <a:off x="10134600" y="3105150"/>
+            <a:ext cx="1333500" cy="9525"/>
+          </a:xfrm>
+          <a:prstGeom xmlns:a="http://schemas.openxmlformats.org/drawingml/2006/main" prst="line">
+            <a:avLst/>
+          </a:prstGeom>
+          <a:noFill xmlns:a="http://schemas.openxmlformats.org/drawingml/2006/main"/>
+          <a:ln xmlns:a="http://schemas.openxmlformats.org/drawingml/2006/main" w="9525">
+            <a:solidFill>
+              <a:srgbClr val="CAD3D4"/>
+            </a:solidFill>
+            <a:prstDash val="solid"/>
+          </a:ln>
+        </p:spPr>
+      </p:sp>
+      <p:sp>
+        <p:nvSpPr>
+          <p:cNvPr id="106" name="ledger-slot-header">
+            <a:extLst xmlns:a="http://schemas.openxmlformats.org/drawingml/2006/main">
+              <a:ext uri="{FF2B5EF4-FFF2-40B4-BE49-F238E27FC236}">
+                <a16:creationId xmlns:a16="http://schemas.microsoft.com/office/drawing/2014/main" id="{D89A069F-181E-4011-8BA6-189CCF36A6A8}"/>
+              </a:ext>
+            </a:extLst>
+          </p:cNvPr>
+          <p:cNvSpPr>
+            <a:spLocks xmlns:a="http://schemas.openxmlformats.org/drawingml/2006/main" noGrp="1"/>
+          </p:cNvSpPr>
+          <p:nvPr/>
+        </p:nvSpPr>
+        <p:spPr>
+          <a:xfrm xmlns:a="http://schemas.openxmlformats.org/drawingml/2006/main" rot="0">
+            <a:off x="10153650" y="3162300"/>
+            <a:ext cx="342900" cy="171450"/>
+          </a:xfrm>
+          <a:prstGeom xmlns:a="http://schemas.openxmlformats.org/drawingml/2006/main" prst="rect">
+            <a:avLst/>
+          </a:prstGeom>
+          <a:noFill xmlns:a="http://schemas.openxmlformats.org/drawingml/2006/main"/>
+          <a:ln xmlns:a="http://schemas.openxmlformats.org/drawingml/2006/main" w="0">
+            <a:noFill/>
+            <a:prstDash val="solid"/>
+          </a:ln>
+        </p:spPr>
+        <p:txBody>
+          <a:bodyPr xmlns:a="http://schemas.openxmlformats.org/drawingml/2006/main" wrap="square" lIns="19050" tIns="9525" rIns="19050" bIns="9525" anchor="ctr">
+            <a:normAutofit fontScale="100000"/>
+          </a:bodyPr>
+          <a:lstStyle xmlns:a="http://schemas.openxmlformats.org/drawingml/2006/main"/>
+          <a:p xmlns:a="http://schemas.openxmlformats.org/drawingml/2006/main">
+            <a:pPr algn="l">
+              <a:defRPr sz="975" b="1">
+                <a:solidFill>
+                  <a:srgbClr val="637077"/>
+                </a:solidFill>
+                <a:latin typeface="Arial"/>
+                <a:ea typeface="Arial"/>
+                <a:cs typeface="Arial"/>
+              </a:defRPr>
+            </a:pPr>
+            <a:r>
+              <a:rPr sz="975" b="1">
+                <a:solidFill>
+                  <a:srgbClr val="637077"/>
+                </a:solidFill>
+                <a:latin typeface="Arial"/>
+                <a:ea typeface="Arial"/>
+                <a:cs typeface="Arial"/>
+              </a:rPr>
+              <a:t>Slot</a:t>
+            </a:r>
+          </a:p>
+        </p:txBody>
+      </p:sp>
+      <p:sp>
+        <p:nvSpPr>
+          <p:cNvPr id="107" name="ledger-source-header">
+            <a:extLst xmlns:a="http://schemas.openxmlformats.org/drawingml/2006/main">
+              <a:ext uri="{FF2B5EF4-FFF2-40B4-BE49-F238E27FC236}">
+                <a16:creationId xmlns:a16="http://schemas.microsoft.com/office/drawing/2014/main" id="{3ECE39D2-B2F9-47DC-83F9-3FC6EFA37C98}"/>
+              </a:ext>
+            </a:extLst>
+          </p:cNvPr>
+          <p:cNvSpPr>
+            <a:spLocks xmlns:a="http://schemas.openxmlformats.org/drawingml/2006/main" noGrp="1"/>
+          </p:cNvSpPr>
+          <p:nvPr/>
+        </p:nvSpPr>
+        <p:spPr>
+          <a:xfrm xmlns:a="http://schemas.openxmlformats.org/drawingml/2006/main" rot="0">
+            <a:off x="10629900" y="3162300"/>
+            <a:ext cx="838200" cy="171450"/>
+          </a:xfrm>
+          <a:prstGeom xmlns:a="http://schemas.openxmlformats.org/drawingml/2006/main" prst="rect">
+            <a:avLst/>
+          </a:prstGeom>
+          <a:noFill xmlns:a="http://schemas.openxmlformats.org/drawingml/2006/main"/>
+          <a:ln xmlns:a="http://schemas.openxmlformats.org/drawingml/2006/main" w="0">
+            <a:noFill/>
+            <a:prstDash val="solid"/>
+          </a:ln>
+        </p:spPr>
+        <p:txBody>
+          <a:bodyPr xmlns:a="http://schemas.openxmlformats.org/drawingml/2006/main" wrap="square" lIns="19050" tIns="9525" rIns="19050" bIns="9525" anchor="ctr">
+            <a:normAutofit fontScale="100000"/>
+          </a:bodyPr>
+          <a:lstStyle xmlns:a="http://schemas.openxmlformats.org/drawingml/2006/main"/>
+          <a:p xmlns:a="http://schemas.openxmlformats.org/drawingml/2006/main">
+            <a:pPr algn="l">
+              <a:defRPr sz="975" b="1">
+                <a:solidFill>
+                  <a:srgbClr val="637077"/>
+                </a:solidFill>
+                <a:latin typeface="Arial"/>
+                <a:ea typeface="Arial"/>
+                <a:cs typeface="Arial"/>
+              </a:defRPr>
+            </a:pPr>
+            <a:r>
+              <a:rPr sz="975" b="1">
+                <a:solidFill>
+                  <a:srgbClr val="637077"/>
+                </a:solidFill>
+                <a:latin typeface="Arial"/>
+                <a:ea typeface="Arial"/>
+                <a:cs typeface="Arial"/>
+              </a:rPr>
+              <a:t>Source</a:t>
+            </a:r>
+          </a:p>
+        </p:txBody>
+      </p:sp>
+      <p:sp>
+        <p:nvSpPr>
+          <p:cNvPr id="108" name="ledger-slot-1">
+            <a:extLst xmlns:a="http://schemas.openxmlformats.org/drawingml/2006/main">
+              <a:ext uri="{FF2B5EF4-FFF2-40B4-BE49-F238E27FC236}">
+                <a16:creationId xmlns:a16="http://schemas.microsoft.com/office/drawing/2014/main" id="{D5BC0312-0CD9-41E1-BEAE-A49BA8A9E7BA}"/>
+              </a:ext>
+            </a:extLst>
+          </p:cNvPr>
+          <p:cNvSpPr>
+            <a:spLocks xmlns:a="http://schemas.openxmlformats.org/drawingml/2006/main" noGrp="1"/>
+          </p:cNvSpPr>
+          <p:nvPr/>
+        </p:nvSpPr>
+        <p:spPr>
+          <a:xfrm xmlns:a="http://schemas.openxmlformats.org/drawingml/2006/main" rot="0">
+            <a:off x="10153650" y="3362325"/>
+            <a:ext cx="342900" cy="180975"/>
+          </a:xfrm>
+          <a:prstGeom xmlns:a="http://schemas.openxmlformats.org/drawingml/2006/main" prst="rect">
+            <a:avLst/>
+          </a:prstGeom>
+          <a:noFill xmlns:a="http://schemas.openxmlformats.org/drawingml/2006/main"/>
+          <a:ln xmlns:a="http://schemas.openxmlformats.org/drawingml/2006/main" w="0">
+            <a:noFill/>
+            <a:prstDash val="solid"/>
+          </a:ln>
+        </p:spPr>
+        <p:txBody>
+          <a:bodyPr xmlns:a="http://schemas.openxmlformats.org/drawingml/2006/main" wrap="square" lIns="19050" tIns="9525" rIns="19050" bIns="9525" anchor="ctr">
+            <a:normAutofit fontScale="100000"/>
+          </a:bodyPr>
+          <a:lstStyle xmlns:a="http://schemas.openxmlformats.org/drawingml/2006/main"/>
+          <a:p xmlns:a="http://schemas.openxmlformats.org/drawingml/2006/main">
+            <a:pPr algn="l">
+              <a:defRPr sz="1050" b="0">
+                <a:solidFill>
+                  <a:srgbClr val="172027"/>
+                </a:solidFill>
+                <a:latin typeface="Arial"/>
+                <a:ea typeface="Arial"/>
+                <a:cs typeface="Arial"/>
+              </a:defRPr>
+            </a:pPr>
+            <a:r>
+              <a:rPr sz="1050" b="0">
+                <a:solidFill>
+                  <a:srgbClr val="172027"/>
+                </a:solidFill>
+                <a:latin typeface="Arial"/>
+                <a:ea typeface="Arial"/>
+                <a:cs typeface="Arial"/>
+              </a:rPr>
+              <a:t>01</a:t>
+            </a:r>
+          </a:p>
+        </p:txBody>
+      </p:sp>
+      <p:sp>
+        <p:nvSpPr>
+          <p:cNvPr id="109" name="ledger-source-1">
+            <a:extLst xmlns:a="http://schemas.openxmlformats.org/drawingml/2006/main">
+              <a:ext uri="{FF2B5EF4-FFF2-40B4-BE49-F238E27FC236}">
+                <a16:creationId xmlns:a16="http://schemas.microsoft.com/office/drawing/2014/main" id="{4904B5A4-2BCA-4879-8B34-73AD077F1604}"/>
+              </a:ext>
+            </a:extLst>
+          </p:cNvPr>
+          <p:cNvSpPr>
+            <a:spLocks xmlns:a="http://schemas.openxmlformats.org/drawingml/2006/main" noGrp="1"/>
+          </p:cNvSpPr>
+          <p:nvPr/>
+        </p:nvSpPr>
+        <p:spPr>
+          <a:xfrm xmlns:a="http://schemas.openxmlformats.org/drawingml/2006/main" rot="0">
+            <a:off x="10629900" y="3362325"/>
+            <a:ext cx="838200" cy="180975"/>
           </a:xfrm>
           <a:prstGeom xmlns:a="http://schemas.openxmlformats.org/drawingml/2006/main" prst="rect">
             <a:avLst/>
@@ -4027,29 +6014,60 @@
                 <a:ea typeface="Arial"/>
                 <a:cs typeface="Arial"/>
               </a:rPr>
-              <a:t>Declared order</a:t>
+              <a:t>reserve</a:t>
             </a:r>
           </a:p>
         </p:txBody>
       </p:sp>
       <p:sp>
         <p:nvSpPr>
-          <p:cNvPr id="62" name="allocation-global-label">
-            <a:extLst xmlns:a="http://schemas.openxmlformats.org/drawingml/2006/main">
-              <a:ext uri="{FF2B5EF4-FFF2-40B4-BE49-F238E27FC236}">
-                <a16:creationId xmlns:a16="http://schemas.microsoft.com/office/drawing/2014/main" id="{36DEE64A-FD1C-476A-8FB5-70A1FC15EC96}"/>
-              </a:ext>
-            </a:extLst>
-          </p:cNvPr>
-          <p:cNvSpPr>
-            <a:spLocks xmlns:a="http://schemas.openxmlformats.org/drawingml/2006/main" noGrp="1"/>
-          </p:cNvSpPr>
-          <p:nvPr/>
-        </p:nvSpPr>
-        <p:spPr>
-          <a:xfrm xmlns:a="http://schemas.openxmlformats.org/drawingml/2006/main" rot="0">
-            <a:off x="7391400" y="2219325"/>
-            <a:ext cx="1257300" cy="228600"/>
+          <p:cNvPr id="110" name="result-row-divider">
+            <a:extLst xmlns:a="http://schemas.openxmlformats.org/drawingml/2006/main">
+              <a:ext uri="{FF2B5EF4-FFF2-40B4-BE49-F238E27FC236}">
+                <a16:creationId xmlns:a16="http://schemas.microsoft.com/office/drawing/2014/main" id="{42A8C7C7-6A4A-4CED-8309-4B48325BCF2F}"/>
+              </a:ext>
+            </a:extLst>
+          </p:cNvPr>
+          <p:cNvSpPr>
+            <a:spLocks xmlns:a="http://schemas.openxmlformats.org/drawingml/2006/main" noGrp="1"/>
+          </p:cNvSpPr>
+          <p:nvPr/>
+        </p:nvSpPr>
+        <p:spPr>
+          <a:xfrm xmlns:a="http://schemas.openxmlformats.org/drawingml/2006/main" flipH="0" flipV="0">
+            <a:off x="10134600" y="3562350"/>
+            <a:ext cx="1333500" cy="9525"/>
+          </a:xfrm>
+          <a:prstGeom xmlns:a="http://schemas.openxmlformats.org/drawingml/2006/main" prst="line">
+            <a:avLst/>
+          </a:prstGeom>
+          <a:noFill xmlns:a="http://schemas.openxmlformats.org/drawingml/2006/main"/>
+          <a:ln xmlns:a="http://schemas.openxmlformats.org/drawingml/2006/main" w="9525">
+            <a:solidFill>
+              <a:srgbClr val="CAD3D4"/>
+            </a:solidFill>
+            <a:prstDash val="solid"/>
+          </a:ln>
+        </p:spPr>
+      </p:sp>
+      <p:sp>
+        <p:nvSpPr>
+          <p:cNvPr id="111" name="ledger-slot-2">
+            <a:extLst xmlns:a="http://schemas.openxmlformats.org/drawingml/2006/main">
+              <a:ext uri="{FF2B5EF4-FFF2-40B4-BE49-F238E27FC236}">
+                <a16:creationId xmlns:a16="http://schemas.microsoft.com/office/drawing/2014/main" id="{A2B67734-FED4-4C9F-95E1-79EDFA743CF4}"/>
+              </a:ext>
+            </a:extLst>
+          </p:cNvPr>
+          <p:cNvSpPr>
+            <a:spLocks xmlns:a="http://schemas.openxmlformats.org/drawingml/2006/main" noGrp="1"/>
+          </p:cNvSpPr>
+          <p:nvPr/>
+        </p:nvSpPr>
+        <p:spPr>
+          <a:xfrm xmlns:a="http://schemas.openxmlformats.org/drawingml/2006/main" rot="0">
+            <a:off x="10153650" y="3590925"/>
+            <a:ext cx="342900" cy="180975"/>
           </a:xfrm>
           <a:prstGeom xmlns:a="http://schemas.openxmlformats.org/drawingml/2006/main" prst="rect">
             <a:avLst/>
@@ -4067,6 +6085,153 @@
           <a:lstStyle xmlns:a="http://schemas.openxmlformats.org/drawingml/2006/main"/>
           <a:p xmlns:a="http://schemas.openxmlformats.org/drawingml/2006/main">
             <a:pPr algn="l">
+              <a:defRPr sz="1050" b="0">
+                <a:solidFill>
+                  <a:srgbClr val="172027"/>
+                </a:solidFill>
+                <a:latin typeface="Arial"/>
+                <a:ea typeface="Arial"/>
+                <a:cs typeface="Arial"/>
+              </a:defRPr>
+            </a:pPr>
+            <a:r>
+              <a:rPr sz="1050" b="0">
+                <a:solidFill>
+                  <a:srgbClr val="172027"/>
+                </a:solidFill>
+                <a:latin typeface="Arial"/>
+                <a:ea typeface="Arial"/>
+                <a:cs typeface="Arial"/>
+              </a:rPr>
+              <a:t>02</a:t>
+            </a:r>
+          </a:p>
+        </p:txBody>
+      </p:sp>
+      <p:sp>
+        <p:nvSpPr>
+          <p:cNvPr id="112" name="ledger-source-2">
+            <a:extLst xmlns:a="http://schemas.openxmlformats.org/drawingml/2006/main">
+              <a:ext uri="{FF2B5EF4-FFF2-40B4-BE49-F238E27FC236}">
+                <a16:creationId xmlns:a16="http://schemas.microsoft.com/office/drawing/2014/main" id="{4831BBDD-225D-494A-A2A2-D1C7F3D5A8EF}"/>
+              </a:ext>
+            </a:extLst>
+          </p:cNvPr>
+          <p:cNvSpPr>
+            <a:spLocks xmlns:a="http://schemas.openxmlformats.org/drawingml/2006/main" noGrp="1"/>
+          </p:cNvSpPr>
+          <p:nvPr/>
+        </p:nvSpPr>
+        <p:spPr>
+          <a:xfrm xmlns:a="http://schemas.openxmlformats.org/drawingml/2006/main" rot="0">
+            <a:off x="10629900" y="3590925"/>
+            <a:ext cx="838200" cy="180975"/>
+          </a:xfrm>
+          <a:prstGeom xmlns:a="http://schemas.openxmlformats.org/drawingml/2006/main" prst="rect">
+            <a:avLst/>
+          </a:prstGeom>
+          <a:noFill xmlns:a="http://schemas.openxmlformats.org/drawingml/2006/main"/>
+          <a:ln xmlns:a="http://schemas.openxmlformats.org/drawingml/2006/main" w="0">
+            <a:noFill/>
+            <a:prstDash val="solid"/>
+          </a:ln>
+        </p:spPr>
+        <p:txBody>
+          <a:bodyPr xmlns:a="http://schemas.openxmlformats.org/drawingml/2006/main" wrap="square" lIns="19050" tIns="9525" rIns="19050" bIns="9525" anchor="ctr">
+            <a:normAutofit fontScale="100000"/>
+          </a:bodyPr>
+          <a:lstStyle xmlns:a="http://schemas.openxmlformats.org/drawingml/2006/main"/>
+          <a:p xmlns:a="http://schemas.openxmlformats.org/drawingml/2006/main">
+            <a:pPr algn="l">
+              <a:defRPr sz="1050" b="1">
+                <a:solidFill>
+                  <a:srgbClr val="26355F"/>
+                </a:solidFill>
+                <a:latin typeface="Arial"/>
+                <a:ea typeface="Arial"/>
+                <a:cs typeface="Arial"/>
+              </a:defRPr>
+            </a:pPr>
+            <a:r>
+              <a:rPr sz="1050" b="1">
+                <a:solidFill>
+                  <a:srgbClr val="26355F"/>
+                </a:solidFill>
+                <a:latin typeface="Arial"/>
+                <a:ea typeface="Arial"/>
+                <a:cs typeface="Arial"/>
+              </a:rPr>
+              <a:t>global fill</a:t>
+            </a:r>
+          </a:p>
+        </p:txBody>
+      </p:sp>
+      <p:sp>
+        <p:nvSpPr>
+          <p:cNvPr id="113" name="contract-divider">
+            <a:extLst xmlns:a="http://schemas.openxmlformats.org/drawingml/2006/main">
+              <a:ext uri="{FF2B5EF4-FFF2-40B4-BE49-F238E27FC236}">
+                <a16:creationId xmlns:a16="http://schemas.microsoft.com/office/drawing/2014/main" id="{E7C003B6-43FC-4614-AB36-7C4F6A483DA0}"/>
+              </a:ext>
+            </a:extLst>
+          </p:cNvPr>
+          <p:cNvSpPr>
+            <a:spLocks xmlns:a="http://schemas.openxmlformats.org/drawingml/2006/main" noGrp="1"/>
+          </p:cNvSpPr>
+          <p:nvPr/>
+        </p:nvSpPr>
+        <p:spPr>
+          <a:xfrm xmlns:a="http://schemas.openxmlformats.org/drawingml/2006/main" flipH="0" flipV="0">
+            <a:off x="533400" y="5162550"/>
+            <a:ext cx="11125200" cy="9525"/>
+          </a:xfrm>
+          <a:prstGeom xmlns:a="http://schemas.openxmlformats.org/drawingml/2006/main" prst="line">
+            <a:avLst/>
+          </a:prstGeom>
+          <a:noFill xmlns:a="http://schemas.openxmlformats.org/drawingml/2006/main"/>
+          <a:ln xmlns:a="http://schemas.openxmlformats.org/drawingml/2006/main" w="12383">
+            <a:solidFill>
+              <a:srgbClr val="CAD3D4"/>
+            </a:solidFill>
+            <a:prstDash val="solid"/>
+          </a:ln>
+        </p:spPr>
+      </p:sp>
+      <p:sp>
+        <p:nvSpPr>
+          <p:cNvPr id="114" name="contract-heading">
+            <a:extLst xmlns:a="http://schemas.openxmlformats.org/drawingml/2006/main">
+              <a:ext uri="{FF2B5EF4-FFF2-40B4-BE49-F238E27FC236}">
+                <a16:creationId xmlns:a16="http://schemas.microsoft.com/office/drawing/2014/main" id="{815AB55B-25C6-42F3-B5E4-BCFBCCEE32DB}"/>
+              </a:ext>
+            </a:extLst>
+          </p:cNvPr>
+          <p:cNvSpPr>
+            <a:spLocks xmlns:a="http://schemas.openxmlformats.org/drawingml/2006/main" noGrp="1"/>
+          </p:cNvSpPr>
+          <p:nvPr/>
+        </p:nvSpPr>
+        <p:spPr>
+          <a:xfrm xmlns:a="http://schemas.openxmlformats.org/drawingml/2006/main" rot="0">
+            <a:off x="533400" y="5238750"/>
+            <a:ext cx="11125200" cy="238125"/>
+          </a:xfrm>
+          <a:prstGeom xmlns:a="http://schemas.openxmlformats.org/drawingml/2006/main" prst="rect">
+            <a:avLst/>
+          </a:prstGeom>
+          <a:noFill xmlns:a="http://schemas.openxmlformats.org/drawingml/2006/main"/>
+          <a:ln xmlns:a="http://schemas.openxmlformats.org/drawingml/2006/main" w="0">
+            <a:noFill/>
+            <a:prstDash val="solid"/>
+          </a:ln>
+        </p:spPr>
+        <p:txBody>
+          <a:bodyPr xmlns:a="http://schemas.openxmlformats.org/drawingml/2006/main" wrap="square" lIns="19050" tIns="9525" rIns="19050" bIns="9525" anchor="ctr">
+            <a:normAutofit fontScale="100000"/>
+          </a:bodyPr>
+          <a:lstStyle xmlns:a="http://schemas.openxmlformats.org/drawingml/2006/main"/>
+          <a:p xmlns:a="http://schemas.openxmlformats.org/drawingml/2006/main">
+            <a:pPr algn="ctr">
               <a:defRPr sz="1200" b="1">
                 <a:solidFill>
                   <a:srgbClr val="26355F"/>
@@ -4085,60 +6250,87 @@
                 <a:ea typeface="Arial"/>
                 <a:cs typeface="Arial"/>
               </a:rPr>
-              <a:t>Global order</a:t>
+              <a:t>Allocation contract</a:t>
             </a:r>
           </a:p>
         </p:txBody>
       </p:sp>
       <p:sp>
         <p:nvSpPr>
-          <p:cNvPr id="63" name="allocation-global-token-1">
-            <a:extLst xmlns:a="http://schemas.openxmlformats.org/drawingml/2006/main">
-              <a:ext uri="{FF2B5EF4-FFF2-40B4-BE49-F238E27FC236}">
-                <a16:creationId xmlns:a16="http://schemas.microsoft.com/office/drawing/2014/main" id="{775FCDD8-26F9-40A1-8E1E-231C04956EE7}"/>
-              </a:ext>
-            </a:extLst>
-          </p:cNvPr>
-          <p:cNvSpPr>
-            <a:spLocks xmlns:a="http://schemas.openxmlformats.org/drawingml/2006/main" noGrp="1"/>
-          </p:cNvSpPr>
-          <p:nvPr/>
-        </p:nvSpPr>
-        <p:spPr>
-          <a:xfrm xmlns:a="http://schemas.openxmlformats.org/drawingml/2006/main" rot="0">
-            <a:off x="7410450" y="2571750"/>
-            <a:ext cx="190500" cy="190500"/>
-          </a:xfrm>
-          <a:prstGeom xmlns:a="http://schemas.openxmlformats.org/drawingml/2006/main" prst="rect">
-            <a:avLst/>
-          </a:prstGeom>
-          <a:solidFill xmlns:a="http://schemas.openxmlformats.org/drawingml/2006/main">
-            <a:srgbClr val="26355F"/>
-          </a:solidFill>
-          <a:ln xmlns:a="http://schemas.openxmlformats.org/drawingml/2006/main" w="0">
-            <a:noFill/>
-            <a:prstDash val="solid"/>
-          </a:ln>
-        </p:spPr>
-      </p:sp>
-      <p:sp>
-        <p:nvSpPr>
-          <p:cNvPr id="64" name="allocation-global-rank-1">
-            <a:extLst xmlns:a="http://schemas.openxmlformats.org/drawingml/2006/main">
-              <a:ext uri="{FF2B5EF4-FFF2-40B4-BE49-F238E27FC236}">
-                <a16:creationId xmlns:a16="http://schemas.microsoft.com/office/drawing/2014/main" id="{06128AD7-65C7-419D-A4F3-73D4EBA0A12F}"/>
-              </a:ext>
-            </a:extLst>
-          </p:cNvPr>
-          <p:cNvSpPr>
-            <a:spLocks xmlns:a="http://schemas.openxmlformats.org/drawingml/2006/main" noGrp="1"/>
-          </p:cNvSpPr>
-          <p:nvPr/>
-        </p:nvSpPr>
-        <p:spPr>
-          <a:xfrm xmlns:a="http://schemas.openxmlformats.org/drawingml/2006/main" rot="0">
-            <a:off x="7410450" y="2819400"/>
-            <a:ext cx="190500" cy="190500"/>
+          <p:cNvPr id="115" name="contract-copy">
+            <a:extLst xmlns:a="http://schemas.openxmlformats.org/drawingml/2006/main">
+              <a:ext uri="{FF2B5EF4-FFF2-40B4-BE49-F238E27FC236}">
+                <a16:creationId xmlns:a16="http://schemas.microsoft.com/office/drawing/2014/main" id="{6DA88E26-33A1-45D9-A46F-B357CCFDB818}"/>
+              </a:ext>
+            </a:extLst>
+          </p:cNvPr>
+          <p:cNvSpPr>
+            <a:spLocks xmlns:a="http://schemas.openxmlformats.org/drawingml/2006/main" noGrp="1"/>
+          </p:cNvSpPr>
+          <p:nvPr/>
+        </p:nvSpPr>
+        <p:spPr>
+          <a:xfrm xmlns:a="http://schemas.openxmlformats.org/drawingml/2006/main" rot="0">
+            <a:off x="533400" y="5476875"/>
+            <a:ext cx="11125200" cy="228600"/>
+          </a:xfrm>
+          <a:prstGeom xmlns:a="http://schemas.openxmlformats.org/drawingml/2006/main" prst="rect">
+            <a:avLst/>
+          </a:prstGeom>
+          <a:noFill xmlns:a="http://schemas.openxmlformats.org/drawingml/2006/main"/>
+          <a:ln xmlns:a="http://schemas.openxmlformats.org/drawingml/2006/main" w="0">
+            <a:noFill/>
+            <a:prstDash val="solid"/>
+          </a:ln>
+        </p:spPr>
+        <p:txBody>
+          <a:bodyPr xmlns:a="http://schemas.openxmlformats.org/drawingml/2006/main" wrap="square" lIns="19050" tIns="9525" rIns="19050" bIns="9525" anchor="ctr">
+            <a:normAutofit fontScale="100000"/>
+          </a:bodyPr>
+          <a:lstStyle xmlns:a="http://schemas.openxmlformats.org/drawingml/2006/main"/>
+          <a:p xmlns:a="http://schemas.openxmlformats.org/drawingml/2006/main">
+            <a:pPr algn="ctr">
+              <a:defRPr sz="1050" b="0">
+                <a:solidFill>
+                  <a:srgbClr val="172027"/>
+                </a:solidFill>
+                <a:latin typeface="Arial"/>
+                <a:ea typeface="Arial"/>
+                <a:cs typeface="Arial"/>
+              </a:defRPr>
+            </a:pPr>
+            <a:r>
+              <a:rPr sz="1050" b="0">
+                <a:solidFill>
+                  <a:srgbClr val="172027"/>
+                </a:solidFill>
+                <a:latin typeface="Arial"/>
+                <a:ea typeface="Arial"/>
+                <a:cs typeface="Arial"/>
+              </a:rPr>
+              <a:t>Capacity fixed before allocation | stable ties | no duplicate slots | complete source ledger</a:t>
+            </a:r>
+          </a:p>
+        </p:txBody>
+      </p:sp>
+      <p:sp>
+        <p:nvSpPr>
+          <p:cNvPr id="116" name="scope-boundary">
+            <a:extLst xmlns:a="http://schemas.openxmlformats.org/drawingml/2006/main">
+              <a:ext uri="{FF2B5EF4-FFF2-40B4-BE49-F238E27FC236}">
+                <a16:creationId xmlns:a16="http://schemas.microsoft.com/office/drawing/2014/main" id="{1E8DE199-A4D3-4FBF-886E-83D334999E17}"/>
+              </a:ext>
+            </a:extLst>
+          </p:cNvPr>
+          <p:cNvSpPr>
+            <a:spLocks xmlns:a="http://schemas.openxmlformats.org/drawingml/2006/main" noGrp="1"/>
+          </p:cNvSpPr>
+          <p:nvPr/>
+        </p:nvSpPr>
+        <p:spPr>
+          <a:xfrm xmlns:a="http://schemas.openxmlformats.org/drawingml/2006/main" rot="0">
+            <a:off x="533400" y="5734050"/>
+            <a:ext cx="11125200" cy="209550"/>
           </a:xfrm>
           <a:prstGeom xmlns:a="http://schemas.openxmlformats.org/drawingml/2006/main" prst="rect">
             <a:avLst/>
@@ -4174,2060 +6366,15 @@
                 <a:ea typeface="Arial"/>
                 <a:cs typeface="Arial"/>
               </a:rPr>
-              <a:t>1</a:t>
+              <a:t>Queue entry changes access to review, not the strength or interpretation of the underlying evidence.</a:t>
             </a:r>
           </a:p>
         </p:txBody>
       </p:sp>
-      <p:sp>
-        <p:nvSpPr>
-          <p:cNvPr id="65" name="allocation-global-token-2">
-            <a:extLst xmlns:a="http://schemas.openxmlformats.org/drawingml/2006/main">
-              <a:ext uri="{FF2B5EF4-FFF2-40B4-BE49-F238E27FC236}">
-                <a16:creationId xmlns:a16="http://schemas.microsoft.com/office/drawing/2014/main" id="{EDEC1E67-8CA1-4807-83C3-5F8AAED5D0F3}"/>
-              </a:ext>
-            </a:extLst>
-          </p:cNvPr>
-          <p:cNvSpPr>
-            <a:spLocks xmlns:a="http://schemas.openxmlformats.org/drawingml/2006/main" noGrp="1"/>
-          </p:cNvSpPr>
-          <p:nvPr/>
-        </p:nvSpPr>
-        <p:spPr>
-          <a:xfrm xmlns:a="http://schemas.openxmlformats.org/drawingml/2006/main" rot="0">
-            <a:off x="7772400" y="2571750"/>
-            <a:ext cx="190500" cy="190500"/>
-          </a:xfrm>
-          <a:prstGeom xmlns:a="http://schemas.openxmlformats.org/drawingml/2006/main" prst="ellipse">
-            <a:avLst/>
-          </a:prstGeom>
-          <a:solidFill xmlns:a="http://schemas.openxmlformats.org/drawingml/2006/main">
-            <a:srgbClr val="257FA0"/>
-          </a:solidFill>
-          <a:ln xmlns:a="http://schemas.openxmlformats.org/drawingml/2006/main" w="7620">
-            <a:solidFill>
-              <a:srgbClr val="26355F"/>
-            </a:solidFill>
-            <a:prstDash val="solid"/>
-          </a:ln>
-        </p:spPr>
-      </p:sp>
-      <p:sp>
-        <p:nvSpPr>
-          <p:cNvPr id="66" name="allocation-global-rank-2">
-            <a:extLst xmlns:a="http://schemas.openxmlformats.org/drawingml/2006/main">
-              <a:ext uri="{FF2B5EF4-FFF2-40B4-BE49-F238E27FC236}">
-                <a16:creationId xmlns:a16="http://schemas.microsoft.com/office/drawing/2014/main" id="{B46747B2-81CF-4D96-BEC6-FDDD85F0E50F}"/>
-              </a:ext>
-            </a:extLst>
-          </p:cNvPr>
-          <p:cNvSpPr>
-            <a:spLocks xmlns:a="http://schemas.openxmlformats.org/drawingml/2006/main" noGrp="1"/>
-          </p:cNvSpPr>
-          <p:nvPr/>
-        </p:nvSpPr>
-        <p:spPr>
-          <a:xfrm xmlns:a="http://schemas.openxmlformats.org/drawingml/2006/main" rot="0">
-            <a:off x="7772400" y="2819400"/>
-            <a:ext cx="190500" cy="190500"/>
-          </a:xfrm>
-          <a:prstGeom xmlns:a="http://schemas.openxmlformats.org/drawingml/2006/main" prst="rect">
-            <a:avLst/>
-          </a:prstGeom>
-          <a:noFill xmlns:a="http://schemas.openxmlformats.org/drawingml/2006/main"/>
-          <a:ln xmlns:a="http://schemas.openxmlformats.org/drawingml/2006/main" w="0">
-            <a:noFill/>
-            <a:prstDash val="solid"/>
-          </a:ln>
-        </p:spPr>
-        <p:txBody>
-          <a:bodyPr xmlns:a="http://schemas.openxmlformats.org/drawingml/2006/main" wrap="square" lIns="19050" tIns="9525" rIns="19050" bIns="9525" anchor="ctr">
-            <a:normAutofit fontScale="100000"/>
-          </a:bodyPr>
-          <a:lstStyle xmlns:a="http://schemas.openxmlformats.org/drawingml/2006/main"/>
-          <a:p xmlns:a="http://schemas.openxmlformats.org/drawingml/2006/main">
-            <a:pPr algn="ctr">
-              <a:defRPr sz="975" b="0">
-                <a:solidFill>
-                  <a:srgbClr val="637077"/>
-                </a:solidFill>
-                <a:latin typeface="Arial"/>
-                <a:ea typeface="Arial"/>
-                <a:cs typeface="Arial"/>
-              </a:defRPr>
-            </a:pPr>
-            <a:r>
-              <a:rPr sz="975" b="0">
-                <a:solidFill>
-                  <a:srgbClr val="637077"/>
-                </a:solidFill>
-                <a:latin typeface="Arial"/>
-                <a:ea typeface="Arial"/>
-                <a:cs typeface="Arial"/>
-              </a:rPr>
-              <a:t>2</a:t>
-            </a:r>
-          </a:p>
-        </p:txBody>
-      </p:sp>
-      <p:sp>
-        <p:nvSpPr>
-          <p:cNvPr id="67" name="allocation-global-token-3">
-            <a:extLst xmlns:a="http://schemas.openxmlformats.org/drawingml/2006/main">
-              <a:ext uri="{FF2B5EF4-FFF2-40B4-BE49-F238E27FC236}">
-                <a16:creationId xmlns:a16="http://schemas.microsoft.com/office/drawing/2014/main" id="{BD33C9EA-78ED-45FF-B2C8-D542FD43A008}"/>
-              </a:ext>
-            </a:extLst>
-          </p:cNvPr>
-          <p:cNvSpPr>
-            <a:spLocks xmlns:a="http://schemas.openxmlformats.org/drawingml/2006/main" noGrp="1"/>
-          </p:cNvSpPr>
-          <p:nvPr/>
-        </p:nvSpPr>
-        <p:spPr>
-          <a:xfrm xmlns:a="http://schemas.openxmlformats.org/drawingml/2006/main" rot="0">
-            <a:off x="8134350" y="2571750"/>
-            <a:ext cx="190500" cy="190500"/>
-          </a:xfrm>
-          <a:prstGeom xmlns:a="http://schemas.openxmlformats.org/drawingml/2006/main" prst="diamond">
-            <a:avLst/>
-          </a:prstGeom>
-          <a:solidFill xmlns:a="http://schemas.openxmlformats.org/drawingml/2006/main">
-            <a:srgbClr val="765A8D"/>
-          </a:solidFill>
-          <a:ln xmlns:a="http://schemas.openxmlformats.org/drawingml/2006/main" w="7620">
-            <a:solidFill>
-              <a:srgbClr val="26355F"/>
-            </a:solidFill>
-            <a:prstDash val="solid"/>
-          </a:ln>
-        </p:spPr>
-      </p:sp>
-      <p:sp>
-        <p:nvSpPr>
-          <p:cNvPr id="68" name="allocation-global-rank-3">
-            <a:extLst xmlns:a="http://schemas.openxmlformats.org/drawingml/2006/main">
-              <a:ext uri="{FF2B5EF4-FFF2-40B4-BE49-F238E27FC236}">
-                <a16:creationId xmlns:a16="http://schemas.microsoft.com/office/drawing/2014/main" id="{F96E4A04-D249-4B69-BF13-2AE4BA77B3B0}"/>
-              </a:ext>
-            </a:extLst>
-          </p:cNvPr>
-          <p:cNvSpPr>
-            <a:spLocks xmlns:a="http://schemas.openxmlformats.org/drawingml/2006/main" noGrp="1"/>
-          </p:cNvSpPr>
-          <p:nvPr/>
-        </p:nvSpPr>
-        <p:spPr>
-          <a:xfrm xmlns:a="http://schemas.openxmlformats.org/drawingml/2006/main" rot="0">
-            <a:off x="8134350" y="2819400"/>
-            <a:ext cx="190500" cy="190500"/>
-          </a:xfrm>
-          <a:prstGeom xmlns:a="http://schemas.openxmlformats.org/drawingml/2006/main" prst="rect">
-            <a:avLst/>
-          </a:prstGeom>
-          <a:noFill xmlns:a="http://schemas.openxmlformats.org/drawingml/2006/main"/>
-          <a:ln xmlns:a="http://schemas.openxmlformats.org/drawingml/2006/main" w="0">
-            <a:noFill/>
-            <a:prstDash val="solid"/>
-          </a:ln>
-        </p:spPr>
-        <p:txBody>
-          <a:bodyPr xmlns:a="http://schemas.openxmlformats.org/drawingml/2006/main" wrap="square" lIns="19050" tIns="9525" rIns="19050" bIns="9525" anchor="ctr">
-            <a:normAutofit fontScale="100000"/>
-          </a:bodyPr>
-          <a:lstStyle xmlns:a="http://schemas.openxmlformats.org/drawingml/2006/main"/>
-          <a:p xmlns:a="http://schemas.openxmlformats.org/drawingml/2006/main">
-            <a:pPr algn="ctr">
-              <a:defRPr sz="975" b="0">
-                <a:solidFill>
-                  <a:srgbClr val="637077"/>
-                </a:solidFill>
-                <a:latin typeface="Arial"/>
-                <a:ea typeface="Arial"/>
-                <a:cs typeface="Arial"/>
-              </a:defRPr>
-            </a:pPr>
-            <a:r>
-              <a:rPr sz="975" b="0">
-                <a:solidFill>
-                  <a:srgbClr val="637077"/>
-                </a:solidFill>
-                <a:latin typeface="Arial"/>
-                <a:ea typeface="Arial"/>
-                <a:cs typeface="Arial"/>
-              </a:rPr>
-              <a:t>3</a:t>
-            </a:r>
-          </a:p>
-        </p:txBody>
-      </p:sp>
-      <p:sp>
-        <p:nvSpPr>
-          <p:cNvPr id="69" name="allocation-global-token-4">
-            <a:extLst xmlns:a="http://schemas.openxmlformats.org/drawingml/2006/main">
-              <a:ext uri="{FF2B5EF4-FFF2-40B4-BE49-F238E27FC236}">
-                <a16:creationId xmlns:a16="http://schemas.microsoft.com/office/drawing/2014/main" id="{610EA4C6-8453-4F8C-A8A6-40E868234FC1}"/>
-              </a:ext>
-            </a:extLst>
-          </p:cNvPr>
-          <p:cNvSpPr>
-            <a:spLocks xmlns:a="http://schemas.openxmlformats.org/drawingml/2006/main" noGrp="1"/>
-          </p:cNvSpPr>
-          <p:nvPr/>
-        </p:nvSpPr>
-        <p:spPr>
-          <a:xfrm xmlns:a="http://schemas.openxmlformats.org/drawingml/2006/main" rot="0">
-            <a:off x="8496300" y="2571750"/>
-            <a:ext cx="190500" cy="190500"/>
-          </a:xfrm>
-          <a:prstGeom xmlns:a="http://schemas.openxmlformats.org/drawingml/2006/main" prst="rect">
-            <a:avLst/>
-          </a:prstGeom>
-          <a:solidFill xmlns:a="http://schemas.openxmlformats.org/drawingml/2006/main">
-            <a:srgbClr val="26355F"/>
-          </a:solidFill>
-          <a:ln xmlns:a="http://schemas.openxmlformats.org/drawingml/2006/main" w="0">
-            <a:noFill/>
-            <a:prstDash val="solid"/>
-          </a:ln>
-        </p:spPr>
-      </p:sp>
-      <p:sp>
-        <p:nvSpPr>
-          <p:cNvPr id="70" name="allocation-global-rank-4">
-            <a:extLst xmlns:a="http://schemas.openxmlformats.org/drawingml/2006/main">
-              <a:ext uri="{FF2B5EF4-FFF2-40B4-BE49-F238E27FC236}">
-                <a16:creationId xmlns:a16="http://schemas.microsoft.com/office/drawing/2014/main" id="{CFB087F9-EEEF-4647-9F74-7CB654A7B7DF}"/>
-              </a:ext>
-            </a:extLst>
-          </p:cNvPr>
-          <p:cNvSpPr>
-            <a:spLocks xmlns:a="http://schemas.openxmlformats.org/drawingml/2006/main" noGrp="1"/>
-          </p:cNvSpPr>
-          <p:nvPr/>
-        </p:nvSpPr>
-        <p:spPr>
-          <a:xfrm xmlns:a="http://schemas.openxmlformats.org/drawingml/2006/main" rot="0">
-            <a:off x="8496300" y="2819400"/>
-            <a:ext cx="190500" cy="190500"/>
-          </a:xfrm>
-          <a:prstGeom xmlns:a="http://schemas.openxmlformats.org/drawingml/2006/main" prst="rect">
-            <a:avLst/>
-          </a:prstGeom>
-          <a:noFill xmlns:a="http://schemas.openxmlformats.org/drawingml/2006/main"/>
-          <a:ln xmlns:a="http://schemas.openxmlformats.org/drawingml/2006/main" w="0">
-            <a:noFill/>
-            <a:prstDash val="solid"/>
-          </a:ln>
-        </p:spPr>
-        <p:txBody>
-          <a:bodyPr xmlns:a="http://schemas.openxmlformats.org/drawingml/2006/main" wrap="square" lIns="19050" tIns="9525" rIns="19050" bIns="9525" anchor="ctr">
-            <a:normAutofit fontScale="100000"/>
-          </a:bodyPr>
-          <a:lstStyle xmlns:a="http://schemas.openxmlformats.org/drawingml/2006/main"/>
-          <a:p xmlns:a="http://schemas.openxmlformats.org/drawingml/2006/main">
-            <a:pPr algn="ctr">
-              <a:defRPr sz="975" b="0">
-                <a:solidFill>
-                  <a:srgbClr val="637077"/>
-                </a:solidFill>
-                <a:latin typeface="Arial"/>
-                <a:ea typeface="Arial"/>
-                <a:cs typeface="Arial"/>
-              </a:defRPr>
-            </a:pPr>
-            <a:r>
-              <a:rPr sz="975" b="0">
-                <a:solidFill>
-                  <a:srgbClr val="637077"/>
-                </a:solidFill>
-                <a:latin typeface="Arial"/>
-                <a:ea typeface="Arial"/>
-                <a:cs typeface="Arial"/>
-              </a:rPr>
-              <a:t>4</a:t>
-            </a:r>
-          </a:p>
-        </p:txBody>
-      </p:sp>
-      <p:sp>
-        <p:nvSpPr>
-          <p:cNvPr id="71" name="allocation-global-baseline">
-            <a:extLst xmlns:a="http://schemas.openxmlformats.org/drawingml/2006/main">
-              <a:ext uri="{FF2B5EF4-FFF2-40B4-BE49-F238E27FC236}">
-                <a16:creationId xmlns:a16="http://schemas.microsoft.com/office/drawing/2014/main" id="{E82733F3-56BB-4DA6-8453-7BFA3D268D36}"/>
-              </a:ext>
-            </a:extLst>
-          </p:cNvPr>
-          <p:cNvSpPr>
-            <a:spLocks xmlns:a="http://schemas.openxmlformats.org/drawingml/2006/main" noGrp="1"/>
-          </p:cNvSpPr>
-          <p:nvPr/>
-        </p:nvSpPr>
-        <p:spPr>
-          <a:xfrm xmlns:a="http://schemas.openxmlformats.org/drawingml/2006/main" flipH="0" flipV="0">
-            <a:off x="7391400" y="3057525"/>
-            <a:ext cx="1428750" cy="9525"/>
-          </a:xfrm>
-          <a:prstGeom xmlns:a="http://schemas.openxmlformats.org/drawingml/2006/main" prst="line">
-            <a:avLst/>
-          </a:prstGeom>
-          <a:noFill xmlns:a="http://schemas.openxmlformats.org/drawingml/2006/main"/>
-          <a:ln xmlns:a="http://schemas.openxmlformats.org/drawingml/2006/main" w="11430">
-            <a:solidFill>
-              <a:srgbClr val="CAD3D4"/>
-            </a:solidFill>
-            <a:prstDash val="solid"/>
-          </a:ln>
-        </p:spPr>
-      </p:sp>
-      <p:sp>
-        <p:nvSpPr>
-          <p:cNvPr id="72" name="allocation-reserved-label">
-            <a:extLst xmlns:a="http://schemas.openxmlformats.org/drawingml/2006/main">
-              <a:ext uri="{FF2B5EF4-FFF2-40B4-BE49-F238E27FC236}">
-                <a16:creationId xmlns:a16="http://schemas.microsoft.com/office/drawing/2014/main" id="{5EB5D7D0-9AD4-42DE-9057-544537E15211}"/>
-              </a:ext>
-            </a:extLst>
-          </p:cNvPr>
-          <p:cNvSpPr>
-            <a:spLocks xmlns:a="http://schemas.openxmlformats.org/drawingml/2006/main" noGrp="1"/>
-          </p:cNvSpPr>
-          <p:nvPr/>
-        </p:nvSpPr>
-        <p:spPr>
-          <a:xfrm xmlns:a="http://schemas.openxmlformats.org/drawingml/2006/main" rot="0">
-            <a:off x="5943600" y="3762375"/>
-            <a:ext cx="685800" cy="190500"/>
-          </a:xfrm>
-          <a:prstGeom xmlns:a="http://schemas.openxmlformats.org/drawingml/2006/main" prst="rect">
-            <a:avLst/>
-          </a:prstGeom>
-          <a:noFill xmlns:a="http://schemas.openxmlformats.org/drawingml/2006/main"/>
-          <a:ln xmlns:a="http://schemas.openxmlformats.org/drawingml/2006/main" w="0">
-            <a:noFill/>
-            <a:prstDash val="solid"/>
-          </a:ln>
-        </p:spPr>
-        <p:txBody>
-          <a:bodyPr xmlns:a="http://schemas.openxmlformats.org/drawingml/2006/main" wrap="square" lIns="19050" tIns="9525" rIns="19050" bIns="9525" anchor="ctr">
-            <a:normAutofit fontScale="100000"/>
-          </a:bodyPr>
-          <a:lstStyle xmlns:a="http://schemas.openxmlformats.org/drawingml/2006/main"/>
-          <a:p xmlns:a="http://schemas.openxmlformats.org/drawingml/2006/main">
-            <a:pPr algn="ctr">
-              <a:defRPr sz="1050" b="1">
-                <a:solidFill>
-                  <a:srgbClr val="26785F"/>
-                </a:solidFill>
-                <a:latin typeface="Arial"/>
-                <a:ea typeface="Arial"/>
-                <a:cs typeface="Arial"/>
-              </a:defRPr>
-            </a:pPr>
-            <a:r>
-              <a:rPr sz="1050" b="1">
-                <a:solidFill>
-                  <a:srgbClr val="26785F"/>
-                </a:solidFill>
-                <a:latin typeface="Arial"/>
-                <a:ea typeface="Arial"/>
-                <a:cs typeface="Arial"/>
-              </a:rPr>
-              <a:t>Reserved</a:t>
-            </a:r>
-          </a:p>
-        </p:txBody>
-      </p:sp>
-      <p:sp>
-        <p:nvSpPr>
-          <p:cNvPr id="73" name="allocation-fill-label">
-            <a:extLst xmlns:a="http://schemas.openxmlformats.org/drawingml/2006/main">
-              <a:ext uri="{FF2B5EF4-FFF2-40B4-BE49-F238E27FC236}">
-                <a16:creationId xmlns:a16="http://schemas.microsoft.com/office/drawing/2014/main" id="{58905538-D7C2-431D-B4C9-E25358932869}"/>
-              </a:ext>
-            </a:extLst>
-          </p:cNvPr>
-          <p:cNvSpPr>
-            <a:spLocks xmlns:a="http://schemas.openxmlformats.org/drawingml/2006/main" noGrp="1"/>
-          </p:cNvSpPr>
-          <p:nvPr/>
-        </p:nvSpPr>
-        <p:spPr>
-          <a:xfrm xmlns:a="http://schemas.openxmlformats.org/drawingml/2006/main" rot="0">
-            <a:off x="7677150" y="3762375"/>
-            <a:ext cx="876300" cy="190500"/>
-          </a:xfrm>
-          <a:prstGeom xmlns:a="http://schemas.openxmlformats.org/drawingml/2006/main" prst="rect">
-            <a:avLst/>
-          </a:prstGeom>
-          <a:noFill xmlns:a="http://schemas.openxmlformats.org/drawingml/2006/main"/>
-          <a:ln xmlns:a="http://schemas.openxmlformats.org/drawingml/2006/main" w="0">
-            <a:noFill/>
-            <a:prstDash val="solid"/>
-          </a:ln>
-        </p:spPr>
-        <p:txBody>
-          <a:bodyPr xmlns:a="http://schemas.openxmlformats.org/drawingml/2006/main" wrap="square" lIns="19050" tIns="9525" rIns="19050" bIns="9525" anchor="ctr">
-            <a:normAutofit fontScale="100000"/>
-          </a:bodyPr>
-          <a:lstStyle xmlns:a="http://schemas.openxmlformats.org/drawingml/2006/main"/>
-          <a:p xmlns:a="http://schemas.openxmlformats.org/drawingml/2006/main">
-            <a:pPr algn="ctr">
-              <a:defRPr sz="1050" b="1">
-                <a:solidFill>
-                  <a:srgbClr val="26355F"/>
-                </a:solidFill>
-                <a:latin typeface="Arial"/>
-                <a:ea typeface="Arial"/>
-                <a:cs typeface="Arial"/>
-              </a:defRPr>
-            </a:pPr>
-            <a:r>
-              <a:rPr sz="1050" b="1">
-                <a:solidFill>
-                  <a:srgbClr val="26355F"/>
-                </a:solidFill>
-                <a:latin typeface="Arial"/>
-                <a:ea typeface="Arial"/>
-                <a:cs typeface="Arial"/>
-              </a:rPr>
-              <a:t>Global fill</a:t>
-            </a:r>
-          </a:p>
-        </p:txBody>
-      </p:sp>
-      <p:sp>
-        <p:nvSpPr>
-          <p:cNvPr id="74" name="allocation-slot-1">
-            <a:extLst xmlns:a="http://schemas.openxmlformats.org/drawingml/2006/main">
-              <a:ext uri="{FF2B5EF4-FFF2-40B4-BE49-F238E27FC236}">
-                <a16:creationId xmlns:a16="http://schemas.microsoft.com/office/drawing/2014/main" id="{FC28115E-F413-4211-AAB1-33E45585DEB2}"/>
-              </a:ext>
-            </a:extLst>
-          </p:cNvPr>
-          <p:cNvSpPr>
-            <a:spLocks xmlns:a="http://schemas.openxmlformats.org/drawingml/2006/main" noGrp="1"/>
-          </p:cNvSpPr>
-          <p:nvPr/>
-        </p:nvSpPr>
-        <p:spPr>
-          <a:xfrm xmlns:a="http://schemas.openxmlformats.org/drawingml/2006/main" rot="0">
-            <a:off x="5791200" y="4010025"/>
-            <a:ext cx="352425" cy="438150"/>
-          </a:xfrm>
-          <a:prstGeom xmlns:a="http://schemas.openxmlformats.org/drawingml/2006/main" prst="rect">
-            <a:avLst/>
-          </a:prstGeom>
-          <a:solidFill xmlns:a="http://schemas.openxmlformats.org/drawingml/2006/main">
-            <a:srgbClr val="E6F1EB"/>
-          </a:solidFill>
-          <a:ln xmlns:a="http://schemas.openxmlformats.org/drawingml/2006/main" w="12383">
-            <a:solidFill>
-              <a:srgbClr val="26785F"/>
-            </a:solidFill>
-            <a:prstDash val="solid"/>
-          </a:ln>
-        </p:spPr>
-      </p:sp>
-      <p:sp>
-        <p:nvSpPr>
-          <p:cNvPr id="75" name="allocation-slot-token-1">
-            <a:extLst xmlns:a="http://schemas.openxmlformats.org/drawingml/2006/main">
-              <a:ext uri="{FF2B5EF4-FFF2-40B4-BE49-F238E27FC236}">
-                <a16:creationId xmlns:a16="http://schemas.microsoft.com/office/drawing/2014/main" id="{8A809C25-072F-45EC-A64B-7F95AD54D66E}"/>
-              </a:ext>
-            </a:extLst>
-          </p:cNvPr>
-          <p:cNvSpPr>
-            <a:spLocks xmlns:a="http://schemas.openxmlformats.org/drawingml/2006/main" noGrp="1"/>
-          </p:cNvSpPr>
-          <p:nvPr/>
-        </p:nvSpPr>
-        <p:spPr>
-          <a:xfrm xmlns:a="http://schemas.openxmlformats.org/drawingml/2006/main" rot="0">
-            <a:off x="5876925" y="4143375"/>
-            <a:ext cx="171450" cy="171450"/>
-          </a:xfrm>
-          <a:prstGeom xmlns:a="http://schemas.openxmlformats.org/drawingml/2006/main" prst="ellipse">
-            <a:avLst/>
-          </a:prstGeom>
-          <a:solidFill xmlns:a="http://schemas.openxmlformats.org/drawingml/2006/main">
-            <a:srgbClr val="257FA0"/>
-          </a:solidFill>
-          <a:ln xmlns:a="http://schemas.openxmlformats.org/drawingml/2006/main" w="7620">
-            <a:solidFill>
-              <a:srgbClr val="26355F"/>
-            </a:solidFill>
-            <a:prstDash val="solid"/>
-          </a:ln>
-        </p:spPr>
-      </p:sp>
-      <p:sp>
-        <p:nvSpPr>
-          <p:cNvPr id="76" name="allocation-slot-2">
-            <a:extLst xmlns:a="http://schemas.openxmlformats.org/drawingml/2006/main">
-              <a:ext uri="{FF2B5EF4-FFF2-40B4-BE49-F238E27FC236}">
-                <a16:creationId xmlns:a16="http://schemas.microsoft.com/office/drawing/2014/main" id="{9AB07EAC-15EB-42BF-BF6D-C2B113B4EFCD}"/>
-              </a:ext>
-            </a:extLst>
-          </p:cNvPr>
-          <p:cNvSpPr>
-            <a:spLocks xmlns:a="http://schemas.openxmlformats.org/drawingml/2006/main" noGrp="1"/>
-          </p:cNvSpPr>
-          <p:nvPr/>
-        </p:nvSpPr>
-        <p:spPr>
-          <a:xfrm xmlns:a="http://schemas.openxmlformats.org/drawingml/2006/main" rot="0">
-            <a:off x="6162675" y="4010025"/>
-            <a:ext cx="352425" cy="438150"/>
-          </a:xfrm>
-          <a:prstGeom xmlns:a="http://schemas.openxmlformats.org/drawingml/2006/main" prst="rect">
-            <a:avLst/>
-          </a:prstGeom>
-          <a:solidFill xmlns:a="http://schemas.openxmlformats.org/drawingml/2006/main">
-            <a:srgbClr val="E6F1EB"/>
-          </a:solidFill>
-          <a:ln xmlns:a="http://schemas.openxmlformats.org/drawingml/2006/main" w="12383">
-            <a:solidFill>
-              <a:srgbClr val="26785F"/>
-            </a:solidFill>
-            <a:prstDash val="solid"/>
-          </a:ln>
-        </p:spPr>
-      </p:sp>
-      <p:sp>
-        <p:nvSpPr>
-          <p:cNvPr id="77" name="allocation-slot-token-2">
-            <a:extLst xmlns:a="http://schemas.openxmlformats.org/drawingml/2006/main">
-              <a:ext uri="{FF2B5EF4-FFF2-40B4-BE49-F238E27FC236}">
-                <a16:creationId xmlns:a16="http://schemas.microsoft.com/office/drawing/2014/main" id="{398464DE-900B-48D6-97F8-CA9D3C14E06A}"/>
-              </a:ext>
-            </a:extLst>
-          </p:cNvPr>
-          <p:cNvSpPr>
-            <a:spLocks xmlns:a="http://schemas.openxmlformats.org/drawingml/2006/main" noGrp="1"/>
-          </p:cNvSpPr>
-          <p:nvPr/>
-        </p:nvSpPr>
-        <p:spPr>
-          <a:xfrm xmlns:a="http://schemas.openxmlformats.org/drawingml/2006/main" rot="0">
-            <a:off x="6248400" y="4143375"/>
-            <a:ext cx="171450" cy="171450"/>
-          </a:xfrm>
-          <a:prstGeom xmlns:a="http://schemas.openxmlformats.org/drawingml/2006/main" prst="diamond">
-            <a:avLst/>
-          </a:prstGeom>
-          <a:solidFill xmlns:a="http://schemas.openxmlformats.org/drawingml/2006/main">
-            <a:srgbClr val="765A8D"/>
-          </a:solidFill>
-          <a:ln xmlns:a="http://schemas.openxmlformats.org/drawingml/2006/main" w="7620">
-            <a:solidFill>
-              <a:srgbClr val="26355F"/>
-            </a:solidFill>
-            <a:prstDash val="solid"/>
-          </a:ln>
-        </p:spPr>
-      </p:sp>
-      <p:sp>
-        <p:nvSpPr>
-          <p:cNvPr id="78" name="allocation-slot-3">
-            <a:extLst xmlns:a="http://schemas.openxmlformats.org/drawingml/2006/main">
-              <a:ext uri="{FF2B5EF4-FFF2-40B4-BE49-F238E27FC236}">
-                <a16:creationId xmlns:a16="http://schemas.microsoft.com/office/drawing/2014/main" id="{C89D51A7-1D05-413F-865F-B7CC425371FD}"/>
-              </a:ext>
-            </a:extLst>
-          </p:cNvPr>
-          <p:cNvSpPr>
-            <a:spLocks xmlns:a="http://schemas.openxmlformats.org/drawingml/2006/main" noGrp="1"/>
-          </p:cNvSpPr>
-          <p:nvPr/>
-        </p:nvSpPr>
-        <p:spPr>
-          <a:xfrm xmlns:a="http://schemas.openxmlformats.org/drawingml/2006/main" rot="0">
-            <a:off x="6534150" y="4010025"/>
-            <a:ext cx="352425" cy="438150"/>
-          </a:xfrm>
-          <a:prstGeom xmlns:a="http://schemas.openxmlformats.org/drawingml/2006/main" prst="rect">
-            <a:avLst/>
-          </a:prstGeom>
-          <a:solidFill xmlns:a="http://schemas.openxmlformats.org/drawingml/2006/main">
-            <a:srgbClr val="FFFFFF"/>
-          </a:solidFill>
-          <a:ln xmlns:a="http://schemas.openxmlformats.org/drawingml/2006/main" w="12383">
-            <a:solidFill>
-              <a:srgbClr val="26355F"/>
-            </a:solidFill>
-            <a:prstDash val="solid"/>
-          </a:ln>
-        </p:spPr>
-      </p:sp>
-      <p:sp>
-        <p:nvSpPr>
-          <p:cNvPr id="79" name="allocation-slot-token-3">
-            <a:extLst xmlns:a="http://schemas.openxmlformats.org/drawingml/2006/main">
-              <a:ext uri="{FF2B5EF4-FFF2-40B4-BE49-F238E27FC236}">
-                <a16:creationId xmlns:a16="http://schemas.microsoft.com/office/drawing/2014/main" id="{A92EC4BB-82EE-4A71-B002-A72E7E7DDF17}"/>
-              </a:ext>
-            </a:extLst>
-          </p:cNvPr>
-          <p:cNvSpPr>
-            <a:spLocks xmlns:a="http://schemas.openxmlformats.org/drawingml/2006/main" noGrp="1"/>
-          </p:cNvSpPr>
-          <p:nvPr/>
-        </p:nvSpPr>
-        <p:spPr>
-          <a:xfrm xmlns:a="http://schemas.openxmlformats.org/drawingml/2006/main" rot="0">
-            <a:off x="6619875" y="4143375"/>
-            <a:ext cx="171450" cy="171450"/>
-          </a:xfrm>
-          <a:prstGeom xmlns:a="http://schemas.openxmlformats.org/drawingml/2006/main" prst="rect">
-            <a:avLst/>
-          </a:prstGeom>
-          <a:solidFill xmlns:a="http://schemas.openxmlformats.org/drawingml/2006/main">
-            <a:srgbClr val="26355F"/>
-          </a:solidFill>
-          <a:ln xmlns:a="http://schemas.openxmlformats.org/drawingml/2006/main" w="0">
-            <a:noFill/>
-            <a:prstDash val="solid"/>
-          </a:ln>
-        </p:spPr>
-      </p:sp>
-      <p:sp>
-        <p:nvSpPr>
-          <p:cNvPr id="80" name="allocation-slot-4">
-            <a:extLst xmlns:a="http://schemas.openxmlformats.org/drawingml/2006/main">
-              <a:ext uri="{FF2B5EF4-FFF2-40B4-BE49-F238E27FC236}">
-                <a16:creationId xmlns:a16="http://schemas.microsoft.com/office/drawing/2014/main" id="{90C2BD6B-6ECE-42F1-BDE1-39C9F57C99F2}"/>
-              </a:ext>
-            </a:extLst>
-          </p:cNvPr>
-          <p:cNvSpPr>
-            <a:spLocks xmlns:a="http://schemas.openxmlformats.org/drawingml/2006/main" noGrp="1"/>
-          </p:cNvSpPr>
-          <p:nvPr/>
-        </p:nvSpPr>
-        <p:spPr>
-          <a:xfrm xmlns:a="http://schemas.openxmlformats.org/drawingml/2006/main" rot="0">
-            <a:off x="6905625" y="4010025"/>
-            <a:ext cx="352425" cy="438150"/>
-          </a:xfrm>
-          <a:prstGeom xmlns:a="http://schemas.openxmlformats.org/drawingml/2006/main" prst="rect">
-            <a:avLst/>
-          </a:prstGeom>
-          <a:solidFill xmlns:a="http://schemas.openxmlformats.org/drawingml/2006/main">
-            <a:srgbClr val="FFFFFF"/>
-          </a:solidFill>
-          <a:ln xmlns:a="http://schemas.openxmlformats.org/drawingml/2006/main" w="12383">
-            <a:solidFill>
-              <a:srgbClr val="26355F"/>
-            </a:solidFill>
-            <a:prstDash val="solid"/>
-          </a:ln>
-        </p:spPr>
-      </p:sp>
-      <p:sp>
-        <p:nvSpPr>
-          <p:cNvPr id="81" name="allocation-slot-token-4">
-            <a:extLst xmlns:a="http://schemas.openxmlformats.org/drawingml/2006/main">
-              <a:ext uri="{FF2B5EF4-FFF2-40B4-BE49-F238E27FC236}">
-                <a16:creationId xmlns:a16="http://schemas.microsoft.com/office/drawing/2014/main" id="{1D7FA37D-51AB-492B-896C-030ED78DFD90}"/>
-              </a:ext>
-            </a:extLst>
-          </p:cNvPr>
-          <p:cNvSpPr>
-            <a:spLocks xmlns:a="http://schemas.openxmlformats.org/drawingml/2006/main" noGrp="1"/>
-          </p:cNvSpPr>
-          <p:nvPr/>
-        </p:nvSpPr>
-        <p:spPr>
-          <a:xfrm xmlns:a="http://schemas.openxmlformats.org/drawingml/2006/main" rot="0">
-            <a:off x="6991350" y="4143375"/>
-            <a:ext cx="171450" cy="171450"/>
-          </a:xfrm>
-          <a:prstGeom xmlns:a="http://schemas.openxmlformats.org/drawingml/2006/main" prst="ellipse">
-            <a:avLst/>
-          </a:prstGeom>
-          <a:solidFill xmlns:a="http://schemas.openxmlformats.org/drawingml/2006/main">
-            <a:srgbClr val="257FA0"/>
-          </a:solidFill>
-          <a:ln xmlns:a="http://schemas.openxmlformats.org/drawingml/2006/main" w="7620">
-            <a:solidFill>
-              <a:srgbClr val="26355F"/>
-            </a:solidFill>
-            <a:prstDash val="solid"/>
-          </a:ln>
-        </p:spPr>
-      </p:sp>
-      <p:sp>
-        <p:nvSpPr>
-          <p:cNvPr id="82" name="allocation-slot-5">
-            <a:extLst xmlns:a="http://schemas.openxmlformats.org/drawingml/2006/main">
-              <a:ext uri="{FF2B5EF4-FFF2-40B4-BE49-F238E27FC236}">
-                <a16:creationId xmlns:a16="http://schemas.microsoft.com/office/drawing/2014/main" id="{C8027854-DF4E-481B-861D-51BEE9561B88}"/>
-              </a:ext>
-            </a:extLst>
-          </p:cNvPr>
-          <p:cNvSpPr>
-            <a:spLocks xmlns:a="http://schemas.openxmlformats.org/drawingml/2006/main" noGrp="1"/>
-          </p:cNvSpPr>
-          <p:nvPr/>
-        </p:nvSpPr>
-        <p:spPr>
-          <a:xfrm xmlns:a="http://schemas.openxmlformats.org/drawingml/2006/main" rot="0">
-            <a:off x="7277100" y="4010025"/>
-            <a:ext cx="352425" cy="438150"/>
-          </a:xfrm>
-          <a:prstGeom xmlns:a="http://schemas.openxmlformats.org/drawingml/2006/main" prst="rect">
-            <a:avLst/>
-          </a:prstGeom>
-          <a:solidFill xmlns:a="http://schemas.openxmlformats.org/drawingml/2006/main">
-            <a:srgbClr val="FFFFFF"/>
-          </a:solidFill>
-          <a:ln xmlns:a="http://schemas.openxmlformats.org/drawingml/2006/main" w="12383">
-            <a:solidFill>
-              <a:srgbClr val="26355F"/>
-            </a:solidFill>
-            <a:prstDash val="solid"/>
-          </a:ln>
-        </p:spPr>
-      </p:sp>
-      <p:sp>
-        <p:nvSpPr>
-          <p:cNvPr id="83" name="allocation-slot-token-5">
-            <a:extLst xmlns:a="http://schemas.openxmlformats.org/drawingml/2006/main">
-              <a:ext uri="{FF2B5EF4-FFF2-40B4-BE49-F238E27FC236}">
-                <a16:creationId xmlns:a16="http://schemas.microsoft.com/office/drawing/2014/main" id="{1B08BAC0-DC3E-471D-924D-B8BA6137BE43}"/>
-              </a:ext>
-            </a:extLst>
-          </p:cNvPr>
-          <p:cNvSpPr>
-            <a:spLocks xmlns:a="http://schemas.openxmlformats.org/drawingml/2006/main" noGrp="1"/>
-          </p:cNvSpPr>
-          <p:nvPr/>
-        </p:nvSpPr>
-        <p:spPr>
-          <a:xfrm xmlns:a="http://schemas.openxmlformats.org/drawingml/2006/main" rot="0">
-            <a:off x="7362825" y="4143375"/>
-            <a:ext cx="171450" cy="171450"/>
-          </a:xfrm>
-          <a:prstGeom xmlns:a="http://schemas.openxmlformats.org/drawingml/2006/main" prst="rect">
-            <a:avLst/>
-          </a:prstGeom>
-          <a:solidFill xmlns:a="http://schemas.openxmlformats.org/drawingml/2006/main">
-            <a:srgbClr val="26355F"/>
-          </a:solidFill>
-          <a:ln xmlns:a="http://schemas.openxmlformats.org/drawingml/2006/main" w="0">
-            <a:noFill/>
-            <a:prstDash val="solid"/>
-          </a:ln>
-        </p:spPr>
-      </p:sp>
-      <p:sp>
-        <p:nvSpPr>
-          <p:cNvPr id="84" name="allocation-slot-6">
-            <a:extLst xmlns:a="http://schemas.openxmlformats.org/drawingml/2006/main">
-              <a:ext uri="{FF2B5EF4-FFF2-40B4-BE49-F238E27FC236}">
-                <a16:creationId xmlns:a16="http://schemas.microsoft.com/office/drawing/2014/main" id="{80AE180B-6C96-4BE5-A145-C00075EB2D24}"/>
-              </a:ext>
-            </a:extLst>
-          </p:cNvPr>
-          <p:cNvSpPr>
-            <a:spLocks xmlns:a="http://schemas.openxmlformats.org/drawingml/2006/main" noGrp="1"/>
-          </p:cNvSpPr>
-          <p:nvPr/>
-        </p:nvSpPr>
-        <p:spPr>
-          <a:xfrm xmlns:a="http://schemas.openxmlformats.org/drawingml/2006/main" rot="0">
-            <a:off x="7648575" y="4010025"/>
-            <a:ext cx="352425" cy="438150"/>
-          </a:xfrm>
-          <a:prstGeom xmlns:a="http://schemas.openxmlformats.org/drawingml/2006/main" prst="rect">
-            <a:avLst/>
-          </a:prstGeom>
-          <a:solidFill xmlns:a="http://schemas.openxmlformats.org/drawingml/2006/main">
-            <a:srgbClr val="FFFFFF"/>
-          </a:solidFill>
-          <a:ln xmlns:a="http://schemas.openxmlformats.org/drawingml/2006/main" w="12383">
-            <a:solidFill>
-              <a:srgbClr val="26355F"/>
-            </a:solidFill>
-            <a:prstDash val="solid"/>
-          </a:ln>
-        </p:spPr>
-      </p:sp>
-      <p:sp>
-        <p:nvSpPr>
-          <p:cNvPr id="85" name="allocation-slot-token-6">
-            <a:extLst xmlns:a="http://schemas.openxmlformats.org/drawingml/2006/main">
-              <a:ext uri="{FF2B5EF4-FFF2-40B4-BE49-F238E27FC236}">
-                <a16:creationId xmlns:a16="http://schemas.microsoft.com/office/drawing/2014/main" id="{8B4135C3-AF8C-40A7-94FB-7B8B82651B3C}"/>
-              </a:ext>
-            </a:extLst>
-          </p:cNvPr>
-          <p:cNvSpPr>
-            <a:spLocks xmlns:a="http://schemas.openxmlformats.org/drawingml/2006/main" noGrp="1"/>
-          </p:cNvSpPr>
-          <p:nvPr/>
-        </p:nvSpPr>
-        <p:spPr>
-          <a:xfrm xmlns:a="http://schemas.openxmlformats.org/drawingml/2006/main" rot="0">
-            <a:off x="7734300" y="4143375"/>
-            <a:ext cx="171450" cy="171450"/>
-          </a:xfrm>
-          <a:prstGeom xmlns:a="http://schemas.openxmlformats.org/drawingml/2006/main" prst="ellipse">
-            <a:avLst/>
-          </a:prstGeom>
-          <a:solidFill xmlns:a="http://schemas.openxmlformats.org/drawingml/2006/main">
-            <a:srgbClr val="257FA0"/>
-          </a:solidFill>
-          <a:ln xmlns:a="http://schemas.openxmlformats.org/drawingml/2006/main" w="7620">
-            <a:solidFill>
-              <a:srgbClr val="26355F"/>
-            </a:solidFill>
-            <a:prstDash val="solid"/>
-          </a:ln>
-        </p:spPr>
-      </p:sp>
-      <p:sp>
-        <p:nvSpPr>
-          <p:cNvPr id="86" name="allocation-slot-7">
-            <a:extLst xmlns:a="http://schemas.openxmlformats.org/drawingml/2006/main">
-              <a:ext uri="{FF2B5EF4-FFF2-40B4-BE49-F238E27FC236}">
-                <a16:creationId xmlns:a16="http://schemas.microsoft.com/office/drawing/2014/main" id="{CFDFED43-3304-4BF0-ADB1-971DAB4C9E46}"/>
-              </a:ext>
-            </a:extLst>
-          </p:cNvPr>
-          <p:cNvSpPr>
-            <a:spLocks xmlns:a="http://schemas.openxmlformats.org/drawingml/2006/main" noGrp="1"/>
-          </p:cNvSpPr>
-          <p:nvPr/>
-        </p:nvSpPr>
-        <p:spPr>
-          <a:xfrm xmlns:a="http://schemas.openxmlformats.org/drawingml/2006/main" rot="0">
-            <a:off x="8020050" y="4010025"/>
-            <a:ext cx="352425" cy="438150"/>
-          </a:xfrm>
-          <a:prstGeom xmlns:a="http://schemas.openxmlformats.org/drawingml/2006/main" prst="rect">
-            <a:avLst/>
-          </a:prstGeom>
-          <a:solidFill xmlns:a="http://schemas.openxmlformats.org/drawingml/2006/main">
-            <a:srgbClr val="FFFFFF"/>
-          </a:solidFill>
-          <a:ln xmlns:a="http://schemas.openxmlformats.org/drawingml/2006/main" w="12383">
-            <a:solidFill>
-              <a:srgbClr val="26355F"/>
-            </a:solidFill>
-            <a:prstDash val="solid"/>
-          </a:ln>
-        </p:spPr>
-      </p:sp>
-      <p:sp>
-        <p:nvSpPr>
-          <p:cNvPr id="87" name="allocation-slot-token-7">
-            <a:extLst xmlns:a="http://schemas.openxmlformats.org/drawingml/2006/main">
-              <a:ext uri="{FF2B5EF4-FFF2-40B4-BE49-F238E27FC236}">
-                <a16:creationId xmlns:a16="http://schemas.microsoft.com/office/drawing/2014/main" id="{B8EFA8A8-3834-4B00-A737-E7EE470FF885}"/>
-              </a:ext>
-            </a:extLst>
-          </p:cNvPr>
-          <p:cNvSpPr>
-            <a:spLocks xmlns:a="http://schemas.openxmlformats.org/drawingml/2006/main" noGrp="1"/>
-          </p:cNvSpPr>
-          <p:nvPr/>
-        </p:nvSpPr>
-        <p:spPr>
-          <a:xfrm xmlns:a="http://schemas.openxmlformats.org/drawingml/2006/main" rot="0">
-            <a:off x="8105775" y="4143375"/>
-            <a:ext cx="171450" cy="171450"/>
-          </a:xfrm>
-          <a:prstGeom xmlns:a="http://schemas.openxmlformats.org/drawingml/2006/main" prst="diamond">
-            <a:avLst/>
-          </a:prstGeom>
-          <a:solidFill xmlns:a="http://schemas.openxmlformats.org/drawingml/2006/main">
-            <a:srgbClr val="765A8D"/>
-          </a:solidFill>
-          <a:ln xmlns:a="http://schemas.openxmlformats.org/drawingml/2006/main" w="7620">
-            <a:solidFill>
-              <a:srgbClr val="26355F"/>
-            </a:solidFill>
-            <a:prstDash val="solid"/>
-          </a:ln>
-        </p:spPr>
-      </p:sp>
-      <p:sp>
-        <p:nvSpPr>
-          <p:cNvPr id="88" name="allocation-slot-8">
-            <a:extLst xmlns:a="http://schemas.openxmlformats.org/drawingml/2006/main">
-              <a:ext uri="{FF2B5EF4-FFF2-40B4-BE49-F238E27FC236}">
-                <a16:creationId xmlns:a16="http://schemas.microsoft.com/office/drawing/2014/main" id="{0D610E69-9A3B-4A6F-B716-BBB7B02A2C4F}"/>
-              </a:ext>
-            </a:extLst>
-          </p:cNvPr>
-          <p:cNvSpPr>
-            <a:spLocks xmlns:a="http://schemas.openxmlformats.org/drawingml/2006/main" noGrp="1"/>
-          </p:cNvSpPr>
-          <p:nvPr/>
-        </p:nvSpPr>
-        <p:spPr>
-          <a:xfrm xmlns:a="http://schemas.openxmlformats.org/drawingml/2006/main" rot="0">
-            <a:off x="8391525" y="4010025"/>
-            <a:ext cx="352425" cy="438150"/>
-          </a:xfrm>
-          <a:prstGeom xmlns:a="http://schemas.openxmlformats.org/drawingml/2006/main" prst="rect">
-            <a:avLst/>
-          </a:prstGeom>
-          <a:solidFill xmlns:a="http://schemas.openxmlformats.org/drawingml/2006/main">
-            <a:srgbClr val="FFFFFF"/>
-          </a:solidFill>
-          <a:ln xmlns:a="http://schemas.openxmlformats.org/drawingml/2006/main" w="12383">
-            <a:solidFill>
-              <a:srgbClr val="26355F"/>
-            </a:solidFill>
-            <a:prstDash val="solid"/>
-          </a:ln>
-        </p:spPr>
-      </p:sp>
-      <p:sp>
-        <p:nvSpPr>
-          <p:cNvPr id="89" name="allocation-slot-token-8">
-            <a:extLst xmlns:a="http://schemas.openxmlformats.org/drawingml/2006/main">
-              <a:ext uri="{FF2B5EF4-FFF2-40B4-BE49-F238E27FC236}">
-                <a16:creationId xmlns:a16="http://schemas.microsoft.com/office/drawing/2014/main" id="{BD8DF7BF-4C57-4A1F-BAD5-558E28A6691E}"/>
-              </a:ext>
-            </a:extLst>
-          </p:cNvPr>
-          <p:cNvSpPr>
-            <a:spLocks xmlns:a="http://schemas.openxmlformats.org/drawingml/2006/main" noGrp="1"/>
-          </p:cNvSpPr>
-          <p:nvPr/>
-        </p:nvSpPr>
-        <p:spPr>
-          <a:xfrm xmlns:a="http://schemas.openxmlformats.org/drawingml/2006/main" rot="0">
-            <a:off x="8477250" y="4143375"/>
-            <a:ext cx="171450" cy="171450"/>
-          </a:xfrm>
-          <a:prstGeom xmlns:a="http://schemas.openxmlformats.org/drawingml/2006/main" prst="rect">
-            <a:avLst/>
-          </a:prstGeom>
-          <a:solidFill xmlns:a="http://schemas.openxmlformats.org/drawingml/2006/main">
-            <a:srgbClr val="26355F"/>
-          </a:solidFill>
-          <a:ln xmlns:a="http://schemas.openxmlformats.org/drawingml/2006/main" w="0">
-            <a:noFill/>
-            <a:prstDash val="solid"/>
-          </a:ln>
-        </p:spPr>
-      </p:sp>
-      <p:sp>
-        <p:nvSpPr>
-          <p:cNvPr id="90" name="allocation-capacity-bracket">
-            <a:extLst xmlns:a="http://schemas.openxmlformats.org/drawingml/2006/main">
-              <a:ext uri="{FF2B5EF4-FFF2-40B4-BE49-F238E27FC236}">
-                <a16:creationId xmlns:a16="http://schemas.microsoft.com/office/drawing/2014/main" id="{C66087E8-BF1D-40FA-BEAD-6530B241162A}"/>
-              </a:ext>
-            </a:extLst>
-          </p:cNvPr>
-          <p:cNvSpPr>
-            <a:spLocks xmlns:a="http://schemas.openxmlformats.org/drawingml/2006/main" noGrp="1"/>
-          </p:cNvSpPr>
-          <p:nvPr/>
-        </p:nvSpPr>
-        <p:spPr>
-          <a:xfrm xmlns:a="http://schemas.openxmlformats.org/drawingml/2006/main" flipH="0" flipV="0">
-            <a:off x="5791200" y="4552950"/>
-            <a:ext cx="2943225" cy="9525"/>
-          </a:xfrm>
-          <a:prstGeom xmlns:a="http://schemas.openxmlformats.org/drawingml/2006/main" prst="line">
-            <a:avLst/>
-          </a:prstGeom>
-          <a:noFill xmlns:a="http://schemas.openxmlformats.org/drawingml/2006/main"/>
-          <a:ln xmlns:a="http://schemas.openxmlformats.org/drawingml/2006/main" w="13335">
-            <a:solidFill>
-              <a:srgbClr val="26355F"/>
-            </a:solidFill>
-            <a:prstDash val="solid"/>
-          </a:ln>
-        </p:spPr>
-      </p:sp>
-      <p:sp>
-        <p:nvSpPr>
-          <p:cNvPr id="91" name="">
-            <a:extLst xmlns:a="http://schemas.openxmlformats.org/drawingml/2006/main">
-              <a:ext uri="{FF2B5EF4-FFF2-40B4-BE49-F238E27FC236}">
-                <a16:creationId xmlns:a16="http://schemas.microsoft.com/office/drawing/2014/main" id="{5C9A64A4-2417-42FF-8C16-7B10E1731DE8}"/>
-              </a:ext>
-            </a:extLst>
-          </p:cNvPr>
-          <p:cNvSpPr>
-            <a:spLocks xmlns:a="http://schemas.openxmlformats.org/drawingml/2006/main" noGrp="1"/>
-          </p:cNvSpPr>
-          <p:nvPr/>
-        </p:nvSpPr>
-        <p:spPr>
-          <a:xfrm xmlns:a="http://schemas.openxmlformats.org/drawingml/2006/main" flipH="0" flipV="0">
-            <a:off x="5791200" y="4495800"/>
-            <a:ext cx="9525" cy="114300"/>
-          </a:xfrm>
-          <a:prstGeom xmlns:a="http://schemas.openxmlformats.org/drawingml/2006/main" prst="line">
-            <a:avLst/>
-          </a:prstGeom>
-          <a:noFill xmlns:a="http://schemas.openxmlformats.org/drawingml/2006/main"/>
-          <a:ln xmlns:a="http://schemas.openxmlformats.org/drawingml/2006/main" w="13335">
-            <a:solidFill>
-              <a:srgbClr val="26355F"/>
-            </a:solidFill>
-            <a:prstDash val="solid"/>
-          </a:ln>
-        </p:spPr>
-      </p:sp>
-      <p:sp>
-        <p:nvSpPr>
-          <p:cNvPr id="92" name="">
-            <a:extLst xmlns:a="http://schemas.openxmlformats.org/drawingml/2006/main">
-              <a:ext uri="{FF2B5EF4-FFF2-40B4-BE49-F238E27FC236}">
-                <a16:creationId xmlns:a16="http://schemas.microsoft.com/office/drawing/2014/main" id="{9960C9BC-B2B6-49FA-AADF-99EFAF104F30}"/>
-              </a:ext>
-            </a:extLst>
-          </p:cNvPr>
-          <p:cNvSpPr>
-            <a:spLocks xmlns:a="http://schemas.openxmlformats.org/drawingml/2006/main" noGrp="1"/>
-          </p:cNvSpPr>
-          <p:nvPr/>
-        </p:nvSpPr>
-        <p:spPr>
-          <a:xfrm xmlns:a="http://schemas.openxmlformats.org/drawingml/2006/main" flipH="0" flipV="0">
-            <a:off x="8734425" y="4495800"/>
-            <a:ext cx="9525" cy="114300"/>
-          </a:xfrm>
-          <a:prstGeom xmlns:a="http://schemas.openxmlformats.org/drawingml/2006/main" prst="line">
-            <a:avLst/>
-          </a:prstGeom>
-          <a:noFill xmlns:a="http://schemas.openxmlformats.org/drawingml/2006/main"/>
-          <a:ln xmlns:a="http://schemas.openxmlformats.org/drawingml/2006/main" w="13335">
-            <a:solidFill>
-              <a:srgbClr val="26355F"/>
-            </a:solidFill>
-            <a:prstDash val="solid"/>
-          </a:ln>
-        </p:spPr>
-      </p:sp>
-      <p:sp>
-        <p:nvSpPr>
-          <p:cNvPr id="93" name="allocation-capacity-label">
-            <a:extLst xmlns:a="http://schemas.openxmlformats.org/drawingml/2006/main">
-              <a:ext uri="{FF2B5EF4-FFF2-40B4-BE49-F238E27FC236}">
-                <a16:creationId xmlns:a16="http://schemas.microsoft.com/office/drawing/2014/main" id="{AC9DE24B-77AF-4E91-8A32-92F3D676C3E4}"/>
-              </a:ext>
-            </a:extLst>
-          </p:cNvPr>
-          <p:cNvSpPr>
-            <a:spLocks xmlns:a="http://schemas.openxmlformats.org/drawingml/2006/main" noGrp="1"/>
-          </p:cNvSpPr>
-          <p:nvPr/>
-        </p:nvSpPr>
-        <p:spPr>
-          <a:xfrm xmlns:a="http://schemas.openxmlformats.org/drawingml/2006/main" rot="0">
-            <a:off x="6629400" y="4572000"/>
-            <a:ext cx="1276350" cy="209550"/>
-          </a:xfrm>
-          <a:prstGeom xmlns:a="http://schemas.openxmlformats.org/drawingml/2006/main" prst="rect">
-            <a:avLst/>
-          </a:prstGeom>
-          <a:noFill xmlns:a="http://schemas.openxmlformats.org/drawingml/2006/main"/>
-          <a:ln xmlns:a="http://schemas.openxmlformats.org/drawingml/2006/main" w="0">
-            <a:noFill/>
-            <a:prstDash val="solid"/>
-          </a:ln>
-        </p:spPr>
-        <p:txBody>
-          <a:bodyPr xmlns:a="http://schemas.openxmlformats.org/drawingml/2006/main" wrap="square" lIns="19050" tIns="9525" rIns="19050" bIns="9525" anchor="ctr">
-            <a:normAutofit fontScale="100000"/>
-          </a:bodyPr>
-          <a:lstStyle xmlns:a="http://schemas.openxmlformats.org/drawingml/2006/main"/>
-          <a:p xmlns:a="http://schemas.openxmlformats.org/drawingml/2006/main">
-            <a:pPr algn="ctr">
-              <a:defRPr sz="1050" b="1">
-                <a:solidFill>
-                  <a:srgbClr val="26355F"/>
-                </a:solidFill>
-                <a:latin typeface="Arial"/>
-                <a:ea typeface="Arial"/>
-                <a:cs typeface="Arial"/>
-              </a:defRPr>
-            </a:pPr>
-            <a:r>
-              <a:rPr sz="1050" b="1">
-                <a:solidFill>
-                  <a:srgbClr val="26355F"/>
-                </a:solidFill>
-                <a:latin typeface="Arial"/>
-                <a:ea typeface="Arial"/>
-                <a:cs typeface="Arial"/>
-              </a:rPr>
-              <a:t>Fixed capacity</a:t>
-            </a:r>
-          </a:p>
-        </p:txBody>
-      </p:sp>
-      <p:sp>
-        <p:nvSpPr>
-          <p:cNvPr id="94" name="allocation-note">
-            <a:extLst xmlns:a="http://schemas.openxmlformats.org/drawingml/2006/main">
-              <a:ext uri="{FF2B5EF4-FFF2-40B4-BE49-F238E27FC236}">
-                <a16:creationId xmlns:a16="http://schemas.microsoft.com/office/drawing/2014/main" id="{D0F57C99-79CC-401A-B454-A02512BDA1CA}"/>
-              </a:ext>
-            </a:extLst>
-          </p:cNvPr>
-          <p:cNvSpPr>
-            <a:spLocks xmlns:a="http://schemas.openxmlformats.org/drawingml/2006/main" noGrp="1"/>
-          </p:cNvSpPr>
-          <p:nvPr/>
-        </p:nvSpPr>
-        <p:spPr>
-          <a:xfrm xmlns:a="http://schemas.openxmlformats.org/drawingml/2006/main" rot="0">
-            <a:off x="5314950" y="4714875"/>
-            <a:ext cx="3905250" cy="285750"/>
-          </a:xfrm>
-          <a:prstGeom xmlns:a="http://schemas.openxmlformats.org/drawingml/2006/main" prst="rect">
-            <a:avLst/>
-          </a:prstGeom>
-          <a:noFill xmlns:a="http://schemas.openxmlformats.org/drawingml/2006/main"/>
-          <a:ln xmlns:a="http://schemas.openxmlformats.org/drawingml/2006/main" w="0">
-            <a:noFill/>
-            <a:prstDash val="solid"/>
-          </a:ln>
-        </p:spPr>
-        <p:txBody>
-          <a:bodyPr xmlns:a="http://schemas.openxmlformats.org/drawingml/2006/main" wrap="square" lIns="19050" tIns="9525" rIns="19050" bIns="9525" anchor="ctr">
-            <a:normAutofit fontScale="76853"/>
-          </a:bodyPr>
-          <a:lstStyle xmlns:a="http://schemas.openxmlformats.org/drawingml/2006/main"/>
-          <a:p xmlns:a="http://schemas.openxmlformats.org/drawingml/2006/main">
-            <a:pPr algn="l">
-              <a:defRPr sz="1200" b="0">
-                <a:solidFill>
-                  <a:srgbClr val="637077"/>
-                </a:solidFill>
-                <a:latin typeface="Arial"/>
-                <a:ea typeface="Arial"/>
-                <a:cs typeface="Arial"/>
-              </a:defRPr>
-            </a:pPr>
-            <a:r>
-              <a:rPr sz="1200" b="0">
-                <a:solidFill>
-                  <a:srgbClr val="637077"/>
-                </a:solidFill>
-                <a:latin typeface="Arial"/>
-                <a:ea typeface="Arial"/>
-                <a:cs typeface="Arial"/>
-              </a:rPr>
-              <a:t>Deduplicate before fill; unused reserve capacity returns to the global order.</a:t>
-            </a:r>
-          </a:p>
-        </p:txBody>
-      </p:sp>
-      <p:sp>
-        <p:nvSpPr>
-          <p:cNvPr id="95" name="output-heading">
-            <a:extLst xmlns:a="http://schemas.openxmlformats.org/drawingml/2006/main">
-              <a:ext uri="{FF2B5EF4-FFF2-40B4-BE49-F238E27FC236}">
-                <a16:creationId xmlns:a16="http://schemas.microsoft.com/office/drawing/2014/main" id="{8EA0717F-460D-4B9F-80BD-11783F167784}"/>
-              </a:ext>
-            </a:extLst>
-          </p:cNvPr>
-          <p:cNvSpPr>
-            <a:spLocks xmlns:a="http://schemas.openxmlformats.org/drawingml/2006/main" noGrp="1"/>
-          </p:cNvSpPr>
-          <p:nvPr/>
-        </p:nvSpPr>
-        <p:spPr>
-          <a:xfrm xmlns:a="http://schemas.openxmlformats.org/drawingml/2006/main" rot="0">
-            <a:off x="10020300" y="1428750"/>
-            <a:ext cx="1562100" cy="323850"/>
-          </a:xfrm>
-          <a:prstGeom xmlns:a="http://schemas.openxmlformats.org/drawingml/2006/main" prst="rect">
-            <a:avLst/>
-          </a:prstGeom>
-          <a:noFill xmlns:a="http://schemas.openxmlformats.org/drawingml/2006/main"/>
-          <a:ln xmlns:a="http://schemas.openxmlformats.org/drawingml/2006/main" w="0">
-            <a:noFill/>
-            <a:prstDash val="solid"/>
-          </a:ln>
-        </p:spPr>
-        <p:txBody>
-          <a:bodyPr xmlns:a="http://schemas.openxmlformats.org/drawingml/2006/main" wrap="square" lIns="19050" tIns="9525" rIns="19050" bIns="9525" anchor="ctr">
-            <a:normAutofit fontScale="100000"/>
-          </a:bodyPr>
-          <a:lstStyle xmlns:a="http://schemas.openxmlformats.org/drawingml/2006/main"/>
-          <a:p xmlns:a="http://schemas.openxmlformats.org/drawingml/2006/main">
-            <a:pPr algn="l">
-              <a:defRPr sz="1725" b="1">
-                <a:solidFill>
-                  <a:srgbClr val="765A8D"/>
-                </a:solidFill>
-                <a:latin typeface="Arial"/>
-                <a:ea typeface="Arial"/>
-                <a:cs typeface="Arial"/>
-              </a:defRPr>
-            </a:pPr>
-            <a:r>
-              <a:rPr sz="1725" b="1">
-                <a:solidFill>
-                  <a:srgbClr val="765A8D"/>
-                </a:solidFill>
-                <a:latin typeface="Arial"/>
-                <a:ea typeface="Arial"/>
-                <a:cs typeface="Arial"/>
-              </a:rPr>
-              <a:t>Queue result</a:t>
-            </a:r>
-          </a:p>
-        </p:txBody>
-      </p:sp>
-      <p:sp>
-        <p:nvSpPr>
-          <p:cNvPr id="96" name="output-caption">
-            <a:extLst xmlns:a="http://schemas.openxmlformats.org/drawingml/2006/main">
-              <a:ext uri="{FF2B5EF4-FFF2-40B4-BE49-F238E27FC236}">
-                <a16:creationId xmlns:a16="http://schemas.microsoft.com/office/drawing/2014/main" id="{7C257B9D-1F6D-435D-8D50-7CE0656846F4}"/>
-              </a:ext>
-            </a:extLst>
-          </p:cNvPr>
-          <p:cNvSpPr>
-            <a:spLocks xmlns:a="http://schemas.openxmlformats.org/drawingml/2006/main" noGrp="1"/>
-          </p:cNvSpPr>
-          <p:nvPr/>
-        </p:nvSpPr>
-        <p:spPr>
-          <a:xfrm xmlns:a="http://schemas.openxmlformats.org/drawingml/2006/main" rot="0">
-            <a:off x="10020300" y="1771650"/>
-            <a:ext cx="1562100" cy="361950"/>
-          </a:xfrm>
-          <a:prstGeom xmlns:a="http://schemas.openxmlformats.org/drawingml/2006/main" prst="rect">
-            <a:avLst/>
-          </a:prstGeom>
-          <a:noFill xmlns:a="http://schemas.openxmlformats.org/drawingml/2006/main"/>
-          <a:ln xmlns:a="http://schemas.openxmlformats.org/drawingml/2006/main" w="0">
-            <a:noFill/>
-            <a:prstDash val="solid"/>
-          </a:ln>
-        </p:spPr>
-        <p:txBody>
-          <a:bodyPr xmlns:a="http://schemas.openxmlformats.org/drawingml/2006/main" wrap="square" lIns="19050" tIns="9525" rIns="19050" bIns="9525" anchor="t">
-            <a:normAutofit fontScale="93750"/>
-          </a:bodyPr>
-          <a:lstStyle xmlns:a="http://schemas.openxmlformats.org/drawingml/2006/main"/>
-          <a:p xmlns:a="http://schemas.openxmlformats.org/drawingml/2006/main">
-            <a:pPr algn="l">
-              <a:defRPr sz="1200" b="0">
-                <a:solidFill>
-                  <a:srgbClr val="637077"/>
-                </a:solidFill>
-                <a:latin typeface="Arial"/>
-                <a:ea typeface="Arial"/>
-                <a:cs typeface="Arial"/>
-              </a:defRPr>
-            </a:pPr>
-            <a:r>
-              <a:rPr sz="1200" b="0">
-                <a:solidFill>
-                  <a:srgbClr val="637077"/>
-                </a:solidFill>
-                <a:latin typeface="Arial"/>
-                <a:ea typeface="Arial"/>
-                <a:cs typeface="Arial"/>
-              </a:rPr>
-              <a:t>Selected IDs and slot ledger</a:t>
-            </a:r>
-          </a:p>
-        </p:txBody>
-      </p:sp>
-      <p:sp>
-        <p:nvSpPr>
-          <p:cNvPr id="97" name="queue-result-ledger">
-            <a:extLst xmlns:a="http://schemas.openxmlformats.org/drawingml/2006/main">
-              <a:ext uri="{FF2B5EF4-FFF2-40B4-BE49-F238E27FC236}">
-                <a16:creationId xmlns:a16="http://schemas.microsoft.com/office/drawing/2014/main" id="{86CBFDA0-D2BD-4595-8E34-67C3823EFB93}"/>
-              </a:ext>
-            </a:extLst>
-          </p:cNvPr>
-          <p:cNvSpPr>
-            <a:spLocks xmlns:a="http://schemas.openxmlformats.org/drawingml/2006/main" noGrp="1"/>
-          </p:cNvSpPr>
-          <p:nvPr/>
-        </p:nvSpPr>
-        <p:spPr>
-          <a:xfrm xmlns:a="http://schemas.openxmlformats.org/drawingml/2006/main" rot="0">
-            <a:off x="10020300" y="2209800"/>
-            <a:ext cx="1562100" cy="1676400"/>
-          </a:xfrm>
-          <a:prstGeom xmlns:a="http://schemas.openxmlformats.org/drawingml/2006/main" prst="rect">
-            <a:avLst/>
-          </a:prstGeom>
-          <a:solidFill xmlns:a="http://schemas.openxmlformats.org/drawingml/2006/main">
-            <a:srgbClr val="FFFFFF"/>
-          </a:solidFill>
-          <a:ln xmlns:a="http://schemas.openxmlformats.org/drawingml/2006/main" w="16193">
-            <a:solidFill>
-              <a:srgbClr val="26355F"/>
-            </a:solidFill>
-            <a:prstDash val="solid"/>
-          </a:ln>
-        </p:spPr>
-      </p:sp>
-      <p:sp>
-        <p:nvSpPr>
-          <p:cNvPr id="98" name="queue-result-header">
-            <a:extLst xmlns:a="http://schemas.openxmlformats.org/drawingml/2006/main">
-              <a:ext uri="{FF2B5EF4-FFF2-40B4-BE49-F238E27FC236}">
-                <a16:creationId xmlns:a16="http://schemas.microsoft.com/office/drawing/2014/main" id="{1B0BCDBD-7D10-43E1-919E-5875A9E72D0B}"/>
-              </a:ext>
-            </a:extLst>
-          </p:cNvPr>
-          <p:cNvSpPr>
-            <a:spLocks xmlns:a="http://schemas.openxmlformats.org/drawingml/2006/main" noGrp="1"/>
-          </p:cNvSpPr>
-          <p:nvPr/>
-        </p:nvSpPr>
-        <p:spPr>
-          <a:xfrm xmlns:a="http://schemas.openxmlformats.org/drawingml/2006/main" rot="0">
-            <a:off x="10020300" y="2209800"/>
-            <a:ext cx="1562100" cy="361950"/>
-          </a:xfrm>
-          <a:prstGeom xmlns:a="http://schemas.openxmlformats.org/drawingml/2006/main" prst="rect">
-            <a:avLst/>
-          </a:prstGeom>
-          <a:solidFill xmlns:a="http://schemas.openxmlformats.org/drawingml/2006/main">
-            <a:srgbClr val="EEEAF3"/>
-          </a:solidFill>
-          <a:ln xmlns:a="http://schemas.openxmlformats.org/drawingml/2006/main" w="11430">
-            <a:solidFill>
-              <a:srgbClr val="26355F"/>
-            </a:solidFill>
-            <a:prstDash val="solid"/>
-          </a:ln>
-        </p:spPr>
-      </p:sp>
-      <p:sp>
-        <p:nvSpPr>
-          <p:cNvPr id="99" name="queue-result-title">
-            <a:extLst xmlns:a="http://schemas.openxmlformats.org/drawingml/2006/main">
-              <a:ext uri="{FF2B5EF4-FFF2-40B4-BE49-F238E27FC236}">
-                <a16:creationId xmlns:a16="http://schemas.microsoft.com/office/drawing/2014/main" id="{90096A99-EA34-4EC4-89E0-BBFF5FCDF8D0}"/>
-              </a:ext>
-            </a:extLst>
-          </p:cNvPr>
-          <p:cNvSpPr>
-            <a:spLocks xmlns:a="http://schemas.openxmlformats.org/drawingml/2006/main" noGrp="1"/>
-          </p:cNvSpPr>
-          <p:nvPr/>
-        </p:nvSpPr>
-        <p:spPr>
-          <a:xfrm xmlns:a="http://schemas.openxmlformats.org/drawingml/2006/main" rot="0">
-            <a:off x="10134600" y="2247900"/>
-            <a:ext cx="1333500" cy="276225"/>
-          </a:xfrm>
-          <a:prstGeom xmlns:a="http://schemas.openxmlformats.org/drawingml/2006/main" prst="rect">
-            <a:avLst/>
-          </a:prstGeom>
-          <a:noFill xmlns:a="http://schemas.openxmlformats.org/drawingml/2006/main"/>
-          <a:ln xmlns:a="http://schemas.openxmlformats.org/drawingml/2006/main" w="0">
-            <a:noFill/>
-            <a:prstDash val="solid"/>
-          </a:ln>
-        </p:spPr>
-        <p:txBody>
-          <a:bodyPr xmlns:a="http://schemas.openxmlformats.org/drawingml/2006/main" wrap="square" lIns="19050" tIns="9525" rIns="19050" bIns="9525" anchor="ctr">
-            <a:normAutofit fontScale="100000"/>
-          </a:bodyPr>
-          <a:lstStyle xmlns:a="http://schemas.openxmlformats.org/drawingml/2006/main"/>
-          <a:p xmlns:a="http://schemas.openxmlformats.org/drawingml/2006/main">
-            <a:pPr algn="l">
-              <a:defRPr sz="1200" b="1">
-                <a:solidFill>
-                  <a:srgbClr val="26355F"/>
-                </a:solidFill>
-                <a:latin typeface="Arial"/>
-                <a:ea typeface="Arial"/>
-                <a:cs typeface="Arial"/>
-              </a:defRPr>
-            </a:pPr>
-            <a:r>
-              <a:rPr sz="1200" b="1">
-                <a:solidFill>
-                  <a:srgbClr val="26355F"/>
-                </a:solidFill>
-                <a:latin typeface="Arial"/>
-                <a:ea typeface="Arial"/>
-                <a:cs typeface="Arial"/>
-              </a:rPr>
-              <a:t>Queue result</a:t>
-            </a:r>
-          </a:p>
-        </p:txBody>
-      </p:sp>
-      <p:sp>
-        <p:nvSpPr>
-          <p:cNvPr id="100" name="selected-ids-label">
-            <a:extLst xmlns:a="http://schemas.openxmlformats.org/drawingml/2006/main">
-              <a:ext uri="{FF2B5EF4-FFF2-40B4-BE49-F238E27FC236}">
-                <a16:creationId xmlns:a16="http://schemas.microsoft.com/office/drawing/2014/main" id="{9F28E7FE-2D67-4457-A60F-D6032E89B3AB}"/>
-              </a:ext>
-            </a:extLst>
-          </p:cNvPr>
-          <p:cNvSpPr>
-            <a:spLocks xmlns:a="http://schemas.openxmlformats.org/drawingml/2006/main" noGrp="1"/>
-          </p:cNvSpPr>
-          <p:nvPr/>
-        </p:nvSpPr>
-        <p:spPr>
-          <a:xfrm xmlns:a="http://schemas.openxmlformats.org/drawingml/2006/main" rot="0">
-            <a:off x="10134600" y="2667000"/>
-            <a:ext cx="1333500" cy="228600"/>
-          </a:xfrm>
-          <a:prstGeom xmlns:a="http://schemas.openxmlformats.org/drawingml/2006/main" prst="rect">
-            <a:avLst/>
-          </a:prstGeom>
-          <a:noFill xmlns:a="http://schemas.openxmlformats.org/drawingml/2006/main"/>
-          <a:ln xmlns:a="http://schemas.openxmlformats.org/drawingml/2006/main" w="0">
-            <a:noFill/>
-            <a:prstDash val="solid"/>
-          </a:ln>
-        </p:spPr>
-        <p:txBody>
-          <a:bodyPr xmlns:a="http://schemas.openxmlformats.org/drawingml/2006/main" wrap="square" lIns="19050" tIns="9525" rIns="19050" bIns="9525" anchor="ctr">
-            <a:normAutofit fontScale="100000"/>
-          </a:bodyPr>
-          <a:lstStyle xmlns:a="http://schemas.openxmlformats.org/drawingml/2006/main"/>
-          <a:p xmlns:a="http://schemas.openxmlformats.org/drawingml/2006/main">
-            <a:pPr algn="l">
-              <a:defRPr sz="1200" b="1">
-                <a:solidFill>
-                  <a:srgbClr val="172027"/>
-                </a:solidFill>
-                <a:latin typeface="Arial"/>
-                <a:ea typeface="Arial"/>
-                <a:cs typeface="Arial"/>
-              </a:defRPr>
-            </a:pPr>
-            <a:r>
-              <a:rPr sz="1200" b="1">
-                <a:solidFill>
-                  <a:srgbClr val="172027"/>
-                </a:solidFill>
-                <a:latin typeface="Arial"/>
-                <a:ea typeface="Arial"/>
-                <a:cs typeface="Arial"/>
-              </a:rPr>
-              <a:t>Selected IDs</a:t>
-            </a:r>
-          </a:p>
-        </p:txBody>
-      </p:sp>
-      <p:sp>
-        <p:nvSpPr>
-          <p:cNvPr id="101" name="result-token-1">
-            <a:extLst xmlns:a="http://schemas.openxmlformats.org/drawingml/2006/main">
-              <a:ext uri="{FF2B5EF4-FFF2-40B4-BE49-F238E27FC236}">
-                <a16:creationId xmlns:a16="http://schemas.microsoft.com/office/drawing/2014/main" id="{0B3DF968-25EE-4502-B12A-A283BA5CF415}"/>
-              </a:ext>
-            </a:extLst>
-          </p:cNvPr>
-          <p:cNvSpPr>
-            <a:spLocks xmlns:a="http://schemas.openxmlformats.org/drawingml/2006/main" noGrp="1"/>
-          </p:cNvSpPr>
-          <p:nvPr/>
-        </p:nvSpPr>
-        <p:spPr>
-          <a:xfrm xmlns:a="http://schemas.openxmlformats.org/drawingml/2006/main" rot="0">
-            <a:off x="10325100" y="2971800"/>
-            <a:ext cx="152400" cy="152400"/>
-          </a:xfrm>
-          <a:prstGeom xmlns:a="http://schemas.openxmlformats.org/drawingml/2006/main" prst="ellipse">
-            <a:avLst/>
-          </a:prstGeom>
-          <a:solidFill xmlns:a="http://schemas.openxmlformats.org/drawingml/2006/main">
-            <a:srgbClr val="257FA0"/>
-          </a:solidFill>
-          <a:ln xmlns:a="http://schemas.openxmlformats.org/drawingml/2006/main" w="7620">
-            <a:solidFill>
-              <a:srgbClr val="26355F"/>
-            </a:solidFill>
-            <a:prstDash val="solid"/>
-          </a:ln>
-        </p:spPr>
-      </p:sp>
-      <p:sp>
-        <p:nvSpPr>
-          <p:cNvPr id="102" name="result-token-2">
-            <a:extLst xmlns:a="http://schemas.openxmlformats.org/drawingml/2006/main">
-              <a:ext uri="{FF2B5EF4-FFF2-40B4-BE49-F238E27FC236}">
-                <a16:creationId xmlns:a16="http://schemas.microsoft.com/office/drawing/2014/main" id="{DB609C8D-3C58-4612-962C-8F65B0AB89EF}"/>
-              </a:ext>
-            </a:extLst>
-          </p:cNvPr>
-          <p:cNvSpPr>
-            <a:spLocks xmlns:a="http://schemas.openxmlformats.org/drawingml/2006/main" noGrp="1"/>
-          </p:cNvSpPr>
-          <p:nvPr/>
-        </p:nvSpPr>
-        <p:spPr>
-          <a:xfrm xmlns:a="http://schemas.openxmlformats.org/drawingml/2006/main" rot="0">
-            <a:off x="10591800" y="2971800"/>
-            <a:ext cx="152400" cy="152400"/>
-          </a:xfrm>
-          <a:prstGeom xmlns:a="http://schemas.openxmlformats.org/drawingml/2006/main" prst="diamond">
-            <a:avLst/>
-          </a:prstGeom>
-          <a:solidFill xmlns:a="http://schemas.openxmlformats.org/drawingml/2006/main">
-            <a:srgbClr val="765A8D"/>
-          </a:solidFill>
-          <a:ln xmlns:a="http://schemas.openxmlformats.org/drawingml/2006/main" w="7620">
-            <a:solidFill>
-              <a:srgbClr val="26355F"/>
-            </a:solidFill>
-            <a:prstDash val="solid"/>
-          </a:ln>
-        </p:spPr>
-      </p:sp>
-      <p:sp>
-        <p:nvSpPr>
-          <p:cNvPr id="103" name="result-token-3">
-            <a:extLst xmlns:a="http://schemas.openxmlformats.org/drawingml/2006/main">
-              <a:ext uri="{FF2B5EF4-FFF2-40B4-BE49-F238E27FC236}">
-                <a16:creationId xmlns:a16="http://schemas.microsoft.com/office/drawing/2014/main" id="{713DA1B2-240A-4AED-A155-D921A4EB3276}"/>
-              </a:ext>
-            </a:extLst>
-          </p:cNvPr>
-          <p:cNvSpPr>
-            <a:spLocks xmlns:a="http://schemas.openxmlformats.org/drawingml/2006/main" noGrp="1"/>
-          </p:cNvSpPr>
-          <p:nvPr/>
-        </p:nvSpPr>
-        <p:spPr>
-          <a:xfrm xmlns:a="http://schemas.openxmlformats.org/drawingml/2006/main" rot="0">
-            <a:off x="10858500" y="2971800"/>
-            <a:ext cx="152400" cy="152400"/>
-          </a:xfrm>
-          <a:prstGeom xmlns:a="http://schemas.openxmlformats.org/drawingml/2006/main" prst="rect">
-            <a:avLst/>
-          </a:prstGeom>
-          <a:solidFill xmlns:a="http://schemas.openxmlformats.org/drawingml/2006/main">
-            <a:srgbClr val="26355F"/>
-          </a:solidFill>
-          <a:ln xmlns:a="http://schemas.openxmlformats.org/drawingml/2006/main" w="0">
-            <a:noFill/>
-            <a:prstDash val="solid"/>
-          </a:ln>
-        </p:spPr>
-      </p:sp>
-      <p:sp>
-        <p:nvSpPr>
-          <p:cNvPr id="104" name="result-token-4">
-            <a:extLst xmlns:a="http://schemas.openxmlformats.org/drawingml/2006/main">
-              <a:ext uri="{FF2B5EF4-FFF2-40B4-BE49-F238E27FC236}">
-                <a16:creationId xmlns:a16="http://schemas.microsoft.com/office/drawing/2014/main" id="{CB8B257A-4701-49B7-82F3-21EB2304A448}"/>
-              </a:ext>
-            </a:extLst>
-          </p:cNvPr>
-          <p:cNvSpPr>
-            <a:spLocks xmlns:a="http://schemas.openxmlformats.org/drawingml/2006/main" noGrp="1"/>
-          </p:cNvSpPr>
-          <p:nvPr/>
-        </p:nvSpPr>
-        <p:spPr>
-          <a:xfrm xmlns:a="http://schemas.openxmlformats.org/drawingml/2006/main" rot="0">
-            <a:off x="11125200" y="2971800"/>
-            <a:ext cx="152400" cy="152400"/>
-          </a:xfrm>
-          <a:prstGeom xmlns:a="http://schemas.openxmlformats.org/drawingml/2006/main" prst="ellipse">
-            <a:avLst/>
-          </a:prstGeom>
-          <a:solidFill xmlns:a="http://schemas.openxmlformats.org/drawingml/2006/main">
-            <a:srgbClr val="257FA0"/>
-          </a:solidFill>
-          <a:ln xmlns:a="http://schemas.openxmlformats.org/drawingml/2006/main" w="7620">
-            <a:solidFill>
-              <a:srgbClr val="26355F"/>
-            </a:solidFill>
-            <a:prstDash val="solid"/>
-          </a:ln>
-        </p:spPr>
-      </p:sp>
-      <p:sp>
-        <p:nvSpPr>
-          <p:cNvPr id="105" name="result-divider">
-            <a:extLst xmlns:a="http://schemas.openxmlformats.org/drawingml/2006/main">
-              <a:ext uri="{FF2B5EF4-FFF2-40B4-BE49-F238E27FC236}">
-                <a16:creationId xmlns:a16="http://schemas.microsoft.com/office/drawing/2014/main" id="{752490EE-569C-47EB-85B1-FF29A078639F}"/>
-              </a:ext>
-            </a:extLst>
-          </p:cNvPr>
-          <p:cNvSpPr>
-            <a:spLocks xmlns:a="http://schemas.openxmlformats.org/drawingml/2006/main" noGrp="1"/>
-          </p:cNvSpPr>
-          <p:nvPr/>
-        </p:nvSpPr>
-        <p:spPr>
-          <a:xfrm xmlns:a="http://schemas.openxmlformats.org/drawingml/2006/main" flipH="0" flipV="0">
-            <a:off x="10134600" y="3267075"/>
-            <a:ext cx="1333500" cy="9525"/>
-          </a:xfrm>
-          <a:prstGeom xmlns:a="http://schemas.openxmlformats.org/drawingml/2006/main" prst="line">
-            <a:avLst/>
-          </a:prstGeom>
-          <a:noFill xmlns:a="http://schemas.openxmlformats.org/drawingml/2006/main"/>
-          <a:ln xmlns:a="http://schemas.openxmlformats.org/drawingml/2006/main" w="9525">
-            <a:solidFill>
-              <a:srgbClr val="CAD3D4"/>
-            </a:solidFill>
-            <a:prstDash val="solid"/>
-          </a:ln>
-        </p:spPr>
-      </p:sp>
-      <p:sp>
-        <p:nvSpPr>
-          <p:cNvPr id="106" name="ledger-slot-header">
-            <a:extLst xmlns:a="http://schemas.openxmlformats.org/drawingml/2006/main">
-              <a:ext uri="{FF2B5EF4-FFF2-40B4-BE49-F238E27FC236}">
-                <a16:creationId xmlns:a16="http://schemas.microsoft.com/office/drawing/2014/main" id="{635346AA-02B3-48C3-ABAF-5FBE6CEDC88F}"/>
-              </a:ext>
-            </a:extLst>
-          </p:cNvPr>
-          <p:cNvSpPr>
-            <a:spLocks xmlns:a="http://schemas.openxmlformats.org/drawingml/2006/main" noGrp="1"/>
-          </p:cNvSpPr>
-          <p:nvPr/>
-        </p:nvSpPr>
-        <p:spPr>
-          <a:xfrm xmlns:a="http://schemas.openxmlformats.org/drawingml/2006/main" rot="0">
-            <a:off x="10153650" y="3343275"/>
-            <a:ext cx="381000" cy="209550"/>
-          </a:xfrm>
-          <a:prstGeom xmlns:a="http://schemas.openxmlformats.org/drawingml/2006/main" prst="rect">
-            <a:avLst/>
-          </a:prstGeom>
-          <a:noFill xmlns:a="http://schemas.openxmlformats.org/drawingml/2006/main"/>
-          <a:ln xmlns:a="http://schemas.openxmlformats.org/drawingml/2006/main" w="0">
-            <a:noFill/>
-            <a:prstDash val="solid"/>
-          </a:ln>
-        </p:spPr>
-        <p:txBody>
-          <a:bodyPr xmlns:a="http://schemas.openxmlformats.org/drawingml/2006/main" wrap="square" lIns="19050" tIns="9525" rIns="19050" bIns="9525" anchor="ctr">
-            <a:normAutofit fontScale="100000"/>
-          </a:bodyPr>
-          <a:lstStyle xmlns:a="http://schemas.openxmlformats.org/drawingml/2006/main"/>
-          <a:p xmlns:a="http://schemas.openxmlformats.org/drawingml/2006/main">
-            <a:pPr algn="l">
-              <a:defRPr sz="1050" b="1">
-                <a:solidFill>
-                  <a:srgbClr val="637077"/>
-                </a:solidFill>
-                <a:latin typeface="Arial"/>
-                <a:ea typeface="Arial"/>
-                <a:cs typeface="Arial"/>
-              </a:defRPr>
-            </a:pPr>
-            <a:r>
-              <a:rPr sz="1050" b="1">
-                <a:solidFill>
-                  <a:srgbClr val="637077"/>
-                </a:solidFill>
-                <a:latin typeface="Arial"/>
-                <a:ea typeface="Arial"/>
-                <a:cs typeface="Arial"/>
-              </a:rPr>
-              <a:t>Slot</a:t>
-            </a:r>
-          </a:p>
-        </p:txBody>
-      </p:sp>
-      <p:sp>
-        <p:nvSpPr>
-          <p:cNvPr id="107" name="ledger-source-header">
-            <a:extLst xmlns:a="http://schemas.openxmlformats.org/drawingml/2006/main">
-              <a:ext uri="{FF2B5EF4-FFF2-40B4-BE49-F238E27FC236}">
-                <a16:creationId xmlns:a16="http://schemas.microsoft.com/office/drawing/2014/main" id="{987974F4-770D-4066-B3A8-7CB3F0807AA4}"/>
-              </a:ext>
-            </a:extLst>
-          </p:cNvPr>
-          <p:cNvSpPr>
-            <a:spLocks xmlns:a="http://schemas.openxmlformats.org/drawingml/2006/main" noGrp="1"/>
-          </p:cNvSpPr>
-          <p:nvPr/>
-        </p:nvSpPr>
-        <p:spPr>
-          <a:xfrm xmlns:a="http://schemas.openxmlformats.org/drawingml/2006/main" rot="0">
-            <a:off x="10725150" y="3343275"/>
-            <a:ext cx="742950" cy="209550"/>
-          </a:xfrm>
-          <a:prstGeom xmlns:a="http://schemas.openxmlformats.org/drawingml/2006/main" prst="rect">
-            <a:avLst/>
-          </a:prstGeom>
-          <a:noFill xmlns:a="http://schemas.openxmlformats.org/drawingml/2006/main"/>
-          <a:ln xmlns:a="http://schemas.openxmlformats.org/drawingml/2006/main" w="0">
-            <a:noFill/>
-            <a:prstDash val="solid"/>
-          </a:ln>
-        </p:spPr>
-        <p:txBody>
-          <a:bodyPr xmlns:a="http://schemas.openxmlformats.org/drawingml/2006/main" wrap="square" lIns="19050" tIns="9525" rIns="19050" bIns="9525" anchor="ctr">
-            <a:normAutofit fontScale="100000"/>
-          </a:bodyPr>
-          <a:lstStyle xmlns:a="http://schemas.openxmlformats.org/drawingml/2006/main"/>
-          <a:p xmlns:a="http://schemas.openxmlformats.org/drawingml/2006/main">
-            <a:pPr algn="l">
-              <a:defRPr sz="1050" b="1">
-                <a:solidFill>
-                  <a:srgbClr val="637077"/>
-                </a:solidFill>
-                <a:latin typeface="Arial"/>
-                <a:ea typeface="Arial"/>
-                <a:cs typeface="Arial"/>
-              </a:defRPr>
-            </a:pPr>
-            <a:r>
-              <a:rPr sz="1050" b="1">
-                <a:solidFill>
-                  <a:srgbClr val="637077"/>
-                </a:solidFill>
-                <a:latin typeface="Arial"/>
-                <a:ea typeface="Arial"/>
-                <a:cs typeface="Arial"/>
-              </a:rPr>
-              <a:t>Source</a:t>
-            </a:r>
-          </a:p>
-        </p:txBody>
-      </p:sp>
-      <p:sp>
-        <p:nvSpPr>
-          <p:cNvPr id="108" name="ledger-slot-1">
-            <a:extLst xmlns:a="http://schemas.openxmlformats.org/drawingml/2006/main">
-              <a:ext uri="{FF2B5EF4-FFF2-40B4-BE49-F238E27FC236}">
-                <a16:creationId xmlns:a16="http://schemas.microsoft.com/office/drawing/2014/main" id="{180D0673-25F4-4B1B-A525-C2FCC48BDB01}"/>
-              </a:ext>
-            </a:extLst>
-          </p:cNvPr>
-          <p:cNvSpPr>
-            <a:spLocks xmlns:a="http://schemas.openxmlformats.org/drawingml/2006/main" noGrp="1"/>
-          </p:cNvSpPr>
-          <p:nvPr/>
-        </p:nvSpPr>
-        <p:spPr>
-          <a:xfrm xmlns:a="http://schemas.openxmlformats.org/drawingml/2006/main" rot="0">
-            <a:off x="10153650" y="3600450"/>
-            <a:ext cx="381000" cy="209550"/>
-          </a:xfrm>
-          <a:prstGeom xmlns:a="http://schemas.openxmlformats.org/drawingml/2006/main" prst="rect">
-            <a:avLst/>
-          </a:prstGeom>
-          <a:noFill xmlns:a="http://schemas.openxmlformats.org/drawingml/2006/main"/>
-          <a:ln xmlns:a="http://schemas.openxmlformats.org/drawingml/2006/main" w="0">
-            <a:noFill/>
-            <a:prstDash val="solid"/>
-          </a:ln>
-        </p:spPr>
-        <p:txBody>
-          <a:bodyPr xmlns:a="http://schemas.openxmlformats.org/drawingml/2006/main" wrap="square" lIns="19050" tIns="9525" rIns="19050" bIns="9525" anchor="ctr">
-            <a:normAutofit fontScale="100000"/>
-          </a:bodyPr>
-          <a:lstStyle xmlns:a="http://schemas.openxmlformats.org/drawingml/2006/main"/>
-          <a:p xmlns:a="http://schemas.openxmlformats.org/drawingml/2006/main">
-            <a:pPr algn="l">
-              <a:defRPr sz="1125" b="0">
-                <a:solidFill>
-                  <a:srgbClr val="172027"/>
-                </a:solidFill>
-                <a:latin typeface="Arial"/>
-                <a:ea typeface="Arial"/>
-                <a:cs typeface="Arial"/>
-              </a:defRPr>
-            </a:pPr>
-            <a:r>
-              <a:rPr sz="1125" b="0">
-                <a:solidFill>
-                  <a:srgbClr val="172027"/>
-                </a:solidFill>
-                <a:latin typeface="Arial"/>
-                <a:ea typeface="Arial"/>
-                <a:cs typeface="Arial"/>
-              </a:rPr>
-              <a:t>01</a:t>
-            </a:r>
-          </a:p>
-        </p:txBody>
-      </p:sp>
-      <p:sp>
-        <p:nvSpPr>
-          <p:cNvPr id="109" name="ledger-source-1">
-            <a:extLst xmlns:a="http://schemas.openxmlformats.org/drawingml/2006/main">
-              <a:ext uri="{FF2B5EF4-FFF2-40B4-BE49-F238E27FC236}">
-                <a16:creationId xmlns:a16="http://schemas.microsoft.com/office/drawing/2014/main" id="{FFFA4EC2-3094-475A-A846-AC7E14DF3174}"/>
-              </a:ext>
-            </a:extLst>
-          </p:cNvPr>
-          <p:cNvSpPr>
-            <a:spLocks xmlns:a="http://schemas.openxmlformats.org/drawingml/2006/main" noGrp="1"/>
-          </p:cNvSpPr>
-          <p:nvPr/>
-        </p:nvSpPr>
-        <p:spPr>
-          <a:xfrm xmlns:a="http://schemas.openxmlformats.org/drawingml/2006/main" rot="0">
-            <a:off x="10725150" y="3600450"/>
-            <a:ext cx="742950" cy="209550"/>
-          </a:xfrm>
-          <a:prstGeom xmlns:a="http://schemas.openxmlformats.org/drawingml/2006/main" prst="rect">
-            <a:avLst/>
-          </a:prstGeom>
-          <a:noFill xmlns:a="http://schemas.openxmlformats.org/drawingml/2006/main"/>
-          <a:ln xmlns:a="http://schemas.openxmlformats.org/drawingml/2006/main" w="0">
-            <a:noFill/>
-            <a:prstDash val="solid"/>
-          </a:ln>
-        </p:spPr>
-        <p:txBody>
-          <a:bodyPr xmlns:a="http://schemas.openxmlformats.org/drawingml/2006/main" wrap="square" lIns="19050" tIns="9525" rIns="19050" bIns="9525" anchor="ctr">
-            <a:normAutofit fontScale="100000"/>
-          </a:bodyPr>
-          <a:lstStyle xmlns:a="http://schemas.openxmlformats.org/drawingml/2006/main"/>
-          <a:p xmlns:a="http://schemas.openxmlformats.org/drawingml/2006/main">
-            <a:pPr algn="l">
-              <a:defRPr sz="1125" b="1">
-                <a:solidFill>
-                  <a:srgbClr val="26785F"/>
-                </a:solidFill>
-                <a:latin typeface="Arial"/>
-                <a:ea typeface="Arial"/>
-                <a:cs typeface="Arial"/>
-              </a:defRPr>
-            </a:pPr>
-            <a:r>
-              <a:rPr sz="1125" b="1">
-                <a:solidFill>
-                  <a:srgbClr val="26785F"/>
-                </a:solidFill>
-                <a:latin typeface="Arial"/>
-                <a:ea typeface="Arial"/>
-                <a:cs typeface="Arial"/>
-              </a:rPr>
-              <a:t>reserve</a:t>
-            </a:r>
-          </a:p>
-        </p:txBody>
-      </p:sp>
-      <p:sp>
-        <p:nvSpPr>
-          <p:cNvPr id="110" name="contract-divider">
-            <a:extLst xmlns:a="http://schemas.openxmlformats.org/drawingml/2006/main">
-              <a:ext uri="{FF2B5EF4-FFF2-40B4-BE49-F238E27FC236}">
-                <a16:creationId xmlns:a16="http://schemas.microsoft.com/office/drawing/2014/main" id="{CD151488-93EB-4492-80A3-EE96E8981905}"/>
-              </a:ext>
-            </a:extLst>
-          </p:cNvPr>
-          <p:cNvSpPr>
-            <a:spLocks xmlns:a="http://schemas.openxmlformats.org/drawingml/2006/main" noGrp="1"/>
-          </p:cNvSpPr>
-          <p:nvPr/>
-        </p:nvSpPr>
-        <p:spPr>
-          <a:xfrm xmlns:a="http://schemas.openxmlformats.org/drawingml/2006/main" flipH="0" flipV="0">
-            <a:off x="533400" y="5162550"/>
-            <a:ext cx="11125200" cy="9525"/>
-          </a:xfrm>
-          <a:prstGeom xmlns:a="http://schemas.openxmlformats.org/drawingml/2006/main" prst="line">
-            <a:avLst/>
-          </a:prstGeom>
-          <a:noFill xmlns:a="http://schemas.openxmlformats.org/drawingml/2006/main"/>
-          <a:ln xmlns:a="http://schemas.openxmlformats.org/drawingml/2006/main" w="12383">
-            <a:solidFill>
-              <a:srgbClr val="CAD3D4"/>
-            </a:solidFill>
-            <a:prstDash val="solid"/>
-          </a:ln>
-        </p:spPr>
-      </p:sp>
-      <p:sp>
-        <p:nvSpPr>
-          <p:cNvPr id="111" name="contract-heading">
-            <a:extLst xmlns:a="http://schemas.openxmlformats.org/drawingml/2006/main">
-              <a:ext uri="{FF2B5EF4-FFF2-40B4-BE49-F238E27FC236}">
-                <a16:creationId xmlns:a16="http://schemas.microsoft.com/office/drawing/2014/main" id="{49550682-ACA6-46E3-B75E-090147C99BD3}"/>
-              </a:ext>
-            </a:extLst>
-          </p:cNvPr>
-          <p:cNvSpPr>
-            <a:spLocks xmlns:a="http://schemas.openxmlformats.org/drawingml/2006/main" noGrp="1"/>
-          </p:cNvSpPr>
-          <p:nvPr/>
-        </p:nvSpPr>
-        <p:spPr>
-          <a:xfrm xmlns:a="http://schemas.openxmlformats.org/drawingml/2006/main" rot="0">
-            <a:off x="533400" y="5238750"/>
-            <a:ext cx="11125200" cy="238125"/>
-          </a:xfrm>
-          <a:prstGeom xmlns:a="http://schemas.openxmlformats.org/drawingml/2006/main" prst="rect">
-            <a:avLst/>
-          </a:prstGeom>
-          <a:noFill xmlns:a="http://schemas.openxmlformats.org/drawingml/2006/main"/>
-          <a:ln xmlns:a="http://schemas.openxmlformats.org/drawingml/2006/main" w="0">
-            <a:noFill/>
-            <a:prstDash val="solid"/>
-          </a:ln>
-        </p:spPr>
-        <p:txBody>
-          <a:bodyPr xmlns:a="http://schemas.openxmlformats.org/drawingml/2006/main" wrap="square" lIns="19050" tIns="9525" rIns="19050" bIns="9525" anchor="ctr">
-            <a:normAutofit fontScale="100000"/>
-          </a:bodyPr>
-          <a:lstStyle xmlns:a="http://schemas.openxmlformats.org/drawingml/2006/main"/>
-          <a:p xmlns:a="http://schemas.openxmlformats.org/drawingml/2006/main">
-            <a:pPr algn="ctr">
-              <a:defRPr sz="1200" b="1">
-                <a:solidFill>
-                  <a:srgbClr val="26355F"/>
-                </a:solidFill>
-                <a:latin typeface="Arial"/>
-                <a:ea typeface="Arial"/>
-                <a:cs typeface="Arial"/>
-              </a:defRPr>
-            </a:pPr>
-            <a:r>
-              <a:rPr sz="1200" b="1">
-                <a:solidFill>
-                  <a:srgbClr val="26355F"/>
-                </a:solidFill>
-                <a:latin typeface="Arial"/>
-                <a:ea typeface="Arial"/>
-                <a:cs typeface="Arial"/>
-              </a:rPr>
-              <a:t>Selection contract</a:t>
-            </a:r>
-          </a:p>
-        </p:txBody>
-      </p:sp>
-      <p:sp>
-        <p:nvSpPr>
-          <p:cNvPr id="112" name="contract-copy">
-            <a:extLst xmlns:a="http://schemas.openxmlformats.org/drawingml/2006/main">
-              <a:ext uri="{FF2B5EF4-FFF2-40B4-BE49-F238E27FC236}">
-                <a16:creationId xmlns:a16="http://schemas.microsoft.com/office/drawing/2014/main" id="{487284AA-CB01-47F5-8F0C-7C98A6668900}"/>
-              </a:ext>
-            </a:extLst>
-          </p:cNvPr>
-          <p:cNvSpPr>
-            <a:spLocks xmlns:a="http://schemas.openxmlformats.org/drawingml/2006/main" noGrp="1"/>
-          </p:cNvSpPr>
-          <p:nvPr/>
-        </p:nvSpPr>
-        <p:spPr>
-          <a:xfrm xmlns:a="http://schemas.openxmlformats.org/drawingml/2006/main" rot="0">
-            <a:off x="533400" y="5476875"/>
-            <a:ext cx="11125200" cy="228600"/>
-          </a:xfrm>
-          <a:prstGeom xmlns:a="http://schemas.openxmlformats.org/drawingml/2006/main" prst="rect">
-            <a:avLst/>
-          </a:prstGeom>
-          <a:noFill xmlns:a="http://schemas.openxmlformats.org/drawingml/2006/main"/>
-          <a:ln xmlns:a="http://schemas.openxmlformats.org/drawingml/2006/main" w="0">
-            <a:noFill/>
-            <a:prstDash val="solid"/>
-          </a:ln>
-        </p:spPr>
-        <p:txBody>
-          <a:bodyPr xmlns:a="http://schemas.openxmlformats.org/drawingml/2006/main" wrap="square" lIns="19050" tIns="9525" rIns="19050" bIns="9525" anchor="ctr">
-            <a:normAutofit fontScale="100000"/>
-          </a:bodyPr>
-          <a:lstStyle xmlns:a="http://schemas.openxmlformats.org/drawingml/2006/main"/>
-          <a:p xmlns:a="http://schemas.openxmlformats.org/drawingml/2006/main">
-            <a:pPr algn="ctr">
-              <a:defRPr sz="1050" b="0">
-                <a:solidFill>
-                  <a:srgbClr val="172027"/>
-                </a:solidFill>
-                <a:latin typeface="Arial"/>
-                <a:ea typeface="Arial"/>
-                <a:cs typeface="Arial"/>
-              </a:defRPr>
-            </a:pPr>
-            <a:r>
-              <a:rPr sz="1050" b="0">
-                <a:solidFill>
-                  <a:srgbClr val="172027"/>
-                </a:solidFill>
-                <a:latin typeface="Arial"/>
-                <a:ea typeface="Arial"/>
-                <a:cs typeface="Arial"/>
-              </a:rPr>
-              <a:t>Fixed capacity | stable ties | no duplicate slots | complete assignment ledger</a:t>
-            </a:r>
-          </a:p>
-        </p:txBody>
-      </p:sp>
-      <p:sp>
-        <p:nvSpPr>
-          <p:cNvPr id="113" name="scope-boundary">
-            <a:extLst xmlns:a="http://schemas.openxmlformats.org/drawingml/2006/main">
-              <a:ext uri="{FF2B5EF4-FFF2-40B4-BE49-F238E27FC236}">
-                <a16:creationId xmlns:a16="http://schemas.microsoft.com/office/drawing/2014/main" id="{161E7BDD-F77F-421C-A04A-D03B9E18A3D9}"/>
-              </a:ext>
-            </a:extLst>
-          </p:cNvPr>
-          <p:cNvSpPr>
-            <a:spLocks xmlns:a="http://schemas.openxmlformats.org/drawingml/2006/main" noGrp="1"/>
-          </p:cNvSpPr>
-          <p:nvPr/>
-        </p:nvSpPr>
-        <p:spPr>
-          <a:xfrm xmlns:a="http://schemas.openxmlformats.org/drawingml/2006/main" rot="0">
-            <a:off x="533400" y="5734050"/>
-            <a:ext cx="11125200" cy="209550"/>
-          </a:xfrm>
-          <a:prstGeom xmlns:a="http://schemas.openxmlformats.org/drawingml/2006/main" prst="rect">
-            <a:avLst/>
-          </a:prstGeom>
-          <a:noFill xmlns:a="http://schemas.openxmlformats.org/drawingml/2006/main"/>
-          <a:ln xmlns:a="http://schemas.openxmlformats.org/drawingml/2006/main" w="0">
-            <a:noFill/>
-            <a:prstDash val="solid"/>
-          </a:ln>
-        </p:spPr>
-        <p:txBody>
-          <a:bodyPr xmlns:a="http://schemas.openxmlformats.org/drawingml/2006/main" wrap="square" lIns="19050" tIns="9525" rIns="19050" bIns="9525" anchor="ctr">
-            <a:normAutofit fontScale="100000"/>
-          </a:bodyPr>
-          <a:lstStyle xmlns:a="http://schemas.openxmlformats.org/drawingml/2006/main"/>
-          <a:p xmlns:a="http://schemas.openxmlformats.org/drawingml/2006/main">
-            <a:pPr algn="ctr">
-              <a:defRPr sz="975" b="0">
-                <a:solidFill>
-                  <a:srgbClr val="637077"/>
-                </a:solidFill>
-                <a:latin typeface="Arial"/>
-                <a:ea typeface="Arial"/>
-                <a:cs typeface="Arial"/>
-              </a:defRPr>
-            </a:pPr>
-            <a:r>
-              <a:rPr sz="975" b="0">
-                <a:solidFill>
-                  <a:srgbClr val="637077"/>
-                </a:solidFill>
-                <a:latin typeface="Arial"/>
-                <a:ea typeface="Arial"/>
-                <a:cs typeface="Arial"/>
-              </a:rPr>
-              <a:t>The package governs access to review capacity; it does not interpret the underlying evidence.</a:t>
-            </a:r>
-          </a:p>
-        </p:txBody>
-      </p:sp>
     </p:spTree>
     <p:extLst>
       <p:ext uri="{BB962C8B-B14F-4D97-AF65-F5344CB8AC3E}">
-        <p14:creationId xmlns:p14="http://schemas.microsoft.com/office/powerpoint/2010/main" val="1155485414"/>
+        <p14:creationId xmlns:p14="http://schemas.microsoft.com/office/powerpoint/2010/main" val="1994211359"/>
       </p:ext>
     </p:extLst>
   </p:cSld>
